--- a/assets/libreoffice_impr_njc/8a9fd669-2142-46d4-bd0c-32cd6323b57f/Game Theory.pptx
+++ b/assets/libreoffice_impr_njc/8a9fd669-2142-46d4-bd0c-32cd6323b57f/Game Theory.pptx
@@ -85,18 +85,12 @@
             </a:pPr>
             <a:r>
               <a:rPr b="0" lang="en-HK" sz="4400" spc="-1" strike="noStrike">
-                <a:solidFill>
-                  <a:srgbClr val="000000"/>
-                </a:solidFill>
-                <a:latin typeface="Calibri Light"/>
+                <a:latin typeface="Arial"/>
               </a:rPr>
               <a:t>Click to move the slide</a:t>
             </a:r>
             <a:endParaRPr b="0" lang="en-HK" sz="4400" spc="-1" strike="noStrike">
-              <a:solidFill>
-                <a:srgbClr val="000000"/>
-              </a:solidFill>
-              <a:latin typeface="Calibri Light"/>
+              <a:latin typeface="Arial"/>
             </a:endParaRPr>
           </a:p>
         </p:txBody>
@@ -318,7 +312,7 @@
             <a:pPr algn="r">
               <a:buNone/>
             </a:pPr>
-            <a:fld id="{53286907-18C8-414F-8413-59E159070C73}" type="slidenum">
+            <a:fld id="{94003495-CDEE-4787-ADA7-06719E905CF0}" type="slidenum">
               <a:rPr b="0" lang="en-HK" sz="1400" spc="-1" strike="noStrike">
                 <a:latin typeface="Times New Roman"/>
               </a:rPr>
@@ -366,7 +360,7 @@
         <p:spPr>
           <a:xfrm>
             <a:off x="685800" y="1143000"/>
-            <a:ext cx="5486040" cy="3085920"/>
+            <a:ext cx="5485680" cy="3085560"/>
           </a:xfrm>
           <a:prstGeom prst="rect">
             <a:avLst/>
@@ -389,18 +383,18 @@
         <p:spPr>
           <a:xfrm>
             <a:off x="685800" y="4400640"/>
-            <a:ext cx="5486040" cy="3600000"/>
-          </a:xfrm>
-          <a:prstGeom prst="rect">
-            <a:avLst/>
-          </a:prstGeom>
-          <a:noFill/>
-          <a:ln w="0">
-            <a:noFill/>
-          </a:ln>
-        </p:spPr>
-        <p:txBody>
-          <a:bodyPr anchor="t">
+            <a:ext cx="5485680" cy="3599640"/>
+          </a:xfrm>
+          <a:prstGeom prst="rect">
+            <a:avLst/>
+          </a:prstGeom>
+          <a:noFill/>
+          <a:ln w="0">
+            <a:noFill/>
+          </a:ln>
+        </p:spPr>
+        <p:txBody>
+          <a:bodyPr lIns="0" rIns="0" tIns="0" bIns="0" anchor="t">
             <a:noAutofit/>
           </a:bodyPr>
           <a:p>
@@ -423,18 +417,18 @@
         <p:spPr>
           <a:xfrm>
             <a:off x="3884760" y="8685360"/>
-            <a:ext cx="2971440" cy="458280"/>
-          </a:xfrm>
-          <a:prstGeom prst="rect">
-            <a:avLst/>
-          </a:prstGeom>
-          <a:noFill/>
-          <a:ln w="0">
-            <a:noFill/>
-          </a:ln>
-        </p:spPr>
-        <p:txBody>
-          <a:bodyPr anchor="b">
+            <a:ext cx="2971080" cy="457920"/>
+          </a:xfrm>
+          <a:prstGeom prst="rect">
+            <a:avLst/>
+          </a:prstGeom>
+          <a:noFill/>
+          <a:ln w="0">
+            <a:noFill/>
+          </a:ln>
+        </p:spPr>
+        <p:txBody>
+          <a:bodyPr lIns="0" rIns="0" tIns="0" bIns="0" anchor="b">
             <a:noAutofit/>
           </a:bodyPr>
           <a:lstStyle>
@@ -455,7 +449,7 @@
               </a:lnSpc>
               <a:buNone/>
             </a:pPr>
-            <a:fld id="{93BAC5C9-A464-4390-A59F-6C4A92283387}" type="slidenum">
+            <a:fld id="{2AA313D9-456B-4F31-B7C1-53239CB951B0}" type="slidenum">
               <a:rPr b="0" lang="en-US" sz="1200" spc="-1" strike="noStrike">
                 <a:latin typeface="Times New Roman"/>
               </a:rPr>
@@ -502,7 +496,7 @@
         <p:spPr>
           <a:xfrm>
             <a:off x="685800" y="1143000"/>
-            <a:ext cx="5486040" cy="3085920"/>
+            <a:ext cx="5485680" cy="3085560"/>
           </a:xfrm>
           <a:prstGeom prst="rect">
             <a:avLst/>
@@ -525,18 +519,18 @@
         <p:spPr>
           <a:xfrm>
             <a:off x="685800" y="4400640"/>
-            <a:ext cx="5486040" cy="3600000"/>
-          </a:xfrm>
-          <a:prstGeom prst="rect">
-            <a:avLst/>
-          </a:prstGeom>
-          <a:noFill/>
-          <a:ln w="0">
-            <a:noFill/>
-          </a:ln>
-        </p:spPr>
-        <p:txBody>
-          <a:bodyPr anchor="t">
+            <a:ext cx="5485680" cy="3599640"/>
+          </a:xfrm>
+          <a:prstGeom prst="rect">
+            <a:avLst/>
+          </a:prstGeom>
+          <a:noFill/>
+          <a:ln w="0">
+            <a:noFill/>
+          </a:ln>
+        </p:spPr>
+        <p:txBody>
+          <a:bodyPr lIns="0" rIns="0" tIns="0" bIns="0" anchor="t">
             <a:noAutofit/>
           </a:bodyPr>
           <a:p>
@@ -559,18 +553,18 @@
         <p:spPr>
           <a:xfrm>
             <a:off x="3884760" y="8685360"/>
-            <a:ext cx="2971440" cy="458280"/>
-          </a:xfrm>
-          <a:prstGeom prst="rect">
-            <a:avLst/>
-          </a:prstGeom>
-          <a:noFill/>
-          <a:ln w="0">
-            <a:noFill/>
-          </a:ln>
-        </p:spPr>
-        <p:txBody>
-          <a:bodyPr anchor="b">
+            <a:ext cx="2971080" cy="457920"/>
+          </a:xfrm>
+          <a:prstGeom prst="rect">
+            <a:avLst/>
+          </a:prstGeom>
+          <a:noFill/>
+          <a:ln w="0">
+            <a:noFill/>
+          </a:ln>
+        </p:spPr>
+        <p:txBody>
+          <a:bodyPr lIns="0" rIns="0" tIns="0" bIns="0" anchor="b">
             <a:noAutofit/>
           </a:bodyPr>
           <a:lstStyle>
@@ -591,7 +585,7 @@
               </a:lnSpc>
               <a:buNone/>
             </a:pPr>
-            <a:fld id="{985F50A4-2945-4F78-93AD-CDD8F4EBF581}" type="slidenum">
+            <a:fld id="{347C99CF-86B7-405F-BA1B-72EAB4A186ED}" type="slidenum">
               <a:rPr b="0" lang="en-US" sz="1200" spc="-1" strike="noStrike">
                 <a:latin typeface="Times New Roman"/>
               </a:rPr>
@@ -638,7 +632,7 @@
         <p:spPr>
           <a:xfrm>
             <a:off x="685800" y="1143000"/>
-            <a:ext cx="5486040" cy="3085920"/>
+            <a:ext cx="5485680" cy="3085560"/>
           </a:xfrm>
           <a:prstGeom prst="rect">
             <a:avLst/>
@@ -661,18 +655,18 @@
         <p:spPr>
           <a:xfrm>
             <a:off x="685800" y="4400640"/>
-            <a:ext cx="5486040" cy="3600000"/>
-          </a:xfrm>
-          <a:prstGeom prst="rect">
-            <a:avLst/>
-          </a:prstGeom>
-          <a:noFill/>
-          <a:ln w="0">
-            <a:noFill/>
-          </a:ln>
-        </p:spPr>
-        <p:txBody>
-          <a:bodyPr anchor="t">
+            <a:ext cx="5485680" cy="3599640"/>
+          </a:xfrm>
+          <a:prstGeom prst="rect">
+            <a:avLst/>
+          </a:prstGeom>
+          <a:noFill/>
+          <a:ln w="0">
+            <a:noFill/>
+          </a:ln>
+        </p:spPr>
+        <p:txBody>
+          <a:bodyPr lIns="0" rIns="0" tIns="0" bIns="0" anchor="t">
             <a:noAutofit/>
           </a:bodyPr>
           <a:p>
@@ -695,18 +689,18 @@
         <p:spPr>
           <a:xfrm>
             <a:off x="3884760" y="8685360"/>
-            <a:ext cx="2971440" cy="458280"/>
-          </a:xfrm>
-          <a:prstGeom prst="rect">
-            <a:avLst/>
-          </a:prstGeom>
-          <a:noFill/>
-          <a:ln w="0">
-            <a:noFill/>
-          </a:ln>
-        </p:spPr>
-        <p:txBody>
-          <a:bodyPr anchor="b">
+            <a:ext cx="2971080" cy="457920"/>
+          </a:xfrm>
+          <a:prstGeom prst="rect">
+            <a:avLst/>
+          </a:prstGeom>
+          <a:noFill/>
+          <a:ln w="0">
+            <a:noFill/>
+          </a:ln>
+        </p:spPr>
+        <p:txBody>
+          <a:bodyPr lIns="0" rIns="0" tIns="0" bIns="0" anchor="b">
             <a:noAutofit/>
           </a:bodyPr>
           <a:lstStyle>
@@ -727,7 +721,7 @@
               </a:lnSpc>
               <a:buNone/>
             </a:pPr>
-            <a:fld id="{348C93FA-BE06-480A-8095-84295FBD7945}" type="slidenum">
+            <a:fld id="{1726FB5D-9E49-4720-8D4F-88BAA117BAB9}" type="slidenum">
               <a:rPr b="0" lang="en-US" sz="1200" spc="-1" strike="noStrike">
                 <a:latin typeface="Times New Roman"/>
               </a:rPr>
@@ -774,7 +768,7 @@
         <p:spPr>
           <a:xfrm>
             <a:off x="685800" y="1143000"/>
-            <a:ext cx="5486040" cy="3085920"/>
+            <a:ext cx="5485680" cy="3085560"/>
           </a:xfrm>
           <a:prstGeom prst="rect">
             <a:avLst/>
@@ -797,18 +791,18 @@
         <p:spPr>
           <a:xfrm>
             <a:off x="685800" y="4400640"/>
-            <a:ext cx="5486040" cy="3600000"/>
-          </a:xfrm>
-          <a:prstGeom prst="rect">
-            <a:avLst/>
-          </a:prstGeom>
-          <a:noFill/>
-          <a:ln w="0">
-            <a:noFill/>
-          </a:ln>
-        </p:spPr>
-        <p:txBody>
-          <a:bodyPr anchor="t">
+            <a:ext cx="5485680" cy="3599640"/>
+          </a:xfrm>
+          <a:prstGeom prst="rect">
+            <a:avLst/>
+          </a:prstGeom>
+          <a:noFill/>
+          <a:ln w="0">
+            <a:noFill/>
+          </a:ln>
+        </p:spPr>
+        <p:txBody>
+          <a:bodyPr lIns="0" rIns="0" tIns="0" bIns="0" anchor="t">
             <a:noAutofit/>
           </a:bodyPr>
           <a:p>
@@ -831,18 +825,18 @@
         <p:spPr>
           <a:xfrm>
             <a:off x="3884760" y="8685360"/>
-            <a:ext cx="2971440" cy="458280"/>
-          </a:xfrm>
-          <a:prstGeom prst="rect">
-            <a:avLst/>
-          </a:prstGeom>
-          <a:noFill/>
-          <a:ln w="0">
-            <a:noFill/>
-          </a:ln>
-        </p:spPr>
-        <p:txBody>
-          <a:bodyPr anchor="b">
+            <a:ext cx="2971080" cy="457920"/>
+          </a:xfrm>
+          <a:prstGeom prst="rect">
+            <a:avLst/>
+          </a:prstGeom>
+          <a:noFill/>
+          <a:ln w="0">
+            <a:noFill/>
+          </a:ln>
+        </p:spPr>
+        <p:txBody>
+          <a:bodyPr lIns="0" rIns="0" tIns="0" bIns="0" anchor="b">
             <a:noAutofit/>
           </a:bodyPr>
           <a:lstStyle>
@@ -863,7 +857,7 @@
               </a:lnSpc>
               <a:buNone/>
             </a:pPr>
-            <a:fld id="{66177342-1D3F-41C3-A601-F771129362D6}" type="slidenum">
+            <a:fld id="{49EBC6B8-F32D-414B-B7FF-5CC5ABD9C262}" type="slidenum">
               <a:rPr b="0" lang="en-US" sz="1200" spc="-1" strike="noStrike">
                 <a:latin typeface="Times New Roman"/>
               </a:rPr>
@@ -910,7 +904,7 @@
         <p:spPr>
           <a:xfrm>
             <a:off x="685800" y="1143000"/>
-            <a:ext cx="5486040" cy="3085920"/>
+            <a:ext cx="5485680" cy="3085560"/>
           </a:xfrm>
           <a:prstGeom prst="rect">
             <a:avLst/>
@@ -933,18 +927,18 @@
         <p:spPr>
           <a:xfrm>
             <a:off x="685800" y="4400640"/>
-            <a:ext cx="5486040" cy="3600000"/>
-          </a:xfrm>
-          <a:prstGeom prst="rect">
-            <a:avLst/>
-          </a:prstGeom>
-          <a:noFill/>
-          <a:ln w="0">
-            <a:noFill/>
-          </a:ln>
-        </p:spPr>
-        <p:txBody>
-          <a:bodyPr anchor="t">
+            <a:ext cx="5485680" cy="3599640"/>
+          </a:xfrm>
+          <a:prstGeom prst="rect">
+            <a:avLst/>
+          </a:prstGeom>
+          <a:noFill/>
+          <a:ln w="0">
+            <a:noFill/>
+          </a:ln>
+        </p:spPr>
+        <p:txBody>
+          <a:bodyPr lIns="0" rIns="0" tIns="0" bIns="0" anchor="t">
             <a:noAutofit/>
           </a:bodyPr>
           <a:p>
@@ -967,18 +961,18 @@
         <p:spPr>
           <a:xfrm>
             <a:off x="3884760" y="8685360"/>
-            <a:ext cx="2971440" cy="458280"/>
-          </a:xfrm>
-          <a:prstGeom prst="rect">
-            <a:avLst/>
-          </a:prstGeom>
-          <a:noFill/>
-          <a:ln w="0">
-            <a:noFill/>
-          </a:ln>
-        </p:spPr>
-        <p:txBody>
-          <a:bodyPr anchor="b">
+            <a:ext cx="2971080" cy="457920"/>
+          </a:xfrm>
+          <a:prstGeom prst="rect">
+            <a:avLst/>
+          </a:prstGeom>
+          <a:noFill/>
+          <a:ln w="0">
+            <a:noFill/>
+          </a:ln>
+        </p:spPr>
+        <p:txBody>
+          <a:bodyPr lIns="0" rIns="0" tIns="0" bIns="0" anchor="b">
             <a:noAutofit/>
           </a:bodyPr>
           <a:lstStyle>
@@ -999,7 +993,7 @@
               </a:lnSpc>
               <a:buNone/>
             </a:pPr>
-            <a:fld id="{1CA124EF-6F3B-4860-84FF-D0860382EF1A}" type="slidenum">
+            <a:fld id="{F1A38029-A317-4AC8-ADE8-2626C944D3D8}" type="slidenum">
               <a:rPr b="0" lang="en-US" sz="1200" spc="-1" strike="noStrike">
                 <a:latin typeface="Times New Roman"/>
               </a:rPr>
@@ -1046,7 +1040,7 @@
         <p:spPr>
           <a:xfrm>
             <a:off x="685800" y="1143000"/>
-            <a:ext cx="5486040" cy="3085920"/>
+            <a:ext cx="5485680" cy="3085560"/>
           </a:xfrm>
           <a:prstGeom prst="rect">
             <a:avLst/>
@@ -1069,18 +1063,18 @@
         <p:spPr>
           <a:xfrm>
             <a:off x="685800" y="4400640"/>
-            <a:ext cx="5486040" cy="3600000"/>
-          </a:xfrm>
-          <a:prstGeom prst="rect">
-            <a:avLst/>
-          </a:prstGeom>
-          <a:noFill/>
-          <a:ln w="0">
-            <a:noFill/>
-          </a:ln>
-        </p:spPr>
-        <p:txBody>
-          <a:bodyPr anchor="t">
+            <a:ext cx="5485680" cy="3599640"/>
+          </a:xfrm>
+          <a:prstGeom prst="rect">
+            <a:avLst/>
+          </a:prstGeom>
+          <a:noFill/>
+          <a:ln w="0">
+            <a:noFill/>
+          </a:ln>
+        </p:spPr>
+        <p:txBody>
+          <a:bodyPr lIns="0" rIns="0" tIns="0" bIns="0" anchor="t">
             <a:noAutofit/>
           </a:bodyPr>
           <a:p>
@@ -1103,18 +1097,18 @@
         <p:spPr>
           <a:xfrm>
             <a:off x="3884760" y="8685360"/>
-            <a:ext cx="2971440" cy="458280"/>
-          </a:xfrm>
-          <a:prstGeom prst="rect">
-            <a:avLst/>
-          </a:prstGeom>
-          <a:noFill/>
-          <a:ln w="0">
-            <a:noFill/>
-          </a:ln>
-        </p:spPr>
-        <p:txBody>
-          <a:bodyPr anchor="b">
+            <a:ext cx="2971080" cy="457920"/>
+          </a:xfrm>
+          <a:prstGeom prst="rect">
+            <a:avLst/>
+          </a:prstGeom>
+          <a:noFill/>
+          <a:ln w="0">
+            <a:noFill/>
+          </a:ln>
+        </p:spPr>
+        <p:txBody>
+          <a:bodyPr lIns="0" rIns="0" tIns="0" bIns="0" anchor="b">
             <a:noAutofit/>
           </a:bodyPr>
           <a:lstStyle>
@@ -1135,7 +1129,7 @@
               </a:lnSpc>
               <a:buNone/>
             </a:pPr>
-            <a:fld id="{DD5E3283-3B3D-4DAF-B157-81C859EF03CE}" type="slidenum">
+            <a:fld id="{FAB15EDB-710A-4495-BFA3-FB4D811E12AB}" type="slidenum">
               <a:rPr b="0" lang="en-US" sz="1200" spc="-1" strike="noStrike">
                 <a:latin typeface="Times New Roman"/>
               </a:rPr>
@@ -1182,7 +1176,7 @@
         <p:spPr>
           <a:xfrm>
             <a:off x="685800" y="1143000"/>
-            <a:ext cx="5486040" cy="3085920"/>
+            <a:ext cx="5485680" cy="3085560"/>
           </a:xfrm>
           <a:prstGeom prst="rect">
             <a:avLst/>
@@ -1205,18 +1199,18 @@
         <p:spPr>
           <a:xfrm>
             <a:off x="685800" y="4400640"/>
-            <a:ext cx="5486040" cy="3600000"/>
-          </a:xfrm>
-          <a:prstGeom prst="rect">
-            <a:avLst/>
-          </a:prstGeom>
-          <a:noFill/>
-          <a:ln w="0">
-            <a:noFill/>
-          </a:ln>
-        </p:spPr>
-        <p:txBody>
-          <a:bodyPr anchor="t">
+            <a:ext cx="5485680" cy="3599640"/>
+          </a:xfrm>
+          <a:prstGeom prst="rect">
+            <a:avLst/>
+          </a:prstGeom>
+          <a:noFill/>
+          <a:ln w="0">
+            <a:noFill/>
+          </a:ln>
+        </p:spPr>
+        <p:txBody>
+          <a:bodyPr lIns="0" rIns="0" tIns="0" bIns="0" anchor="t">
             <a:noAutofit/>
           </a:bodyPr>
           <a:p>
@@ -1239,18 +1233,18 @@
         <p:spPr>
           <a:xfrm>
             <a:off x="3884760" y="8685360"/>
-            <a:ext cx="2971440" cy="458280"/>
-          </a:xfrm>
-          <a:prstGeom prst="rect">
-            <a:avLst/>
-          </a:prstGeom>
-          <a:noFill/>
-          <a:ln w="0">
-            <a:noFill/>
-          </a:ln>
-        </p:spPr>
-        <p:txBody>
-          <a:bodyPr anchor="b">
+            <a:ext cx="2971080" cy="457920"/>
+          </a:xfrm>
+          <a:prstGeom prst="rect">
+            <a:avLst/>
+          </a:prstGeom>
+          <a:noFill/>
+          <a:ln w="0">
+            <a:noFill/>
+          </a:ln>
+        </p:spPr>
+        <p:txBody>
+          <a:bodyPr lIns="0" rIns="0" tIns="0" bIns="0" anchor="b">
             <a:noAutofit/>
           </a:bodyPr>
           <a:lstStyle>
@@ -1271,7 +1265,7 @@
               </a:lnSpc>
               <a:buNone/>
             </a:pPr>
-            <a:fld id="{1ABC991B-C1AF-4E7C-8BB6-F8400C607859}" type="slidenum">
+            <a:fld id="{80715C0C-BC89-4232-915B-06316E4AC332}" type="slidenum">
               <a:rPr b="0" lang="en-US" sz="1200" spc="-1" strike="noStrike">
                 <a:latin typeface="Times New Roman"/>
               </a:rPr>
@@ -1318,7 +1312,7 @@
         <p:spPr>
           <a:xfrm>
             <a:off x="685800" y="1143000"/>
-            <a:ext cx="5486040" cy="3085920"/>
+            <a:ext cx="5485680" cy="3085560"/>
           </a:xfrm>
           <a:prstGeom prst="rect">
             <a:avLst/>
@@ -1341,18 +1335,18 @@
         <p:spPr>
           <a:xfrm>
             <a:off x="685800" y="4400640"/>
-            <a:ext cx="5486040" cy="3600000"/>
-          </a:xfrm>
-          <a:prstGeom prst="rect">
-            <a:avLst/>
-          </a:prstGeom>
-          <a:noFill/>
-          <a:ln w="0">
-            <a:noFill/>
-          </a:ln>
-        </p:spPr>
-        <p:txBody>
-          <a:bodyPr anchor="t">
+            <a:ext cx="5485680" cy="3599640"/>
+          </a:xfrm>
+          <a:prstGeom prst="rect">
+            <a:avLst/>
+          </a:prstGeom>
+          <a:noFill/>
+          <a:ln w="0">
+            <a:noFill/>
+          </a:ln>
+        </p:spPr>
+        <p:txBody>
+          <a:bodyPr lIns="0" rIns="0" tIns="0" bIns="0" anchor="t">
             <a:noAutofit/>
           </a:bodyPr>
           <a:p>
@@ -1375,18 +1369,18 @@
         <p:spPr>
           <a:xfrm>
             <a:off x="3884760" y="8685360"/>
-            <a:ext cx="2971440" cy="458280"/>
-          </a:xfrm>
-          <a:prstGeom prst="rect">
-            <a:avLst/>
-          </a:prstGeom>
-          <a:noFill/>
-          <a:ln w="0">
-            <a:noFill/>
-          </a:ln>
-        </p:spPr>
-        <p:txBody>
-          <a:bodyPr anchor="b">
+            <a:ext cx="2971080" cy="457920"/>
+          </a:xfrm>
+          <a:prstGeom prst="rect">
+            <a:avLst/>
+          </a:prstGeom>
+          <a:noFill/>
+          <a:ln w="0">
+            <a:noFill/>
+          </a:ln>
+        </p:spPr>
+        <p:txBody>
+          <a:bodyPr lIns="0" rIns="0" tIns="0" bIns="0" anchor="b">
             <a:noAutofit/>
           </a:bodyPr>
           <a:lstStyle>
@@ -1407,7 +1401,7 @@
               </a:lnSpc>
               <a:buNone/>
             </a:pPr>
-            <a:fld id="{20103769-7D22-4B0E-AFEE-F2EA8426CEF2}" type="slidenum">
+            <a:fld id="{72548510-FA9A-450C-867D-32954E7B62E1}" type="slidenum">
               <a:rPr b="0" lang="en-US" sz="1200" spc="-1" strike="noStrike">
                 <a:latin typeface="Times New Roman"/>
               </a:rPr>
@@ -1454,7 +1448,7 @@
         <p:spPr>
           <a:xfrm>
             <a:off x="685800" y="1143000"/>
-            <a:ext cx="5486040" cy="3085920"/>
+            <a:ext cx="5485680" cy="3085560"/>
           </a:xfrm>
           <a:prstGeom prst="rect">
             <a:avLst/>
@@ -1477,18 +1471,18 @@
         <p:spPr>
           <a:xfrm>
             <a:off x="685800" y="4400640"/>
-            <a:ext cx="5486040" cy="3600000"/>
-          </a:xfrm>
-          <a:prstGeom prst="rect">
-            <a:avLst/>
-          </a:prstGeom>
-          <a:noFill/>
-          <a:ln w="0">
-            <a:noFill/>
-          </a:ln>
-        </p:spPr>
-        <p:txBody>
-          <a:bodyPr anchor="t">
+            <a:ext cx="5485680" cy="3599640"/>
+          </a:xfrm>
+          <a:prstGeom prst="rect">
+            <a:avLst/>
+          </a:prstGeom>
+          <a:noFill/>
+          <a:ln w="0">
+            <a:noFill/>
+          </a:ln>
+        </p:spPr>
+        <p:txBody>
+          <a:bodyPr lIns="0" rIns="0" tIns="0" bIns="0" anchor="t">
             <a:noAutofit/>
           </a:bodyPr>
           <a:p>
@@ -1511,18 +1505,18 @@
         <p:spPr>
           <a:xfrm>
             <a:off x="3884760" y="8685360"/>
-            <a:ext cx="2971440" cy="458280"/>
-          </a:xfrm>
-          <a:prstGeom prst="rect">
-            <a:avLst/>
-          </a:prstGeom>
-          <a:noFill/>
-          <a:ln w="0">
-            <a:noFill/>
-          </a:ln>
-        </p:spPr>
-        <p:txBody>
-          <a:bodyPr anchor="b">
+            <a:ext cx="2971080" cy="457920"/>
+          </a:xfrm>
+          <a:prstGeom prst="rect">
+            <a:avLst/>
+          </a:prstGeom>
+          <a:noFill/>
+          <a:ln w="0">
+            <a:noFill/>
+          </a:ln>
+        </p:spPr>
+        <p:txBody>
+          <a:bodyPr lIns="0" rIns="0" tIns="0" bIns="0" anchor="b">
             <a:noAutofit/>
           </a:bodyPr>
           <a:lstStyle>
@@ -1543,7 +1537,7 @@
               </a:lnSpc>
               <a:buNone/>
             </a:pPr>
-            <a:fld id="{54903250-6602-4F03-BA45-26E8B7AFB71E}" type="slidenum">
+            <a:fld id="{3135AF1E-4BC3-40F7-BD27-DB78F6B4BE5A}" type="slidenum">
               <a:rPr b="0" lang="en-US" sz="1200" spc="-1" strike="noStrike">
                 <a:latin typeface="Times New Roman"/>
               </a:rPr>
@@ -1590,7 +1584,7 @@
         <p:spPr>
           <a:xfrm>
             <a:off x="685800" y="1143000"/>
-            <a:ext cx="5486040" cy="3085920"/>
+            <a:ext cx="5485680" cy="3085560"/>
           </a:xfrm>
           <a:prstGeom prst="rect">
             <a:avLst/>
@@ -1613,18 +1607,18 @@
         <p:spPr>
           <a:xfrm>
             <a:off x="685800" y="4400640"/>
-            <a:ext cx="5486040" cy="3600000"/>
-          </a:xfrm>
-          <a:prstGeom prst="rect">
-            <a:avLst/>
-          </a:prstGeom>
-          <a:noFill/>
-          <a:ln w="0">
-            <a:noFill/>
-          </a:ln>
-        </p:spPr>
-        <p:txBody>
-          <a:bodyPr anchor="t">
+            <a:ext cx="5485680" cy="3599640"/>
+          </a:xfrm>
+          <a:prstGeom prst="rect">
+            <a:avLst/>
+          </a:prstGeom>
+          <a:noFill/>
+          <a:ln w="0">
+            <a:noFill/>
+          </a:ln>
+        </p:spPr>
+        <p:txBody>
+          <a:bodyPr lIns="0" rIns="0" tIns="0" bIns="0" anchor="t">
             <a:noAutofit/>
           </a:bodyPr>
           <a:p>
@@ -1647,18 +1641,18 @@
         <p:spPr>
           <a:xfrm>
             <a:off x="3884760" y="8685360"/>
-            <a:ext cx="2971440" cy="458280"/>
-          </a:xfrm>
-          <a:prstGeom prst="rect">
-            <a:avLst/>
-          </a:prstGeom>
-          <a:noFill/>
-          <a:ln w="0">
-            <a:noFill/>
-          </a:ln>
-        </p:spPr>
-        <p:txBody>
-          <a:bodyPr anchor="b">
+            <a:ext cx="2971080" cy="457920"/>
+          </a:xfrm>
+          <a:prstGeom prst="rect">
+            <a:avLst/>
+          </a:prstGeom>
+          <a:noFill/>
+          <a:ln w="0">
+            <a:noFill/>
+          </a:ln>
+        </p:spPr>
+        <p:txBody>
+          <a:bodyPr lIns="0" rIns="0" tIns="0" bIns="0" anchor="b">
             <a:noAutofit/>
           </a:bodyPr>
           <a:lstStyle>
@@ -1679,7 +1673,7 @@
               </a:lnSpc>
               <a:buNone/>
             </a:pPr>
-            <a:fld id="{BD30E99D-10CD-4CBE-B85D-28C67DB269AD}" type="slidenum">
+            <a:fld id="{42739A8E-5E8E-489B-B745-8AFA642B9ADC}" type="slidenum">
               <a:rPr b="0" lang="en-US" sz="1200" spc="-1" strike="noStrike">
                 <a:latin typeface="Times New Roman"/>
               </a:rPr>
@@ -1726,7 +1720,7 @@
         <p:spPr>
           <a:xfrm>
             <a:off x="685800" y="1143000"/>
-            <a:ext cx="5486040" cy="3085920"/>
+            <a:ext cx="5485680" cy="3085560"/>
           </a:xfrm>
           <a:prstGeom prst="rect">
             <a:avLst/>
@@ -1749,18 +1743,18 @@
         <p:spPr>
           <a:xfrm>
             <a:off x="685800" y="4400640"/>
-            <a:ext cx="5486040" cy="3600000"/>
-          </a:xfrm>
-          <a:prstGeom prst="rect">
-            <a:avLst/>
-          </a:prstGeom>
-          <a:noFill/>
-          <a:ln w="0">
-            <a:noFill/>
-          </a:ln>
-        </p:spPr>
-        <p:txBody>
-          <a:bodyPr anchor="t">
+            <a:ext cx="5485680" cy="3599640"/>
+          </a:xfrm>
+          <a:prstGeom prst="rect">
+            <a:avLst/>
+          </a:prstGeom>
+          <a:noFill/>
+          <a:ln w="0">
+            <a:noFill/>
+          </a:ln>
+        </p:spPr>
+        <p:txBody>
+          <a:bodyPr lIns="0" rIns="0" tIns="0" bIns="0" anchor="t">
             <a:noAutofit/>
           </a:bodyPr>
           <a:p>
@@ -1783,18 +1777,18 @@
         <p:spPr>
           <a:xfrm>
             <a:off x="3884760" y="8685360"/>
-            <a:ext cx="2971440" cy="458280"/>
-          </a:xfrm>
-          <a:prstGeom prst="rect">
-            <a:avLst/>
-          </a:prstGeom>
-          <a:noFill/>
-          <a:ln w="0">
-            <a:noFill/>
-          </a:ln>
-        </p:spPr>
-        <p:txBody>
-          <a:bodyPr anchor="b">
+            <a:ext cx="2971080" cy="457920"/>
+          </a:xfrm>
+          <a:prstGeom prst="rect">
+            <a:avLst/>
+          </a:prstGeom>
+          <a:noFill/>
+          <a:ln w="0">
+            <a:noFill/>
+          </a:ln>
+        </p:spPr>
+        <p:txBody>
+          <a:bodyPr lIns="0" rIns="0" tIns="0" bIns="0" anchor="b">
             <a:noAutofit/>
           </a:bodyPr>
           <a:lstStyle>
@@ -1815,7 +1809,7 @@
               </a:lnSpc>
               <a:buNone/>
             </a:pPr>
-            <a:fld id="{B6EDA76C-F112-4346-8F41-07F8B5CD7725}" type="slidenum">
+            <a:fld id="{EB0CAE2A-892B-45FE-951C-95C508A4DB07}" type="slidenum">
               <a:rPr b="0" lang="en-US" sz="1200" spc="-1" strike="noStrike">
                 <a:latin typeface="Times New Roman"/>
               </a:rPr>
@@ -1862,7 +1856,7 @@
         <p:spPr>
           <a:xfrm>
             <a:off x="685800" y="1143000"/>
-            <a:ext cx="5486040" cy="3085920"/>
+            <a:ext cx="5485680" cy="3085560"/>
           </a:xfrm>
           <a:prstGeom prst="rect">
             <a:avLst/>
@@ -1885,18 +1879,18 @@
         <p:spPr>
           <a:xfrm>
             <a:off x="685800" y="4400640"/>
-            <a:ext cx="5486040" cy="3600000"/>
-          </a:xfrm>
-          <a:prstGeom prst="rect">
-            <a:avLst/>
-          </a:prstGeom>
-          <a:noFill/>
-          <a:ln w="0">
-            <a:noFill/>
-          </a:ln>
-        </p:spPr>
-        <p:txBody>
-          <a:bodyPr anchor="t">
+            <a:ext cx="5485680" cy="3599640"/>
+          </a:xfrm>
+          <a:prstGeom prst="rect">
+            <a:avLst/>
+          </a:prstGeom>
+          <a:noFill/>
+          <a:ln w="0">
+            <a:noFill/>
+          </a:ln>
+        </p:spPr>
+        <p:txBody>
+          <a:bodyPr lIns="0" rIns="0" tIns="0" bIns="0" anchor="t">
             <a:noAutofit/>
           </a:bodyPr>
           <a:p>
@@ -1919,18 +1913,18 @@
         <p:spPr>
           <a:xfrm>
             <a:off x="3884760" y="8685360"/>
-            <a:ext cx="2971440" cy="458280"/>
-          </a:xfrm>
-          <a:prstGeom prst="rect">
-            <a:avLst/>
-          </a:prstGeom>
-          <a:noFill/>
-          <a:ln w="0">
-            <a:noFill/>
-          </a:ln>
-        </p:spPr>
-        <p:txBody>
-          <a:bodyPr anchor="b">
+            <a:ext cx="2971080" cy="457920"/>
+          </a:xfrm>
+          <a:prstGeom prst="rect">
+            <a:avLst/>
+          </a:prstGeom>
+          <a:noFill/>
+          <a:ln w="0">
+            <a:noFill/>
+          </a:ln>
+        </p:spPr>
+        <p:txBody>
+          <a:bodyPr lIns="0" rIns="0" tIns="0" bIns="0" anchor="b">
             <a:noAutofit/>
           </a:bodyPr>
           <a:lstStyle>
@@ -1951,7 +1945,7 @@
               </a:lnSpc>
               <a:buNone/>
             </a:pPr>
-            <a:fld id="{837BD9A1-9B49-4A0F-A6B3-E212C3C017C2}" type="slidenum">
+            <a:fld id="{F386590F-5E26-4ACB-93BB-76307936762A}" type="slidenum">
               <a:rPr b="0" lang="en-US" sz="1200" spc="-1" strike="noStrike">
                 <a:latin typeface="Times New Roman"/>
               </a:rPr>
@@ -1998,7 +1992,7 @@
         <p:spPr>
           <a:xfrm>
             <a:off x="685800" y="1143000"/>
-            <a:ext cx="5486040" cy="3085920"/>
+            <a:ext cx="5485680" cy="3085560"/>
           </a:xfrm>
           <a:prstGeom prst="rect">
             <a:avLst/>
@@ -2021,18 +2015,18 @@
         <p:spPr>
           <a:xfrm>
             <a:off x="685800" y="4400640"/>
-            <a:ext cx="5486040" cy="3600000"/>
-          </a:xfrm>
-          <a:prstGeom prst="rect">
-            <a:avLst/>
-          </a:prstGeom>
-          <a:noFill/>
-          <a:ln w="0">
-            <a:noFill/>
-          </a:ln>
-        </p:spPr>
-        <p:txBody>
-          <a:bodyPr anchor="t">
+            <a:ext cx="5485680" cy="3599640"/>
+          </a:xfrm>
+          <a:prstGeom prst="rect">
+            <a:avLst/>
+          </a:prstGeom>
+          <a:noFill/>
+          <a:ln w="0">
+            <a:noFill/>
+          </a:ln>
+        </p:spPr>
+        <p:txBody>
+          <a:bodyPr lIns="0" rIns="0" tIns="0" bIns="0" anchor="t">
             <a:noAutofit/>
           </a:bodyPr>
           <a:p>
@@ -2055,18 +2049,18 @@
         <p:spPr>
           <a:xfrm>
             <a:off x="3884760" y="8685360"/>
-            <a:ext cx="2971440" cy="458280"/>
-          </a:xfrm>
-          <a:prstGeom prst="rect">
-            <a:avLst/>
-          </a:prstGeom>
-          <a:noFill/>
-          <a:ln w="0">
-            <a:noFill/>
-          </a:ln>
-        </p:spPr>
-        <p:txBody>
-          <a:bodyPr anchor="b">
+            <a:ext cx="2971080" cy="457920"/>
+          </a:xfrm>
+          <a:prstGeom prst="rect">
+            <a:avLst/>
+          </a:prstGeom>
+          <a:noFill/>
+          <a:ln w="0">
+            <a:noFill/>
+          </a:ln>
+        </p:spPr>
+        <p:txBody>
+          <a:bodyPr lIns="0" rIns="0" tIns="0" bIns="0" anchor="b">
             <a:noAutofit/>
           </a:bodyPr>
           <a:lstStyle>
@@ -2087,7 +2081,7 @@
               </a:lnSpc>
               <a:buNone/>
             </a:pPr>
-            <a:fld id="{3DF08D13-27EE-49D0-9AC6-47BE339ABF37}" type="slidenum">
+            <a:fld id="{E389BE81-6497-4BFB-BC79-73A3EB6991C6}" type="slidenum">
               <a:rPr b="0" lang="en-US" sz="1200" spc="-1" strike="noStrike">
                 <a:latin typeface="Times New Roman"/>
               </a:rPr>
@@ -2134,7 +2128,7 @@
         <p:spPr>
           <a:xfrm>
             <a:off x="685800" y="1143000"/>
-            <a:ext cx="5486040" cy="3085920"/>
+            <a:ext cx="5485680" cy="3085560"/>
           </a:xfrm>
           <a:prstGeom prst="rect">
             <a:avLst/>
@@ -2157,18 +2151,18 @@
         <p:spPr>
           <a:xfrm>
             <a:off x="685800" y="4400640"/>
-            <a:ext cx="5486040" cy="3600000"/>
-          </a:xfrm>
-          <a:prstGeom prst="rect">
-            <a:avLst/>
-          </a:prstGeom>
-          <a:noFill/>
-          <a:ln w="0">
-            <a:noFill/>
-          </a:ln>
-        </p:spPr>
-        <p:txBody>
-          <a:bodyPr anchor="t">
+            <a:ext cx="5485680" cy="3599640"/>
+          </a:xfrm>
+          <a:prstGeom prst="rect">
+            <a:avLst/>
+          </a:prstGeom>
+          <a:noFill/>
+          <a:ln w="0">
+            <a:noFill/>
+          </a:ln>
+        </p:spPr>
+        <p:txBody>
+          <a:bodyPr lIns="0" rIns="0" tIns="0" bIns="0" anchor="t">
             <a:noAutofit/>
           </a:bodyPr>
           <a:p>
@@ -2191,18 +2185,18 @@
         <p:spPr>
           <a:xfrm>
             <a:off x="3884760" y="8685360"/>
-            <a:ext cx="2971440" cy="458280"/>
-          </a:xfrm>
-          <a:prstGeom prst="rect">
-            <a:avLst/>
-          </a:prstGeom>
-          <a:noFill/>
-          <a:ln w="0">
-            <a:noFill/>
-          </a:ln>
-        </p:spPr>
-        <p:txBody>
-          <a:bodyPr anchor="b">
+            <a:ext cx="2971080" cy="457920"/>
+          </a:xfrm>
+          <a:prstGeom prst="rect">
+            <a:avLst/>
+          </a:prstGeom>
+          <a:noFill/>
+          <a:ln w="0">
+            <a:noFill/>
+          </a:ln>
+        </p:spPr>
+        <p:txBody>
+          <a:bodyPr lIns="0" rIns="0" tIns="0" bIns="0" anchor="b">
             <a:noAutofit/>
           </a:bodyPr>
           <a:lstStyle>
@@ -2223,7 +2217,7 @@
               </a:lnSpc>
               <a:buNone/>
             </a:pPr>
-            <a:fld id="{683DC360-28B2-479D-9A43-8788D3A705ED}" type="slidenum">
+            <a:fld id="{57EC69D6-7F1F-4BCB-98F4-6338C273EE9C}" type="slidenum">
               <a:rPr b="0" lang="en-US" sz="1200" spc="-1" strike="noStrike">
                 <a:latin typeface="Times New Roman"/>
               </a:rPr>
@@ -2270,7 +2264,7 @@
         <p:spPr>
           <a:xfrm>
             <a:off x="685800" y="1143000"/>
-            <a:ext cx="5486040" cy="3085920"/>
+            <a:ext cx="5485680" cy="3085560"/>
           </a:xfrm>
           <a:prstGeom prst="rect">
             <a:avLst/>
@@ -2293,18 +2287,18 @@
         <p:spPr>
           <a:xfrm>
             <a:off x="685800" y="4400640"/>
-            <a:ext cx="5486040" cy="3600000"/>
-          </a:xfrm>
-          <a:prstGeom prst="rect">
-            <a:avLst/>
-          </a:prstGeom>
-          <a:noFill/>
-          <a:ln w="0">
-            <a:noFill/>
-          </a:ln>
-        </p:spPr>
-        <p:txBody>
-          <a:bodyPr anchor="t">
+            <a:ext cx="5485680" cy="3599640"/>
+          </a:xfrm>
+          <a:prstGeom prst="rect">
+            <a:avLst/>
+          </a:prstGeom>
+          <a:noFill/>
+          <a:ln w="0">
+            <a:noFill/>
+          </a:ln>
+        </p:spPr>
+        <p:txBody>
+          <a:bodyPr lIns="0" rIns="0" tIns="0" bIns="0" anchor="t">
             <a:noAutofit/>
           </a:bodyPr>
           <a:p>
@@ -2327,18 +2321,18 @@
         <p:spPr>
           <a:xfrm>
             <a:off x="3884760" y="8685360"/>
-            <a:ext cx="2971440" cy="458280"/>
-          </a:xfrm>
-          <a:prstGeom prst="rect">
-            <a:avLst/>
-          </a:prstGeom>
-          <a:noFill/>
-          <a:ln w="0">
-            <a:noFill/>
-          </a:ln>
-        </p:spPr>
-        <p:txBody>
-          <a:bodyPr anchor="b">
+            <a:ext cx="2971080" cy="457920"/>
+          </a:xfrm>
+          <a:prstGeom prst="rect">
+            <a:avLst/>
+          </a:prstGeom>
+          <a:noFill/>
+          <a:ln w="0">
+            <a:noFill/>
+          </a:ln>
+        </p:spPr>
+        <p:txBody>
+          <a:bodyPr lIns="0" rIns="0" tIns="0" bIns="0" anchor="b">
             <a:noAutofit/>
           </a:bodyPr>
           <a:lstStyle>
@@ -2359,7 +2353,7 @@
               </a:lnSpc>
               <a:buNone/>
             </a:pPr>
-            <a:fld id="{C0078A60-A077-4E12-BEBE-4972948AA5E9}" type="slidenum">
+            <a:fld id="{86358DCA-D6CB-4FF1-8F90-2EA27B4B3054}" type="slidenum">
               <a:rPr b="0" lang="en-US" sz="1200" spc="-1" strike="noStrike">
                 <a:latin typeface="Times New Roman"/>
               </a:rPr>
@@ -2406,7 +2400,7 @@
         <p:spPr>
           <a:xfrm>
             <a:off x="685800" y="1143000"/>
-            <a:ext cx="5486040" cy="3085920"/>
+            <a:ext cx="5485680" cy="3085560"/>
           </a:xfrm>
           <a:prstGeom prst="rect">
             <a:avLst/>
@@ -2429,18 +2423,18 @@
         <p:spPr>
           <a:xfrm>
             <a:off x="685800" y="4400640"/>
-            <a:ext cx="5486040" cy="3600000"/>
-          </a:xfrm>
-          <a:prstGeom prst="rect">
-            <a:avLst/>
-          </a:prstGeom>
-          <a:noFill/>
-          <a:ln w="0">
-            <a:noFill/>
-          </a:ln>
-        </p:spPr>
-        <p:txBody>
-          <a:bodyPr anchor="t">
+            <a:ext cx="5485680" cy="3599640"/>
+          </a:xfrm>
+          <a:prstGeom prst="rect">
+            <a:avLst/>
+          </a:prstGeom>
+          <a:noFill/>
+          <a:ln w="0">
+            <a:noFill/>
+          </a:ln>
+        </p:spPr>
+        <p:txBody>
+          <a:bodyPr lIns="0" rIns="0" tIns="0" bIns="0" anchor="t">
             <a:noAutofit/>
           </a:bodyPr>
           <a:p>
@@ -2463,18 +2457,18 @@
         <p:spPr>
           <a:xfrm>
             <a:off x="3884760" y="8685360"/>
-            <a:ext cx="2971440" cy="458280"/>
-          </a:xfrm>
-          <a:prstGeom prst="rect">
-            <a:avLst/>
-          </a:prstGeom>
-          <a:noFill/>
-          <a:ln w="0">
-            <a:noFill/>
-          </a:ln>
-        </p:spPr>
-        <p:txBody>
-          <a:bodyPr anchor="b">
+            <a:ext cx="2971080" cy="457920"/>
+          </a:xfrm>
+          <a:prstGeom prst="rect">
+            <a:avLst/>
+          </a:prstGeom>
+          <a:noFill/>
+          <a:ln w="0">
+            <a:noFill/>
+          </a:ln>
+        </p:spPr>
+        <p:txBody>
+          <a:bodyPr lIns="0" rIns="0" tIns="0" bIns="0" anchor="b">
             <a:noAutofit/>
           </a:bodyPr>
           <a:lstStyle>
@@ -2495,7 +2489,7 @@
               </a:lnSpc>
               <a:buNone/>
             </a:pPr>
-            <a:fld id="{74720A76-39DF-41E4-BE8C-123EC62D5A84}" type="slidenum">
+            <a:fld id="{0336DCB2-A934-44A5-B7BE-210C9EA5F3A5}" type="slidenum">
               <a:rPr b="0" lang="en-US" sz="1200" spc="-1" strike="noStrike">
                 <a:latin typeface="Times New Roman"/>
               </a:rPr>
@@ -2542,7 +2536,7 @@
         <p:spPr>
           <a:xfrm>
             <a:off x="685800" y="1143000"/>
-            <a:ext cx="5486040" cy="3085920"/>
+            <a:ext cx="5485680" cy="3085560"/>
           </a:xfrm>
           <a:prstGeom prst="rect">
             <a:avLst/>
@@ -2565,18 +2559,18 @@
         <p:spPr>
           <a:xfrm>
             <a:off x="685800" y="4400640"/>
-            <a:ext cx="5486040" cy="3600000"/>
-          </a:xfrm>
-          <a:prstGeom prst="rect">
-            <a:avLst/>
-          </a:prstGeom>
-          <a:noFill/>
-          <a:ln w="0">
-            <a:noFill/>
-          </a:ln>
-        </p:spPr>
-        <p:txBody>
-          <a:bodyPr anchor="t">
+            <a:ext cx="5485680" cy="3599640"/>
+          </a:xfrm>
+          <a:prstGeom prst="rect">
+            <a:avLst/>
+          </a:prstGeom>
+          <a:noFill/>
+          <a:ln w="0">
+            <a:noFill/>
+          </a:ln>
+        </p:spPr>
+        <p:txBody>
+          <a:bodyPr lIns="0" rIns="0" tIns="0" bIns="0" anchor="t">
             <a:noAutofit/>
           </a:bodyPr>
           <a:p>
@@ -2599,18 +2593,18 @@
         <p:spPr>
           <a:xfrm>
             <a:off x="3884760" y="8685360"/>
-            <a:ext cx="2971440" cy="458280"/>
-          </a:xfrm>
-          <a:prstGeom prst="rect">
-            <a:avLst/>
-          </a:prstGeom>
-          <a:noFill/>
-          <a:ln w="0">
-            <a:noFill/>
-          </a:ln>
-        </p:spPr>
-        <p:txBody>
-          <a:bodyPr anchor="b">
+            <a:ext cx="2971080" cy="457920"/>
+          </a:xfrm>
+          <a:prstGeom prst="rect">
+            <a:avLst/>
+          </a:prstGeom>
+          <a:noFill/>
+          <a:ln w="0">
+            <a:noFill/>
+          </a:ln>
+        </p:spPr>
+        <p:txBody>
+          <a:bodyPr lIns="0" rIns="0" tIns="0" bIns="0" anchor="b">
             <a:noAutofit/>
           </a:bodyPr>
           <a:lstStyle>
@@ -2631,7 +2625,7 @@
               </a:lnSpc>
               <a:buNone/>
             </a:pPr>
-            <a:fld id="{09A4DDAD-6906-4DF4-B8C6-31E065121D22}" type="slidenum">
+            <a:fld id="{BC9EC594-9C03-4408-BE70-4C089ABBA0BE}" type="slidenum">
               <a:rPr b="0" lang="en-US" sz="1200" spc="-1" strike="noStrike">
                 <a:latin typeface="Times New Roman"/>
               </a:rPr>
@@ -2678,7 +2672,7 @@
         <p:spPr>
           <a:xfrm>
             <a:off x="685800" y="1143000"/>
-            <a:ext cx="5486040" cy="3085920"/>
+            <a:ext cx="5485680" cy="3085560"/>
           </a:xfrm>
           <a:prstGeom prst="rect">
             <a:avLst/>
@@ -2701,18 +2695,18 @@
         <p:spPr>
           <a:xfrm>
             <a:off x="685800" y="4400640"/>
-            <a:ext cx="5486040" cy="3600000"/>
-          </a:xfrm>
-          <a:prstGeom prst="rect">
-            <a:avLst/>
-          </a:prstGeom>
-          <a:noFill/>
-          <a:ln w="0">
-            <a:noFill/>
-          </a:ln>
-        </p:spPr>
-        <p:txBody>
-          <a:bodyPr anchor="t">
+            <a:ext cx="5485680" cy="3599640"/>
+          </a:xfrm>
+          <a:prstGeom prst="rect">
+            <a:avLst/>
+          </a:prstGeom>
+          <a:noFill/>
+          <a:ln w="0">
+            <a:noFill/>
+          </a:ln>
+        </p:spPr>
+        <p:txBody>
+          <a:bodyPr lIns="0" rIns="0" tIns="0" bIns="0" anchor="t">
             <a:noAutofit/>
           </a:bodyPr>
           <a:p>
@@ -2735,18 +2729,18 @@
         <p:spPr>
           <a:xfrm>
             <a:off x="3884760" y="8685360"/>
-            <a:ext cx="2971440" cy="458280"/>
-          </a:xfrm>
-          <a:prstGeom prst="rect">
-            <a:avLst/>
-          </a:prstGeom>
-          <a:noFill/>
-          <a:ln w="0">
-            <a:noFill/>
-          </a:ln>
-        </p:spPr>
-        <p:txBody>
-          <a:bodyPr anchor="b">
+            <a:ext cx="2971080" cy="457920"/>
+          </a:xfrm>
+          <a:prstGeom prst="rect">
+            <a:avLst/>
+          </a:prstGeom>
+          <a:noFill/>
+          <a:ln w="0">
+            <a:noFill/>
+          </a:ln>
+        </p:spPr>
+        <p:txBody>
+          <a:bodyPr lIns="0" rIns="0" tIns="0" bIns="0" anchor="b">
             <a:noAutofit/>
           </a:bodyPr>
           <a:lstStyle>
@@ -2767,7 +2761,7 @@
               </a:lnSpc>
               <a:buNone/>
             </a:pPr>
-            <a:fld id="{7127C2E8-EA5E-4732-9409-BB6CF447004D}" type="slidenum">
+            <a:fld id="{438C9BE5-32FE-4313-85E9-418E97720B13}" type="slidenum">
               <a:rPr b="0" lang="en-US" sz="1200" spc="-1" strike="noStrike">
                 <a:latin typeface="Times New Roman"/>
               </a:rPr>
@@ -2814,7 +2808,7 @@
         <p:spPr>
           <a:xfrm>
             <a:off x="685800" y="1143000"/>
-            <a:ext cx="5486040" cy="3085920"/>
+            <a:ext cx="5485680" cy="3085560"/>
           </a:xfrm>
           <a:prstGeom prst="rect">
             <a:avLst/>
@@ -2837,18 +2831,18 @@
         <p:spPr>
           <a:xfrm>
             <a:off x="685800" y="4400640"/>
-            <a:ext cx="5486040" cy="3600000"/>
-          </a:xfrm>
-          <a:prstGeom prst="rect">
-            <a:avLst/>
-          </a:prstGeom>
-          <a:noFill/>
-          <a:ln w="0">
-            <a:noFill/>
-          </a:ln>
-        </p:spPr>
-        <p:txBody>
-          <a:bodyPr anchor="t">
+            <a:ext cx="5485680" cy="3599640"/>
+          </a:xfrm>
+          <a:prstGeom prst="rect">
+            <a:avLst/>
+          </a:prstGeom>
+          <a:noFill/>
+          <a:ln w="0">
+            <a:noFill/>
+          </a:ln>
+        </p:spPr>
+        <p:txBody>
+          <a:bodyPr lIns="0" rIns="0" tIns="0" bIns="0" anchor="t">
             <a:noAutofit/>
           </a:bodyPr>
           <a:p>
@@ -2871,18 +2865,18 @@
         <p:spPr>
           <a:xfrm>
             <a:off x="3884760" y="8685360"/>
-            <a:ext cx="2971440" cy="458280"/>
-          </a:xfrm>
-          <a:prstGeom prst="rect">
-            <a:avLst/>
-          </a:prstGeom>
-          <a:noFill/>
-          <a:ln w="0">
-            <a:noFill/>
-          </a:ln>
-        </p:spPr>
-        <p:txBody>
-          <a:bodyPr anchor="b">
+            <a:ext cx="2971080" cy="457920"/>
+          </a:xfrm>
+          <a:prstGeom prst="rect">
+            <a:avLst/>
+          </a:prstGeom>
+          <a:noFill/>
+          <a:ln w="0">
+            <a:noFill/>
+          </a:ln>
+        </p:spPr>
+        <p:txBody>
+          <a:bodyPr lIns="0" rIns="0" tIns="0" bIns="0" anchor="b">
             <a:noAutofit/>
           </a:bodyPr>
           <a:lstStyle>
@@ -2903,7 +2897,7 @@
               </a:lnSpc>
               <a:buNone/>
             </a:pPr>
-            <a:fld id="{A8FBA103-0EDA-4EFE-A524-48F5410BFBC8}" type="slidenum">
+            <a:fld id="{CCAC50BA-DB06-4A81-A460-80CCA3DB3C11}" type="slidenum">
               <a:rPr b="0" lang="en-US" sz="1200" spc="-1" strike="noStrike">
                 <a:latin typeface="Times New Roman"/>
               </a:rPr>
@@ -2950,7 +2944,7 @@
         <p:spPr>
           <a:xfrm>
             <a:off x="685800" y="1143000"/>
-            <a:ext cx="5486040" cy="3085920"/>
+            <a:ext cx="5485680" cy="3085560"/>
           </a:xfrm>
           <a:prstGeom prst="rect">
             <a:avLst/>
@@ -2973,18 +2967,18 @@
         <p:spPr>
           <a:xfrm>
             <a:off x="685800" y="4400640"/>
-            <a:ext cx="5486040" cy="3600000"/>
-          </a:xfrm>
-          <a:prstGeom prst="rect">
-            <a:avLst/>
-          </a:prstGeom>
-          <a:noFill/>
-          <a:ln w="0">
-            <a:noFill/>
-          </a:ln>
-        </p:spPr>
-        <p:txBody>
-          <a:bodyPr anchor="t">
+            <a:ext cx="5485680" cy="3599640"/>
+          </a:xfrm>
+          <a:prstGeom prst="rect">
+            <a:avLst/>
+          </a:prstGeom>
+          <a:noFill/>
+          <a:ln w="0">
+            <a:noFill/>
+          </a:ln>
+        </p:spPr>
+        <p:txBody>
+          <a:bodyPr lIns="0" rIns="0" tIns="0" bIns="0" anchor="t">
             <a:noAutofit/>
           </a:bodyPr>
           <a:p>
@@ -3007,18 +3001,18 @@
         <p:spPr>
           <a:xfrm>
             <a:off x="3884760" y="8685360"/>
-            <a:ext cx="2971440" cy="458280"/>
-          </a:xfrm>
-          <a:prstGeom prst="rect">
-            <a:avLst/>
-          </a:prstGeom>
-          <a:noFill/>
-          <a:ln w="0">
-            <a:noFill/>
-          </a:ln>
-        </p:spPr>
-        <p:txBody>
-          <a:bodyPr anchor="b">
+            <a:ext cx="2971080" cy="457920"/>
+          </a:xfrm>
+          <a:prstGeom prst="rect">
+            <a:avLst/>
+          </a:prstGeom>
+          <a:noFill/>
+          <a:ln w="0">
+            <a:noFill/>
+          </a:ln>
+        </p:spPr>
+        <p:txBody>
+          <a:bodyPr lIns="0" rIns="0" tIns="0" bIns="0" anchor="b">
             <a:noAutofit/>
           </a:bodyPr>
           <a:lstStyle>
@@ -3039,7 +3033,7 @@
               </a:lnSpc>
               <a:buNone/>
             </a:pPr>
-            <a:fld id="{BA1EC2D2-077B-465A-A4AF-A550FD6E219E}" type="slidenum">
+            <a:fld id="{EA3686B7-5F23-447C-A302-C2965608B4A3}" type="slidenum">
               <a:rPr b="0" lang="en-US" sz="1200" spc="-1" strike="noStrike">
                 <a:latin typeface="Times New Roman"/>
               </a:rPr>
@@ -3086,7 +3080,7 @@
         <p:spPr>
           <a:xfrm>
             <a:off x="685800" y="1143000"/>
-            <a:ext cx="5486040" cy="3085920"/>
+            <a:ext cx="5485680" cy="3085560"/>
           </a:xfrm>
           <a:prstGeom prst="rect">
             <a:avLst/>
@@ -3109,18 +3103,18 @@
         <p:spPr>
           <a:xfrm>
             <a:off x="685800" y="4400640"/>
-            <a:ext cx="5486040" cy="3600000"/>
-          </a:xfrm>
-          <a:prstGeom prst="rect">
-            <a:avLst/>
-          </a:prstGeom>
-          <a:noFill/>
-          <a:ln w="0">
-            <a:noFill/>
-          </a:ln>
-        </p:spPr>
-        <p:txBody>
-          <a:bodyPr anchor="t">
+            <a:ext cx="5485680" cy="3599640"/>
+          </a:xfrm>
+          <a:prstGeom prst="rect">
+            <a:avLst/>
+          </a:prstGeom>
+          <a:noFill/>
+          <a:ln w="0">
+            <a:noFill/>
+          </a:ln>
+        </p:spPr>
+        <p:txBody>
+          <a:bodyPr lIns="0" rIns="0" tIns="0" bIns="0" anchor="t">
             <a:noAutofit/>
           </a:bodyPr>
           <a:p>
@@ -3143,18 +3137,18 @@
         <p:spPr>
           <a:xfrm>
             <a:off x="3884760" y="8685360"/>
-            <a:ext cx="2971440" cy="458280"/>
-          </a:xfrm>
-          <a:prstGeom prst="rect">
-            <a:avLst/>
-          </a:prstGeom>
-          <a:noFill/>
-          <a:ln w="0">
-            <a:noFill/>
-          </a:ln>
-        </p:spPr>
-        <p:txBody>
-          <a:bodyPr anchor="b">
+            <a:ext cx="2971080" cy="457920"/>
+          </a:xfrm>
+          <a:prstGeom prst="rect">
+            <a:avLst/>
+          </a:prstGeom>
+          <a:noFill/>
+          <a:ln w="0">
+            <a:noFill/>
+          </a:ln>
+        </p:spPr>
+        <p:txBody>
+          <a:bodyPr lIns="0" rIns="0" tIns="0" bIns="0" anchor="b">
             <a:noAutofit/>
           </a:bodyPr>
           <a:lstStyle>
@@ -3175,7 +3169,7 @@
               </a:lnSpc>
               <a:buNone/>
             </a:pPr>
-            <a:fld id="{A1F05450-B7BC-4860-9D88-D4B22D58477E}" type="slidenum">
+            <a:fld id="{82393524-EE59-445C-B454-46639718D29B}" type="slidenum">
               <a:rPr b="0" lang="en-US" sz="1200" spc="-1" strike="noStrike">
                 <a:latin typeface="Times New Roman"/>
               </a:rPr>
@@ -3263,10 +3257,7 @@
               <a:buNone/>
             </a:pPr>
             <a:endParaRPr b="0" lang="en-HK" sz="4400" spc="-1" strike="noStrike">
-              <a:solidFill>
-                <a:srgbClr val="000000"/>
-              </a:solidFill>
-              <a:latin typeface="Calibri Light"/>
+              <a:latin typeface="Arial"/>
             </a:endParaRPr>
           </a:p>
         </p:txBody>
@@ -3300,10 +3291,7 @@
           </a:bodyPr>
           <a:p>
             <a:endParaRPr b="0" lang="en-HK" sz="3200" spc="-1" strike="noStrike">
-              <a:solidFill>
-                <a:srgbClr val="000000"/>
-              </a:solidFill>
-              <a:latin typeface="Calibri"/>
+              <a:latin typeface="Arial"/>
             </a:endParaRPr>
           </a:p>
         </p:txBody>
@@ -3337,10 +3325,7 @@
           </a:bodyPr>
           <a:p>
             <a:endParaRPr b="0" lang="en-HK" sz="3200" spc="-1" strike="noStrike">
-              <a:solidFill>
-                <a:srgbClr val="000000"/>
-              </a:solidFill>
-              <a:latin typeface="Calibri"/>
+              <a:latin typeface="Arial"/>
             </a:endParaRPr>
           </a:p>
         </p:txBody>
@@ -3399,10 +3384,7 @@
               <a:buNone/>
             </a:pPr>
             <a:endParaRPr b="0" lang="en-HK" sz="4400" spc="-1" strike="noStrike">
-              <a:solidFill>
-                <a:srgbClr val="000000"/>
-              </a:solidFill>
-              <a:latin typeface="Calibri Light"/>
+              <a:latin typeface="Arial"/>
             </a:endParaRPr>
           </a:p>
         </p:txBody>
@@ -3436,10 +3418,7 @@
           </a:bodyPr>
           <a:p>
             <a:endParaRPr b="0" lang="en-HK" sz="3200" spc="-1" strike="noStrike">
-              <a:solidFill>
-                <a:srgbClr val="000000"/>
-              </a:solidFill>
-              <a:latin typeface="Calibri"/>
+              <a:latin typeface="Arial"/>
             </a:endParaRPr>
           </a:p>
         </p:txBody>
@@ -3473,10 +3452,7 @@
           </a:bodyPr>
           <a:p>
             <a:endParaRPr b="0" lang="en-HK" sz="3200" spc="-1" strike="noStrike">
-              <a:solidFill>
-                <a:srgbClr val="000000"/>
-              </a:solidFill>
-              <a:latin typeface="Calibri"/>
+              <a:latin typeface="Arial"/>
             </a:endParaRPr>
           </a:p>
         </p:txBody>
@@ -3510,10 +3486,7 @@
           </a:bodyPr>
           <a:p>
             <a:endParaRPr b="0" lang="en-HK" sz="3200" spc="-1" strike="noStrike">
-              <a:solidFill>
-                <a:srgbClr val="000000"/>
-              </a:solidFill>
-              <a:latin typeface="Calibri"/>
+              <a:latin typeface="Arial"/>
             </a:endParaRPr>
           </a:p>
         </p:txBody>
@@ -3547,10 +3520,7 @@
           </a:bodyPr>
           <a:p>
             <a:endParaRPr b="0" lang="en-HK" sz="3200" spc="-1" strike="noStrike">
-              <a:solidFill>
-                <a:srgbClr val="000000"/>
-              </a:solidFill>
-              <a:latin typeface="Calibri"/>
+              <a:latin typeface="Arial"/>
             </a:endParaRPr>
           </a:p>
         </p:txBody>
@@ -3609,10 +3579,7 @@
               <a:buNone/>
             </a:pPr>
             <a:endParaRPr b="0" lang="en-HK" sz="4400" spc="-1" strike="noStrike">
-              <a:solidFill>
-                <a:srgbClr val="000000"/>
-              </a:solidFill>
-              <a:latin typeface="Calibri Light"/>
+              <a:latin typeface="Arial"/>
             </a:endParaRPr>
           </a:p>
         </p:txBody>
@@ -3646,10 +3613,7 @@
           </a:bodyPr>
           <a:p>
             <a:endParaRPr b="0" lang="en-HK" sz="3200" spc="-1" strike="noStrike">
-              <a:solidFill>
-                <a:srgbClr val="000000"/>
-              </a:solidFill>
-              <a:latin typeface="Calibri"/>
+              <a:latin typeface="Arial"/>
             </a:endParaRPr>
           </a:p>
         </p:txBody>
@@ -3683,10 +3647,7 @@
           </a:bodyPr>
           <a:p>
             <a:endParaRPr b="0" lang="en-HK" sz="3200" spc="-1" strike="noStrike">
-              <a:solidFill>
-                <a:srgbClr val="000000"/>
-              </a:solidFill>
-              <a:latin typeface="Calibri"/>
+              <a:latin typeface="Arial"/>
             </a:endParaRPr>
           </a:p>
         </p:txBody>
@@ -3720,10 +3681,7 @@
           </a:bodyPr>
           <a:p>
             <a:endParaRPr b="0" lang="en-HK" sz="3200" spc="-1" strike="noStrike">
-              <a:solidFill>
-                <a:srgbClr val="000000"/>
-              </a:solidFill>
-              <a:latin typeface="Calibri"/>
+              <a:latin typeface="Arial"/>
             </a:endParaRPr>
           </a:p>
         </p:txBody>
@@ -3757,10 +3715,7 @@
           </a:bodyPr>
           <a:p>
             <a:endParaRPr b="0" lang="en-HK" sz="3200" spc="-1" strike="noStrike">
-              <a:solidFill>
-                <a:srgbClr val="000000"/>
-              </a:solidFill>
-              <a:latin typeface="Calibri"/>
+              <a:latin typeface="Arial"/>
             </a:endParaRPr>
           </a:p>
         </p:txBody>
@@ -3794,10 +3749,7 @@
           </a:bodyPr>
           <a:p>
             <a:endParaRPr b="0" lang="en-HK" sz="3200" spc="-1" strike="noStrike">
-              <a:solidFill>
-                <a:srgbClr val="000000"/>
-              </a:solidFill>
-              <a:latin typeface="Calibri"/>
+              <a:latin typeface="Arial"/>
             </a:endParaRPr>
           </a:p>
         </p:txBody>
@@ -3831,10 +3783,7 @@
           </a:bodyPr>
           <a:p>
             <a:endParaRPr b="0" lang="en-HK" sz="3200" spc="-1" strike="noStrike">
-              <a:solidFill>
-                <a:srgbClr val="000000"/>
-              </a:solidFill>
-              <a:latin typeface="Calibri"/>
+              <a:latin typeface="Arial"/>
             </a:endParaRPr>
           </a:p>
         </p:txBody>
@@ -3893,10 +3842,7 @@
               <a:buNone/>
             </a:pPr>
             <a:endParaRPr b="0" lang="en-HK" sz="4400" spc="-1" strike="noStrike">
-              <a:solidFill>
-                <a:srgbClr val="000000"/>
-              </a:solidFill>
-              <a:latin typeface="Calibri Light"/>
+              <a:latin typeface="Arial"/>
             </a:endParaRPr>
           </a:p>
         </p:txBody>
@@ -3992,10 +3938,7 @@
               <a:buNone/>
             </a:pPr>
             <a:endParaRPr b="0" lang="en-HK" sz="4400" spc="-1" strike="noStrike">
-              <a:solidFill>
-                <a:srgbClr val="000000"/>
-              </a:solidFill>
-              <a:latin typeface="Calibri Light"/>
+              <a:latin typeface="Arial"/>
             </a:endParaRPr>
           </a:p>
         </p:txBody>
@@ -4029,10 +3972,7 @@
           </a:bodyPr>
           <a:p>
             <a:endParaRPr b="0" lang="en-HK" sz="3200" spc="-1" strike="noStrike">
-              <a:solidFill>
-                <a:srgbClr val="000000"/>
-              </a:solidFill>
-              <a:latin typeface="Calibri"/>
+              <a:latin typeface="Arial"/>
             </a:endParaRPr>
           </a:p>
         </p:txBody>
@@ -4091,10 +4031,7 @@
               <a:buNone/>
             </a:pPr>
             <a:endParaRPr b="0" lang="en-HK" sz="4400" spc="-1" strike="noStrike">
-              <a:solidFill>
-                <a:srgbClr val="000000"/>
-              </a:solidFill>
-              <a:latin typeface="Calibri Light"/>
+              <a:latin typeface="Arial"/>
             </a:endParaRPr>
           </a:p>
         </p:txBody>
@@ -4128,10 +4065,7 @@
           </a:bodyPr>
           <a:p>
             <a:endParaRPr b="0" lang="en-HK" sz="3200" spc="-1" strike="noStrike">
-              <a:solidFill>
-                <a:srgbClr val="000000"/>
-              </a:solidFill>
-              <a:latin typeface="Calibri"/>
+              <a:latin typeface="Arial"/>
             </a:endParaRPr>
           </a:p>
         </p:txBody>
@@ -4165,10 +4099,7 @@
           </a:bodyPr>
           <a:p>
             <a:endParaRPr b="0" lang="en-HK" sz="3200" spc="-1" strike="noStrike">
-              <a:solidFill>
-                <a:srgbClr val="000000"/>
-              </a:solidFill>
-              <a:latin typeface="Calibri"/>
+              <a:latin typeface="Arial"/>
             </a:endParaRPr>
           </a:p>
         </p:txBody>
@@ -4227,10 +4158,7 @@
               <a:buNone/>
             </a:pPr>
             <a:endParaRPr b="0" lang="en-HK" sz="4400" spc="-1" strike="noStrike">
-              <a:solidFill>
-                <a:srgbClr val="000000"/>
-              </a:solidFill>
-              <a:latin typeface="Calibri Light"/>
+              <a:latin typeface="Arial"/>
             </a:endParaRPr>
           </a:p>
         </p:txBody>
@@ -4348,10 +4276,7 @@
               <a:buNone/>
             </a:pPr>
             <a:endParaRPr b="0" lang="en-HK" sz="4400" spc="-1" strike="noStrike">
-              <a:solidFill>
-                <a:srgbClr val="000000"/>
-              </a:solidFill>
-              <a:latin typeface="Calibri Light"/>
+              <a:latin typeface="Arial"/>
             </a:endParaRPr>
           </a:p>
         </p:txBody>
@@ -4385,10 +4310,7 @@
           </a:bodyPr>
           <a:p>
             <a:endParaRPr b="0" lang="en-HK" sz="3200" spc="-1" strike="noStrike">
-              <a:solidFill>
-                <a:srgbClr val="000000"/>
-              </a:solidFill>
-              <a:latin typeface="Calibri"/>
+              <a:latin typeface="Arial"/>
             </a:endParaRPr>
           </a:p>
         </p:txBody>
@@ -4422,10 +4344,7 @@
           </a:bodyPr>
           <a:p>
             <a:endParaRPr b="0" lang="en-HK" sz="3200" spc="-1" strike="noStrike">
-              <a:solidFill>
-                <a:srgbClr val="000000"/>
-              </a:solidFill>
-              <a:latin typeface="Calibri"/>
+              <a:latin typeface="Arial"/>
             </a:endParaRPr>
           </a:p>
         </p:txBody>
@@ -4459,10 +4378,7 @@
           </a:bodyPr>
           <a:p>
             <a:endParaRPr b="0" lang="en-HK" sz="3200" spc="-1" strike="noStrike">
-              <a:solidFill>
-                <a:srgbClr val="000000"/>
-              </a:solidFill>
-              <a:latin typeface="Calibri"/>
+              <a:latin typeface="Arial"/>
             </a:endParaRPr>
           </a:p>
         </p:txBody>
@@ -4521,10 +4437,7 @@
               <a:buNone/>
             </a:pPr>
             <a:endParaRPr b="0" lang="en-HK" sz="4400" spc="-1" strike="noStrike">
-              <a:solidFill>
-                <a:srgbClr val="000000"/>
-              </a:solidFill>
-              <a:latin typeface="Calibri Light"/>
+              <a:latin typeface="Arial"/>
             </a:endParaRPr>
           </a:p>
         </p:txBody>
@@ -4558,10 +4471,7 @@
           </a:bodyPr>
           <a:p>
             <a:endParaRPr b="0" lang="en-HK" sz="3200" spc="-1" strike="noStrike">
-              <a:solidFill>
-                <a:srgbClr val="000000"/>
-              </a:solidFill>
-              <a:latin typeface="Calibri"/>
+              <a:latin typeface="Arial"/>
             </a:endParaRPr>
           </a:p>
         </p:txBody>
@@ -4595,10 +4505,7 @@
           </a:bodyPr>
           <a:p>
             <a:endParaRPr b="0" lang="en-HK" sz="3200" spc="-1" strike="noStrike">
-              <a:solidFill>
-                <a:srgbClr val="000000"/>
-              </a:solidFill>
-              <a:latin typeface="Calibri"/>
+              <a:latin typeface="Arial"/>
             </a:endParaRPr>
           </a:p>
         </p:txBody>
@@ -4632,10 +4539,7 @@
           </a:bodyPr>
           <a:p>
             <a:endParaRPr b="0" lang="en-HK" sz="3200" spc="-1" strike="noStrike">
-              <a:solidFill>
-                <a:srgbClr val="000000"/>
-              </a:solidFill>
-              <a:latin typeface="Calibri"/>
+              <a:latin typeface="Arial"/>
             </a:endParaRPr>
           </a:p>
         </p:txBody>
@@ -4694,10 +4598,7 @@
               <a:buNone/>
             </a:pPr>
             <a:endParaRPr b="0" lang="en-HK" sz="4400" spc="-1" strike="noStrike">
-              <a:solidFill>
-                <a:srgbClr val="000000"/>
-              </a:solidFill>
-              <a:latin typeface="Calibri Light"/>
+              <a:latin typeface="Arial"/>
             </a:endParaRPr>
           </a:p>
         </p:txBody>
@@ -4731,10 +4632,7 @@
           </a:bodyPr>
           <a:p>
             <a:endParaRPr b="0" lang="en-HK" sz="3200" spc="-1" strike="noStrike">
-              <a:solidFill>
-                <a:srgbClr val="000000"/>
-              </a:solidFill>
-              <a:latin typeface="Calibri"/>
+              <a:latin typeface="Arial"/>
             </a:endParaRPr>
           </a:p>
         </p:txBody>
@@ -4768,10 +4666,7 @@
           </a:bodyPr>
           <a:p>
             <a:endParaRPr b="0" lang="en-HK" sz="3200" spc="-1" strike="noStrike">
-              <a:solidFill>
-                <a:srgbClr val="000000"/>
-              </a:solidFill>
-              <a:latin typeface="Calibri"/>
+              <a:latin typeface="Arial"/>
             </a:endParaRPr>
           </a:p>
         </p:txBody>
@@ -4805,10 +4700,7 @@
           </a:bodyPr>
           <a:p>
             <a:endParaRPr b="0" lang="en-HK" sz="3200" spc="-1" strike="noStrike">
-              <a:solidFill>
-                <a:srgbClr val="000000"/>
-              </a:solidFill>
-              <a:latin typeface="Calibri"/>
+              <a:latin typeface="Arial"/>
             </a:endParaRPr>
           </a:p>
         </p:txBody>
@@ -4875,18 +4767,12 @@
             </a:pPr>
             <a:r>
               <a:rPr b="0" lang="en-HK" sz="4400" spc="-1" strike="noStrike">
-                <a:solidFill>
-                  <a:srgbClr val="000000"/>
-                </a:solidFill>
-                <a:latin typeface="Calibri Light"/>
+                <a:latin typeface="Arial"/>
               </a:rPr>
               <a:t>Click to edit the title text format</a:t>
             </a:r>
             <a:endParaRPr b="0" lang="en-HK" sz="4400" spc="-1" strike="noStrike">
-              <a:solidFill>
-                <a:srgbClr val="000000"/>
-              </a:solidFill>
-              <a:latin typeface="Calibri Light"/>
+              <a:latin typeface="Arial"/>
             </a:endParaRPr>
           </a:p>
         </p:txBody>
@@ -4932,18 +4818,12 @@
             </a:pPr>
             <a:r>
               <a:rPr b="0" lang="en-HK" sz="3200" spc="-1" strike="noStrike">
-                <a:solidFill>
-                  <a:srgbClr val="000000"/>
-                </a:solidFill>
-                <a:latin typeface="Calibri"/>
+                <a:latin typeface="Arial"/>
               </a:rPr>
               <a:t>Click to edit the outline text format</a:t>
             </a:r>
             <a:endParaRPr b="0" lang="en-HK" sz="3200" spc="-1" strike="noStrike">
-              <a:solidFill>
-                <a:srgbClr val="000000"/>
-              </a:solidFill>
-              <a:latin typeface="Calibri"/>
+              <a:latin typeface="Arial"/>
             </a:endParaRPr>
           </a:p>
           <a:p>
@@ -4959,19 +4839,13 @@
               <a:buChar char=""/>
             </a:pPr>
             <a:r>
-              <a:rPr b="0" lang="en-HK" sz="2400" spc="-1" strike="noStrike">
-                <a:solidFill>
-                  <a:srgbClr val="000000"/>
-                </a:solidFill>
-                <a:latin typeface="Calibri"/>
+              <a:rPr b="0" lang="en-HK" sz="2800" spc="-1" strike="noStrike">
+                <a:latin typeface="Arial"/>
               </a:rPr>
               <a:t>Second Outline Level</a:t>
             </a:r>
-            <a:endParaRPr b="0" lang="en-HK" sz="2400" spc="-1" strike="noStrike">
-              <a:solidFill>
-                <a:srgbClr val="000000"/>
-              </a:solidFill>
-              <a:latin typeface="Calibri"/>
+            <a:endParaRPr b="0" lang="en-HK" sz="2800" spc="-1" strike="noStrike">
+              <a:latin typeface="Arial"/>
             </a:endParaRPr>
           </a:p>
           <a:p>
@@ -4987,19 +4861,13 @@
               <a:buChar char=""/>
             </a:pPr>
             <a:r>
-              <a:rPr b="0" lang="en-HK" sz="2000" spc="-1" strike="noStrike">
-                <a:solidFill>
-                  <a:srgbClr val="000000"/>
-                </a:solidFill>
-                <a:latin typeface="Calibri"/>
+              <a:rPr b="0" lang="en-HK" sz="2400" spc="-1" strike="noStrike">
+                <a:latin typeface="Arial"/>
               </a:rPr>
               <a:t>Third Outline Level</a:t>
             </a:r>
-            <a:endParaRPr b="0" lang="en-HK" sz="2000" spc="-1" strike="noStrike">
-              <a:solidFill>
-                <a:srgbClr val="000000"/>
-              </a:solidFill>
-              <a:latin typeface="Calibri"/>
+            <a:endParaRPr b="0" lang="en-HK" sz="2400" spc="-1" strike="noStrike">
+              <a:latin typeface="Arial"/>
             </a:endParaRPr>
           </a:p>
           <a:p>
@@ -5016,18 +4884,12 @@
             </a:pPr>
             <a:r>
               <a:rPr b="0" lang="en-HK" sz="2000" spc="-1" strike="noStrike">
-                <a:solidFill>
-                  <a:srgbClr val="000000"/>
-                </a:solidFill>
-                <a:latin typeface="Calibri"/>
+                <a:latin typeface="Arial"/>
               </a:rPr>
               <a:t>Fourth Outline Level</a:t>
             </a:r>
             <a:endParaRPr b="0" lang="en-HK" sz="2000" spc="-1" strike="noStrike">
-              <a:solidFill>
-                <a:srgbClr val="000000"/>
-              </a:solidFill>
-              <a:latin typeface="Calibri"/>
+              <a:latin typeface="Arial"/>
             </a:endParaRPr>
           </a:p>
           <a:p>
@@ -5044,18 +4906,12 @@
             </a:pPr>
             <a:r>
               <a:rPr b="0" lang="en-HK" sz="2000" spc="-1" strike="noStrike">
-                <a:solidFill>
-                  <a:srgbClr val="000000"/>
-                </a:solidFill>
-                <a:latin typeface="Calibri"/>
+                <a:latin typeface="Arial"/>
               </a:rPr>
               <a:t>Fifth Outline Level</a:t>
             </a:r>
             <a:endParaRPr b="0" lang="en-HK" sz="2000" spc="-1" strike="noStrike">
-              <a:solidFill>
-                <a:srgbClr val="000000"/>
-              </a:solidFill>
-              <a:latin typeface="Calibri"/>
+              <a:latin typeface="Arial"/>
             </a:endParaRPr>
           </a:p>
           <a:p>
@@ -5072,18 +4928,12 @@
             </a:pPr>
             <a:r>
               <a:rPr b="0" lang="en-HK" sz="2000" spc="-1" strike="noStrike">
-                <a:solidFill>
-                  <a:srgbClr val="000000"/>
-                </a:solidFill>
-                <a:latin typeface="Calibri"/>
+                <a:latin typeface="Arial"/>
               </a:rPr>
               <a:t>Sixth Outline Level</a:t>
             </a:r>
             <a:endParaRPr b="0" lang="en-HK" sz="2000" spc="-1" strike="noStrike">
-              <a:solidFill>
-                <a:srgbClr val="000000"/>
-              </a:solidFill>
-              <a:latin typeface="Calibri"/>
+              <a:latin typeface="Arial"/>
             </a:endParaRPr>
           </a:p>
           <a:p>
@@ -5100,18 +4950,12 @@
             </a:pPr>
             <a:r>
               <a:rPr b="0" lang="en-HK" sz="2000" spc="-1" strike="noStrike">
-                <a:solidFill>
-                  <a:srgbClr val="000000"/>
-                </a:solidFill>
-                <a:latin typeface="Calibri"/>
+                <a:latin typeface="Arial"/>
               </a:rPr>
               <a:t>Seventh Outline Level</a:t>
             </a:r>
             <a:endParaRPr b="0" lang="en-HK" sz="2000" spc="-1" strike="noStrike">
-              <a:solidFill>
-                <a:srgbClr val="000000"/>
-              </a:solidFill>
-              <a:latin typeface="Calibri"/>
+              <a:latin typeface="Arial"/>
             </a:endParaRPr>
           </a:p>
         </p:txBody>
@@ -5169,7 +5013,7 @@
         <p:spPr>
           <a:xfrm>
             <a:off x="5638680" y="2266920"/>
-            <a:ext cx="914040" cy="18720"/>
+            <a:ext cx="913680" cy="18360"/>
           </a:xfrm>
           <a:custGeom>
             <a:avLst/>
@@ -5220,7 +5064,7 @@
         <p:spPr>
           <a:xfrm>
             <a:off x="3633840" y="2514600"/>
-            <a:ext cx="4924080" cy="914040"/>
+            <a:ext cx="4923720" cy="913680"/>
           </a:xfrm>
           <a:prstGeom prst="rect">
             <a:avLst/>
@@ -5275,7 +5119,7 @@
         <p:spPr>
           <a:xfrm>
             <a:off x="5638680" y="3657600"/>
-            <a:ext cx="914040" cy="18720"/>
+            <a:ext cx="913680" cy="18360"/>
           </a:xfrm>
           <a:custGeom>
             <a:avLst/>
@@ -5326,7 +5170,7 @@
         <p:spPr>
           <a:xfrm>
             <a:off x="3545640" y="4286160"/>
-            <a:ext cx="5095440" cy="304560"/>
+            <a:ext cx="5095080" cy="304200"/>
           </a:xfrm>
           <a:prstGeom prst="rect">
             <a:avLst/>
@@ -5354,7 +5198,7 @@
               <a:buNone/>
             </a:pPr>
             <a:r>
-              <a:rPr b="0" lang="en-US" sz="1800" spc="43" strike="noStrike">
+              <a:rPr b="0" lang="en-US" sz="1800" spc="41" strike="noStrike">
                 <a:solidFill>
                   <a:srgbClr val="ffffff"/>
                 </a:solidFill>
@@ -5418,7 +5262,7 @@
         <p:spPr>
           <a:xfrm>
             <a:off x="380880" y="380880"/>
-            <a:ext cx="11505960" cy="228240"/>
+            <a:ext cx="11505600" cy="227880"/>
           </a:xfrm>
           <a:prstGeom prst="rect">
             <a:avLst/>
@@ -5446,7 +5290,7 @@
               <a:buNone/>
             </a:pPr>
             <a:r>
-              <a:rPr b="1" lang="en-US" sz="1200" spc="58" strike="noStrike">
+              <a:rPr b="1" lang="en-US" sz="1200" spc="55" strike="noStrike">
                 <a:solidFill>
                   <a:srgbClr val="0984e3"/>
                 </a:solidFill>
@@ -5470,7 +5314,7 @@
         <p:spPr>
           <a:xfrm>
             <a:off x="380880" y="685800"/>
-            <a:ext cx="11658240" cy="456840"/>
+            <a:ext cx="11657880" cy="456480"/>
           </a:xfrm>
           <a:prstGeom prst="rect">
             <a:avLst/>
@@ -5522,7 +5366,7 @@
         <p:spPr>
           <a:xfrm>
             <a:off x="380880" y="1419120"/>
-            <a:ext cx="5496840" cy="828360"/>
+            <a:ext cx="5496480" cy="828000"/>
           </a:xfrm>
           <a:prstGeom prst="rect">
             <a:avLst/>
@@ -5574,7 +5418,7 @@
         <p:spPr>
           <a:xfrm>
             <a:off x="380880" y="2452680"/>
-            <a:ext cx="5648040" cy="837720"/>
+            <a:ext cx="5647680" cy="837360"/>
           </a:xfrm>
           <a:prstGeom prst="rect">
             <a:avLst/>
@@ -5626,7 +5470,7 @@
         <p:spPr>
           <a:xfrm>
             <a:off x="380880" y="3867120"/>
-            <a:ext cx="5562360" cy="2018880"/>
+            <a:ext cx="5562000" cy="2018520"/>
           </a:xfrm>
           <a:custGeom>
             <a:avLst/>
@@ -5677,7 +5521,7 @@
         <p:spPr>
           <a:xfrm>
             <a:off x="609480" y="4095720"/>
-            <a:ext cx="5200200" cy="266400"/>
+            <a:ext cx="5199840" cy="266040"/>
           </a:xfrm>
           <a:prstGeom prst="rect">
             <a:avLst/>
@@ -5729,7 +5573,7 @@
         <p:spPr>
           <a:xfrm>
             <a:off x="609480" y="4476600"/>
-            <a:ext cx="5181120" cy="247320"/>
+            <a:ext cx="5180760" cy="246960"/>
           </a:xfrm>
           <a:prstGeom prst="rect">
             <a:avLst/>
@@ -5821,7 +5665,7 @@
         <p:spPr>
           <a:xfrm>
             <a:off x="609480" y="4838760"/>
-            <a:ext cx="5105160" cy="456840"/>
+            <a:ext cx="5104800" cy="456480"/>
           </a:xfrm>
           <a:custGeom>
             <a:avLst/>
@@ -5872,24 +5716,24 @@
         <p:spPr>
           <a:xfrm>
             <a:off x="609480" y="4838760"/>
-            <a:ext cx="5181120" cy="456840"/>
-          </a:xfrm>
-          <a:prstGeom prst="rect">
-            <a:avLst/>
-          </a:prstGeom>
-          <a:noFill/>
-          <a:ln w="0">
-            <a:noFill/>
-          </a:ln>
-        </p:spPr>
-        <p:style>
-          <a:lnRef idx="0"/>
-          <a:fillRef idx="0"/>
-          <a:effectRef idx="0"/>
-          <a:fontRef idx="minor"/>
-        </p:style>
-        <p:txBody>
-          <a:bodyPr lIns="114480" rIns="114480" tIns="228960" bIns="228960" anchor="ctr">
+            <a:ext cx="5180760" cy="456480"/>
+          </a:xfrm>
+          <a:prstGeom prst="rect">
+            <a:avLst/>
+          </a:prstGeom>
+          <a:noFill/>
+          <a:ln w="0">
+            <a:noFill/>
+          </a:ln>
+        </p:spPr>
+        <p:style>
+          <a:lnRef idx="0"/>
+          <a:fillRef idx="0"/>
+          <a:effectRef idx="0"/>
+          <a:fontRef idx="minor"/>
+        </p:style>
+        <p:txBody>
+          <a:bodyPr lIns="114480" rIns="114480" tIns="457200" bIns="457200" anchor="ctr">
             <a:noAutofit/>
           </a:bodyPr>
           <a:p>
@@ -5924,7 +5768,7 @@
         <p:spPr>
           <a:xfrm>
             <a:off x="609480" y="5410080"/>
-            <a:ext cx="5181120" cy="247320"/>
+            <a:ext cx="5180760" cy="246960"/>
           </a:xfrm>
           <a:prstGeom prst="rect">
             <a:avLst/>
@@ -5996,7 +5840,7 @@
         <p:spPr>
           <a:xfrm>
             <a:off x="6253200" y="1376280"/>
-            <a:ext cx="5552640" cy="3209400"/>
+            <a:ext cx="5552280" cy="3209040"/>
           </a:xfrm>
           <a:custGeom>
             <a:avLst/>
@@ -6050,7 +5894,7 @@
         <p:spPr>
           <a:xfrm>
             <a:off x="6486480" y="1609560"/>
-            <a:ext cx="5181120" cy="266400"/>
+            <a:ext cx="5180760" cy="266040"/>
           </a:xfrm>
           <a:prstGeom prst="rect">
             <a:avLst/>
@@ -6102,7 +5946,7 @@
         <p:spPr>
           <a:xfrm>
             <a:off x="6486480" y="2028960"/>
-            <a:ext cx="304560" cy="304560"/>
+            <a:ext cx="304200" cy="304200"/>
           </a:xfrm>
           <a:custGeom>
             <a:avLst/>
@@ -6153,7 +5997,7 @@
         <p:spPr>
           <a:xfrm>
             <a:off x="6453360" y="2028960"/>
-            <a:ext cx="371160" cy="304560"/>
+            <a:ext cx="370800" cy="304200"/>
           </a:xfrm>
           <a:prstGeom prst="rect">
             <a:avLst/>
@@ -6205,7 +6049,7 @@
         <p:spPr>
           <a:xfrm>
             <a:off x="6905520" y="2028960"/>
-            <a:ext cx="3066840" cy="228240"/>
+            <a:ext cx="3066480" cy="227880"/>
           </a:xfrm>
           <a:prstGeom prst="rect">
             <a:avLst/>
@@ -6257,7 +6101,7 @@
         <p:spPr>
           <a:xfrm>
             <a:off x="6905520" y="2295360"/>
-            <a:ext cx="3066840" cy="228240"/>
+            <a:ext cx="3066480" cy="227880"/>
           </a:xfrm>
           <a:prstGeom prst="rect">
             <a:avLst/>
@@ -6309,7 +6153,7 @@
         <p:spPr>
           <a:xfrm>
             <a:off x="6486480" y="2638440"/>
-            <a:ext cx="304560" cy="304560"/>
+            <a:ext cx="304200" cy="304200"/>
           </a:xfrm>
           <a:custGeom>
             <a:avLst/>
@@ -6360,7 +6204,7 @@
         <p:spPr>
           <a:xfrm>
             <a:off x="6453360" y="2638440"/>
-            <a:ext cx="371160" cy="304560"/>
+            <a:ext cx="370800" cy="304200"/>
           </a:xfrm>
           <a:prstGeom prst="rect">
             <a:avLst/>
@@ -6412,7 +6256,7 @@
         <p:spPr>
           <a:xfrm>
             <a:off x="6905520" y="2638440"/>
-            <a:ext cx="3666600" cy="228240"/>
+            <a:ext cx="3666240" cy="227880"/>
           </a:xfrm>
           <a:prstGeom prst="rect">
             <a:avLst/>
@@ -6464,7 +6308,7 @@
         <p:spPr>
           <a:xfrm>
             <a:off x="6905520" y="2905200"/>
-            <a:ext cx="3666600" cy="228240"/>
+            <a:ext cx="3666240" cy="227880"/>
           </a:xfrm>
           <a:prstGeom prst="rect">
             <a:avLst/>
@@ -6516,7 +6360,7 @@
         <p:spPr>
           <a:xfrm>
             <a:off x="6486480" y="3247920"/>
-            <a:ext cx="304560" cy="304560"/>
+            <a:ext cx="304200" cy="304200"/>
           </a:xfrm>
           <a:custGeom>
             <a:avLst/>
@@ -6567,7 +6411,7 @@
         <p:spPr>
           <a:xfrm>
             <a:off x="6453360" y="3247920"/>
-            <a:ext cx="371160" cy="304560"/>
+            <a:ext cx="370800" cy="304200"/>
           </a:xfrm>
           <a:prstGeom prst="rect">
             <a:avLst/>
@@ -6619,7 +6463,7 @@
         <p:spPr>
           <a:xfrm>
             <a:off x="6905520" y="3247920"/>
-            <a:ext cx="3285720" cy="228240"/>
+            <a:ext cx="3285360" cy="227880"/>
           </a:xfrm>
           <a:prstGeom prst="rect">
             <a:avLst/>
@@ -6671,7 +6515,7 @@
         <p:spPr>
           <a:xfrm>
             <a:off x="6905520" y="3514680"/>
-            <a:ext cx="3285720" cy="228240"/>
+            <a:ext cx="3285360" cy="227880"/>
           </a:xfrm>
           <a:prstGeom prst="rect">
             <a:avLst/>
@@ -6723,7 +6567,7 @@
         <p:spPr>
           <a:xfrm>
             <a:off x="6486480" y="3857760"/>
-            <a:ext cx="304560" cy="304560"/>
+            <a:ext cx="304200" cy="304200"/>
           </a:xfrm>
           <a:custGeom>
             <a:avLst/>
@@ -6774,7 +6618,7 @@
         <p:spPr>
           <a:xfrm>
             <a:off x="6453360" y="3857760"/>
-            <a:ext cx="371160" cy="304560"/>
+            <a:ext cx="370800" cy="304200"/>
           </a:xfrm>
           <a:prstGeom prst="rect">
             <a:avLst/>
@@ -6826,7 +6670,7 @@
         <p:spPr>
           <a:xfrm>
             <a:off x="6905520" y="3857760"/>
-            <a:ext cx="4133520" cy="228240"/>
+            <a:ext cx="4133160" cy="227880"/>
           </a:xfrm>
           <a:prstGeom prst="rect">
             <a:avLst/>
@@ -6878,7 +6722,7 @@
         <p:spPr>
           <a:xfrm>
             <a:off x="6905520" y="4124160"/>
-            <a:ext cx="4133520" cy="228240"/>
+            <a:ext cx="4133160" cy="227880"/>
           </a:xfrm>
           <a:prstGeom prst="rect">
             <a:avLst/>
@@ -6930,7 +6774,7 @@
         <p:spPr>
           <a:xfrm>
             <a:off x="6267600" y="4743360"/>
-            <a:ext cx="5543280" cy="1142640"/>
+            <a:ext cx="5542920" cy="1142280"/>
           </a:xfrm>
           <a:custGeom>
             <a:avLst/>
@@ -6981,7 +6825,7 @@
         <p:spPr>
           <a:xfrm>
             <a:off x="6267600" y="4743360"/>
-            <a:ext cx="37800" cy="1142640"/>
+            <a:ext cx="37440" cy="1142280"/>
           </a:xfrm>
           <a:custGeom>
             <a:avLst/>
@@ -7032,7 +6876,7 @@
         <p:spPr>
           <a:xfrm>
             <a:off x="6477120" y="4933800"/>
-            <a:ext cx="5219280" cy="495000"/>
+            <a:ext cx="5218920" cy="494640"/>
           </a:xfrm>
           <a:prstGeom prst="rect">
             <a:avLst/>
@@ -7084,7 +6928,7 @@
         <p:spPr>
           <a:xfrm>
             <a:off x="6477120" y="5505480"/>
-            <a:ext cx="5209920" cy="190080"/>
+            <a:ext cx="5209560" cy="189720"/>
           </a:xfrm>
           <a:prstGeom prst="rect">
             <a:avLst/>
@@ -7183,7 +7027,7 @@
         <p:spPr>
           <a:xfrm>
             <a:off x="379440" y="379440"/>
-            <a:ext cx="11508480" cy="227520"/>
+            <a:ext cx="11508120" cy="227160"/>
           </a:xfrm>
           <a:prstGeom prst="rect">
             <a:avLst/>
@@ -7211,7 +7055,7 @@
               <a:buNone/>
             </a:pPr>
             <a:r>
-              <a:rPr b="1" lang="en-US" sz="1200" spc="58" strike="noStrike">
+              <a:rPr b="1" lang="en-US" sz="1200" spc="55" strike="noStrike">
                 <a:solidFill>
                   <a:srgbClr val="0984e3"/>
                 </a:solidFill>
@@ -7235,7 +7079,7 @@
         <p:spPr>
           <a:xfrm>
             <a:off x="379440" y="683280"/>
-            <a:ext cx="11660400" cy="455040"/>
+            <a:ext cx="11660040" cy="454680"/>
           </a:xfrm>
           <a:prstGeom prst="rect">
             <a:avLst/>
@@ -7287,7 +7131,7 @@
         <p:spPr>
           <a:xfrm>
             <a:off x="379440" y="1366200"/>
-            <a:ext cx="5682960" cy="303120"/>
+            <a:ext cx="5682600" cy="302760"/>
           </a:xfrm>
           <a:prstGeom prst="rect">
             <a:avLst/>
@@ -7339,7 +7183,7 @@
         <p:spPr>
           <a:xfrm>
             <a:off x="379440" y="1826280"/>
-            <a:ext cx="5096880" cy="466920"/>
+            <a:ext cx="5096520" cy="466560"/>
           </a:xfrm>
           <a:prstGeom prst="rect">
             <a:avLst/>
@@ -7391,7 +7235,7 @@
         <p:spPr>
           <a:xfrm>
             <a:off x="379440" y="2452680"/>
-            <a:ext cx="5644800" cy="739800"/>
+            <a:ext cx="5644440" cy="739440"/>
           </a:xfrm>
           <a:prstGeom prst="rect">
             <a:avLst/>
@@ -7443,7 +7287,7 @@
         <p:spPr>
           <a:xfrm>
             <a:off x="398520" y="3306600"/>
-            <a:ext cx="5550120" cy="758520"/>
+            <a:ext cx="5549760" cy="758160"/>
           </a:xfrm>
           <a:custGeom>
             <a:avLst/>
@@ -7494,7 +7338,7 @@
         <p:spPr>
           <a:xfrm>
             <a:off x="398520" y="3306600"/>
-            <a:ext cx="37440" cy="758520"/>
+            <a:ext cx="37080" cy="758160"/>
           </a:xfrm>
           <a:custGeom>
             <a:avLst/>
@@ -7545,7 +7389,7 @@
         <p:spPr>
           <a:xfrm>
             <a:off x="569160" y="3458520"/>
-            <a:ext cx="5303520" cy="455040"/>
+            <a:ext cx="5303160" cy="454680"/>
           </a:xfrm>
           <a:prstGeom prst="rect">
             <a:avLst/>
@@ -7638,7 +7482,7 @@
         <p:spPr>
           <a:xfrm>
             <a:off x="379440" y="4217400"/>
-            <a:ext cx="5682960" cy="303120"/>
+            <a:ext cx="5682600" cy="302760"/>
           </a:xfrm>
           <a:prstGeom prst="rect">
             <a:avLst/>
@@ -7690,7 +7534,7 @@
         <p:spPr>
           <a:xfrm>
             <a:off x="379440" y="4635000"/>
-            <a:ext cx="5644800" cy="739800"/>
+            <a:ext cx="5644440" cy="739440"/>
           </a:xfrm>
           <a:prstGeom prst="rect">
             <a:avLst/>
@@ -7742,7 +7586,7 @@
         <p:spPr>
           <a:xfrm>
             <a:off x="6249240" y="1366200"/>
-            <a:ext cx="5682960" cy="303120"/>
+            <a:ext cx="5682600" cy="302760"/>
           </a:xfrm>
           <a:prstGeom prst="rect">
             <a:avLst/>
@@ -7794,7 +7638,7 @@
         <p:spPr>
           <a:xfrm>
             <a:off x="6249240" y="1826280"/>
-            <a:ext cx="5250240" cy="466920"/>
+            <a:ext cx="5249880" cy="466560"/>
           </a:xfrm>
           <a:prstGeom prst="rect">
             <a:avLst/>
@@ -7846,7 +7690,7 @@
         <p:spPr>
           <a:xfrm>
             <a:off x="6249240" y="2452680"/>
-            <a:ext cx="5644800" cy="739800"/>
+            <a:ext cx="5644440" cy="739440"/>
           </a:xfrm>
           <a:prstGeom prst="rect">
             <a:avLst/>
@@ -7898,7 +7742,7 @@
         <p:spPr>
           <a:xfrm>
             <a:off x="6249240" y="3344400"/>
-            <a:ext cx="5569200" cy="2181960"/>
+            <a:ext cx="5568840" cy="2181600"/>
           </a:xfrm>
           <a:custGeom>
             <a:avLst/>
@@ -7949,7 +7793,7 @@
         <p:spPr>
           <a:xfrm>
             <a:off x="6438960" y="3534120"/>
-            <a:ext cx="5284440" cy="265320"/>
+            <a:ext cx="5284080" cy="264960"/>
           </a:xfrm>
           <a:prstGeom prst="rect">
             <a:avLst/>
@@ -8001,7 +7845,7 @@
         <p:spPr>
           <a:xfrm>
             <a:off x="6438960" y="3913920"/>
-            <a:ext cx="5265360" cy="246240"/>
+            <a:ext cx="5265000" cy="245880"/>
           </a:xfrm>
           <a:prstGeom prst="rect">
             <a:avLst/>
@@ -8053,7 +7897,7 @@
         <p:spPr>
           <a:xfrm>
             <a:off x="6438960" y="4274280"/>
-            <a:ext cx="5189400" cy="455040"/>
+            <a:ext cx="5189040" cy="454680"/>
           </a:xfrm>
           <a:custGeom>
             <a:avLst/>
@@ -8104,7 +7948,7 @@
         <p:spPr>
           <a:xfrm>
             <a:off x="6438960" y="4274280"/>
-            <a:ext cx="5265360" cy="455040"/>
+            <a:ext cx="5265000" cy="454680"/>
           </a:xfrm>
           <a:prstGeom prst="rect">
             <a:avLst/>
@@ -8156,7 +8000,7 @@
         <p:spPr>
           <a:xfrm>
             <a:off x="6438960" y="4843440"/>
-            <a:ext cx="5265360" cy="492840"/>
+            <a:ext cx="5265000" cy="492480"/>
           </a:xfrm>
           <a:prstGeom prst="rect">
             <a:avLst/>
@@ -8208,7 +8052,7 @@
         <p:spPr>
           <a:xfrm>
             <a:off x="6268320" y="5678640"/>
-            <a:ext cx="5550120" cy="796680"/>
+            <a:ext cx="5549760" cy="796320"/>
           </a:xfrm>
           <a:custGeom>
             <a:avLst/>
@@ -8259,7 +8103,7 @@
         <p:spPr>
           <a:xfrm>
             <a:off x="6268320" y="5678640"/>
-            <a:ext cx="37440" cy="796680"/>
+            <a:ext cx="37080" cy="796320"/>
           </a:xfrm>
           <a:custGeom>
             <a:avLst/>
@@ -8310,7 +8154,7 @@
         <p:spPr>
           <a:xfrm>
             <a:off x="6438960" y="5830200"/>
-            <a:ext cx="5303520" cy="492840"/>
+            <a:ext cx="5303160" cy="492480"/>
           </a:xfrm>
           <a:prstGeom prst="rect">
             <a:avLst/>
@@ -8409,7 +8253,7 @@
         <p:spPr>
           <a:xfrm>
             <a:off x="609480" y="2066760"/>
-            <a:ext cx="12191760" cy="1218960"/>
+            <a:ext cx="12191400" cy="1218600"/>
           </a:xfrm>
           <a:prstGeom prst="rect">
             <a:avLst/>
@@ -8463,7 +8307,7 @@
         <p:spPr>
           <a:xfrm>
             <a:off x="609480" y="3438360"/>
-            <a:ext cx="11867760" cy="571320"/>
+            <a:ext cx="11867400" cy="570960"/>
           </a:xfrm>
           <a:prstGeom prst="rect">
             <a:avLst/>
@@ -8515,7 +8359,7 @@
         <p:spPr>
           <a:xfrm>
             <a:off x="609480" y="4238640"/>
-            <a:ext cx="1218960" cy="18720"/>
+            <a:ext cx="1218600" cy="18360"/>
           </a:xfrm>
           <a:custGeom>
             <a:avLst/>
@@ -8566,7 +8410,7 @@
         <p:spPr>
           <a:xfrm>
             <a:off x="609480" y="4486320"/>
-            <a:ext cx="11696400" cy="304560"/>
+            <a:ext cx="11696040" cy="304200"/>
           </a:xfrm>
           <a:prstGeom prst="rect">
             <a:avLst/>
@@ -8655,7 +8499,7 @@
         <p:spPr>
           <a:xfrm>
             <a:off x="356400" y="356400"/>
-            <a:ext cx="11550600" cy="213480"/>
+            <a:ext cx="11550240" cy="213120"/>
           </a:xfrm>
           <a:prstGeom prst="rect">
             <a:avLst/>
@@ -8683,7 +8527,7 @@
               <a:buNone/>
             </a:pPr>
             <a:r>
-              <a:rPr b="1" lang="en-US" sz="1120" spc="55" strike="noStrike">
+              <a:rPr b="1" lang="en-US" sz="1120" spc="52" strike="noStrike">
                 <a:solidFill>
                   <a:srgbClr val="0984e3"/>
                 </a:solidFill>
@@ -8707,7 +8551,7 @@
         <p:spPr>
           <a:xfrm>
             <a:off x="356400" y="641160"/>
-            <a:ext cx="11692800" cy="426960"/>
+            <a:ext cx="11692440" cy="426600"/>
           </a:xfrm>
           <a:prstGeom prst="rect">
             <a:avLst/>
@@ -8759,7 +8603,7 @@
         <p:spPr>
           <a:xfrm>
             <a:off x="360720" y="1287000"/>
-            <a:ext cx="3695400" cy="2626920"/>
+            <a:ext cx="3695040" cy="2626560"/>
           </a:xfrm>
           <a:custGeom>
             <a:avLst/>
@@ -8813,7 +8657,7 @@
         <p:spPr>
           <a:xfrm>
             <a:off x="543240" y="1469520"/>
-            <a:ext cx="426960" cy="426960"/>
+            <a:ext cx="426600" cy="426600"/>
           </a:xfrm>
           <a:custGeom>
             <a:avLst/>
@@ -8864,7 +8708,7 @@
         <p:spPr>
           <a:xfrm>
             <a:off x="656640" y="1594080"/>
-            <a:ext cx="200160" cy="177840"/>
+            <a:ext cx="199800" cy="177480"/>
           </a:xfrm>
           <a:custGeom>
             <a:avLst/>
@@ -9061,7 +8905,7 @@
         <p:spPr>
           <a:xfrm>
             <a:off x="1077480" y="1558440"/>
-            <a:ext cx="2341800" cy="249120"/>
+            <a:ext cx="2341440" cy="248760"/>
           </a:xfrm>
           <a:prstGeom prst="rect">
             <a:avLst/>
@@ -9113,7 +8957,7 @@
         <p:spPr>
           <a:xfrm>
             <a:off x="543240" y="2003760"/>
-            <a:ext cx="3401640" cy="694440"/>
+            <a:ext cx="3401280" cy="694080"/>
           </a:xfrm>
           <a:prstGeom prst="rect">
             <a:avLst/>
@@ -9175,7 +9019,7 @@
         <p:spPr>
           <a:xfrm>
             <a:off x="543240" y="2805480"/>
-            <a:ext cx="3401640" cy="925920"/>
+            <a:ext cx="3401280" cy="925560"/>
           </a:xfrm>
           <a:prstGeom prst="rect">
             <a:avLst/>
@@ -9237,7 +9081,7 @@
         <p:spPr>
           <a:xfrm>
             <a:off x="4246200" y="1287000"/>
-            <a:ext cx="3695400" cy="2626920"/>
+            <a:ext cx="3695040" cy="2626560"/>
           </a:xfrm>
           <a:custGeom>
             <a:avLst/>
@@ -9291,7 +9135,7 @@
         <p:spPr>
           <a:xfrm>
             <a:off x="4428720" y="1469520"/>
-            <a:ext cx="426960" cy="426960"/>
+            <a:ext cx="426600" cy="426600"/>
           </a:xfrm>
           <a:custGeom>
             <a:avLst/>
@@ -9342,7 +9186,7 @@
         <p:spPr>
           <a:xfrm>
             <a:off x="4542120" y="1594080"/>
-            <a:ext cx="200160" cy="177840"/>
+            <a:ext cx="199800" cy="177480"/>
           </a:xfrm>
           <a:custGeom>
             <a:avLst/>
@@ -9494,7 +9338,7 @@
         <p:spPr>
           <a:xfrm>
             <a:off x="4962960" y="1558440"/>
-            <a:ext cx="2431080" cy="249120"/>
+            <a:ext cx="2430720" cy="248760"/>
           </a:xfrm>
           <a:prstGeom prst="rect">
             <a:avLst/>
@@ -9546,7 +9390,7 @@
         <p:spPr>
           <a:xfrm>
             <a:off x="4428720" y="2003760"/>
-            <a:ext cx="3401640" cy="694440"/>
+            <a:ext cx="3401280" cy="694080"/>
           </a:xfrm>
           <a:prstGeom prst="rect">
             <a:avLst/>
@@ -9608,7 +9452,7 @@
         <p:spPr>
           <a:xfrm>
             <a:off x="4428720" y="2805480"/>
-            <a:ext cx="3401640" cy="694440"/>
+            <a:ext cx="3401280" cy="694080"/>
           </a:xfrm>
           <a:prstGeom prst="rect">
             <a:avLst/>
@@ -9670,7 +9514,7 @@
         <p:spPr>
           <a:xfrm>
             <a:off x="8131680" y="1287000"/>
-            <a:ext cx="3695400" cy="2626920"/>
+            <a:ext cx="3695040" cy="2626560"/>
           </a:xfrm>
           <a:custGeom>
             <a:avLst/>
@@ -9724,7 +9568,7 @@
         <p:spPr>
           <a:xfrm>
             <a:off x="8314200" y="1469520"/>
-            <a:ext cx="426960" cy="426960"/>
+            <a:ext cx="426600" cy="426600"/>
           </a:xfrm>
           <a:custGeom>
             <a:avLst/>
@@ -9775,7 +9619,7 @@
         <p:spPr>
           <a:xfrm>
             <a:off x="8439120" y="1594080"/>
-            <a:ext cx="177840" cy="177840"/>
+            <a:ext cx="177480" cy="177480"/>
           </a:xfrm>
           <a:custGeom>
             <a:avLst/>
@@ -9875,7 +9719,7 @@
         <p:spPr>
           <a:xfrm>
             <a:off x="8848800" y="1558440"/>
-            <a:ext cx="2039040" cy="249120"/>
+            <a:ext cx="2038680" cy="248760"/>
           </a:xfrm>
           <a:prstGeom prst="rect">
             <a:avLst/>
@@ -9927,7 +9771,7 @@
         <p:spPr>
           <a:xfrm>
             <a:off x="8314200" y="2003760"/>
-            <a:ext cx="3401640" cy="694440"/>
+            <a:ext cx="3401280" cy="694080"/>
           </a:xfrm>
           <a:prstGeom prst="rect">
             <a:avLst/>
@@ -9989,7 +9833,7 @@
         <p:spPr>
           <a:xfrm>
             <a:off x="8314200" y="2805480"/>
-            <a:ext cx="3401640" cy="694440"/>
+            <a:ext cx="3401280" cy="694080"/>
           </a:xfrm>
           <a:prstGeom prst="rect">
             <a:avLst/>
@@ -10051,7 +9895,7 @@
         <p:spPr>
           <a:xfrm>
             <a:off x="360720" y="4101120"/>
-            <a:ext cx="3695400" cy="2395440"/>
+            <a:ext cx="3695040" cy="2395080"/>
           </a:xfrm>
           <a:custGeom>
             <a:avLst/>
@@ -10105,7 +9949,7 @@
         <p:spPr>
           <a:xfrm>
             <a:off x="543240" y="4283640"/>
-            <a:ext cx="426960" cy="426960"/>
+            <a:ext cx="426600" cy="426600"/>
           </a:xfrm>
           <a:custGeom>
             <a:avLst/>
@@ -10156,7 +10000,7 @@
         <p:spPr>
           <a:xfrm>
             <a:off x="645840" y="4408200"/>
-            <a:ext cx="222120" cy="177840"/>
+            <a:ext cx="221760" cy="177480"/>
           </a:xfrm>
           <a:custGeom>
             <a:avLst/>
@@ -10388,7 +10232,7 @@
         <p:spPr>
           <a:xfrm>
             <a:off x="1077480" y="4372560"/>
-            <a:ext cx="1932120" cy="249120"/>
+            <a:ext cx="1931760" cy="248760"/>
           </a:xfrm>
           <a:prstGeom prst="rect">
             <a:avLst/>
@@ -10440,7 +10284,7 @@
         <p:spPr>
           <a:xfrm>
             <a:off x="543240" y="4817880"/>
-            <a:ext cx="3401640" cy="694440"/>
+            <a:ext cx="3401280" cy="694080"/>
           </a:xfrm>
           <a:prstGeom prst="rect">
             <a:avLst/>
@@ -10502,7 +10346,7 @@
         <p:spPr>
           <a:xfrm>
             <a:off x="543240" y="5619600"/>
-            <a:ext cx="3401640" cy="694440"/>
+            <a:ext cx="3401280" cy="694080"/>
           </a:xfrm>
           <a:prstGeom prst="rect">
             <a:avLst/>
@@ -10564,7 +10408,7 @@
         <p:spPr>
           <a:xfrm>
             <a:off x="4246200" y="4101120"/>
-            <a:ext cx="7587360" cy="2395440"/>
+            <a:ext cx="7587000" cy="2395080"/>
           </a:xfrm>
           <a:custGeom>
             <a:avLst/>
@@ -10618,7 +10462,7 @@
         <p:spPr>
           <a:xfrm>
             <a:off x="4428720" y="4283640"/>
-            <a:ext cx="426960" cy="426960"/>
+            <a:ext cx="426600" cy="426600"/>
           </a:xfrm>
           <a:custGeom>
             <a:avLst/>
@@ -10669,7 +10513,7 @@
         <p:spPr>
           <a:xfrm>
             <a:off x="4553280" y="4408200"/>
-            <a:ext cx="177840" cy="177840"/>
+            <a:ext cx="177480" cy="177480"/>
           </a:xfrm>
           <a:custGeom>
             <a:avLst/>
@@ -10802,7 +10646,7 @@
         <p:spPr>
           <a:xfrm>
             <a:off x="4962960" y="4372560"/>
-            <a:ext cx="2048040" cy="249120"/>
+            <a:ext cx="2047680" cy="248760"/>
           </a:xfrm>
           <a:prstGeom prst="rect">
             <a:avLst/>
@@ -10854,7 +10698,7 @@
         <p:spPr>
           <a:xfrm>
             <a:off x="4428720" y="4817880"/>
-            <a:ext cx="3606480" cy="694440"/>
+            <a:ext cx="3606120" cy="694080"/>
           </a:xfrm>
           <a:prstGeom prst="rect">
             <a:avLst/>
@@ -10916,7 +10760,7 @@
         <p:spPr>
           <a:xfrm>
             <a:off x="4428720" y="5583960"/>
-            <a:ext cx="3606480" cy="462600"/>
+            <a:ext cx="3606120" cy="462240"/>
           </a:xfrm>
           <a:prstGeom prst="rect">
             <a:avLst/>
@@ -10968,7 +10812,7 @@
         <p:spPr>
           <a:xfrm>
             <a:off x="8109360" y="4817880"/>
-            <a:ext cx="3606480" cy="694440"/>
+            <a:ext cx="3606120" cy="694080"/>
           </a:xfrm>
           <a:prstGeom prst="rect">
             <a:avLst/>
@@ -11030,7 +10874,7 @@
         <p:spPr>
           <a:xfrm>
             <a:off x="8109360" y="5583960"/>
-            <a:ext cx="3606480" cy="462600"/>
+            <a:ext cx="3606120" cy="462240"/>
           </a:xfrm>
           <a:prstGeom prst="rect">
             <a:avLst/>
@@ -11119,7 +10963,7 @@
         <p:spPr>
           <a:xfrm>
             <a:off x="609480" y="2066760"/>
-            <a:ext cx="12191760" cy="1218960"/>
+            <a:ext cx="12191400" cy="1218600"/>
           </a:xfrm>
           <a:prstGeom prst="rect">
             <a:avLst/>
@@ -11173,7 +11017,7 @@
         <p:spPr>
           <a:xfrm>
             <a:off x="609480" y="3438360"/>
-            <a:ext cx="11867760" cy="571320"/>
+            <a:ext cx="11867400" cy="570960"/>
           </a:xfrm>
           <a:prstGeom prst="rect">
             <a:avLst/>
@@ -11225,7 +11069,7 @@
         <p:spPr>
           <a:xfrm>
             <a:off x="609480" y="4238640"/>
-            <a:ext cx="1218960" cy="18720"/>
+            <a:ext cx="1218600" cy="18360"/>
           </a:xfrm>
           <a:custGeom>
             <a:avLst/>
@@ -11276,7 +11120,7 @@
         <p:spPr>
           <a:xfrm>
             <a:off x="609480" y="4486320"/>
-            <a:ext cx="11696400" cy="304560"/>
+            <a:ext cx="11696040" cy="304200"/>
           </a:xfrm>
           <a:prstGeom prst="rect">
             <a:avLst/>
@@ -11365,7 +11209,7 @@
         <p:spPr>
           <a:xfrm>
             <a:off x="380880" y="380880"/>
-            <a:ext cx="11505960" cy="228240"/>
+            <a:ext cx="11505600" cy="227880"/>
           </a:xfrm>
           <a:prstGeom prst="rect">
             <a:avLst/>
@@ -11393,7 +11237,7 @@
               <a:buNone/>
             </a:pPr>
             <a:r>
-              <a:rPr b="1" lang="en-US" sz="1200" spc="58" strike="noStrike">
+              <a:rPr b="1" lang="en-US" sz="1200" spc="55" strike="noStrike">
                 <a:solidFill>
                   <a:srgbClr val="0984e3"/>
                 </a:solidFill>
@@ -11417,7 +11261,7 @@
         <p:spPr>
           <a:xfrm>
             <a:off x="380880" y="685800"/>
-            <a:ext cx="11658240" cy="456840"/>
+            <a:ext cx="11657880" cy="456480"/>
           </a:xfrm>
           <a:prstGeom prst="rect">
             <a:avLst/>
@@ -11469,7 +11313,7 @@
         <p:spPr>
           <a:xfrm>
             <a:off x="380880" y="1295280"/>
-            <a:ext cx="5657400" cy="1238040"/>
+            <a:ext cx="5657040" cy="1237680"/>
           </a:xfrm>
           <a:prstGeom prst="rect">
             <a:avLst/>
@@ -11531,7 +11375,7 @@
         <p:spPr>
           <a:xfrm>
             <a:off x="380880" y="2647800"/>
-            <a:ext cx="5638320" cy="742680"/>
+            <a:ext cx="5637960" cy="742320"/>
           </a:xfrm>
           <a:prstGeom prst="rect">
             <a:avLst/>
@@ -11583,7 +11427,7 @@
         <p:spPr>
           <a:xfrm>
             <a:off x="385920" y="3548160"/>
-            <a:ext cx="5552640" cy="2028600"/>
+            <a:ext cx="5552280" cy="2028240"/>
           </a:xfrm>
           <a:custGeom>
             <a:avLst/>
@@ -11637,7 +11481,7 @@
         <p:spPr>
           <a:xfrm>
             <a:off x="495360" y="3705120"/>
-            <a:ext cx="5333760" cy="266400"/>
+            <a:ext cx="5333400" cy="266040"/>
           </a:xfrm>
           <a:prstGeom prst="rect">
             <a:avLst/>
@@ -11688,7 +11532,7 @@
         </p:nvGraphicFramePr>
         <p:xfrm>
           <a:off x="542880" y="4086360"/>
-          <a:ext cx="5238360" cy="1066320"/>
+          <a:ext cx="5238000" cy="1065960"/>
         </p:xfrm>
         <a:graphic>
           <a:graphicData uri="http://schemas.openxmlformats.org/drawingml/2006/table">
@@ -11729,7 +11573,7 @@
                 </a:tc>
                 <a:tc>
                   <a:txBody>
-                    <a:bodyPr lIns="75960" rIns="75960" tIns="75960" bIns="75960" anchor="ctr">
+                    <a:bodyPr lIns="75960" rIns="75960" anchor="ctr">
                       <a:noAutofit/>
                     </a:bodyPr>
                     <a:p>
@@ -11782,7 +11626,7 @@
                 </a:tc>
                 <a:tc>
                   <a:txBody>
-                    <a:bodyPr lIns="75960" rIns="75960" tIns="75960" bIns="75960" anchor="ctr">
+                    <a:bodyPr lIns="75960" rIns="75960" anchor="ctr">
                       <a:noAutofit/>
                     </a:bodyPr>
                     <a:p>
@@ -11837,7 +11681,7 @@
               <a:tr h="355320">
                 <a:tc>
                   <a:txBody>
-                    <a:bodyPr lIns="75960" rIns="75960" tIns="75960" bIns="75960" anchor="ctr">
+                    <a:bodyPr lIns="75960" rIns="75960" anchor="ctr">
                       <a:noAutofit/>
                     </a:bodyPr>
                     <a:p>
@@ -11890,7 +11734,7 @@
                 </a:tc>
                 <a:tc>
                   <a:txBody>
-                    <a:bodyPr lIns="75960" rIns="75960" tIns="75960" bIns="75960" anchor="ctr">
+                    <a:bodyPr lIns="75960" rIns="75960" anchor="ctr">
                       <a:noAutofit/>
                     </a:bodyPr>
                     <a:p>
@@ -11941,7 +11785,7 @@
                 </a:tc>
                 <a:tc>
                   <a:txBody>
-                    <a:bodyPr lIns="75960" rIns="75960" tIns="75960" bIns="75960" anchor="ctr">
+                    <a:bodyPr lIns="75960" rIns="75960" anchor="ctr">
                       <a:noAutofit/>
                     </a:bodyPr>
                     <a:p>
@@ -11994,7 +11838,7 @@
               <a:tr h="355680">
                 <a:tc>
                   <a:txBody>
-                    <a:bodyPr lIns="75960" rIns="75960" tIns="75960" bIns="75960" anchor="ctr">
+                    <a:bodyPr lIns="75960" rIns="75960" anchor="ctr">
                       <a:noAutofit/>
                     </a:bodyPr>
                     <a:p>
@@ -12047,7 +11891,7 @@
                 </a:tc>
                 <a:tc>
                   <a:txBody>
-                    <a:bodyPr lIns="75960" rIns="75960" tIns="75960" bIns="75960" anchor="ctr">
+                    <a:bodyPr lIns="75960" rIns="75960" anchor="ctr">
                       <a:noAutofit/>
                     </a:bodyPr>
                     <a:p>
@@ -12098,7 +11942,7 @@
                 </a:tc>
                 <a:tc>
                   <a:txBody>
-                    <a:bodyPr lIns="75960" rIns="75960" tIns="75960" bIns="75960" anchor="ctr">
+                    <a:bodyPr lIns="75960" rIns="75960" anchor="ctr">
                       <a:noAutofit/>
                     </a:bodyPr>
                     <a:p>
@@ -12163,7 +12007,7 @@
         <p:spPr>
           <a:xfrm>
             <a:off x="509760" y="5229360"/>
-            <a:ext cx="5304960" cy="190080"/>
+            <a:ext cx="5304600" cy="189720"/>
           </a:xfrm>
           <a:prstGeom prst="rect">
             <a:avLst/>
@@ -12215,7 +12059,7 @@
         <p:spPr>
           <a:xfrm>
             <a:off x="6253200" y="1300320"/>
-            <a:ext cx="5552640" cy="1609200"/>
+            <a:ext cx="5552280" cy="1608840"/>
           </a:xfrm>
           <a:custGeom>
             <a:avLst/>
@@ -12269,7 +12113,7 @@
         <p:spPr>
           <a:xfrm>
             <a:off x="6448320" y="1495440"/>
-            <a:ext cx="5257440" cy="266400"/>
+            <a:ext cx="5257080" cy="266040"/>
           </a:xfrm>
           <a:prstGeom prst="rect">
             <a:avLst/>
@@ -12321,7 +12165,7 @@
         <p:spPr>
           <a:xfrm>
             <a:off x="6448320" y="1876320"/>
-            <a:ext cx="5238360" cy="228240"/>
+            <a:ext cx="5238000" cy="227880"/>
           </a:xfrm>
           <a:prstGeom prst="rect">
             <a:avLst/>
@@ -12383,7 +12227,7 @@
         <p:spPr>
           <a:xfrm>
             <a:off x="6448320" y="2181240"/>
-            <a:ext cx="5238360" cy="228240"/>
+            <a:ext cx="5238000" cy="227880"/>
           </a:xfrm>
           <a:prstGeom prst="rect">
             <a:avLst/>
@@ -12445,7 +12289,7 @@
         <p:spPr>
           <a:xfrm>
             <a:off x="6448320" y="2486160"/>
-            <a:ext cx="5238360" cy="228240"/>
+            <a:ext cx="5238000" cy="227880"/>
           </a:xfrm>
           <a:prstGeom prst="rect">
             <a:avLst/>
@@ -12497,7 +12341,7 @@
         <p:spPr>
           <a:xfrm>
             <a:off x="6267600" y="3067200"/>
-            <a:ext cx="5543280" cy="2133360"/>
+            <a:ext cx="5542920" cy="2133000"/>
           </a:xfrm>
           <a:custGeom>
             <a:avLst/>
@@ -12548,7 +12392,7 @@
         <p:spPr>
           <a:xfrm>
             <a:off x="6267600" y="3067200"/>
-            <a:ext cx="37800" cy="2133360"/>
+            <a:ext cx="37440" cy="2133000"/>
           </a:xfrm>
           <a:custGeom>
             <a:avLst/>
@@ -12599,7 +12443,7 @@
         <p:spPr>
           <a:xfrm>
             <a:off x="6477120" y="3257640"/>
-            <a:ext cx="5238360" cy="266400"/>
+            <a:ext cx="5238000" cy="266040"/>
           </a:xfrm>
           <a:prstGeom prst="rect">
             <a:avLst/>
@@ -12651,7 +12495,7 @@
         <p:spPr>
           <a:xfrm>
             <a:off x="6496200" y="3672000"/>
-            <a:ext cx="151920" cy="151920"/>
+            <a:ext cx="151560" cy="151560"/>
           </a:xfrm>
           <a:custGeom>
             <a:avLst/>
@@ -12775,7 +12619,7 @@
         <p:spPr>
           <a:xfrm>
             <a:off x="6724800" y="3638520"/>
-            <a:ext cx="4971600" cy="456840"/>
+            <a:ext cx="4971240" cy="456480"/>
           </a:xfrm>
           <a:prstGeom prst="rect">
             <a:avLst/>
@@ -12837,7 +12681,7 @@
         <p:spPr>
           <a:xfrm>
             <a:off x="6496200" y="4205160"/>
-            <a:ext cx="151920" cy="151920"/>
+            <a:ext cx="151560" cy="151560"/>
           </a:xfrm>
           <a:custGeom>
             <a:avLst/>
@@ -12960,7 +12804,7 @@
         <p:spPr>
           <a:xfrm>
             <a:off x="6724800" y="4172040"/>
-            <a:ext cx="4971600" cy="228240"/>
+            <a:ext cx="4971240" cy="227880"/>
           </a:xfrm>
           <a:prstGeom prst="rect">
             <a:avLst/>
@@ -13022,7 +12866,7 @@
         <p:spPr>
           <a:xfrm>
             <a:off x="6515280" y="4510080"/>
-            <a:ext cx="114120" cy="151920"/>
+            <a:ext cx="113760" cy="151560"/>
           </a:xfrm>
           <a:custGeom>
             <a:avLst/>
@@ -13263,7 +13107,7 @@
         <p:spPr>
           <a:xfrm>
             <a:off x="6724800" y="4476600"/>
-            <a:ext cx="4971600" cy="228240"/>
+            <a:ext cx="4971240" cy="227880"/>
           </a:xfrm>
           <a:prstGeom prst="rect">
             <a:avLst/>
@@ -13325,7 +13169,7 @@
         <p:spPr>
           <a:xfrm>
             <a:off x="6486480" y="4815000"/>
-            <a:ext cx="171000" cy="151920"/>
+            <a:ext cx="170640" cy="151560"/>
           </a:xfrm>
           <a:custGeom>
             <a:avLst/>
@@ -13561,7 +13405,7 @@
         <p:spPr>
           <a:xfrm>
             <a:off x="6724800" y="4781520"/>
-            <a:ext cx="4971600" cy="228240"/>
+            <a:ext cx="4971240" cy="227880"/>
           </a:xfrm>
           <a:prstGeom prst="rect">
             <a:avLst/>
@@ -13660,7 +13504,7 @@
         <p:spPr>
           <a:xfrm>
             <a:off x="358560" y="358560"/>
-            <a:ext cx="11546280" cy="214920"/>
+            <a:ext cx="11545920" cy="214560"/>
           </a:xfrm>
           <a:prstGeom prst="rect">
             <a:avLst/>
@@ -13688,7 +13532,7 @@
               <a:buNone/>
             </a:pPr>
             <a:r>
-              <a:rPr b="1" lang="en-US" sz="1130" spc="55" strike="noStrike">
+              <a:rPr b="1" lang="en-US" sz="1130" spc="52" strike="noStrike">
                 <a:solidFill>
                   <a:srgbClr val="0984e3"/>
                 </a:solidFill>
@@ -13712,7 +13556,7 @@
         <p:spPr>
           <a:xfrm>
             <a:off x="358560" y="645480"/>
-            <a:ext cx="11689560" cy="429840"/>
+            <a:ext cx="11689200" cy="429480"/>
           </a:xfrm>
           <a:prstGeom prst="rect">
             <a:avLst/>
@@ -13764,7 +13608,7 @@
         <p:spPr>
           <a:xfrm>
             <a:off x="358560" y="1290960"/>
-            <a:ext cx="5701320" cy="286560"/>
+            <a:ext cx="5700960" cy="286200"/>
           </a:xfrm>
           <a:prstGeom prst="rect">
             <a:avLst/>
@@ -13816,7 +13660,7 @@
         <p:spPr>
           <a:xfrm>
             <a:off x="358560" y="1725840"/>
-            <a:ext cx="5474160" cy="441000"/>
+            <a:ext cx="5473800" cy="440640"/>
           </a:xfrm>
           <a:prstGeom prst="rect">
             <a:avLst/>
@@ -13868,7 +13712,7 @@
         <p:spPr>
           <a:xfrm>
             <a:off x="358560" y="2317320"/>
-            <a:ext cx="5665320" cy="465840"/>
+            <a:ext cx="5664960" cy="465480"/>
           </a:xfrm>
           <a:prstGeom prst="rect">
             <a:avLst/>
@@ -13920,7 +13764,7 @@
         <p:spPr>
           <a:xfrm>
             <a:off x="363240" y="2931480"/>
-            <a:ext cx="5584680" cy="1873440"/>
+            <a:ext cx="5584320" cy="1873080"/>
           </a:xfrm>
           <a:custGeom>
             <a:avLst/>
@@ -13974,7 +13818,7 @@
         <p:spPr>
           <a:xfrm>
             <a:off x="470520" y="3079440"/>
-            <a:ext cx="5369400" cy="250560"/>
+            <a:ext cx="5369040" cy="250200"/>
           </a:xfrm>
           <a:prstGeom prst="rect">
             <a:avLst/>
@@ -14025,7 +13869,7 @@
         </p:nvGraphicFramePr>
         <p:xfrm>
           <a:off x="510840" y="3402000"/>
-          <a:ext cx="5288760" cy="1003680"/>
+          <a:ext cx="5288400" cy="1003320"/>
         </p:xfrm>
         <a:graphic>
           <a:graphicData uri="http://schemas.openxmlformats.org/drawingml/2006/table">
@@ -14066,7 +13910,7 @@
                 </a:tc>
                 <a:tc>
                   <a:txBody>
-                    <a:bodyPr lIns="71640" rIns="71640" tIns="71640" bIns="71640" anchor="ctr">
+                    <a:bodyPr lIns="71640" rIns="71640" anchor="ctr">
                       <a:noAutofit/>
                     </a:bodyPr>
                     <a:p>
@@ -14119,7 +13963,7 @@
                 </a:tc>
                 <a:tc>
                   <a:txBody>
-                    <a:bodyPr lIns="71640" rIns="71640" tIns="71640" bIns="71640" anchor="ctr">
+                    <a:bodyPr lIns="71640" rIns="71640" anchor="ctr">
                       <a:noAutofit/>
                     </a:bodyPr>
                     <a:p>
@@ -14174,7 +14018,7 @@
               <a:tr h="334440">
                 <a:tc>
                   <a:txBody>
-                    <a:bodyPr lIns="71640" rIns="71640" tIns="71640" bIns="71640" anchor="ctr">
+                    <a:bodyPr lIns="71640" rIns="71640" anchor="ctr">
                       <a:noAutofit/>
                     </a:bodyPr>
                     <a:p>
@@ -14227,7 +14071,7 @@
                 </a:tc>
                 <a:tc>
                   <a:txBody>
-                    <a:bodyPr lIns="71640" rIns="71640" tIns="71640" bIns="71640" anchor="ctr">
+                    <a:bodyPr lIns="71640" rIns="71640" anchor="ctr">
                       <a:noAutofit/>
                     </a:bodyPr>
                     <a:p>
@@ -14280,7 +14124,7 @@
                 </a:tc>
                 <a:tc>
                   <a:txBody>
-                    <a:bodyPr lIns="71640" rIns="71640" tIns="71640" bIns="71640" anchor="ctr">
+                    <a:bodyPr lIns="71640" rIns="71640" anchor="ctr">
                       <a:noAutofit/>
                     </a:bodyPr>
                     <a:p>
@@ -14333,7 +14177,7 @@
               <a:tr h="334800">
                 <a:tc>
                   <a:txBody>
-                    <a:bodyPr lIns="71640" rIns="71640" tIns="71640" bIns="71640" anchor="ctr">
+                    <a:bodyPr lIns="71640" rIns="71640" anchor="ctr">
                       <a:noAutofit/>
                     </a:bodyPr>
                     <a:p>
@@ -14386,7 +14230,7 @@
                 </a:tc>
                 <a:tc>
                   <a:txBody>
-                    <a:bodyPr lIns="71640" rIns="71640" tIns="71640" bIns="71640" anchor="ctr">
+                    <a:bodyPr lIns="71640" rIns="71640" anchor="ctr">
                       <a:noAutofit/>
                     </a:bodyPr>
                     <a:p>
@@ -14437,7 +14281,7 @@
                 </a:tc>
                 <a:tc>
                   <a:txBody>
-                    <a:bodyPr lIns="71640" rIns="71640" tIns="71640" bIns="71640" anchor="ctr">
+                    <a:bodyPr lIns="71640" rIns="71640" anchor="ctr">
                       <a:noAutofit/>
                     </a:bodyPr>
                     <a:p>
@@ -14502,7 +14346,7 @@
         <p:spPr>
           <a:xfrm>
             <a:off x="479520" y="4478040"/>
-            <a:ext cx="5351400" cy="178920"/>
+            <a:ext cx="5351040" cy="178560"/>
           </a:xfrm>
           <a:prstGeom prst="rect">
             <a:avLst/>
@@ -14554,7 +14398,7 @@
         <p:spPr>
           <a:xfrm>
             <a:off x="376560" y="4952880"/>
-            <a:ext cx="5575680" cy="752760"/>
+            <a:ext cx="5575320" cy="752400"/>
           </a:xfrm>
           <a:custGeom>
             <a:avLst/>
@@ -14605,7 +14449,7 @@
         <p:spPr>
           <a:xfrm>
             <a:off x="376560" y="4952880"/>
-            <a:ext cx="35640" cy="752760"/>
+            <a:ext cx="35280" cy="752400"/>
           </a:xfrm>
           <a:custGeom>
             <a:avLst/>
@@ -14656,7 +14500,7 @@
         <p:spPr>
           <a:xfrm>
             <a:off x="537840" y="5096520"/>
-            <a:ext cx="5342760" cy="465840"/>
+            <a:ext cx="5342400" cy="465480"/>
           </a:xfrm>
           <a:prstGeom prst="rect">
             <a:avLst/>
@@ -14718,7 +14562,7 @@
         <p:spPr>
           <a:xfrm>
             <a:off x="6239520" y="1290960"/>
-            <a:ext cx="5701320" cy="286560"/>
+            <a:ext cx="5700960" cy="286200"/>
           </a:xfrm>
           <a:prstGeom prst="rect">
             <a:avLst/>
@@ -14770,7 +14614,7 @@
         <p:spPr>
           <a:xfrm>
             <a:off x="6239520" y="1685520"/>
-            <a:ext cx="5674320" cy="528480"/>
+            <a:ext cx="5673960" cy="528120"/>
           </a:xfrm>
           <a:prstGeom prst="rect">
             <a:avLst/>
@@ -14832,7 +14676,7 @@
         <p:spPr>
           <a:xfrm>
             <a:off x="6239520" y="2317320"/>
-            <a:ext cx="5665320" cy="698760"/>
+            <a:ext cx="5664960" cy="698400"/>
           </a:xfrm>
           <a:prstGeom prst="rect">
             <a:avLst/>
@@ -14884,7 +14728,7 @@
         <p:spPr>
           <a:xfrm>
             <a:off x="6243840" y="3164400"/>
-            <a:ext cx="5584680" cy="1873440"/>
+            <a:ext cx="5584320" cy="1873080"/>
           </a:xfrm>
           <a:custGeom>
             <a:avLst/>
@@ -14938,7 +14782,7 @@
         <p:spPr>
           <a:xfrm>
             <a:off x="6351480" y="3312360"/>
-            <a:ext cx="5369400" cy="250560"/>
+            <a:ext cx="5369040" cy="250200"/>
           </a:xfrm>
           <a:prstGeom prst="rect">
             <a:avLst/>
@@ -14989,7 +14833,7 @@
         </p:nvGraphicFramePr>
         <p:xfrm>
           <a:off x="6391800" y="3635280"/>
-          <a:ext cx="5288760" cy="1003680"/>
+          <a:ext cx="5288400" cy="1003320"/>
         </p:xfrm>
         <a:graphic>
           <a:graphicData uri="http://schemas.openxmlformats.org/drawingml/2006/table">
@@ -15030,7 +14874,7 @@
                 </a:tc>
                 <a:tc>
                   <a:txBody>
-                    <a:bodyPr lIns="71640" rIns="71640" tIns="71640" bIns="71640" anchor="ctr">
+                    <a:bodyPr lIns="71640" rIns="71640" anchor="ctr">
                       <a:noAutofit/>
                     </a:bodyPr>
                     <a:p>
@@ -15083,7 +14927,7 @@
                 </a:tc>
                 <a:tc>
                   <a:txBody>
-                    <a:bodyPr lIns="71640" rIns="71640" tIns="71640" bIns="71640" anchor="ctr">
+                    <a:bodyPr lIns="71640" rIns="71640" anchor="ctr">
                       <a:noAutofit/>
                     </a:bodyPr>
                     <a:p>
@@ -15138,7 +14982,7 @@
               <a:tr h="334440">
                 <a:tc>
                   <a:txBody>
-                    <a:bodyPr lIns="71640" rIns="71640" tIns="71640" bIns="71640" anchor="ctr">
+                    <a:bodyPr lIns="71640" rIns="71640" anchor="ctr">
                       <a:noAutofit/>
                     </a:bodyPr>
                     <a:p>
@@ -15191,7 +15035,7 @@
                 </a:tc>
                 <a:tc>
                   <a:txBody>
-                    <a:bodyPr lIns="71640" rIns="71640" tIns="71640" bIns="71640" anchor="ctr">
+                    <a:bodyPr lIns="71640" rIns="71640" anchor="ctr">
                       <a:noAutofit/>
                     </a:bodyPr>
                     <a:p>
@@ -15242,7 +15086,7 @@
                 </a:tc>
                 <a:tc>
                   <a:txBody>
-                    <a:bodyPr lIns="71640" rIns="71640" tIns="71640" bIns="71640" anchor="ctr">
+                    <a:bodyPr lIns="71640" rIns="71640" anchor="ctr">
                       <a:noAutofit/>
                     </a:bodyPr>
                     <a:p>
@@ -15295,7 +15139,7 @@
               <a:tr h="334800">
                 <a:tc>
                   <a:txBody>
-                    <a:bodyPr lIns="71640" rIns="71640" tIns="71640" bIns="71640" anchor="ctr">
+                    <a:bodyPr lIns="71640" rIns="71640" anchor="ctr">
                       <a:noAutofit/>
                     </a:bodyPr>
                     <a:p>
@@ -15348,7 +15192,7 @@
                 </a:tc>
                 <a:tc>
                   <a:txBody>
-                    <a:bodyPr lIns="71640" rIns="71640" tIns="71640" bIns="71640" anchor="ctr">
+                    <a:bodyPr lIns="71640" rIns="71640" anchor="ctr">
                       <a:noAutofit/>
                     </a:bodyPr>
                     <a:p>
@@ -15399,7 +15243,7 @@
                 </a:tc>
                 <a:tc>
                   <a:txBody>
-                    <a:bodyPr lIns="71640" rIns="71640" tIns="71640" bIns="71640" anchor="ctr">
+                    <a:bodyPr lIns="71640" rIns="71640" anchor="ctr">
                       <a:noAutofit/>
                     </a:bodyPr>
                     <a:p>
@@ -15464,7 +15308,7 @@
         <p:spPr>
           <a:xfrm>
             <a:off x="6360480" y="4710960"/>
-            <a:ext cx="5351400" cy="178920"/>
+            <a:ext cx="5351040" cy="178560"/>
           </a:xfrm>
           <a:prstGeom prst="rect">
             <a:avLst/>
@@ -15516,7 +15360,7 @@
         <p:spPr>
           <a:xfrm>
             <a:off x="6239520" y="5186160"/>
-            <a:ext cx="5593680" cy="1308600"/>
+            <a:ext cx="5593320" cy="1308240"/>
           </a:xfrm>
           <a:custGeom>
             <a:avLst/>
@@ -15567,7 +15411,7 @@
         <p:spPr>
           <a:xfrm>
             <a:off x="6382800" y="5329440"/>
-            <a:ext cx="5387400" cy="250560"/>
+            <a:ext cx="5387040" cy="250200"/>
           </a:xfrm>
           <a:prstGeom prst="rect">
             <a:avLst/>
@@ -15619,7 +15463,7 @@
         <p:spPr>
           <a:xfrm>
             <a:off x="6382800" y="5652360"/>
-            <a:ext cx="5378400" cy="698760"/>
+            <a:ext cx="5378040" cy="698400"/>
           </a:xfrm>
           <a:prstGeom prst="rect">
             <a:avLst/>
@@ -15708,7 +15552,7 @@
         <p:spPr>
           <a:xfrm>
             <a:off x="609480" y="1781280"/>
-            <a:ext cx="12191760" cy="1218960"/>
+            <a:ext cx="12191400" cy="1218600"/>
           </a:xfrm>
           <a:prstGeom prst="rect">
             <a:avLst/>
@@ -15762,7 +15606,7 @@
         <p:spPr>
           <a:xfrm>
             <a:off x="609480" y="3152880"/>
-            <a:ext cx="11867760" cy="1142640"/>
+            <a:ext cx="11867400" cy="1142280"/>
           </a:xfrm>
           <a:prstGeom prst="rect">
             <a:avLst/>
@@ -15835,7 +15679,7 @@
         <p:spPr>
           <a:xfrm>
             <a:off x="609480" y="4524480"/>
-            <a:ext cx="1218960" cy="18720"/>
+            <a:ext cx="1218600" cy="18360"/>
           </a:xfrm>
           <a:custGeom>
             <a:avLst/>
@@ -15886,7 +15730,7 @@
         <p:spPr>
           <a:xfrm>
             <a:off x="609480" y="4772160"/>
-            <a:ext cx="11696400" cy="304560"/>
+            <a:ext cx="11696040" cy="304200"/>
           </a:xfrm>
           <a:prstGeom prst="rect">
             <a:avLst/>
@@ -15975,7 +15819,7 @@
         <p:spPr>
           <a:xfrm>
             <a:off x="380880" y="380880"/>
-            <a:ext cx="11505960" cy="228240"/>
+            <a:ext cx="11505600" cy="227880"/>
           </a:xfrm>
           <a:prstGeom prst="rect">
             <a:avLst/>
@@ -16003,7 +15847,7 @@
               <a:buNone/>
             </a:pPr>
             <a:r>
-              <a:rPr b="1" lang="en-US" sz="1200" spc="58" strike="noStrike">
+              <a:rPr b="1" lang="en-US" sz="1200" spc="55" strike="noStrike">
                 <a:solidFill>
                   <a:srgbClr val="0984e3"/>
                 </a:solidFill>
@@ -16027,7 +15871,7 @@
         <p:spPr>
           <a:xfrm>
             <a:off x="380880" y="685800"/>
-            <a:ext cx="11658240" cy="456840"/>
+            <a:ext cx="11657880" cy="456480"/>
           </a:xfrm>
           <a:prstGeom prst="rect">
             <a:avLst/>
@@ -16079,7 +15923,7 @@
         <p:spPr>
           <a:xfrm>
             <a:off x="380880" y="1295280"/>
-            <a:ext cx="7648200" cy="933120"/>
+            <a:ext cx="7647840" cy="932760"/>
           </a:xfrm>
           <a:prstGeom prst="rect">
             <a:avLst/>
@@ -16141,7 +15985,7 @@
         <p:spPr>
           <a:xfrm>
             <a:off x="385920" y="2381400"/>
-            <a:ext cx="3695400" cy="1723680"/>
+            <a:ext cx="3695040" cy="1723320"/>
           </a:xfrm>
           <a:custGeom>
             <a:avLst/>
@@ -16195,7 +16039,7 @@
         <p:spPr>
           <a:xfrm>
             <a:off x="542880" y="2538360"/>
-            <a:ext cx="3476160" cy="266400"/>
+            <a:ext cx="3475800" cy="266040"/>
           </a:xfrm>
           <a:prstGeom prst="rect">
             <a:avLst/>
@@ -16247,7 +16091,7 @@
         <p:spPr>
           <a:xfrm>
             <a:off x="542880" y="2881440"/>
-            <a:ext cx="3457080" cy="495000"/>
+            <a:ext cx="3456720" cy="494640"/>
           </a:xfrm>
           <a:prstGeom prst="rect">
             <a:avLst/>
@@ -16309,7 +16153,7 @@
         <p:spPr>
           <a:xfrm>
             <a:off x="542880" y="3452760"/>
-            <a:ext cx="3457080" cy="495000"/>
+            <a:ext cx="3456720" cy="494640"/>
           </a:xfrm>
           <a:prstGeom prst="rect">
             <a:avLst/>
@@ -16371,7 +16215,7 @@
         <p:spPr>
           <a:xfrm>
             <a:off x="4240080" y="2381400"/>
-            <a:ext cx="3695400" cy="1723680"/>
+            <a:ext cx="3695040" cy="1723320"/>
           </a:xfrm>
           <a:custGeom>
             <a:avLst/>
@@ -16425,7 +16269,7 @@
         <p:spPr>
           <a:xfrm>
             <a:off x="4397400" y="2538360"/>
-            <a:ext cx="3476160" cy="266400"/>
+            <a:ext cx="3475800" cy="266040"/>
           </a:xfrm>
           <a:prstGeom prst="rect">
             <a:avLst/>
@@ -16477,7 +16321,7 @@
         <p:spPr>
           <a:xfrm>
             <a:off x="4397400" y="2881440"/>
-            <a:ext cx="3457080" cy="495000"/>
+            <a:ext cx="3456720" cy="494640"/>
           </a:xfrm>
           <a:prstGeom prst="rect">
             <a:avLst/>
@@ -16539,7 +16383,7 @@
         <p:spPr>
           <a:xfrm>
             <a:off x="4397400" y="3452760"/>
-            <a:ext cx="3457080" cy="495000"/>
+            <a:ext cx="3456720" cy="494640"/>
           </a:xfrm>
           <a:prstGeom prst="rect">
             <a:avLst/>
@@ -16601,7 +16445,7 @@
         <p:spPr>
           <a:xfrm>
             <a:off x="399960" y="4262400"/>
-            <a:ext cx="7534080" cy="1638000"/>
+            <a:ext cx="7533720" cy="1637640"/>
           </a:xfrm>
           <a:custGeom>
             <a:avLst/>
@@ -16652,7 +16496,7 @@
         <p:spPr>
           <a:xfrm>
             <a:off x="399960" y="4262400"/>
-            <a:ext cx="37800" cy="1638000"/>
+            <a:ext cx="37440" cy="1637640"/>
           </a:xfrm>
           <a:custGeom>
             <a:avLst/>
@@ -16703,7 +16547,7 @@
         <p:spPr>
           <a:xfrm>
             <a:off x="571680" y="4414680"/>
-            <a:ext cx="7305480" cy="266400"/>
+            <a:ext cx="7305120" cy="266040"/>
           </a:xfrm>
           <a:prstGeom prst="rect">
             <a:avLst/>
@@ -16755,7 +16599,7 @@
         <p:spPr>
           <a:xfrm>
             <a:off x="619200" y="4791240"/>
-            <a:ext cx="95040" cy="151920"/>
+            <a:ext cx="94680" cy="151560"/>
           </a:xfrm>
           <a:custGeom>
             <a:avLst/>
@@ -16910,7 +16754,7 @@
         <p:spPr>
           <a:xfrm>
             <a:off x="819000" y="4757760"/>
-            <a:ext cx="3362040" cy="456840"/>
+            <a:ext cx="3361680" cy="456480"/>
           </a:xfrm>
           <a:prstGeom prst="rect">
             <a:avLst/>
@@ -16972,7 +16816,7 @@
         <p:spPr>
           <a:xfrm>
             <a:off x="4282920" y="4791240"/>
-            <a:ext cx="132840" cy="151920"/>
+            <a:ext cx="132480" cy="151560"/>
           </a:xfrm>
           <a:custGeom>
             <a:avLst/>
@@ -17104,7 +16948,7 @@
         <p:spPr>
           <a:xfrm>
             <a:off x="4502160" y="4757760"/>
-            <a:ext cx="3362040" cy="456840"/>
+            <a:ext cx="3361680" cy="456480"/>
           </a:xfrm>
           <a:prstGeom prst="rect">
             <a:avLst/>
@@ -17166,7 +17010,7 @@
         <p:spPr>
           <a:xfrm>
             <a:off x="590400" y="5324400"/>
-            <a:ext cx="151920" cy="151920"/>
+            <a:ext cx="151560" cy="151560"/>
           </a:xfrm>
           <a:custGeom>
             <a:avLst/>
@@ -17389,7 +17233,7 @@
         <p:spPr>
           <a:xfrm>
             <a:off x="819000" y="5291280"/>
-            <a:ext cx="3362040" cy="456840"/>
+            <a:ext cx="3361680" cy="456480"/>
           </a:xfrm>
           <a:prstGeom prst="rect">
             <a:avLst/>
@@ -17451,7 +17295,7 @@
         <p:spPr>
           <a:xfrm>
             <a:off x="4263840" y="5324400"/>
-            <a:ext cx="171000" cy="151920"/>
+            <a:ext cx="170640" cy="151560"/>
           </a:xfrm>
           <a:custGeom>
             <a:avLst/>
@@ -17648,7 +17492,7 @@
         <p:spPr>
           <a:xfrm>
             <a:off x="4502160" y="5291280"/>
-            <a:ext cx="3362040" cy="456840"/>
+            <a:ext cx="3361680" cy="456480"/>
           </a:xfrm>
           <a:prstGeom prst="rect">
             <a:avLst/>
@@ -17710,7 +17554,7 @@
         <p:spPr>
           <a:xfrm>
             <a:off x="8132760" y="1300320"/>
-            <a:ext cx="3676320" cy="2638080"/>
+            <a:ext cx="3675960" cy="2637720"/>
           </a:xfrm>
           <a:custGeom>
             <a:avLst/>
@@ -17764,7 +17608,7 @@
         <p:spPr>
           <a:xfrm>
             <a:off x="8242200" y="1457280"/>
-            <a:ext cx="3457080" cy="266400"/>
+            <a:ext cx="3456720" cy="266040"/>
           </a:xfrm>
           <a:prstGeom prst="rect">
             <a:avLst/>
@@ -17816,7 +17660,7 @@
         <p:spPr>
           <a:xfrm>
             <a:off x="8289720" y="1838160"/>
-            <a:ext cx="3362040" cy="1333080"/>
+            <a:ext cx="3361680" cy="1332720"/>
           </a:xfrm>
           <a:prstGeom prst="roundRect">
             <a:avLst>
@@ -17848,7 +17692,7 @@
         <p:spPr>
           <a:xfrm>
             <a:off x="8251920" y="3286080"/>
-            <a:ext cx="3438000" cy="495000"/>
+            <a:ext cx="3437640" cy="494640"/>
           </a:xfrm>
           <a:prstGeom prst="rect">
             <a:avLst/>
@@ -17900,7 +17744,7 @@
         <p:spPr>
           <a:xfrm>
             <a:off x="8128080" y="4095720"/>
-            <a:ext cx="3685680" cy="1638000"/>
+            <a:ext cx="3685320" cy="1637640"/>
           </a:xfrm>
           <a:custGeom>
             <a:avLst/>
@@ -17951,7 +17795,7 @@
         <p:spPr>
           <a:xfrm>
             <a:off x="8280360" y="4248000"/>
-            <a:ext cx="3466800" cy="266400"/>
+            <a:ext cx="3466440" cy="266040"/>
           </a:xfrm>
           <a:prstGeom prst="rect">
             <a:avLst/>
@@ -18003,7 +17847,7 @@
         <p:spPr>
           <a:xfrm>
             <a:off x="8280360" y="4591080"/>
-            <a:ext cx="3457080" cy="990360"/>
+            <a:ext cx="3456720" cy="990000"/>
           </a:xfrm>
           <a:prstGeom prst="rect">
             <a:avLst/>
@@ -18092,7 +17936,7 @@
         <p:spPr>
           <a:xfrm>
             <a:off x="370440" y="370440"/>
-            <a:ext cx="11524680" cy="222120"/>
+            <a:ext cx="11524320" cy="221760"/>
           </a:xfrm>
           <a:prstGeom prst="rect">
             <a:avLst/>
@@ -18120,7 +17964,7 @@
               <a:buNone/>
             </a:pPr>
             <a:r>
-              <a:rPr b="1" lang="en-US" sz="1170" spc="55" strike="noStrike">
+              <a:rPr b="1" lang="en-US" sz="1170" spc="52" strike="noStrike">
                 <a:solidFill>
                   <a:srgbClr val="0984e3"/>
                 </a:solidFill>
@@ -18144,7 +17988,7 @@
         <p:spPr>
           <a:xfrm>
             <a:off x="370440" y="667080"/>
-            <a:ext cx="11673000" cy="444240"/>
+            <a:ext cx="11672640" cy="443880"/>
           </a:xfrm>
           <a:prstGeom prst="rect">
             <a:avLst/>
@@ -18196,7 +18040,7 @@
         <p:spPr>
           <a:xfrm>
             <a:off x="370440" y="1334160"/>
-            <a:ext cx="5669640" cy="1203840"/>
+            <a:ext cx="5669280" cy="1203480"/>
           </a:xfrm>
           <a:prstGeom prst="rect">
             <a:avLst/>
@@ -18258,7 +18102,7 @@
         <p:spPr>
           <a:xfrm>
             <a:off x="375120" y="2691360"/>
-            <a:ext cx="5567400" cy="2158200"/>
+            <a:ext cx="5567040" cy="2157840"/>
           </a:xfrm>
           <a:custGeom>
             <a:avLst/>
@@ -18312,7 +18156,7 @@
         <p:spPr>
           <a:xfrm>
             <a:off x="565200" y="2881080"/>
-            <a:ext cx="5280480" cy="259200"/>
+            <a:ext cx="5280120" cy="258840"/>
           </a:xfrm>
           <a:prstGeom prst="rect">
             <a:avLst/>
@@ -18364,7 +18208,7 @@
         <p:spPr>
           <a:xfrm>
             <a:off x="565200" y="3251880"/>
-            <a:ext cx="5261760" cy="481320"/>
+            <a:ext cx="5261400" cy="480960"/>
           </a:xfrm>
           <a:prstGeom prst="rect">
             <a:avLst/>
@@ -18416,7 +18260,7 @@
         <p:spPr>
           <a:xfrm>
             <a:off x="592920" y="3877200"/>
-            <a:ext cx="129240" cy="147960"/>
+            <a:ext cx="128880" cy="147600"/>
           </a:xfrm>
           <a:custGeom>
             <a:avLst/>
@@ -18497,7 +18341,7 @@
         <p:spPr>
           <a:xfrm>
             <a:off x="804600" y="3844800"/>
-            <a:ext cx="5022360" cy="222120"/>
+            <a:ext cx="5022000" cy="221760"/>
           </a:xfrm>
           <a:prstGeom prst="rect">
             <a:avLst/>
@@ -18549,7 +18393,7 @@
         <p:spPr>
           <a:xfrm>
             <a:off x="592920" y="4173480"/>
-            <a:ext cx="129240" cy="147960"/>
+            <a:ext cx="128880" cy="147600"/>
           </a:xfrm>
           <a:custGeom>
             <a:avLst/>
@@ -18630,7 +18474,7 @@
         <p:spPr>
           <a:xfrm>
             <a:off x="804600" y="4141080"/>
-            <a:ext cx="5022360" cy="222120"/>
+            <a:ext cx="5022000" cy="221760"/>
           </a:xfrm>
           <a:prstGeom prst="rect">
             <a:avLst/>
@@ -18682,7 +18526,7 @@
         <p:spPr>
           <a:xfrm>
             <a:off x="592920" y="4470120"/>
-            <a:ext cx="129240" cy="147960"/>
+            <a:ext cx="128880" cy="147600"/>
           </a:xfrm>
           <a:custGeom>
             <a:avLst/>
@@ -18763,7 +18607,7 @@
         <p:spPr>
           <a:xfrm>
             <a:off x="804600" y="4437720"/>
-            <a:ext cx="5022360" cy="222120"/>
+            <a:ext cx="5022000" cy="221760"/>
           </a:xfrm>
           <a:prstGeom prst="rect">
             <a:avLst/>
@@ -18815,7 +18659,7 @@
         <p:spPr>
           <a:xfrm>
             <a:off x="375120" y="5007600"/>
-            <a:ext cx="5567400" cy="1472760"/>
+            <a:ext cx="5567040" cy="1472400"/>
           </a:xfrm>
           <a:custGeom>
             <a:avLst/>
@@ -18869,7 +18713,7 @@
         <p:spPr>
           <a:xfrm>
             <a:off x="565200" y="5197320"/>
-            <a:ext cx="5280480" cy="259200"/>
+            <a:ext cx="5280120" cy="258840"/>
           </a:xfrm>
           <a:prstGeom prst="rect">
             <a:avLst/>
@@ -18921,7 +18765,7 @@
         <p:spPr>
           <a:xfrm>
             <a:off x="565200" y="5567760"/>
-            <a:ext cx="5261760" cy="722160"/>
+            <a:ext cx="5261400" cy="721800"/>
           </a:xfrm>
           <a:prstGeom prst="rect">
             <a:avLst/>
@@ -18973,7 +18817,7 @@
         <p:spPr>
           <a:xfrm>
             <a:off x="6242040" y="1334160"/>
-            <a:ext cx="5576760" cy="2844000"/>
+            <a:ext cx="5576400" cy="2843640"/>
           </a:xfrm>
           <a:custGeom>
             <a:avLst/>
@@ -19024,7 +18868,7 @@
         <p:spPr>
           <a:xfrm>
             <a:off x="6427440" y="1519200"/>
-            <a:ext cx="5317560" cy="296280"/>
+            <a:ext cx="5317200" cy="295920"/>
           </a:xfrm>
           <a:prstGeom prst="rect">
             <a:avLst/>
@@ -19076,7 +18920,7 @@
         <p:spPr>
           <a:xfrm>
             <a:off x="6427440" y="1968840"/>
-            <a:ext cx="5146200" cy="455760"/>
+            <a:ext cx="5145840" cy="455400"/>
           </a:xfrm>
           <a:prstGeom prst="rect">
             <a:avLst/>
@@ -19128,7 +18972,7 @@
         <p:spPr>
           <a:xfrm>
             <a:off x="6427440" y="2580120"/>
-            <a:ext cx="5280480" cy="481320"/>
+            <a:ext cx="5280120" cy="480960"/>
           </a:xfrm>
           <a:prstGeom prst="rect">
             <a:avLst/>
@@ -19180,7 +19024,7 @@
         <p:spPr>
           <a:xfrm>
             <a:off x="6436800" y="3205440"/>
-            <a:ext cx="166320" cy="147960"/>
+            <a:ext cx="165960" cy="147600"/>
           </a:xfrm>
           <a:custGeom>
             <a:avLst/>
@@ -19365,7 +19209,7 @@
         <p:spPr>
           <a:xfrm>
             <a:off x="6666840" y="3173040"/>
-            <a:ext cx="5041080" cy="222120"/>
+            <a:ext cx="5040720" cy="221760"/>
           </a:xfrm>
           <a:prstGeom prst="rect">
             <a:avLst/>
@@ -19427,7 +19271,7 @@
         <p:spPr>
           <a:xfrm>
             <a:off x="6445800" y="3502080"/>
-            <a:ext cx="147960" cy="147960"/>
+            <a:ext cx="147600" cy="147600"/>
           </a:xfrm>
           <a:custGeom>
             <a:avLst/>
@@ -19594,7 +19438,7 @@
         <p:spPr>
           <a:xfrm>
             <a:off x="6666840" y="3469680"/>
-            <a:ext cx="5041080" cy="222120"/>
+            <a:ext cx="5040720" cy="221760"/>
           </a:xfrm>
           <a:prstGeom prst="rect">
             <a:avLst/>
@@ -19656,7 +19500,7 @@
         <p:spPr>
           <a:xfrm>
             <a:off x="6427440" y="3798360"/>
-            <a:ext cx="185040" cy="147960"/>
+            <a:ext cx="184680" cy="147600"/>
           </a:xfrm>
           <a:custGeom>
             <a:avLst/>
@@ -19888,7 +19732,7 @@
         <p:spPr>
           <a:xfrm>
             <a:off x="6666840" y="3765960"/>
-            <a:ext cx="5041080" cy="222120"/>
+            <a:ext cx="5040720" cy="221760"/>
           </a:xfrm>
           <a:prstGeom prst="rect">
             <a:avLst/>
@@ -19950,7 +19794,7 @@
         <p:spPr>
           <a:xfrm>
             <a:off x="6260760" y="4321800"/>
-            <a:ext cx="5558400" cy="870480"/>
+            <a:ext cx="5558040" cy="870120"/>
           </a:xfrm>
           <a:custGeom>
             <a:avLst/>
@@ -20001,7 +19845,7 @@
         <p:spPr>
           <a:xfrm>
             <a:off x="6260760" y="4321800"/>
-            <a:ext cx="36720" cy="870480"/>
+            <a:ext cx="36360" cy="870120"/>
           </a:xfrm>
           <a:custGeom>
             <a:avLst/>
@@ -20052,7 +19896,7 @@
         <p:spPr>
           <a:xfrm>
             <a:off x="6464520" y="4507200"/>
-            <a:ext cx="5243400" cy="240480"/>
+            <a:ext cx="5243040" cy="240120"/>
           </a:xfrm>
           <a:prstGeom prst="rect">
             <a:avLst/>
@@ -20104,7 +19948,7 @@
         <p:spPr>
           <a:xfrm>
             <a:off x="6464520" y="4822200"/>
-            <a:ext cx="5234040" cy="185040"/>
+            <a:ext cx="5233680" cy="184680"/>
           </a:xfrm>
           <a:prstGeom prst="rect">
             <a:avLst/>
@@ -20203,7 +20047,7 @@
         <p:spPr>
           <a:xfrm>
             <a:off x="380880" y="380880"/>
-            <a:ext cx="11658240" cy="456840"/>
+            <a:ext cx="11657880" cy="456480"/>
           </a:xfrm>
           <a:prstGeom prst="rect">
             <a:avLst/>
@@ -20255,7 +20099,7 @@
         <p:spPr>
           <a:xfrm>
             <a:off x="380880" y="952560"/>
-            <a:ext cx="761760" cy="18720"/>
+            <a:ext cx="761400" cy="18360"/>
           </a:xfrm>
           <a:custGeom>
             <a:avLst/>
@@ -20306,7 +20150,7 @@
         <p:spPr>
           <a:xfrm>
             <a:off x="380880" y="1428840"/>
-            <a:ext cx="752040" cy="571320"/>
+            <a:ext cx="751680" cy="570960"/>
           </a:xfrm>
           <a:prstGeom prst="rect">
             <a:avLst/>
@@ -20360,7 +20204,7 @@
         <p:spPr>
           <a:xfrm>
             <a:off x="1034280" y="1504800"/>
-            <a:ext cx="4190760" cy="304560"/>
+            <a:ext cx="4190400" cy="304200"/>
           </a:xfrm>
           <a:prstGeom prst="rect">
             <a:avLst/>
@@ -20412,7 +20256,7 @@
         <p:spPr>
           <a:xfrm>
             <a:off x="1034280" y="1886040"/>
-            <a:ext cx="4161960" cy="275760"/>
+            <a:ext cx="4161600" cy="275400"/>
           </a:xfrm>
           <a:prstGeom prst="rect">
             <a:avLst/>
@@ -20464,7 +20308,7 @@
         <p:spPr>
           <a:xfrm>
             <a:off x="6400800" y="1428840"/>
-            <a:ext cx="856800" cy="571320"/>
+            <a:ext cx="856440" cy="570960"/>
           </a:xfrm>
           <a:prstGeom prst="rect">
             <a:avLst/>
@@ -20518,7 +20362,7 @@
         <p:spPr>
           <a:xfrm>
             <a:off x="7160040" y="1504800"/>
-            <a:ext cx="4762080" cy="304560"/>
+            <a:ext cx="4761720" cy="304200"/>
           </a:xfrm>
           <a:prstGeom prst="rect">
             <a:avLst/>
@@ -20570,7 +20414,7 @@
         <p:spPr>
           <a:xfrm>
             <a:off x="7160040" y="1886040"/>
-            <a:ext cx="4733640" cy="561600"/>
+            <a:ext cx="4733280" cy="561240"/>
           </a:xfrm>
           <a:prstGeom prst="rect">
             <a:avLst/>
@@ -20622,7 +20466,7 @@
         <p:spPr>
           <a:xfrm>
             <a:off x="380880" y="2824200"/>
-            <a:ext cx="856800" cy="571320"/>
+            <a:ext cx="856440" cy="570960"/>
           </a:xfrm>
           <a:prstGeom prst="rect">
             <a:avLst/>
@@ -20676,7 +20520,7 @@
         <p:spPr>
           <a:xfrm>
             <a:off x="1143000" y="2900520"/>
-            <a:ext cx="3971520" cy="304560"/>
+            <a:ext cx="3971160" cy="304200"/>
           </a:xfrm>
           <a:prstGeom prst="rect">
             <a:avLst/>
@@ -20728,7 +20572,7 @@
         <p:spPr>
           <a:xfrm>
             <a:off x="1143000" y="3281400"/>
-            <a:ext cx="3943080" cy="275760"/>
+            <a:ext cx="3942720" cy="275400"/>
           </a:xfrm>
           <a:prstGeom prst="rect">
             <a:avLst/>
@@ -20780,7 +20624,7 @@
         <p:spPr>
           <a:xfrm>
             <a:off x="6400800" y="2824200"/>
-            <a:ext cx="885600" cy="571320"/>
+            <a:ext cx="885240" cy="570960"/>
           </a:xfrm>
           <a:prstGeom prst="rect">
             <a:avLst/>
@@ -20834,7 +20678,7 @@
         <p:spPr>
           <a:xfrm>
             <a:off x="7188480" y="2900520"/>
-            <a:ext cx="2476080" cy="304560"/>
+            <a:ext cx="2475720" cy="304200"/>
           </a:xfrm>
           <a:prstGeom prst="rect">
             <a:avLst/>
@@ -20886,7 +20730,7 @@
         <p:spPr>
           <a:xfrm>
             <a:off x="7188480" y="3281400"/>
-            <a:ext cx="2447640" cy="275760"/>
+            <a:ext cx="2447280" cy="275400"/>
           </a:xfrm>
           <a:prstGeom prst="rect">
             <a:avLst/>
@@ -20938,7 +20782,7 @@
         <p:spPr>
           <a:xfrm>
             <a:off x="380880" y="3940920"/>
-            <a:ext cx="847440" cy="571320"/>
+            <a:ext cx="847080" cy="570960"/>
           </a:xfrm>
           <a:prstGeom prst="rect">
             <a:avLst/>
@@ -20992,7 +20836,7 @@
         <p:spPr>
           <a:xfrm>
             <a:off x="1137240" y="4017240"/>
-            <a:ext cx="2866680" cy="304560"/>
+            <a:ext cx="2866320" cy="304200"/>
           </a:xfrm>
           <a:prstGeom prst="rect">
             <a:avLst/>
@@ -21044,7 +20888,7 @@
         <p:spPr>
           <a:xfrm>
             <a:off x="1137240" y="4398120"/>
-            <a:ext cx="2838240" cy="275760"/>
+            <a:ext cx="2837880" cy="275400"/>
           </a:xfrm>
           <a:prstGeom prst="rect">
             <a:avLst/>
@@ -21096,7 +20940,7 @@
         <p:spPr>
           <a:xfrm>
             <a:off x="6400800" y="3940920"/>
-            <a:ext cx="866520" cy="571320"/>
+            <a:ext cx="866160" cy="570960"/>
           </a:xfrm>
           <a:prstGeom prst="rect">
             <a:avLst/>
@@ -21150,7 +20994,7 @@
         <p:spPr>
           <a:xfrm>
             <a:off x="7171560" y="4017240"/>
-            <a:ext cx="3076200" cy="304560"/>
+            <a:ext cx="3075840" cy="304200"/>
           </a:xfrm>
           <a:prstGeom prst="rect">
             <a:avLst/>
@@ -21202,7 +21046,7 @@
         <p:spPr>
           <a:xfrm>
             <a:off x="7171560" y="4398120"/>
-            <a:ext cx="3047760" cy="275760"/>
+            <a:ext cx="3047400" cy="275400"/>
           </a:xfrm>
           <a:prstGeom prst="rect">
             <a:avLst/>
@@ -21291,7 +21135,7 @@
         <p:spPr>
           <a:xfrm>
             <a:off x="335880" y="335880"/>
-            <a:ext cx="11586960" cy="201240"/>
+            <a:ext cx="11586600" cy="200880"/>
           </a:xfrm>
           <a:prstGeom prst="rect">
             <a:avLst/>
@@ -21319,7 +21163,7 @@
               <a:buNone/>
             </a:pPr>
             <a:r>
-              <a:rPr b="1" lang="en-US" sz="1060" spc="52" strike="noStrike">
+              <a:rPr b="1" lang="en-US" sz="1060" spc="49" strike="noStrike">
                 <a:solidFill>
                   <a:srgbClr val="0984e3"/>
                 </a:solidFill>
@@ -21343,7 +21187,7 @@
         <p:spPr>
           <a:xfrm>
             <a:off x="335880" y="604440"/>
-            <a:ext cx="11721600" cy="402840"/>
+            <a:ext cx="11721240" cy="402480"/>
           </a:xfrm>
           <a:prstGeom prst="rect">
             <a:avLst/>
@@ -21395,7 +21239,7 @@
         <p:spPr>
           <a:xfrm>
             <a:off x="335880" y="1251000"/>
-            <a:ext cx="5995800" cy="457200"/>
+            <a:ext cx="5995440" cy="456840"/>
           </a:xfrm>
           <a:prstGeom prst="rect">
             <a:avLst/>
@@ -21447,7 +21291,7 @@
         <p:spPr>
           <a:xfrm>
             <a:off x="335880" y="1889280"/>
-            <a:ext cx="6876360" cy="654480"/>
+            <a:ext cx="6876000" cy="654120"/>
           </a:xfrm>
           <a:prstGeom prst="rect">
             <a:avLst/>
@@ -21499,7 +21343,7 @@
         <p:spPr>
           <a:xfrm>
             <a:off x="340200" y="2682720"/>
-            <a:ext cx="6801120" cy="1956240"/>
+            <a:ext cx="6800760" cy="1955880"/>
           </a:xfrm>
           <a:custGeom>
             <a:avLst/>
@@ -21553,7 +21397,7 @@
         <p:spPr>
           <a:xfrm>
             <a:off x="512280" y="2854800"/>
-            <a:ext cx="6540840" cy="234720"/>
+            <a:ext cx="6540480" cy="234360"/>
           </a:xfrm>
           <a:prstGeom prst="rect">
             <a:avLst/>
@@ -21605,7 +21449,7 @@
         <p:spPr>
           <a:xfrm>
             <a:off x="512280" y="3190680"/>
-            <a:ext cx="6523920" cy="217800"/>
+            <a:ext cx="6523560" cy="217440"/>
           </a:xfrm>
           <a:prstGeom prst="rect">
             <a:avLst/>
@@ -21657,7 +21501,7 @@
         <p:spPr>
           <a:xfrm>
             <a:off x="512280" y="3509640"/>
-            <a:ext cx="6456600" cy="637920"/>
+            <a:ext cx="6456240" cy="637560"/>
           </a:xfrm>
           <a:custGeom>
             <a:avLst/>
@@ -21708,7 +21552,7 @@
         <p:spPr>
           <a:xfrm>
             <a:off x="613080" y="3610440"/>
-            <a:ext cx="6322320" cy="201240"/>
+            <a:ext cx="6321960" cy="200880"/>
           </a:xfrm>
           <a:prstGeom prst="rect">
             <a:avLst/>
@@ -21760,7 +21604,7 @@
         <p:spPr>
           <a:xfrm>
             <a:off x="613080" y="3845520"/>
-            <a:ext cx="6322320" cy="201240"/>
+            <a:ext cx="6321960" cy="200880"/>
           </a:xfrm>
           <a:prstGeom prst="rect">
             <a:avLst/>
@@ -21812,7 +21656,7 @@
         <p:spPr>
           <a:xfrm>
             <a:off x="512280" y="4248720"/>
-            <a:ext cx="6523920" cy="217800"/>
+            <a:ext cx="6523560" cy="217440"/>
           </a:xfrm>
           <a:prstGeom prst="rect">
             <a:avLst/>
@@ -21864,7 +21708,7 @@
         <p:spPr>
           <a:xfrm>
             <a:off x="352800" y="4777560"/>
-            <a:ext cx="6792480" cy="1527840"/>
+            <a:ext cx="6792120" cy="1527480"/>
           </a:xfrm>
           <a:custGeom>
             <a:avLst/>
@@ -21915,7 +21759,7 @@
         <p:spPr>
           <a:xfrm>
             <a:off x="352800" y="4777560"/>
-            <a:ext cx="33120" cy="1527840"/>
+            <a:ext cx="32760" cy="1527480"/>
           </a:xfrm>
           <a:custGeom>
             <a:avLst/>
@@ -21966,7 +21810,7 @@
         <p:spPr>
           <a:xfrm>
             <a:off x="537480" y="4945680"/>
-            <a:ext cx="6523920" cy="234720"/>
+            <a:ext cx="6523560" cy="234360"/>
           </a:xfrm>
           <a:prstGeom prst="rect">
             <a:avLst/>
@@ -22018,7 +21862,7 @@
         <p:spPr>
           <a:xfrm>
             <a:off x="537480" y="5281560"/>
-            <a:ext cx="6507000" cy="217800"/>
+            <a:ext cx="6506640" cy="217440"/>
           </a:xfrm>
           <a:prstGeom prst="rect">
             <a:avLst/>
@@ -22070,7 +21914,7 @@
         <p:spPr>
           <a:xfrm>
             <a:off x="537480" y="5600520"/>
-            <a:ext cx="3215520" cy="201240"/>
+            <a:ext cx="3215160" cy="200880"/>
           </a:xfrm>
           <a:prstGeom prst="rect">
             <a:avLst/>
@@ -22132,7 +21976,7 @@
         <p:spPr>
           <a:xfrm>
             <a:off x="3823200" y="5600520"/>
-            <a:ext cx="3215520" cy="201240"/>
+            <a:ext cx="3215160" cy="200880"/>
           </a:xfrm>
           <a:prstGeom prst="rect">
             <a:avLst/>
@@ -22194,7 +22038,7 @@
         <p:spPr>
           <a:xfrm>
             <a:off x="537480" y="5936400"/>
-            <a:ext cx="3215520" cy="201240"/>
+            <a:ext cx="3215160" cy="200880"/>
           </a:xfrm>
           <a:prstGeom prst="rect">
             <a:avLst/>
@@ -22256,7 +22100,7 @@
         <p:spPr>
           <a:xfrm>
             <a:off x="3823200" y="5936400"/>
-            <a:ext cx="3215520" cy="201240"/>
+            <a:ext cx="3215160" cy="200880"/>
           </a:xfrm>
           <a:prstGeom prst="rect">
             <a:avLst/>
@@ -22318,7 +22162,7 @@
         <p:spPr>
           <a:xfrm>
             <a:off x="7415640" y="1213200"/>
-            <a:ext cx="4441320" cy="3501000"/>
+            <a:ext cx="4440960" cy="3500640"/>
           </a:xfrm>
           <a:custGeom>
             <a:avLst/>
@@ -22372,7 +22216,7 @@
         <p:spPr>
           <a:xfrm>
             <a:off x="7587720" y="1385280"/>
-            <a:ext cx="4097160" cy="1679040"/>
+            <a:ext cx="4096800" cy="1678680"/>
           </a:xfrm>
           <a:prstGeom prst="roundRect">
             <a:avLst>
@@ -22404,7 +22248,7 @@
         <p:spPr>
           <a:xfrm>
             <a:off x="7545600" y="3199320"/>
-            <a:ext cx="4181040" cy="234720"/>
+            <a:ext cx="4180680" cy="234360"/>
           </a:xfrm>
           <a:prstGeom prst="rect">
             <a:avLst/>
@@ -22456,7 +22300,7 @@
         <p:spPr>
           <a:xfrm>
             <a:off x="7621200" y="3564360"/>
-            <a:ext cx="100440" cy="133920"/>
+            <a:ext cx="100080" cy="133560"/>
           </a:xfrm>
           <a:custGeom>
             <a:avLst/>
@@ -22655,7 +22499,7 @@
         <p:spPr>
           <a:xfrm>
             <a:off x="7800120" y="3534840"/>
-            <a:ext cx="3952080" cy="201240"/>
+            <a:ext cx="3951720" cy="200880"/>
           </a:xfrm>
           <a:prstGeom prst="rect">
             <a:avLst/>
@@ -22717,7 +22561,7 @@
         <p:spPr>
           <a:xfrm>
             <a:off x="7604640" y="3832920"/>
-            <a:ext cx="133920" cy="133920"/>
+            <a:ext cx="133560" cy="133560"/>
           </a:xfrm>
           <a:custGeom>
             <a:avLst/>
@@ -22924,7 +22768,7 @@
         <p:spPr>
           <a:xfrm>
             <a:off x="7800120" y="3803760"/>
-            <a:ext cx="3952080" cy="201240"/>
+            <a:ext cx="3951720" cy="200880"/>
           </a:xfrm>
           <a:prstGeom prst="rect">
             <a:avLst/>
@@ -22986,7 +22830,7 @@
         <p:spPr>
           <a:xfrm>
             <a:off x="7604640" y="4101840"/>
-            <a:ext cx="133920" cy="133920"/>
+            <a:ext cx="133560" cy="133560"/>
           </a:xfrm>
           <a:custGeom>
             <a:avLst/>
@@ -23177,7 +23021,7 @@
         <p:spPr>
           <a:xfrm>
             <a:off x="7800120" y="4072320"/>
-            <a:ext cx="3952080" cy="201240"/>
+            <a:ext cx="3951720" cy="200880"/>
           </a:xfrm>
           <a:prstGeom prst="rect">
             <a:avLst/>
@@ -23239,7 +23083,7 @@
         <p:spPr>
           <a:xfrm>
             <a:off x="7587720" y="4370400"/>
-            <a:ext cx="167400" cy="133920"/>
+            <a:ext cx="167040" cy="133560"/>
           </a:xfrm>
           <a:custGeom>
             <a:avLst/>
@@ -23455,7 +23299,7 @@
         <p:spPr>
           <a:xfrm>
             <a:off x="7800120" y="4341240"/>
-            <a:ext cx="3952080" cy="201240"/>
+            <a:ext cx="3951720" cy="200880"/>
           </a:xfrm>
           <a:prstGeom prst="rect">
             <a:avLst/>
@@ -23517,7 +23361,7 @@
         <p:spPr>
           <a:xfrm>
             <a:off x="7411320" y="4853160"/>
-            <a:ext cx="4449960" cy="1292760"/>
+            <a:ext cx="4449600" cy="1292400"/>
           </a:xfrm>
           <a:custGeom>
             <a:avLst/>
@@ -23568,7 +23412,7 @@
         <p:spPr>
           <a:xfrm>
             <a:off x="7579440" y="5021280"/>
-            <a:ext cx="4189680" cy="234720"/>
+            <a:ext cx="4189320" cy="234360"/>
           </a:xfrm>
           <a:prstGeom prst="rect">
             <a:avLst/>
@@ -23620,7 +23464,7 @@
         <p:spPr>
           <a:xfrm>
             <a:off x="7579440" y="5323680"/>
-            <a:ext cx="4181040" cy="654480"/>
+            <a:ext cx="4180680" cy="654120"/>
           </a:xfrm>
           <a:prstGeom prst="rect">
             <a:avLst/>
@@ -23709,7 +23553,7 @@
         <p:spPr>
           <a:xfrm>
             <a:off x="5486400" y="585720"/>
-            <a:ext cx="1218960" cy="18720"/>
+            <a:ext cx="1218600" cy="18360"/>
           </a:xfrm>
           <a:custGeom>
             <a:avLst/>
@@ -23760,7 +23604,7 @@
         <p:spPr>
           <a:xfrm>
             <a:off x="3664080" y="909720"/>
-            <a:ext cx="4866840" cy="1428480"/>
+            <a:ext cx="4866480" cy="1428120"/>
           </a:xfrm>
           <a:prstGeom prst="rect">
             <a:avLst/>
@@ -23833,7 +23677,7 @@
         <p:spPr>
           <a:xfrm>
             <a:off x="5486400" y="2643120"/>
-            <a:ext cx="1218960" cy="18720"/>
+            <a:ext cx="1218600" cy="18360"/>
           </a:xfrm>
           <a:custGeom>
             <a:avLst/>
@@ -23884,7 +23728,7 @@
         <p:spPr>
           <a:xfrm>
             <a:off x="1771560" y="2967120"/>
-            <a:ext cx="8648280" cy="1114200"/>
+            <a:ext cx="8647920" cy="1113840"/>
           </a:xfrm>
           <a:prstGeom prst="rect">
             <a:avLst/>
@@ -23936,7 +23780,7 @@
         <p:spPr>
           <a:xfrm>
             <a:off x="1781280" y="4309920"/>
-            <a:ext cx="8629200" cy="1238040"/>
+            <a:ext cx="8628840" cy="1237680"/>
           </a:xfrm>
           <a:prstGeom prst="rect">
             <a:avLst/>
@@ -23988,7 +23832,7 @@
         <p:spPr>
           <a:xfrm>
             <a:off x="2615400" y="6005520"/>
-            <a:ext cx="6962400" cy="266400"/>
+            <a:ext cx="6962040" cy="266040"/>
           </a:xfrm>
           <a:prstGeom prst="rect">
             <a:avLst/>
@@ -24077,7 +23921,7 @@
         <p:spPr>
           <a:xfrm>
             <a:off x="609480" y="1781280"/>
-            <a:ext cx="12191760" cy="1218960"/>
+            <a:ext cx="12191400" cy="1218600"/>
           </a:xfrm>
           <a:prstGeom prst="rect">
             <a:avLst/>
@@ -24131,7 +23975,7 @@
         <p:spPr>
           <a:xfrm>
             <a:off x="609480" y="3152880"/>
-            <a:ext cx="11867760" cy="1142640"/>
+            <a:ext cx="11867400" cy="1142280"/>
           </a:xfrm>
           <a:prstGeom prst="rect">
             <a:avLst/>
@@ -24204,7 +24048,7 @@
         <p:spPr>
           <a:xfrm>
             <a:off x="609480" y="4524480"/>
-            <a:ext cx="1218960" cy="18720"/>
+            <a:ext cx="1218600" cy="18360"/>
           </a:xfrm>
           <a:custGeom>
             <a:avLst/>
@@ -24255,7 +24099,7 @@
         <p:spPr>
           <a:xfrm>
             <a:off x="609480" y="4772160"/>
-            <a:ext cx="11696400" cy="304560"/>
+            <a:ext cx="11696040" cy="304200"/>
           </a:xfrm>
           <a:prstGeom prst="rect">
             <a:avLst/>
@@ -24344,7 +24188,7 @@
         <p:spPr>
           <a:xfrm>
             <a:off x="380880" y="380880"/>
-            <a:ext cx="11505960" cy="228240"/>
+            <a:ext cx="11505600" cy="227880"/>
           </a:xfrm>
           <a:prstGeom prst="rect">
             <a:avLst/>
@@ -24372,7 +24216,7 @@
               <a:buNone/>
             </a:pPr>
             <a:r>
-              <a:rPr b="1" lang="en-US" sz="1200" spc="58" strike="noStrike">
+              <a:rPr b="1" lang="en-US" sz="1200" spc="55" strike="noStrike">
                 <a:solidFill>
                   <a:srgbClr val="0984e3"/>
                 </a:solidFill>
@@ -24396,7 +24240,7 @@
         <p:spPr>
           <a:xfrm>
             <a:off x="380880" y="685800"/>
-            <a:ext cx="11658240" cy="456840"/>
+            <a:ext cx="11657880" cy="456480"/>
           </a:xfrm>
           <a:prstGeom prst="rect">
             <a:avLst/>
@@ -24448,7 +24292,7 @@
         <p:spPr>
           <a:xfrm>
             <a:off x="380880" y="1371600"/>
-            <a:ext cx="6829200" cy="1238040"/>
+            <a:ext cx="6828840" cy="1237680"/>
           </a:xfrm>
           <a:prstGeom prst="rect">
             <a:avLst/>
@@ -24510,7 +24354,7 @@
         <p:spPr>
           <a:xfrm>
             <a:off x="380880" y="2838600"/>
-            <a:ext cx="6819480" cy="1114200"/>
+            <a:ext cx="6819120" cy="1113840"/>
           </a:xfrm>
           <a:prstGeom prst="rect">
             <a:avLst/>
@@ -24562,7 +24406,7 @@
         <p:spPr>
           <a:xfrm>
             <a:off x="399960" y="4986360"/>
-            <a:ext cx="6714720" cy="1361880"/>
+            <a:ext cx="6714360" cy="1361520"/>
           </a:xfrm>
           <a:custGeom>
             <a:avLst/>
@@ -24613,7 +24457,7 @@
         <p:spPr>
           <a:xfrm>
             <a:off x="399960" y="4986360"/>
-            <a:ext cx="37800" cy="1361880"/>
+            <a:ext cx="37440" cy="1361520"/>
           </a:xfrm>
           <a:custGeom>
             <a:avLst/>
@@ -24664,7 +24508,7 @@
         <p:spPr>
           <a:xfrm>
             <a:off x="647640" y="5214960"/>
-            <a:ext cx="6324120" cy="561600"/>
+            <a:ext cx="6323760" cy="561240"/>
           </a:xfrm>
           <a:prstGeom prst="rect">
             <a:avLst/>
@@ -24716,7 +24560,7 @@
         <p:spPr>
           <a:xfrm>
             <a:off x="647640" y="5886360"/>
-            <a:ext cx="6314760" cy="228240"/>
+            <a:ext cx="6314400" cy="227880"/>
           </a:xfrm>
           <a:prstGeom prst="rect">
             <a:avLst/>
@@ -24778,7 +24622,7 @@
         <p:spPr>
           <a:xfrm>
             <a:off x="7426440" y="1376280"/>
-            <a:ext cx="4381200" cy="1495080"/>
+            <a:ext cx="4380840" cy="1494720"/>
           </a:xfrm>
           <a:custGeom>
             <a:avLst/>
@@ -24832,7 +24676,7 @@
         <p:spPr>
           <a:xfrm>
             <a:off x="7660080" y="1609560"/>
-            <a:ext cx="380520" cy="380520"/>
+            <a:ext cx="380160" cy="380160"/>
           </a:xfrm>
           <a:custGeom>
             <a:avLst/>
@@ -24883,7 +24727,7 @@
         <p:spPr>
           <a:xfrm>
             <a:off x="7745760" y="1714680"/>
-            <a:ext cx="213840" cy="171000"/>
+            <a:ext cx="213480" cy="170640"/>
           </a:xfrm>
           <a:custGeom>
             <a:avLst/>
@@ -25099,7 +24943,7 @@
         <p:spPr>
           <a:xfrm>
             <a:off x="8155440" y="1666800"/>
-            <a:ext cx="637920" cy="266400"/>
+            <a:ext cx="637560" cy="266040"/>
           </a:xfrm>
           <a:prstGeom prst="rect">
             <a:avLst/>
@@ -25151,7 +24995,7 @@
         <p:spPr>
           <a:xfrm>
             <a:off x="7660080" y="2143080"/>
-            <a:ext cx="3990600" cy="495000"/>
+            <a:ext cx="3990240" cy="494640"/>
           </a:xfrm>
           <a:prstGeom prst="rect">
             <a:avLst/>
@@ -25203,7 +25047,7 @@
         <p:spPr>
           <a:xfrm>
             <a:off x="7426440" y="3110040"/>
-            <a:ext cx="4381200" cy="1495080"/>
+            <a:ext cx="4380840" cy="1494720"/>
           </a:xfrm>
           <a:custGeom>
             <a:avLst/>
@@ -25257,7 +25101,7 @@
         <p:spPr>
           <a:xfrm>
             <a:off x="7660080" y="3343320"/>
-            <a:ext cx="380520" cy="380520"/>
+            <a:ext cx="380160" cy="380160"/>
           </a:xfrm>
           <a:custGeom>
             <a:avLst/>
@@ -25308,7 +25152,7 @@
         <p:spPr>
           <a:xfrm>
             <a:off x="7767000" y="3448080"/>
-            <a:ext cx="171000" cy="171000"/>
+            <a:ext cx="170640" cy="170640"/>
           </a:xfrm>
           <a:custGeom>
             <a:avLst/>
@@ -25584,7 +25428,7 @@
         <p:spPr>
           <a:xfrm>
             <a:off x="8155440" y="3400560"/>
-            <a:ext cx="866520" cy="266400"/>
+            <a:ext cx="866160" cy="266040"/>
           </a:xfrm>
           <a:prstGeom prst="rect">
             <a:avLst/>
@@ -25636,7 +25480,7 @@
         <p:spPr>
           <a:xfrm>
             <a:off x="7660080" y="3876840"/>
-            <a:ext cx="3990600" cy="495000"/>
+            <a:ext cx="3990240" cy="494640"/>
           </a:xfrm>
           <a:prstGeom prst="rect">
             <a:avLst/>
@@ -25688,7 +25532,7 @@
         <p:spPr>
           <a:xfrm>
             <a:off x="7426440" y="4843440"/>
-            <a:ext cx="4381200" cy="1495080"/>
+            <a:ext cx="4380840" cy="1494720"/>
           </a:xfrm>
           <a:custGeom>
             <a:avLst/>
@@ -25742,7 +25586,7 @@
         <p:spPr>
           <a:xfrm>
             <a:off x="7660080" y="5076720"/>
-            <a:ext cx="380520" cy="380520"/>
+            <a:ext cx="380160" cy="380160"/>
           </a:xfrm>
           <a:custGeom>
             <a:avLst/>
@@ -25793,7 +25637,7 @@
         <p:spPr>
           <a:xfrm>
             <a:off x="7767000" y="5181480"/>
-            <a:ext cx="171000" cy="171000"/>
+            <a:ext cx="170640" cy="170640"/>
           </a:xfrm>
           <a:custGeom>
             <a:avLst/>
@@ -25970,7 +25814,7 @@
         <p:spPr>
           <a:xfrm>
             <a:off x="8155440" y="5133960"/>
-            <a:ext cx="657000" cy="266400"/>
+            <a:ext cx="656640" cy="266040"/>
           </a:xfrm>
           <a:prstGeom prst="rect">
             <a:avLst/>
@@ -26022,7 +25866,7 @@
         <p:spPr>
           <a:xfrm>
             <a:off x="7660080" y="5610240"/>
-            <a:ext cx="3990600" cy="495000"/>
+            <a:ext cx="3990240" cy="494640"/>
           </a:xfrm>
           <a:prstGeom prst="rect">
             <a:avLst/>
@@ -26111,7 +25955,7 @@
         <p:spPr>
           <a:xfrm>
             <a:off x="609480" y="1781280"/>
-            <a:ext cx="12191760" cy="1218960"/>
+            <a:ext cx="12191400" cy="1218600"/>
           </a:xfrm>
           <a:prstGeom prst="rect">
             <a:avLst/>
@@ -26165,7 +26009,7 @@
         <p:spPr>
           <a:xfrm>
             <a:off x="609480" y="3152880"/>
-            <a:ext cx="11867760" cy="1142640"/>
+            <a:ext cx="11867400" cy="1142280"/>
           </a:xfrm>
           <a:prstGeom prst="rect">
             <a:avLst/>
@@ -26238,7 +26082,7 @@
         <p:spPr>
           <a:xfrm>
             <a:off x="609480" y="4524480"/>
-            <a:ext cx="1218960" cy="18720"/>
+            <a:ext cx="1218600" cy="18360"/>
           </a:xfrm>
           <a:custGeom>
             <a:avLst/>
@@ -26289,7 +26133,7 @@
         <p:spPr>
           <a:xfrm>
             <a:off x="609480" y="4772160"/>
-            <a:ext cx="11696400" cy="304560"/>
+            <a:ext cx="11696040" cy="304200"/>
           </a:xfrm>
           <a:prstGeom prst="rect">
             <a:avLst/>
@@ -26378,7 +26222,7 @@
         <p:spPr>
           <a:xfrm>
             <a:off x="324360" y="324360"/>
-            <a:ext cx="11607840" cy="194040"/>
+            <a:ext cx="11607480" cy="193680"/>
           </a:xfrm>
           <a:prstGeom prst="rect">
             <a:avLst/>
@@ -26406,7 +26250,7 @@
               <a:buNone/>
             </a:pPr>
             <a:r>
-              <a:rPr b="1" lang="en-US" sz="1020" spc="49" strike="noStrike">
+              <a:rPr b="1" lang="en-US" sz="1020" spc="46" strike="noStrike">
                 <a:solidFill>
                   <a:srgbClr val="0984e3"/>
                 </a:solidFill>
@@ -26430,7 +26274,7 @@
         <p:spPr>
           <a:xfrm>
             <a:off x="324360" y="583560"/>
-            <a:ext cx="11737800" cy="388800"/>
+            <a:ext cx="11737440" cy="388440"/>
           </a:xfrm>
           <a:prstGeom prst="rect">
             <a:avLst/>
@@ -26482,7 +26326,7 @@
         <p:spPr>
           <a:xfrm>
             <a:off x="6095880" y="1167480"/>
-            <a:ext cx="15840" cy="4977000"/>
+            <a:ext cx="15480" cy="4976640"/>
           </a:xfrm>
           <a:custGeom>
             <a:avLst/>
@@ -26533,7 +26377,7 @@
         <p:spPr>
           <a:xfrm>
             <a:off x="1638000" y="1171440"/>
-            <a:ext cx="3866400" cy="721080"/>
+            <a:ext cx="3866040" cy="720720"/>
           </a:xfrm>
           <a:custGeom>
             <a:avLst/>
@@ -26587,7 +26431,7 @@
         <p:spPr>
           <a:xfrm>
             <a:off x="1698840" y="1305000"/>
-            <a:ext cx="3672000" cy="226440"/>
+            <a:ext cx="3671640" cy="226080"/>
           </a:xfrm>
           <a:prstGeom prst="rect">
             <a:avLst/>
@@ -26639,7 +26483,7 @@
         <p:spPr>
           <a:xfrm>
             <a:off x="1706760" y="1564560"/>
-            <a:ext cx="3663720" cy="194040"/>
+            <a:ext cx="3663360" cy="193680"/>
           </a:xfrm>
           <a:prstGeom prst="rect">
             <a:avLst/>
@@ -26691,7 +26535,7 @@
         <p:spPr>
           <a:xfrm>
             <a:off x="6683760" y="2030760"/>
-            <a:ext cx="3290760" cy="721080"/>
+            <a:ext cx="3290400" cy="720720"/>
           </a:xfrm>
           <a:custGeom>
             <a:avLst/>
@@ -26745,7 +26589,7 @@
         <p:spPr>
           <a:xfrm>
             <a:off x="6817320" y="2164320"/>
-            <a:ext cx="3096360" cy="226440"/>
+            <a:ext cx="3096000" cy="226080"/>
           </a:xfrm>
           <a:prstGeom prst="rect">
             <a:avLst/>
@@ -26797,7 +26641,7 @@
         <p:spPr>
           <a:xfrm>
             <a:off x="6817320" y="2423880"/>
-            <a:ext cx="3088080" cy="194040"/>
+            <a:ext cx="3087720" cy="193680"/>
           </a:xfrm>
           <a:prstGeom prst="rect">
             <a:avLst/>
@@ -26849,7 +26693,7 @@
         <p:spPr>
           <a:xfrm>
             <a:off x="633600" y="2885760"/>
-            <a:ext cx="4879800" cy="713160"/>
+            <a:ext cx="4879440" cy="712800"/>
           </a:xfrm>
           <a:custGeom>
             <a:avLst/>
@@ -26900,7 +26744,7 @@
         <p:spPr>
           <a:xfrm>
             <a:off x="633600" y="2885760"/>
-            <a:ext cx="32040" cy="713160"/>
+            <a:ext cx="31680" cy="712800"/>
           </a:xfrm>
           <a:custGeom>
             <a:avLst/>
@@ -26951,7 +26795,7 @@
         <p:spPr>
           <a:xfrm>
             <a:off x="706680" y="3015720"/>
-            <a:ext cx="4677120" cy="226440"/>
+            <a:ext cx="4676760" cy="226080"/>
           </a:xfrm>
           <a:prstGeom prst="rect">
             <a:avLst/>
@@ -27003,7 +26847,7 @@
         <p:spPr>
           <a:xfrm>
             <a:off x="714960" y="3274920"/>
-            <a:ext cx="4668840" cy="194040"/>
+            <a:ext cx="4668480" cy="193680"/>
           </a:xfrm>
           <a:prstGeom prst="rect">
             <a:avLst/>
@@ -27065,7 +26909,7 @@
         <p:spPr>
           <a:xfrm>
             <a:off x="6696000" y="3728880"/>
-            <a:ext cx="5017320" cy="713160"/>
+            <a:ext cx="5016960" cy="712800"/>
           </a:xfrm>
           <a:custGeom>
             <a:avLst/>
@@ -27116,7 +26960,7 @@
         <p:spPr>
           <a:xfrm>
             <a:off x="6696000" y="3728880"/>
-            <a:ext cx="32040" cy="713160"/>
+            <a:ext cx="31680" cy="712800"/>
           </a:xfrm>
           <a:custGeom>
             <a:avLst/>
@@ -27167,7 +27011,7 @@
         <p:spPr>
           <a:xfrm>
             <a:off x="6841800" y="3858480"/>
-            <a:ext cx="4815000" cy="226440"/>
+            <a:ext cx="4814640" cy="226080"/>
           </a:xfrm>
           <a:prstGeom prst="rect">
             <a:avLst/>
@@ -27219,7 +27063,7 @@
         <p:spPr>
           <a:xfrm>
             <a:off x="6841800" y="4118040"/>
-            <a:ext cx="4806720" cy="194040"/>
+            <a:ext cx="4806360" cy="193680"/>
           </a:xfrm>
           <a:prstGeom prst="rect">
             <a:avLst/>
@@ -27281,7 +27125,7 @@
         <p:spPr>
           <a:xfrm>
             <a:off x="1476360" y="4572000"/>
-            <a:ext cx="4036680" cy="713160"/>
+            <a:ext cx="4036320" cy="712800"/>
           </a:xfrm>
           <a:custGeom>
             <a:avLst/>
@@ -27332,7 +27176,7 @@
         <p:spPr>
           <a:xfrm>
             <a:off x="1532880" y="4701600"/>
-            <a:ext cx="3850200" cy="226440"/>
+            <a:ext cx="3849840" cy="226080"/>
           </a:xfrm>
           <a:prstGeom prst="rect">
             <a:avLst/>
@@ -27384,7 +27228,7 @@
         <p:spPr>
           <a:xfrm>
             <a:off x="1541160" y="4961160"/>
-            <a:ext cx="3841920" cy="194040"/>
+            <a:ext cx="3841560" cy="193680"/>
           </a:xfrm>
           <a:prstGeom prst="rect">
             <a:avLst/>
@@ -27446,7 +27290,7 @@
         <p:spPr>
           <a:xfrm>
             <a:off x="6683760" y="5419080"/>
-            <a:ext cx="3988080" cy="721080"/>
+            <a:ext cx="3987720" cy="720720"/>
           </a:xfrm>
           <a:custGeom>
             <a:avLst/>
@@ -27500,7 +27344,7 @@
         <p:spPr>
           <a:xfrm>
             <a:off x="6817320" y="5553000"/>
-            <a:ext cx="3793320" cy="226440"/>
+            <a:ext cx="3792960" cy="226080"/>
           </a:xfrm>
           <a:prstGeom prst="rect">
             <a:avLst/>
@@ -27552,7 +27396,7 @@
         <p:spPr>
           <a:xfrm>
             <a:off x="6817320" y="5812200"/>
-            <a:ext cx="3785400" cy="194040"/>
+            <a:ext cx="3785040" cy="193680"/>
           </a:xfrm>
           <a:prstGeom prst="rect">
             <a:avLst/>
@@ -27604,7 +27448,7 @@
         <p:spPr>
           <a:xfrm>
             <a:off x="6031080" y="1467360"/>
-            <a:ext cx="129240" cy="129240"/>
+            <a:ext cx="128880" cy="128880"/>
           </a:xfrm>
           <a:custGeom>
             <a:avLst/>
@@ -27675,7 +27519,7 @@
         <p:spPr>
           <a:xfrm>
             <a:off x="6031080" y="2326680"/>
-            <a:ext cx="129240" cy="129240"/>
+            <a:ext cx="128880" cy="128880"/>
           </a:xfrm>
           <a:custGeom>
             <a:avLst/>
@@ -27746,7 +27590,7 @@
         <p:spPr>
           <a:xfrm>
             <a:off x="6031080" y="3177720"/>
-            <a:ext cx="129240" cy="129240"/>
+            <a:ext cx="128880" cy="128880"/>
           </a:xfrm>
           <a:custGeom>
             <a:avLst/>
@@ -27817,7 +27661,7 @@
         <p:spPr>
           <a:xfrm>
             <a:off x="6031080" y="4020840"/>
-            <a:ext cx="129240" cy="129240"/>
+            <a:ext cx="128880" cy="128880"/>
           </a:xfrm>
           <a:custGeom>
             <a:avLst/>
@@ -27888,7 +27732,7 @@
         <p:spPr>
           <a:xfrm>
             <a:off x="6031080" y="4863960"/>
-            <a:ext cx="129240" cy="129240"/>
+            <a:ext cx="128880" cy="128880"/>
           </a:xfrm>
           <a:custGeom>
             <a:avLst/>
@@ -27959,7 +27803,7 @@
         <p:spPr>
           <a:xfrm>
             <a:off x="6031080" y="5715000"/>
-            <a:ext cx="129240" cy="129240"/>
+            <a:ext cx="128880" cy="128880"/>
           </a:xfrm>
           <a:custGeom>
             <a:avLst/>
@@ -28067,7 +27911,7 @@
         <p:spPr>
           <a:xfrm>
             <a:off x="380880" y="380880"/>
-            <a:ext cx="11505960" cy="228240"/>
+            <a:ext cx="11505600" cy="227880"/>
           </a:xfrm>
           <a:prstGeom prst="rect">
             <a:avLst/>
@@ -28095,7 +27939,7 @@
               <a:buNone/>
             </a:pPr>
             <a:r>
-              <a:rPr b="1" lang="en-US" sz="1200" spc="58" strike="noStrike">
+              <a:rPr b="1" lang="en-US" sz="1200" spc="55" strike="noStrike">
                 <a:solidFill>
                   <a:srgbClr val="0984e3"/>
                 </a:solidFill>
@@ -28119,7 +27963,7 @@
         <p:spPr>
           <a:xfrm>
             <a:off x="380880" y="685800"/>
-            <a:ext cx="11658240" cy="456840"/>
+            <a:ext cx="11657880" cy="456480"/>
           </a:xfrm>
           <a:prstGeom prst="rect">
             <a:avLst/>
@@ -28171,7 +28015,7 @@
         <p:spPr>
           <a:xfrm>
             <a:off x="380880" y="1371600"/>
-            <a:ext cx="4390560" cy="3047760"/>
+            <a:ext cx="4390200" cy="3047400"/>
           </a:xfrm>
           <a:prstGeom prst="roundRect">
             <a:avLst>
@@ -28203,7 +28047,7 @@
         <p:spPr>
           <a:xfrm>
             <a:off x="399960" y="4648320"/>
-            <a:ext cx="4371480" cy="1142640"/>
+            <a:ext cx="4371120" cy="1142280"/>
           </a:xfrm>
           <a:custGeom>
             <a:avLst/>
@@ -28254,7 +28098,7 @@
         <p:spPr>
           <a:xfrm>
             <a:off x="399960" y="4648320"/>
-            <a:ext cx="37800" cy="1142640"/>
+            <a:ext cx="37440" cy="1142280"/>
           </a:xfrm>
           <a:custGeom>
             <a:avLst/>
@@ -28305,7 +28149,7 @@
         <p:spPr>
           <a:xfrm>
             <a:off x="609480" y="4838760"/>
-            <a:ext cx="4047840" cy="495000"/>
+            <a:ext cx="4047480" cy="494640"/>
           </a:xfrm>
           <a:prstGeom prst="rect">
             <a:avLst/>
@@ -28357,7 +28201,7 @@
         <p:spPr>
           <a:xfrm>
             <a:off x="609480" y="5410080"/>
-            <a:ext cx="4038120" cy="190080"/>
+            <a:ext cx="4037760" cy="189720"/>
           </a:xfrm>
           <a:prstGeom prst="rect">
             <a:avLst/>
@@ -28419,7 +28263,7 @@
         <p:spPr>
           <a:xfrm>
             <a:off x="5074920" y="1371600"/>
-            <a:ext cx="6848280" cy="304560"/>
+            <a:ext cx="6847920" cy="304200"/>
           </a:xfrm>
           <a:prstGeom prst="rect">
             <a:avLst/>
@@ -28471,7 +28315,7 @@
         <p:spPr>
           <a:xfrm>
             <a:off x="5074920" y="1752480"/>
-            <a:ext cx="6810120" cy="990360"/>
+            <a:ext cx="6809760" cy="990000"/>
           </a:xfrm>
           <a:prstGeom prst="rect">
             <a:avLst/>
@@ -28523,7 +28367,7 @@
         <p:spPr>
           <a:xfrm>
             <a:off x="5074920" y="2895480"/>
-            <a:ext cx="6848280" cy="304560"/>
+            <a:ext cx="6847920" cy="304200"/>
           </a:xfrm>
           <a:prstGeom prst="rect">
             <a:avLst/>
@@ -28575,7 +28419,7 @@
         <p:spPr>
           <a:xfrm>
             <a:off x="5074920" y="3276720"/>
-            <a:ext cx="6810120" cy="990360"/>
+            <a:ext cx="6809760" cy="990000"/>
           </a:xfrm>
           <a:prstGeom prst="rect">
             <a:avLst/>
@@ -28647,7 +28491,7 @@
         <p:spPr>
           <a:xfrm>
             <a:off x="5074920" y="4419720"/>
-            <a:ext cx="6848280" cy="304560"/>
+            <a:ext cx="6847920" cy="304200"/>
           </a:xfrm>
           <a:prstGeom prst="rect">
             <a:avLst/>
@@ -28699,7 +28543,7 @@
         <p:spPr>
           <a:xfrm>
             <a:off x="5074920" y="4800600"/>
-            <a:ext cx="6810120" cy="990360"/>
+            <a:ext cx="6809760" cy="990000"/>
           </a:xfrm>
           <a:prstGeom prst="rect">
             <a:avLst/>
@@ -28808,7 +28652,7 @@
         <p:spPr>
           <a:xfrm>
             <a:off x="609480" y="1781280"/>
-            <a:ext cx="12191760" cy="1218960"/>
+            <a:ext cx="12191400" cy="1218600"/>
           </a:xfrm>
           <a:prstGeom prst="rect">
             <a:avLst/>
@@ -28862,7 +28706,7 @@
         <p:spPr>
           <a:xfrm>
             <a:off x="609480" y="3152880"/>
-            <a:ext cx="11867760" cy="1142640"/>
+            <a:ext cx="11867400" cy="1142280"/>
           </a:xfrm>
           <a:prstGeom prst="rect">
             <a:avLst/>
@@ -28935,7 +28779,7 @@
         <p:spPr>
           <a:xfrm>
             <a:off x="609480" y="4524480"/>
-            <a:ext cx="1218960" cy="18720"/>
+            <a:ext cx="1218600" cy="18360"/>
           </a:xfrm>
           <a:custGeom>
             <a:avLst/>
@@ -28986,7 +28830,7 @@
         <p:spPr>
           <a:xfrm>
             <a:off x="609480" y="4772160"/>
-            <a:ext cx="11696400" cy="304560"/>
+            <a:ext cx="11696040" cy="304200"/>
           </a:xfrm>
           <a:prstGeom prst="rect">
             <a:avLst/>
@@ -29075,7 +28919,7 @@
         <p:spPr>
           <a:xfrm>
             <a:off x="380880" y="380880"/>
-            <a:ext cx="11505960" cy="228240"/>
+            <a:ext cx="11505600" cy="227880"/>
           </a:xfrm>
           <a:prstGeom prst="rect">
             <a:avLst/>
@@ -29103,7 +28947,7 @@
               <a:buNone/>
             </a:pPr>
             <a:r>
-              <a:rPr b="1" lang="en-US" sz="1200" spc="58" strike="noStrike">
+              <a:rPr b="1" lang="en-US" sz="1200" spc="55" strike="noStrike">
                 <a:solidFill>
                   <a:srgbClr val="0984e3"/>
                 </a:solidFill>
@@ -29127,7 +28971,7 @@
         <p:spPr>
           <a:xfrm>
             <a:off x="380880" y="685800"/>
-            <a:ext cx="11658240" cy="456840"/>
+            <a:ext cx="11657880" cy="456480"/>
           </a:xfrm>
           <a:prstGeom prst="rect">
             <a:avLst/>
@@ -29179,7 +29023,7 @@
         <p:spPr>
           <a:xfrm>
             <a:off x="380880" y="1371600"/>
-            <a:ext cx="5657400" cy="1238040"/>
+            <a:ext cx="5657040" cy="1237680"/>
           </a:xfrm>
           <a:prstGeom prst="rect">
             <a:avLst/>
@@ -29241,7 +29085,7 @@
         <p:spPr>
           <a:xfrm>
             <a:off x="380880" y="2762280"/>
-            <a:ext cx="5648040" cy="837720"/>
+            <a:ext cx="5647680" cy="837360"/>
           </a:xfrm>
           <a:prstGeom prst="rect">
             <a:avLst/>
@@ -29293,7 +29137,7 @@
         <p:spPr>
           <a:xfrm>
             <a:off x="399960" y="3750480"/>
-            <a:ext cx="5543280" cy="1599840"/>
+            <a:ext cx="5542920" cy="1599480"/>
           </a:xfrm>
           <a:custGeom>
             <a:avLst/>
@@ -29344,7 +29188,7 @@
         <p:spPr>
           <a:xfrm>
             <a:off x="399960" y="3750480"/>
-            <a:ext cx="37800" cy="1599840"/>
+            <a:ext cx="37440" cy="1599480"/>
           </a:xfrm>
           <a:custGeom>
             <a:avLst/>
@@ -29395,7 +29239,7 @@
         <p:spPr>
           <a:xfrm>
             <a:off x="609480" y="3940920"/>
-            <a:ext cx="5238360" cy="266400"/>
+            <a:ext cx="5238000" cy="266040"/>
           </a:xfrm>
           <a:prstGeom prst="rect">
             <a:avLst/>
@@ -29447,7 +29291,7 @@
         <p:spPr>
           <a:xfrm>
             <a:off x="609480" y="4321800"/>
-            <a:ext cx="5219280" cy="228240"/>
+            <a:ext cx="5218920" cy="227880"/>
           </a:xfrm>
           <a:prstGeom prst="rect">
             <a:avLst/>
@@ -29509,7 +29353,7 @@
         <p:spPr>
           <a:xfrm>
             <a:off x="609480" y="4626720"/>
-            <a:ext cx="5219280" cy="228240"/>
+            <a:ext cx="5218920" cy="227880"/>
           </a:xfrm>
           <a:prstGeom prst="rect">
             <a:avLst/>
@@ -29571,7 +29415,7 @@
         <p:spPr>
           <a:xfrm>
             <a:off x="609480" y="4931640"/>
-            <a:ext cx="5219280" cy="228240"/>
+            <a:ext cx="5218920" cy="227880"/>
           </a:xfrm>
           <a:prstGeom prst="rect">
             <a:avLst/>
@@ -29633,7 +29477,7 @@
         <p:spPr>
           <a:xfrm>
             <a:off x="6253200" y="1618200"/>
-            <a:ext cx="5552640" cy="3485880"/>
+            <a:ext cx="5552280" cy="3485520"/>
           </a:xfrm>
           <a:custGeom>
             <a:avLst/>
@@ -29687,7 +29531,7 @@
         <p:spPr>
           <a:xfrm>
             <a:off x="6438960" y="1851480"/>
-            <a:ext cx="5181120" cy="266400"/>
+            <a:ext cx="5180760" cy="266040"/>
           </a:xfrm>
           <a:prstGeom prst="rect">
             <a:avLst/>
@@ -29739,7 +29583,7 @@
         <p:spPr>
           <a:xfrm>
             <a:off x="6448320" y="2270520"/>
-            <a:ext cx="5162040" cy="228240"/>
+            <a:ext cx="5161680" cy="227880"/>
           </a:xfrm>
           <a:prstGeom prst="rect">
             <a:avLst/>
@@ -29790,7 +29634,7 @@
         </p:nvGraphicFramePr>
         <p:xfrm>
           <a:off x="6486480" y="2651400"/>
-          <a:ext cx="5086080" cy="1409400"/>
+          <a:ext cx="5085720" cy="1409040"/>
         </p:xfrm>
         <a:graphic>
           <a:graphicData uri="http://schemas.openxmlformats.org/drawingml/2006/table">
@@ -29831,7 +29675,7 @@
                 </a:tc>
                 <a:tc>
                   <a:txBody>
-                    <a:bodyPr lIns="114120" rIns="114120" tIns="114120" bIns="114120" anchor="ctr">
+                    <a:bodyPr lIns="114120" rIns="114120" anchor="ctr">
                       <a:noAutofit/>
                     </a:bodyPr>
                     <a:p>
@@ -29884,7 +29728,7 @@
                 </a:tc>
                 <a:tc>
                   <a:txBody>
-                    <a:bodyPr lIns="114120" rIns="114120" tIns="114120" bIns="114120" anchor="ctr">
+                    <a:bodyPr lIns="114120" rIns="114120" anchor="ctr">
                       <a:noAutofit/>
                     </a:bodyPr>
                     <a:p>
@@ -29939,7 +29783,7 @@
               <a:tr h="469800">
                 <a:tc>
                   <a:txBody>
-                    <a:bodyPr lIns="114120" rIns="114120" tIns="114120" bIns="114120" anchor="ctr">
+                    <a:bodyPr lIns="114120" rIns="114120" anchor="ctr">
                       <a:noAutofit/>
                     </a:bodyPr>
                     <a:p>
@@ -29992,7 +29836,7 @@
                 </a:tc>
                 <a:tc>
                   <a:txBody>
-                    <a:bodyPr lIns="114120" rIns="114120" tIns="114120" bIns="114120" anchor="ctr">
+                    <a:bodyPr lIns="114120" rIns="114120" anchor="ctr">
                       <a:noAutofit/>
                     </a:bodyPr>
                     <a:p>
@@ -30043,7 +29887,7 @@
                 </a:tc>
                 <a:tc>
                   <a:txBody>
-                    <a:bodyPr lIns="114120" rIns="114120" tIns="114120" bIns="114120" anchor="ctr">
+                    <a:bodyPr lIns="114120" rIns="114120" anchor="ctr">
                       <a:noAutofit/>
                     </a:bodyPr>
                     <a:p>
@@ -30096,7 +29940,7 @@
               <a:tr h="469800">
                 <a:tc>
                   <a:txBody>
-                    <a:bodyPr lIns="114120" rIns="114120" tIns="114120" bIns="114120" anchor="ctr">
+                    <a:bodyPr lIns="114120" rIns="114120" anchor="ctr">
                       <a:noAutofit/>
                     </a:bodyPr>
                     <a:p>
@@ -30149,7 +29993,7 @@
                 </a:tc>
                 <a:tc>
                   <a:txBody>
-                    <a:bodyPr lIns="114120" rIns="114120" tIns="114120" bIns="114120" anchor="ctr">
+                    <a:bodyPr lIns="114120" rIns="114120" anchor="ctr">
                       <a:noAutofit/>
                     </a:bodyPr>
                     <a:p>
@@ -30200,7 +30044,7 @@
                 </a:tc>
                 <a:tc>
                   <a:txBody>
-                    <a:bodyPr lIns="114120" rIns="114120" tIns="114120" bIns="114120" anchor="ctr">
+                    <a:bodyPr lIns="114120" rIns="114120" anchor="ctr">
                       <a:noAutofit/>
                     </a:bodyPr>
                     <a:p>
@@ -30263,7 +30107,7 @@
         <p:spPr>
           <a:xfrm>
             <a:off x="6486480" y="4218480"/>
-            <a:ext cx="5086080" cy="9000"/>
+            <a:ext cx="5085720" cy="8640"/>
           </a:xfrm>
           <a:custGeom>
             <a:avLst/>
@@ -30314,7 +30158,7 @@
         <p:spPr>
           <a:xfrm>
             <a:off x="6486480" y="4375440"/>
-            <a:ext cx="5162040" cy="495000"/>
+            <a:ext cx="5161680" cy="494640"/>
           </a:xfrm>
           <a:prstGeom prst="rect">
             <a:avLst/>

--- a/assets/libreoffice_impr_njc/8a9fd669-2142-46d4-bd0c-32cd6323b57f/Game Theory.pptx
+++ b/assets/libreoffice_impr_njc/8a9fd669-2142-46d4-bd0c-32cd6323b57f/Game Theory.pptx
@@ -312,7 +312,7 @@
             <a:pPr algn="r">
               <a:buNone/>
             </a:pPr>
-            <a:fld id="{94003495-CDEE-4787-ADA7-06719E905CF0}" type="slidenum">
+            <a:fld id="{6956C64B-2FAF-4791-BF89-4C80E11DF9D2}" type="slidenum">
               <a:rPr b="0" lang="en-HK" sz="1400" spc="-1" strike="noStrike">
                 <a:latin typeface="Times New Roman"/>
               </a:rPr>
@@ -360,7 +360,7 @@
         <p:spPr>
           <a:xfrm>
             <a:off x="685800" y="1143000"/>
-            <a:ext cx="5485680" cy="3085560"/>
+            <a:ext cx="5485320" cy="3085200"/>
           </a:xfrm>
           <a:prstGeom prst="rect">
             <a:avLst/>
@@ -383,7 +383,7 @@
         <p:spPr>
           <a:xfrm>
             <a:off x="685800" y="4400640"/>
-            <a:ext cx="5485680" cy="3599640"/>
+            <a:ext cx="5485320" cy="3599280"/>
           </a:xfrm>
           <a:prstGeom prst="rect">
             <a:avLst/>
@@ -417,7 +417,7 @@
         <p:spPr>
           <a:xfrm>
             <a:off x="3884760" y="8685360"/>
-            <a:ext cx="2971080" cy="457920"/>
+            <a:ext cx="2970720" cy="457560"/>
           </a:xfrm>
           <a:prstGeom prst="rect">
             <a:avLst/>
@@ -449,7 +449,7 @@
               </a:lnSpc>
               <a:buNone/>
             </a:pPr>
-            <a:fld id="{2AA313D9-456B-4F31-B7C1-53239CB951B0}" type="slidenum">
+            <a:fld id="{AB38B43C-DFD9-4003-B957-0E975FADEC5C}" type="slidenum">
               <a:rPr b="0" lang="en-US" sz="1200" spc="-1" strike="noStrike">
                 <a:latin typeface="Times New Roman"/>
               </a:rPr>
@@ -496,7 +496,7 @@
         <p:spPr>
           <a:xfrm>
             <a:off x="685800" y="1143000"/>
-            <a:ext cx="5485680" cy="3085560"/>
+            <a:ext cx="5485320" cy="3085200"/>
           </a:xfrm>
           <a:prstGeom prst="rect">
             <a:avLst/>
@@ -519,7 +519,7 @@
         <p:spPr>
           <a:xfrm>
             <a:off x="685800" y="4400640"/>
-            <a:ext cx="5485680" cy="3599640"/>
+            <a:ext cx="5485320" cy="3599280"/>
           </a:xfrm>
           <a:prstGeom prst="rect">
             <a:avLst/>
@@ -553,7 +553,7 @@
         <p:spPr>
           <a:xfrm>
             <a:off x="3884760" y="8685360"/>
-            <a:ext cx="2971080" cy="457920"/>
+            <a:ext cx="2970720" cy="457560"/>
           </a:xfrm>
           <a:prstGeom prst="rect">
             <a:avLst/>
@@ -585,7 +585,7 @@
               </a:lnSpc>
               <a:buNone/>
             </a:pPr>
-            <a:fld id="{347C99CF-86B7-405F-BA1B-72EAB4A186ED}" type="slidenum">
+            <a:fld id="{99512475-A3CE-4E1F-ACD9-C6D09A9FD71A}" type="slidenum">
               <a:rPr b="0" lang="en-US" sz="1200" spc="-1" strike="noStrike">
                 <a:latin typeface="Times New Roman"/>
               </a:rPr>
@@ -632,7 +632,7 @@
         <p:spPr>
           <a:xfrm>
             <a:off x="685800" y="1143000"/>
-            <a:ext cx="5485680" cy="3085560"/>
+            <a:ext cx="5485320" cy="3085200"/>
           </a:xfrm>
           <a:prstGeom prst="rect">
             <a:avLst/>
@@ -655,7 +655,7 @@
         <p:spPr>
           <a:xfrm>
             <a:off x="685800" y="4400640"/>
-            <a:ext cx="5485680" cy="3599640"/>
+            <a:ext cx="5485320" cy="3599280"/>
           </a:xfrm>
           <a:prstGeom prst="rect">
             <a:avLst/>
@@ -689,7 +689,7 @@
         <p:spPr>
           <a:xfrm>
             <a:off x="3884760" y="8685360"/>
-            <a:ext cx="2971080" cy="457920"/>
+            <a:ext cx="2970720" cy="457560"/>
           </a:xfrm>
           <a:prstGeom prst="rect">
             <a:avLst/>
@@ -721,7 +721,7 @@
               </a:lnSpc>
               <a:buNone/>
             </a:pPr>
-            <a:fld id="{1726FB5D-9E49-4720-8D4F-88BAA117BAB9}" type="slidenum">
+            <a:fld id="{7E7E7668-06A0-42DE-8378-AC97BAE1646E}" type="slidenum">
               <a:rPr b="0" lang="en-US" sz="1200" spc="-1" strike="noStrike">
                 <a:latin typeface="Times New Roman"/>
               </a:rPr>
@@ -768,7 +768,7 @@
         <p:spPr>
           <a:xfrm>
             <a:off x="685800" y="1143000"/>
-            <a:ext cx="5485680" cy="3085560"/>
+            <a:ext cx="5485320" cy="3085200"/>
           </a:xfrm>
           <a:prstGeom prst="rect">
             <a:avLst/>
@@ -791,7 +791,7 @@
         <p:spPr>
           <a:xfrm>
             <a:off x="685800" y="4400640"/>
-            <a:ext cx="5485680" cy="3599640"/>
+            <a:ext cx="5485320" cy="3599280"/>
           </a:xfrm>
           <a:prstGeom prst="rect">
             <a:avLst/>
@@ -825,7 +825,7 @@
         <p:spPr>
           <a:xfrm>
             <a:off x="3884760" y="8685360"/>
-            <a:ext cx="2971080" cy="457920"/>
+            <a:ext cx="2970720" cy="457560"/>
           </a:xfrm>
           <a:prstGeom prst="rect">
             <a:avLst/>
@@ -857,7 +857,7 @@
               </a:lnSpc>
               <a:buNone/>
             </a:pPr>
-            <a:fld id="{49EBC6B8-F32D-414B-B7FF-5CC5ABD9C262}" type="slidenum">
+            <a:fld id="{BABB765F-5FCD-4ED9-8580-DC5F1DF72F03}" type="slidenum">
               <a:rPr b="0" lang="en-US" sz="1200" spc="-1" strike="noStrike">
                 <a:latin typeface="Times New Roman"/>
               </a:rPr>
@@ -904,7 +904,7 @@
         <p:spPr>
           <a:xfrm>
             <a:off x="685800" y="1143000"/>
-            <a:ext cx="5485680" cy="3085560"/>
+            <a:ext cx="5485320" cy="3085200"/>
           </a:xfrm>
           <a:prstGeom prst="rect">
             <a:avLst/>
@@ -927,7 +927,7 @@
         <p:spPr>
           <a:xfrm>
             <a:off x="685800" y="4400640"/>
-            <a:ext cx="5485680" cy="3599640"/>
+            <a:ext cx="5485320" cy="3599280"/>
           </a:xfrm>
           <a:prstGeom prst="rect">
             <a:avLst/>
@@ -961,7 +961,7 @@
         <p:spPr>
           <a:xfrm>
             <a:off x="3884760" y="8685360"/>
-            <a:ext cx="2971080" cy="457920"/>
+            <a:ext cx="2970720" cy="457560"/>
           </a:xfrm>
           <a:prstGeom prst="rect">
             <a:avLst/>
@@ -993,7 +993,7 @@
               </a:lnSpc>
               <a:buNone/>
             </a:pPr>
-            <a:fld id="{F1A38029-A317-4AC8-ADE8-2626C944D3D8}" type="slidenum">
+            <a:fld id="{B14F65CE-E1C7-4D7B-827A-9DCF894BD01E}" type="slidenum">
               <a:rPr b="0" lang="en-US" sz="1200" spc="-1" strike="noStrike">
                 <a:latin typeface="Times New Roman"/>
               </a:rPr>
@@ -1040,7 +1040,7 @@
         <p:spPr>
           <a:xfrm>
             <a:off x="685800" y="1143000"/>
-            <a:ext cx="5485680" cy="3085560"/>
+            <a:ext cx="5485320" cy="3085200"/>
           </a:xfrm>
           <a:prstGeom prst="rect">
             <a:avLst/>
@@ -1063,7 +1063,7 @@
         <p:spPr>
           <a:xfrm>
             <a:off x="685800" y="4400640"/>
-            <a:ext cx="5485680" cy="3599640"/>
+            <a:ext cx="5485320" cy="3599280"/>
           </a:xfrm>
           <a:prstGeom prst="rect">
             <a:avLst/>
@@ -1097,7 +1097,7 @@
         <p:spPr>
           <a:xfrm>
             <a:off x="3884760" y="8685360"/>
-            <a:ext cx="2971080" cy="457920"/>
+            <a:ext cx="2970720" cy="457560"/>
           </a:xfrm>
           <a:prstGeom prst="rect">
             <a:avLst/>
@@ -1129,7 +1129,7 @@
               </a:lnSpc>
               <a:buNone/>
             </a:pPr>
-            <a:fld id="{FAB15EDB-710A-4495-BFA3-FB4D811E12AB}" type="slidenum">
+            <a:fld id="{0665917F-904E-425A-8732-08D97469B13E}" type="slidenum">
               <a:rPr b="0" lang="en-US" sz="1200" spc="-1" strike="noStrike">
                 <a:latin typeface="Times New Roman"/>
               </a:rPr>
@@ -1176,7 +1176,7 @@
         <p:spPr>
           <a:xfrm>
             <a:off x="685800" y="1143000"/>
-            <a:ext cx="5485680" cy="3085560"/>
+            <a:ext cx="5485320" cy="3085200"/>
           </a:xfrm>
           <a:prstGeom prst="rect">
             <a:avLst/>
@@ -1199,7 +1199,7 @@
         <p:spPr>
           <a:xfrm>
             <a:off x="685800" y="4400640"/>
-            <a:ext cx="5485680" cy="3599640"/>
+            <a:ext cx="5485320" cy="3599280"/>
           </a:xfrm>
           <a:prstGeom prst="rect">
             <a:avLst/>
@@ -1233,7 +1233,7 @@
         <p:spPr>
           <a:xfrm>
             <a:off x="3884760" y="8685360"/>
-            <a:ext cx="2971080" cy="457920"/>
+            <a:ext cx="2970720" cy="457560"/>
           </a:xfrm>
           <a:prstGeom prst="rect">
             <a:avLst/>
@@ -1265,7 +1265,7 @@
               </a:lnSpc>
               <a:buNone/>
             </a:pPr>
-            <a:fld id="{80715C0C-BC89-4232-915B-06316E4AC332}" type="slidenum">
+            <a:fld id="{88A3CABC-B137-4E98-B662-71D4436D3DF6}" type="slidenum">
               <a:rPr b="0" lang="en-US" sz="1200" spc="-1" strike="noStrike">
                 <a:latin typeface="Times New Roman"/>
               </a:rPr>
@@ -1312,7 +1312,7 @@
         <p:spPr>
           <a:xfrm>
             <a:off x="685800" y="1143000"/>
-            <a:ext cx="5485680" cy="3085560"/>
+            <a:ext cx="5485320" cy="3085200"/>
           </a:xfrm>
           <a:prstGeom prst="rect">
             <a:avLst/>
@@ -1335,7 +1335,7 @@
         <p:spPr>
           <a:xfrm>
             <a:off x="685800" y="4400640"/>
-            <a:ext cx="5485680" cy="3599640"/>
+            <a:ext cx="5485320" cy="3599280"/>
           </a:xfrm>
           <a:prstGeom prst="rect">
             <a:avLst/>
@@ -1369,7 +1369,7 @@
         <p:spPr>
           <a:xfrm>
             <a:off x="3884760" y="8685360"/>
-            <a:ext cx="2971080" cy="457920"/>
+            <a:ext cx="2970720" cy="457560"/>
           </a:xfrm>
           <a:prstGeom prst="rect">
             <a:avLst/>
@@ -1401,7 +1401,7 @@
               </a:lnSpc>
               <a:buNone/>
             </a:pPr>
-            <a:fld id="{72548510-FA9A-450C-867D-32954E7B62E1}" type="slidenum">
+            <a:fld id="{BF171FA0-61B9-4735-A72F-9E59BC9235E2}" type="slidenum">
               <a:rPr b="0" lang="en-US" sz="1200" spc="-1" strike="noStrike">
                 <a:latin typeface="Times New Roman"/>
               </a:rPr>
@@ -1448,7 +1448,7 @@
         <p:spPr>
           <a:xfrm>
             <a:off x="685800" y="1143000"/>
-            <a:ext cx="5485680" cy="3085560"/>
+            <a:ext cx="5485320" cy="3085200"/>
           </a:xfrm>
           <a:prstGeom prst="rect">
             <a:avLst/>
@@ -1471,7 +1471,7 @@
         <p:spPr>
           <a:xfrm>
             <a:off x="685800" y="4400640"/>
-            <a:ext cx="5485680" cy="3599640"/>
+            <a:ext cx="5485320" cy="3599280"/>
           </a:xfrm>
           <a:prstGeom prst="rect">
             <a:avLst/>
@@ -1505,7 +1505,7 @@
         <p:spPr>
           <a:xfrm>
             <a:off x="3884760" y="8685360"/>
-            <a:ext cx="2971080" cy="457920"/>
+            <a:ext cx="2970720" cy="457560"/>
           </a:xfrm>
           <a:prstGeom prst="rect">
             <a:avLst/>
@@ -1537,7 +1537,7 @@
               </a:lnSpc>
               <a:buNone/>
             </a:pPr>
-            <a:fld id="{3135AF1E-4BC3-40F7-BD27-DB78F6B4BE5A}" type="slidenum">
+            <a:fld id="{19BAB682-2343-45B4-B1CA-CFDE50254F51}" type="slidenum">
               <a:rPr b="0" lang="en-US" sz="1200" spc="-1" strike="noStrike">
                 <a:latin typeface="Times New Roman"/>
               </a:rPr>
@@ -1584,7 +1584,7 @@
         <p:spPr>
           <a:xfrm>
             <a:off x="685800" y="1143000"/>
-            <a:ext cx="5485680" cy="3085560"/>
+            <a:ext cx="5485320" cy="3085200"/>
           </a:xfrm>
           <a:prstGeom prst="rect">
             <a:avLst/>
@@ -1607,7 +1607,7 @@
         <p:spPr>
           <a:xfrm>
             <a:off x="685800" y="4400640"/>
-            <a:ext cx="5485680" cy="3599640"/>
+            <a:ext cx="5485320" cy="3599280"/>
           </a:xfrm>
           <a:prstGeom prst="rect">
             <a:avLst/>
@@ -1641,7 +1641,7 @@
         <p:spPr>
           <a:xfrm>
             <a:off x="3884760" y="8685360"/>
-            <a:ext cx="2971080" cy="457920"/>
+            <a:ext cx="2970720" cy="457560"/>
           </a:xfrm>
           <a:prstGeom prst="rect">
             <a:avLst/>
@@ -1673,7 +1673,7 @@
               </a:lnSpc>
               <a:buNone/>
             </a:pPr>
-            <a:fld id="{42739A8E-5E8E-489B-B745-8AFA642B9ADC}" type="slidenum">
+            <a:fld id="{18F17A85-9C36-43B2-A76E-83B2AA8F540C}" type="slidenum">
               <a:rPr b="0" lang="en-US" sz="1200" spc="-1" strike="noStrike">
                 <a:latin typeface="Times New Roman"/>
               </a:rPr>
@@ -1720,7 +1720,7 @@
         <p:spPr>
           <a:xfrm>
             <a:off x="685800" y="1143000"/>
-            <a:ext cx="5485680" cy="3085560"/>
+            <a:ext cx="5485320" cy="3085200"/>
           </a:xfrm>
           <a:prstGeom prst="rect">
             <a:avLst/>
@@ -1743,7 +1743,7 @@
         <p:spPr>
           <a:xfrm>
             <a:off x="685800" y="4400640"/>
-            <a:ext cx="5485680" cy="3599640"/>
+            <a:ext cx="5485320" cy="3599280"/>
           </a:xfrm>
           <a:prstGeom prst="rect">
             <a:avLst/>
@@ -1777,7 +1777,7 @@
         <p:spPr>
           <a:xfrm>
             <a:off x="3884760" y="8685360"/>
-            <a:ext cx="2971080" cy="457920"/>
+            <a:ext cx="2970720" cy="457560"/>
           </a:xfrm>
           <a:prstGeom prst="rect">
             <a:avLst/>
@@ -1809,7 +1809,7 @@
               </a:lnSpc>
               <a:buNone/>
             </a:pPr>
-            <a:fld id="{EB0CAE2A-892B-45FE-951C-95C508A4DB07}" type="slidenum">
+            <a:fld id="{2C6E8248-3353-4DD7-91B9-4A81BEE882BC}" type="slidenum">
               <a:rPr b="0" lang="en-US" sz="1200" spc="-1" strike="noStrike">
                 <a:latin typeface="Times New Roman"/>
               </a:rPr>
@@ -1856,7 +1856,7 @@
         <p:spPr>
           <a:xfrm>
             <a:off x="685800" y="1143000"/>
-            <a:ext cx="5485680" cy="3085560"/>
+            <a:ext cx="5485320" cy="3085200"/>
           </a:xfrm>
           <a:prstGeom prst="rect">
             <a:avLst/>
@@ -1879,7 +1879,7 @@
         <p:spPr>
           <a:xfrm>
             <a:off x="685800" y="4400640"/>
-            <a:ext cx="5485680" cy="3599640"/>
+            <a:ext cx="5485320" cy="3599280"/>
           </a:xfrm>
           <a:prstGeom prst="rect">
             <a:avLst/>
@@ -1913,7 +1913,7 @@
         <p:spPr>
           <a:xfrm>
             <a:off x="3884760" y="8685360"/>
-            <a:ext cx="2971080" cy="457920"/>
+            <a:ext cx="2970720" cy="457560"/>
           </a:xfrm>
           <a:prstGeom prst="rect">
             <a:avLst/>
@@ -1945,7 +1945,7 @@
               </a:lnSpc>
               <a:buNone/>
             </a:pPr>
-            <a:fld id="{F386590F-5E26-4ACB-93BB-76307936762A}" type="slidenum">
+            <a:fld id="{30083641-FE33-4D03-8631-FBB006A6888A}" type="slidenum">
               <a:rPr b="0" lang="en-US" sz="1200" spc="-1" strike="noStrike">
                 <a:latin typeface="Times New Roman"/>
               </a:rPr>
@@ -1992,7 +1992,7 @@
         <p:spPr>
           <a:xfrm>
             <a:off x="685800" y="1143000"/>
-            <a:ext cx="5485680" cy="3085560"/>
+            <a:ext cx="5485320" cy="3085200"/>
           </a:xfrm>
           <a:prstGeom prst="rect">
             <a:avLst/>
@@ -2015,7 +2015,7 @@
         <p:spPr>
           <a:xfrm>
             <a:off x="685800" y="4400640"/>
-            <a:ext cx="5485680" cy="3599640"/>
+            <a:ext cx="5485320" cy="3599280"/>
           </a:xfrm>
           <a:prstGeom prst="rect">
             <a:avLst/>
@@ -2049,7 +2049,7 @@
         <p:spPr>
           <a:xfrm>
             <a:off x="3884760" y="8685360"/>
-            <a:ext cx="2971080" cy="457920"/>
+            <a:ext cx="2970720" cy="457560"/>
           </a:xfrm>
           <a:prstGeom prst="rect">
             <a:avLst/>
@@ -2081,7 +2081,7 @@
               </a:lnSpc>
               <a:buNone/>
             </a:pPr>
-            <a:fld id="{E389BE81-6497-4BFB-BC79-73A3EB6991C6}" type="slidenum">
+            <a:fld id="{FC9E967B-67B8-4702-957A-75B88E4042EB}" type="slidenum">
               <a:rPr b="0" lang="en-US" sz="1200" spc="-1" strike="noStrike">
                 <a:latin typeface="Times New Roman"/>
               </a:rPr>
@@ -2128,7 +2128,7 @@
         <p:spPr>
           <a:xfrm>
             <a:off x="685800" y="1143000"/>
-            <a:ext cx="5485680" cy="3085560"/>
+            <a:ext cx="5485320" cy="3085200"/>
           </a:xfrm>
           <a:prstGeom prst="rect">
             <a:avLst/>
@@ -2151,7 +2151,7 @@
         <p:spPr>
           <a:xfrm>
             <a:off x="685800" y="4400640"/>
-            <a:ext cx="5485680" cy="3599640"/>
+            <a:ext cx="5485320" cy="3599280"/>
           </a:xfrm>
           <a:prstGeom prst="rect">
             <a:avLst/>
@@ -2185,7 +2185,7 @@
         <p:spPr>
           <a:xfrm>
             <a:off x="3884760" y="8685360"/>
-            <a:ext cx="2971080" cy="457920"/>
+            <a:ext cx="2970720" cy="457560"/>
           </a:xfrm>
           <a:prstGeom prst="rect">
             <a:avLst/>
@@ -2217,7 +2217,7 @@
               </a:lnSpc>
               <a:buNone/>
             </a:pPr>
-            <a:fld id="{57EC69D6-7F1F-4BCB-98F4-6338C273EE9C}" type="slidenum">
+            <a:fld id="{F10DA348-1261-404B-AF31-CB4AF888E702}" type="slidenum">
               <a:rPr b="0" lang="en-US" sz="1200" spc="-1" strike="noStrike">
                 <a:latin typeface="Times New Roman"/>
               </a:rPr>
@@ -2264,7 +2264,7 @@
         <p:spPr>
           <a:xfrm>
             <a:off x="685800" y="1143000"/>
-            <a:ext cx="5485680" cy="3085560"/>
+            <a:ext cx="5485320" cy="3085200"/>
           </a:xfrm>
           <a:prstGeom prst="rect">
             <a:avLst/>
@@ -2287,7 +2287,7 @@
         <p:spPr>
           <a:xfrm>
             <a:off x="685800" y="4400640"/>
-            <a:ext cx="5485680" cy="3599640"/>
+            <a:ext cx="5485320" cy="3599280"/>
           </a:xfrm>
           <a:prstGeom prst="rect">
             <a:avLst/>
@@ -2321,7 +2321,7 @@
         <p:spPr>
           <a:xfrm>
             <a:off x="3884760" y="8685360"/>
-            <a:ext cx="2971080" cy="457920"/>
+            <a:ext cx="2970720" cy="457560"/>
           </a:xfrm>
           <a:prstGeom prst="rect">
             <a:avLst/>
@@ -2353,7 +2353,7 @@
               </a:lnSpc>
               <a:buNone/>
             </a:pPr>
-            <a:fld id="{86358DCA-D6CB-4FF1-8F90-2EA27B4B3054}" type="slidenum">
+            <a:fld id="{874E664E-0A93-4510-B995-016F2037C66F}" type="slidenum">
               <a:rPr b="0" lang="en-US" sz="1200" spc="-1" strike="noStrike">
                 <a:latin typeface="Times New Roman"/>
               </a:rPr>
@@ -2400,7 +2400,7 @@
         <p:spPr>
           <a:xfrm>
             <a:off x="685800" y="1143000"/>
-            <a:ext cx="5485680" cy="3085560"/>
+            <a:ext cx="5485320" cy="3085200"/>
           </a:xfrm>
           <a:prstGeom prst="rect">
             <a:avLst/>
@@ -2423,7 +2423,7 @@
         <p:spPr>
           <a:xfrm>
             <a:off x="685800" y="4400640"/>
-            <a:ext cx="5485680" cy="3599640"/>
+            <a:ext cx="5485320" cy="3599280"/>
           </a:xfrm>
           <a:prstGeom prst="rect">
             <a:avLst/>
@@ -2457,7 +2457,7 @@
         <p:spPr>
           <a:xfrm>
             <a:off x="3884760" y="8685360"/>
-            <a:ext cx="2971080" cy="457920"/>
+            <a:ext cx="2970720" cy="457560"/>
           </a:xfrm>
           <a:prstGeom prst="rect">
             <a:avLst/>
@@ -2489,7 +2489,7 @@
               </a:lnSpc>
               <a:buNone/>
             </a:pPr>
-            <a:fld id="{0336DCB2-A934-44A5-B7BE-210C9EA5F3A5}" type="slidenum">
+            <a:fld id="{CDB8B1EB-5949-4101-9C8A-5F31747E2546}" type="slidenum">
               <a:rPr b="0" lang="en-US" sz="1200" spc="-1" strike="noStrike">
                 <a:latin typeface="Times New Roman"/>
               </a:rPr>
@@ -2536,7 +2536,7 @@
         <p:spPr>
           <a:xfrm>
             <a:off x="685800" y="1143000"/>
-            <a:ext cx="5485680" cy="3085560"/>
+            <a:ext cx="5485320" cy="3085200"/>
           </a:xfrm>
           <a:prstGeom prst="rect">
             <a:avLst/>
@@ -2559,7 +2559,7 @@
         <p:spPr>
           <a:xfrm>
             <a:off x="685800" y="4400640"/>
-            <a:ext cx="5485680" cy="3599640"/>
+            <a:ext cx="5485320" cy="3599280"/>
           </a:xfrm>
           <a:prstGeom prst="rect">
             <a:avLst/>
@@ -2593,7 +2593,7 @@
         <p:spPr>
           <a:xfrm>
             <a:off x="3884760" y="8685360"/>
-            <a:ext cx="2971080" cy="457920"/>
+            <a:ext cx="2970720" cy="457560"/>
           </a:xfrm>
           <a:prstGeom prst="rect">
             <a:avLst/>
@@ -2625,7 +2625,7 @@
               </a:lnSpc>
               <a:buNone/>
             </a:pPr>
-            <a:fld id="{BC9EC594-9C03-4408-BE70-4C089ABBA0BE}" type="slidenum">
+            <a:fld id="{A74AEC41-E38A-4E5E-AB74-5BF9F7756C54}" type="slidenum">
               <a:rPr b="0" lang="en-US" sz="1200" spc="-1" strike="noStrike">
                 <a:latin typeface="Times New Roman"/>
               </a:rPr>
@@ -2672,7 +2672,7 @@
         <p:spPr>
           <a:xfrm>
             <a:off x="685800" y="1143000"/>
-            <a:ext cx="5485680" cy="3085560"/>
+            <a:ext cx="5485320" cy="3085200"/>
           </a:xfrm>
           <a:prstGeom prst="rect">
             <a:avLst/>
@@ -2695,7 +2695,7 @@
         <p:spPr>
           <a:xfrm>
             <a:off x="685800" y="4400640"/>
-            <a:ext cx="5485680" cy="3599640"/>
+            <a:ext cx="5485320" cy="3599280"/>
           </a:xfrm>
           <a:prstGeom prst="rect">
             <a:avLst/>
@@ -2729,7 +2729,7 @@
         <p:spPr>
           <a:xfrm>
             <a:off x="3884760" y="8685360"/>
-            <a:ext cx="2971080" cy="457920"/>
+            <a:ext cx="2970720" cy="457560"/>
           </a:xfrm>
           <a:prstGeom prst="rect">
             <a:avLst/>
@@ -2761,7 +2761,7 @@
               </a:lnSpc>
               <a:buNone/>
             </a:pPr>
-            <a:fld id="{438C9BE5-32FE-4313-85E9-418E97720B13}" type="slidenum">
+            <a:fld id="{4DECE65C-5355-4C9B-9AD9-EDCB92F7590E}" type="slidenum">
               <a:rPr b="0" lang="en-US" sz="1200" spc="-1" strike="noStrike">
                 <a:latin typeface="Times New Roman"/>
               </a:rPr>
@@ -2808,7 +2808,7 @@
         <p:spPr>
           <a:xfrm>
             <a:off x="685800" y="1143000"/>
-            <a:ext cx="5485680" cy="3085560"/>
+            <a:ext cx="5485320" cy="3085200"/>
           </a:xfrm>
           <a:prstGeom prst="rect">
             <a:avLst/>
@@ -2831,7 +2831,7 @@
         <p:spPr>
           <a:xfrm>
             <a:off x="685800" y="4400640"/>
-            <a:ext cx="5485680" cy="3599640"/>
+            <a:ext cx="5485320" cy="3599280"/>
           </a:xfrm>
           <a:prstGeom prst="rect">
             <a:avLst/>
@@ -2865,7 +2865,7 @@
         <p:spPr>
           <a:xfrm>
             <a:off x="3884760" y="8685360"/>
-            <a:ext cx="2971080" cy="457920"/>
+            <a:ext cx="2970720" cy="457560"/>
           </a:xfrm>
           <a:prstGeom prst="rect">
             <a:avLst/>
@@ -2897,7 +2897,7 @@
               </a:lnSpc>
               <a:buNone/>
             </a:pPr>
-            <a:fld id="{CCAC50BA-DB06-4A81-A460-80CCA3DB3C11}" type="slidenum">
+            <a:fld id="{DBD6448A-6AED-4470-9D10-CE9C9449FCF4}" type="slidenum">
               <a:rPr b="0" lang="en-US" sz="1200" spc="-1" strike="noStrike">
                 <a:latin typeface="Times New Roman"/>
               </a:rPr>
@@ -2944,7 +2944,7 @@
         <p:spPr>
           <a:xfrm>
             <a:off x="685800" y="1143000"/>
-            <a:ext cx="5485680" cy="3085560"/>
+            <a:ext cx="5485320" cy="3085200"/>
           </a:xfrm>
           <a:prstGeom prst="rect">
             <a:avLst/>
@@ -2967,7 +2967,7 @@
         <p:spPr>
           <a:xfrm>
             <a:off x="685800" y="4400640"/>
-            <a:ext cx="5485680" cy="3599640"/>
+            <a:ext cx="5485320" cy="3599280"/>
           </a:xfrm>
           <a:prstGeom prst="rect">
             <a:avLst/>
@@ -3001,7 +3001,7 @@
         <p:spPr>
           <a:xfrm>
             <a:off x="3884760" y="8685360"/>
-            <a:ext cx="2971080" cy="457920"/>
+            <a:ext cx="2970720" cy="457560"/>
           </a:xfrm>
           <a:prstGeom prst="rect">
             <a:avLst/>
@@ -3033,7 +3033,7 @@
               </a:lnSpc>
               <a:buNone/>
             </a:pPr>
-            <a:fld id="{EA3686B7-5F23-447C-A302-C2965608B4A3}" type="slidenum">
+            <a:fld id="{479188AC-D418-41E9-9264-ACC9AD05DA5D}" type="slidenum">
               <a:rPr b="0" lang="en-US" sz="1200" spc="-1" strike="noStrike">
                 <a:latin typeface="Times New Roman"/>
               </a:rPr>
@@ -3080,7 +3080,7 @@
         <p:spPr>
           <a:xfrm>
             <a:off x="685800" y="1143000"/>
-            <a:ext cx="5485680" cy="3085560"/>
+            <a:ext cx="5485320" cy="3085200"/>
           </a:xfrm>
           <a:prstGeom prst="rect">
             <a:avLst/>
@@ -3103,7 +3103,7 @@
         <p:spPr>
           <a:xfrm>
             <a:off x="685800" y="4400640"/>
-            <a:ext cx="5485680" cy="3599640"/>
+            <a:ext cx="5485320" cy="3599280"/>
           </a:xfrm>
           <a:prstGeom prst="rect">
             <a:avLst/>
@@ -3137,7 +3137,7 @@
         <p:spPr>
           <a:xfrm>
             <a:off x="3884760" y="8685360"/>
-            <a:ext cx="2971080" cy="457920"/>
+            <a:ext cx="2970720" cy="457560"/>
           </a:xfrm>
           <a:prstGeom prst="rect">
             <a:avLst/>
@@ -3169,7 +3169,7 @@
               </a:lnSpc>
               <a:buNone/>
             </a:pPr>
-            <a:fld id="{82393524-EE59-445C-B454-46639718D29B}" type="slidenum">
+            <a:fld id="{E1114AE3-B9E3-4422-81FD-1F1489ABFCB9}" type="slidenum">
               <a:rPr b="0" lang="en-US" sz="1200" spc="-1" strike="noStrike">
                 <a:latin typeface="Times New Roman"/>
               </a:rPr>
@@ -5013,7 +5013,7 @@
         <p:spPr>
           <a:xfrm>
             <a:off x="5638680" y="2266920"/>
-            <a:ext cx="913680" cy="18360"/>
+            <a:ext cx="913320" cy="18000"/>
           </a:xfrm>
           <a:custGeom>
             <a:avLst/>
@@ -5064,7 +5064,7 @@
         <p:spPr>
           <a:xfrm>
             <a:off x="3633840" y="2514600"/>
-            <a:ext cx="4923720" cy="913680"/>
+            <a:ext cx="4923360" cy="913320"/>
           </a:xfrm>
           <a:prstGeom prst="rect">
             <a:avLst/>
@@ -5102,9 +5102,6 @@
               <a:t>Game Theory</a:t>
             </a:r>
             <a:endParaRPr b="0" lang="en-HK" sz="7200" spc="-1" strike="noStrike">
-              <a:solidFill>
-                <a:srgbClr val="ffffff"/>
-              </a:solidFill>
               <a:latin typeface="Arial"/>
             </a:endParaRPr>
           </a:p>
@@ -5119,7 +5116,7 @@
         <p:spPr>
           <a:xfrm>
             <a:off x="5638680" y="3657600"/>
-            <a:ext cx="913680" cy="18360"/>
+            <a:ext cx="913320" cy="18000"/>
           </a:xfrm>
           <a:custGeom>
             <a:avLst/>
@@ -5170,7 +5167,7 @@
         <p:spPr>
           <a:xfrm>
             <a:off x="3545640" y="4286160"/>
-            <a:ext cx="5095080" cy="304200"/>
+            <a:ext cx="5094720" cy="303840"/>
           </a:xfrm>
           <a:prstGeom prst="rect">
             <a:avLst/>
@@ -5198,7 +5195,7 @@
               <a:buNone/>
             </a:pPr>
             <a:r>
-              <a:rPr b="0" lang="en-US" sz="1800" spc="41" strike="noStrike">
+              <a:rPr b="0" lang="en-US" sz="1800" spc="38" strike="noStrike">
                 <a:solidFill>
                   <a:srgbClr val="ffffff"/>
                 </a:solidFill>
@@ -5208,9 +5205,6 @@
               <a:t>The Mathematics of Strategic Decision-Making</a:t>
             </a:r>
             <a:endParaRPr b="0" lang="en-HK" sz="1800" spc="-1" strike="noStrike">
-              <a:solidFill>
-                <a:srgbClr val="ffffff"/>
-              </a:solidFill>
               <a:latin typeface="Arial"/>
             </a:endParaRPr>
           </a:p>
@@ -5262,7 +5256,7 @@
         <p:spPr>
           <a:xfrm>
             <a:off x="380880" y="380880"/>
-            <a:ext cx="11505600" cy="227880"/>
+            <a:ext cx="11505240" cy="227520"/>
           </a:xfrm>
           <a:prstGeom prst="rect">
             <a:avLst/>
@@ -5290,7 +5284,7 @@
               <a:buNone/>
             </a:pPr>
             <a:r>
-              <a:rPr b="1" lang="en-US" sz="1200" spc="55" strike="noStrike">
+              <a:rPr b="1" lang="en-US" sz="1200" spc="52" strike="noStrike">
                 <a:solidFill>
                   <a:srgbClr val="0984e3"/>
                 </a:solidFill>
@@ -5314,7 +5308,7 @@
         <p:spPr>
           <a:xfrm>
             <a:off x="380880" y="685800"/>
-            <a:ext cx="11657880" cy="456480"/>
+            <a:ext cx="11657520" cy="456120"/>
           </a:xfrm>
           <a:prstGeom prst="rect">
             <a:avLst/>
@@ -5366,7 +5360,7 @@
         <p:spPr>
           <a:xfrm>
             <a:off x="380880" y="1419120"/>
-            <a:ext cx="5496480" cy="828000"/>
+            <a:ext cx="5496120" cy="827640"/>
           </a:xfrm>
           <a:prstGeom prst="rect">
             <a:avLst/>
@@ -5418,7 +5412,7 @@
         <p:spPr>
           <a:xfrm>
             <a:off x="380880" y="2452680"/>
-            <a:ext cx="5647680" cy="837360"/>
+            <a:ext cx="5647320" cy="837000"/>
           </a:xfrm>
           <a:prstGeom prst="rect">
             <a:avLst/>
@@ -5470,7 +5464,7 @@
         <p:spPr>
           <a:xfrm>
             <a:off x="380880" y="3867120"/>
-            <a:ext cx="5562000" cy="2018520"/>
+            <a:ext cx="5561640" cy="2018160"/>
           </a:xfrm>
           <a:custGeom>
             <a:avLst/>
@@ -5521,7 +5515,7 @@
         <p:spPr>
           <a:xfrm>
             <a:off x="609480" y="4095720"/>
-            <a:ext cx="5199840" cy="266040"/>
+            <a:ext cx="5199480" cy="265680"/>
           </a:xfrm>
           <a:prstGeom prst="rect">
             <a:avLst/>
@@ -5573,7 +5567,7 @@
         <p:spPr>
           <a:xfrm>
             <a:off x="609480" y="4476600"/>
-            <a:ext cx="5180760" cy="246960"/>
+            <a:ext cx="5180400" cy="246600"/>
           </a:xfrm>
           <a:prstGeom prst="rect">
             <a:avLst/>
@@ -5665,7 +5659,7 @@
         <p:spPr>
           <a:xfrm>
             <a:off x="609480" y="4838760"/>
-            <a:ext cx="5104800" cy="456480"/>
+            <a:ext cx="5104440" cy="456120"/>
           </a:xfrm>
           <a:custGeom>
             <a:avLst/>
@@ -5716,24 +5710,24 @@
         <p:spPr>
           <a:xfrm>
             <a:off x="609480" y="4838760"/>
-            <a:ext cx="5180760" cy="456480"/>
-          </a:xfrm>
-          <a:prstGeom prst="rect">
-            <a:avLst/>
-          </a:prstGeom>
-          <a:noFill/>
-          <a:ln w="0">
-            <a:noFill/>
-          </a:ln>
-        </p:spPr>
-        <p:style>
-          <a:lnRef idx="0"/>
-          <a:fillRef idx="0"/>
-          <a:effectRef idx="0"/>
-          <a:fontRef idx="minor"/>
-        </p:style>
-        <p:txBody>
-          <a:bodyPr lIns="114480" rIns="114480" tIns="457200" bIns="457200" anchor="ctr">
+            <a:ext cx="5180400" cy="456120"/>
+          </a:xfrm>
+          <a:prstGeom prst="rect">
+            <a:avLst/>
+          </a:prstGeom>
+          <a:noFill/>
+          <a:ln w="0">
+            <a:noFill/>
+          </a:ln>
+        </p:spPr>
+        <p:style>
+          <a:lnRef idx="0"/>
+          <a:fillRef idx="0"/>
+          <a:effectRef idx="0"/>
+          <a:fontRef idx="minor"/>
+        </p:style>
+        <p:txBody>
+          <a:bodyPr lIns="114480" rIns="114480" tIns="456480" bIns="456480" anchor="ctr">
             <a:noAutofit/>
           </a:bodyPr>
           <a:p>
@@ -5768,7 +5762,7 @@
         <p:spPr>
           <a:xfrm>
             <a:off x="609480" y="5410080"/>
-            <a:ext cx="5180760" cy="246960"/>
+            <a:ext cx="5180400" cy="246600"/>
           </a:xfrm>
           <a:prstGeom prst="rect">
             <a:avLst/>
@@ -5840,7 +5834,7 @@
         <p:spPr>
           <a:xfrm>
             <a:off x="6253200" y="1376280"/>
-            <a:ext cx="5552280" cy="3209040"/>
+            <a:ext cx="5551920" cy="3208680"/>
           </a:xfrm>
           <a:custGeom>
             <a:avLst/>
@@ -5894,7 +5888,7 @@
         <p:spPr>
           <a:xfrm>
             <a:off x="6486480" y="1609560"/>
-            <a:ext cx="5180760" cy="266040"/>
+            <a:ext cx="5180400" cy="265680"/>
           </a:xfrm>
           <a:prstGeom prst="rect">
             <a:avLst/>
@@ -5946,7 +5940,7 @@
         <p:spPr>
           <a:xfrm>
             <a:off x="6486480" y="2028960"/>
-            <a:ext cx="304200" cy="304200"/>
+            <a:ext cx="303840" cy="303840"/>
           </a:xfrm>
           <a:custGeom>
             <a:avLst/>
@@ -5997,7 +5991,7 @@
         <p:spPr>
           <a:xfrm>
             <a:off x="6453360" y="2028960"/>
-            <a:ext cx="370800" cy="304200"/>
+            <a:ext cx="370440" cy="303840"/>
           </a:xfrm>
           <a:prstGeom prst="rect">
             <a:avLst/>
@@ -6049,7 +6043,7 @@
         <p:spPr>
           <a:xfrm>
             <a:off x="6905520" y="2028960"/>
-            <a:ext cx="3066480" cy="227880"/>
+            <a:ext cx="3066120" cy="227520"/>
           </a:xfrm>
           <a:prstGeom prst="rect">
             <a:avLst/>
@@ -6101,7 +6095,7 @@
         <p:spPr>
           <a:xfrm>
             <a:off x="6905520" y="2295360"/>
-            <a:ext cx="3066480" cy="227880"/>
+            <a:ext cx="3066120" cy="227520"/>
           </a:xfrm>
           <a:prstGeom prst="rect">
             <a:avLst/>
@@ -6153,7 +6147,7 @@
         <p:spPr>
           <a:xfrm>
             <a:off x="6486480" y="2638440"/>
-            <a:ext cx="304200" cy="304200"/>
+            <a:ext cx="303840" cy="303840"/>
           </a:xfrm>
           <a:custGeom>
             <a:avLst/>
@@ -6204,7 +6198,7 @@
         <p:spPr>
           <a:xfrm>
             <a:off x="6453360" y="2638440"/>
-            <a:ext cx="370800" cy="304200"/>
+            <a:ext cx="370440" cy="303840"/>
           </a:xfrm>
           <a:prstGeom prst="rect">
             <a:avLst/>
@@ -6256,7 +6250,7 @@
         <p:spPr>
           <a:xfrm>
             <a:off x="6905520" y="2638440"/>
-            <a:ext cx="3666240" cy="227880"/>
+            <a:ext cx="3665880" cy="227520"/>
           </a:xfrm>
           <a:prstGeom prst="rect">
             <a:avLst/>
@@ -6308,7 +6302,7 @@
         <p:spPr>
           <a:xfrm>
             <a:off x="6905520" y="2905200"/>
-            <a:ext cx="3666240" cy="227880"/>
+            <a:ext cx="3665880" cy="227520"/>
           </a:xfrm>
           <a:prstGeom prst="rect">
             <a:avLst/>
@@ -6360,7 +6354,7 @@
         <p:spPr>
           <a:xfrm>
             <a:off x="6486480" y="3247920"/>
-            <a:ext cx="304200" cy="304200"/>
+            <a:ext cx="303840" cy="303840"/>
           </a:xfrm>
           <a:custGeom>
             <a:avLst/>
@@ -6411,7 +6405,7 @@
         <p:spPr>
           <a:xfrm>
             <a:off x="6453360" y="3247920"/>
-            <a:ext cx="370800" cy="304200"/>
+            <a:ext cx="370440" cy="303840"/>
           </a:xfrm>
           <a:prstGeom prst="rect">
             <a:avLst/>
@@ -6463,7 +6457,7 @@
         <p:spPr>
           <a:xfrm>
             <a:off x="6905520" y="3247920"/>
-            <a:ext cx="3285360" cy="227880"/>
+            <a:ext cx="3285000" cy="227520"/>
           </a:xfrm>
           <a:prstGeom prst="rect">
             <a:avLst/>
@@ -6515,7 +6509,7 @@
         <p:spPr>
           <a:xfrm>
             <a:off x="6905520" y="3514680"/>
-            <a:ext cx="3285360" cy="227880"/>
+            <a:ext cx="3285000" cy="227520"/>
           </a:xfrm>
           <a:prstGeom prst="rect">
             <a:avLst/>
@@ -6567,7 +6561,7 @@
         <p:spPr>
           <a:xfrm>
             <a:off x="6486480" y="3857760"/>
-            <a:ext cx="304200" cy="304200"/>
+            <a:ext cx="303840" cy="303840"/>
           </a:xfrm>
           <a:custGeom>
             <a:avLst/>
@@ -6618,7 +6612,7 @@
         <p:spPr>
           <a:xfrm>
             <a:off x="6453360" y="3857760"/>
-            <a:ext cx="370800" cy="304200"/>
+            <a:ext cx="370440" cy="303840"/>
           </a:xfrm>
           <a:prstGeom prst="rect">
             <a:avLst/>
@@ -6670,7 +6664,7 @@
         <p:spPr>
           <a:xfrm>
             <a:off x="6905520" y="3857760"/>
-            <a:ext cx="4133160" cy="227880"/>
+            <a:ext cx="4132800" cy="227520"/>
           </a:xfrm>
           <a:prstGeom prst="rect">
             <a:avLst/>
@@ -6722,7 +6716,7 @@
         <p:spPr>
           <a:xfrm>
             <a:off x="6905520" y="4124160"/>
-            <a:ext cx="4133160" cy="227880"/>
+            <a:ext cx="4132800" cy="227520"/>
           </a:xfrm>
           <a:prstGeom prst="rect">
             <a:avLst/>
@@ -6774,7 +6768,7 @@
         <p:spPr>
           <a:xfrm>
             <a:off x="6267600" y="4743360"/>
-            <a:ext cx="5542920" cy="1142280"/>
+            <a:ext cx="5542560" cy="1141920"/>
           </a:xfrm>
           <a:custGeom>
             <a:avLst/>
@@ -6825,7 +6819,7 @@
         <p:spPr>
           <a:xfrm>
             <a:off x="6267600" y="4743360"/>
-            <a:ext cx="37440" cy="1142280"/>
+            <a:ext cx="37080" cy="1141920"/>
           </a:xfrm>
           <a:custGeom>
             <a:avLst/>
@@ -6876,7 +6870,7 @@
         <p:spPr>
           <a:xfrm>
             <a:off x="6477120" y="4933800"/>
-            <a:ext cx="5218920" cy="494640"/>
+            <a:ext cx="5218560" cy="494280"/>
           </a:xfrm>
           <a:prstGeom prst="rect">
             <a:avLst/>
@@ -6928,7 +6922,7 @@
         <p:spPr>
           <a:xfrm>
             <a:off x="6477120" y="5505480"/>
-            <a:ext cx="5209560" cy="189720"/>
+            <a:ext cx="5209200" cy="189360"/>
           </a:xfrm>
           <a:prstGeom prst="rect">
             <a:avLst/>
@@ -7027,7 +7021,7 @@
         <p:spPr>
           <a:xfrm>
             <a:off x="379440" y="379440"/>
-            <a:ext cx="11508120" cy="227160"/>
+            <a:ext cx="11507760" cy="226800"/>
           </a:xfrm>
           <a:prstGeom prst="rect">
             <a:avLst/>
@@ -7055,7 +7049,7 @@
               <a:buNone/>
             </a:pPr>
             <a:r>
-              <a:rPr b="1" lang="en-US" sz="1200" spc="55" strike="noStrike">
+              <a:rPr b="1" lang="en-US" sz="1200" spc="52" strike="noStrike">
                 <a:solidFill>
                   <a:srgbClr val="0984e3"/>
                 </a:solidFill>
@@ -7079,7 +7073,7 @@
         <p:spPr>
           <a:xfrm>
             <a:off x="379440" y="683280"/>
-            <a:ext cx="11660040" cy="454680"/>
+            <a:ext cx="11659680" cy="454320"/>
           </a:xfrm>
           <a:prstGeom prst="rect">
             <a:avLst/>
@@ -7131,7 +7125,7 @@
         <p:spPr>
           <a:xfrm>
             <a:off x="379440" y="1366200"/>
-            <a:ext cx="5682600" cy="302760"/>
+            <a:ext cx="5682240" cy="302400"/>
           </a:xfrm>
           <a:prstGeom prst="rect">
             <a:avLst/>
@@ -7183,7 +7177,7 @@
         <p:spPr>
           <a:xfrm>
             <a:off x="379440" y="1826280"/>
-            <a:ext cx="5096520" cy="466560"/>
+            <a:ext cx="5096160" cy="466200"/>
           </a:xfrm>
           <a:prstGeom prst="rect">
             <a:avLst/>
@@ -7235,7 +7229,7 @@
         <p:spPr>
           <a:xfrm>
             <a:off x="379440" y="2452680"/>
-            <a:ext cx="5644440" cy="739440"/>
+            <a:ext cx="5644080" cy="739080"/>
           </a:xfrm>
           <a:prstGeom prst="rect">
             <a:avLst/>
@@ -7287,7 +7281,7 @@
         <p:spPr>
           <a:xfrm>
             <a:off x="398520" y="3306600"/>
-            <a:ext cx="5549760" cy="758160"/>
+            <a:ext cx="5549400" cy="757800"/>
           </a:xfrm>
           <a:custGeom>
             <a:avLst/>
@@ -7338,7 +7332,7 @@
         <p:spPr>
           <a:xfrm>
             <a:off x="398520" y="3306600"/>
-            <a:ext cx="37080" cy="758160"/>
+            <a:ext cx="36720" cy="757800"/>
           </a:xfrm>
           <a:custGeom>
             <a:avLst/>
@@ -7389,7 +7383,7 @@
         <p:spPr>
           <a:xfrm>
             <a:off x="569160" y="3458520"/>
-            <a:ext cx="5303160" cy="454680"/>
+            <a:ext cx="5302800" cy="454320"/>
           </a:xfrm>
           <a:prstGeom prst="rect">
             <a:avLst/>
@@ -7482,7 +7476,7 @@
         <p:spPr>
           <a:xfrm>
             <a:off x="379440" y="4217400"/>
-            <a:ext cx="5682600" cy="302760"/>
+            <a:ext cx="5682240" cy="302400"/>
           </a:xfrm>
           <a:prstGeom prst="rect">
             <a:avLst/>
@@ -7534,7 +7528,7 @@
         <p:spPr>
           <a:xfrm>
             <a:off x="379440" y="4635000"/>
-            <a:ext cx="5644440" cy="739440"/>
+            <a:ext cx="5644080" cy="739080"/>
           </a:xfrm>
           <a:prstGeom prst="rect">
             <a:avLst/>
@@ -7586,7 +7580,7 @@
         <p:spPr>
           <a:xfrm>
             <a:off x="6249240" y="1366200"/>
-            <a:ext cx="5682600" cy="302760"/>
+            <a:ext cx="5682240" cy="302400"/>
           </a:xfrm>
           <a:prstGeom prst="rect">
             <a:avLst/>
@@ -7638,7 +7632,7 @@
         <p:spPr>
           <a:xfrm>
             <a:off x="6249240" y="1826280"/>
-            <a:ext cx="5249880" cy="466560"/>
+            <a:ext cx="5249520" cy="466200"/>
           </a:xfrm>
           <a:prstGeom prst="rect">
             <a:avLst/>
@@ -7690,7 +7684,7 @@
         <p:spPr>
           <a:xfrm>
             <a:off x="6249240" y="2452680"/>
-            <a:ext cx="5644440" cy="739440"/>
+            <a:ext cx="5644080" cy="739080"/>
           </a:xfrm>
           <a:prstGeom prst="rect">
             <a:avLst/>
@@ -7742,7 +7736,7 @@
         <p:spPr>
           <a:xfrm>
             <a:off x="6249240" y="3344400"/>
-            <a:ext cx="5568840" cy="2181600"/>
+            <a:ext cx="5568480" cy="2181240"/>
           </a:xfrm>
           <a:custGeom>
             <a:avLst/>
@@ -7793,7 +7787,7 @@
         <p:spPr>
           <a:xfrm>
             <a:off x="6438960" y="3534120"/>
-            <a:ext cx="5284080" cy="264960"/>
+            <a:ext cx="5283720" cy="264600"/>
           </a:xfrm>
           <a:prstGeom prst="rect">
             <a:avLst/>
@@ -7845,7 +7839,7 @@
         <p:spPr>
           <a:xfrm>
             <a:off x="6438960" y="3913920"/>
-            <a:ext cx="5265000" cy="245880"/>
+            <a:ext cx="5264640" cy="245520"/>
           </a:xfrm>
           <a:prstGeom prst="rect">
             <a:avLst/>
@@ -7897,7 +7891,7 @@
         <p:spPr>
           <a:xfrm>
             <a:off x="6438960" y="4274280"/>
-            <a:ext cx="5189040" cy="454680"/>
+            <a:ext cx="5188680" cy="454320"/>
           </a:xfrm>
           <a:custGeom>
             <a:avLst/>
@@ -7948,24 +7942,24 @@
         <p:spPr>
           <a:xfrm>
             <a:off x="6438960" y="4274280"/>
-            <a:ext cx="5265000" cy="454680"/>
-          </a:xfrm>
-          <a:prstGeom prst="rect">
-            <a:avLst/>
-          </a:prstGeom>
-          <a:noFill/>
-          <a:ln w="0">
-            <a:noFill/>
-          </a:ln>
-        </p:spPr>
-        <p:style>
-          <a:lnRef idx="0"/>
-          <a:fillRef idx="0"/>
-          <a:effectRef idx="0"/>
-          <a:fontRef idx="minor"/>
-        </p:style>
-        <p:txBody>
-          <a:bodyPr lIns="113760" rIns="113760" tIns="113760" bIns="113760" anchor="ctr">
+            <a:ext cx="5264640" cy="454320"/>
+          </a:xfrm>
+          <a:prstGeom prst="rect">
+            <a:avLst/>
+          </a:prstGeom>
+          <a:noFill/>
+          <a:ln w="0">
+            <a:noFill/>
+          </a:ln>
+        </p:spPr>
+        <p:style>
+          <a:lnRef idx="0"/>
+          <a:fillRef idx="0"/>
+          <a:effectRef idx="0"/>
+          <a:fontRef idx="minor"/>
+        </p:style>
+        <p:txBody>
+          <a:bodyPr lIns="113760" rIns="113760" tIns="227520" bIns="227520" anchor="ctr">
             <a:noAutofit/>
           </a:bodyPr>
           <a:p>
@@ -8000,7 +7994,7 @@
         <p:spPr>
           <a:xfrm>
             <a:off x="6438960" y="4843440"/>
-            <a:ext cx="5265000" cy="492480"/>
+            <a:ext cx="5264640" cy="492120"/>
           </a:xfrm>
           <a:prstGeom prst="rect">
             <a:avLst/>
@@ -8052,7 +8046,7 @@
         <p:spPr>
           <a:xfrm>
             <a:off x="6268320" y="5678640"/>
-            <a:ext cx="5549760" cy="796320"/>
+            <a:ext cx="5549400" cy="795960"/>
           </a:xfrm>
           <a:custGeom>
             <a:avLst/>
@@ -8103,7 +8097,7 @@
         <p:spPr>
           <a:xfrm>
             <a:off x="6268320" y="5678640"/>
-            <a:ext cx="37080" cy="796320"/>
+            <a:ext cx="36720" cy="795960"/>
           </a:xfrm>
           <a:custGeom>
             <a:avLst/>
@@ -8154,7 +8148,7 @@
         <p:spPr>
           <a:xfrm>
             <a:off x="6438960" y="5830200"/>
-            <a:ext cx="5303160" cy="492480"/>
+            <a:ext cx="5302800" cy="492120"/>
           </a:xfrm>
           <a:prstGeom prst="rect">
             <a:avLst/>
@@ -8253,7 +8247,7 @@
         <p:spPr>
           <a:xfrm>
             <a:off x="609480" y="2066760"/>
-            <a:ext cx="12191400" cy="1218600"/>
+            <a:ext cx="12191040" cy="1218240"/>
           </a:xfrm>
           <a:prstGeom prst="rect">
             <a:avLst/>
@@ -8307,7 +8301,7 @@
         <p:spPr>
           <a:xfrm>
             <a:off x="609480" y="3438360"/>
-            <a:ext cx="11867400" cy="570960"/>
+            <a:ext cx="11867040" cy="570600"/>
           </a:xfrm>
           <a:prstGeom prst="rect">
             <a:avLst/>
@@ -8359,7 +8353,7 @@
         <p:spPr>
           <a:xfrm>
             <a:off x="609480" y="4238640"/>
-            <a:ext cx="1218600" cy="18360"/>
+            <a:ext cx="1218240" cy="18000"/>
           </a:xfrm>
           <a:custGeom>
             <a:avLst/>
@@ -8410,7 +8404,7 @@
         <p:spPr>
           <a:xfrm>
             <a:off x="609480" y="4486320"/>
-            <a:ext cx="11696040" cy="304200"/>
+            <a:ext cx="11695680" cy="303840"/>
           </a:xfrm>
           <a:prstGeom prst="rect">
             <a:avLst/>
@@ -8499,7 +8493,7 @@
         <p:spPr>
           <a:xfrm>
             <a:off x="356400" y="356400"/>
-            <a:ext cx="11550240" cy="213120"/>
+            <a:ext cx="11549880" cy="212760"/>
           </a:xfrm>
           <a:prstGeom prst="rect">
             <a:avLst/>
@@ -8527,7 +8521,7 @@
               <a:buNone/>
             </a:pPr>
             <a:r>
-              <a:rPr b="1" lang="en-US" sz="1120" spc="52" strike="noStrike">
+              <a:rPr b="1" lang="en-US" sz="1120" spc="49" strike="noStrike">
                 <a:solidFill>
                   <a:srgbClr val="0984e3"/>
                 </a:solidFill>
@@ -8551,7 +8545,7 @@
         <p:spPr>
           <a:xfrm>
             <a:off x="356400" y="641160"/>
-            <a:ext cx="11692440" cy="426600"/>
+            <a:ext cx="11692080" cy="426240"/>
           </a:xfrm>
           <a:prstGeom prst="rect">
             <a:avLst/>
@@ -8603,7 +8597,7 @@
         <p:spPr>
           <a:xfrm>
             <a:off x="360720" y="1287000"/>
-            <a:ext cx="3695040" cy="2626560"/>
+            <a:ext cx="3694680" cy="2626200"/>
           </a:xfrm>
           <a:custGeom>
             <a:avLst/>
@@ -8657,7 +8651,7 @@
         <p:spPr>
           <a:xfrm>
             <a:off x="543240" y="1469520"/>
-            <a:ext cx="426600" cy="426600"/>
+            <a:ext cx="426240" cy="426240"/>
           </a:xfrm>
           <a:custGeom>
             <a:avLst/>
@@ -8708,7 +8702,7 @@
         <p:spPr>
           <a:xfrm>
             <a:off x="656640" y="1594080"/>
-            <a:ext cx="199800" cy="177480"/>
+            <a:ext cx="199440" cy="177120"/>
           </a:xfrm>
           <a:custGeom>
             <a:avLst/>
@@ -8905,7 +8899,7 @@
         <p:spPr>
           <a:xfrm>
             <a:off x="1077480" y="1558440"/>
-            <a:ext cx="2341440" cy="248760"/>
+            <a:ext cx="2341080" cy="248400"/>
           </a:xfrm>
           <a:prstGeom prst="rect">
             <a:avLst/>
@@ -8957,7 +8951,7 @@
         <p:spPr>
           <a:xfrm>
             <a:off x="543240" y="2003760"/>
-            <a:ext cx="3401280" cy="694080"/>
+            <a:ext cx="3400920" cy="693720"/>
           </a:xfrm>
           <a:prstGeom prst="rect">
             <a:avLst/>
@@ -9019,7 +9013,7 @@
         <p:spPr>
           <a:xfrm>
             <a:off x="543240" y="2805480"/>
-            <a:ext cx="3401280" cy="925560"/>
+            <a:ext cx="3400920" cy="925200"/>
           </a:xfrm>
           <a:prstGeom prst="rect">
             <a:avLst/>
@@ -9081,7 +9075,7 @@
         <p:spPr>
           <a:xfrm>
             <a:off x="4246200" y="1287000"/>
-            <a:ext cx="3695040" cy="2626560"/>
+            <a:ext cx="3694680" cy="2626200"/>
           </a:xfrm>
           <a:custGeom>
             <a:avLst/>
@@ -9135,7 +9129,7 @@
         <p:spPr>
           <a:xfrm>
             <a:off x="4428720" y="1469520"/>
-            <a:ext cx="426600" cy="426600"/>
+            <a:ext cx="426240" cy="426240"/>
           </a:xfrm>
           <a:custGeom>
             <a:avLst/>
@@ -9186,7 +9180,7 @@
         <p:spPr>
           <a:xfrm>
             <a:off x="4542120" y="1594080"/>
-            <a:ext cx="199800" cy="177480"/>
+            <a:ext cx="199440" cy="177120"/>
           </a:xfrm>
           <a:custGeom>
             <a:avLst/>
@@ -9338,7 +9332,7 @@
         <p:spPr>
           <a:xfrm>
             <a:off x="4962960" y="1558440"/>
-            <a:ext cx="2430720" cy="248760"/>
+            <a:ext cx="2430360" cy="248400"/>
           </a:xfrm>
           <a:prstGeom prst="rect">
             <a:avLst/>
@@ -9390,7 +9384,7 @@
         <p:spPr>
           <a:xfrm>
             <a:off x="4428720" y="2003760"/>
-            <a:ext cx="3401280" cy="694080"/>
+            <a:ext cx="3400920" cy="693720"/>
           </a:xfrm>
           <a:prstGeom prst="rect">
             <a:avLst/>
@@ -9452,7 +9446,7 @@
         <p:spPr>
           <a:xfrm>
             <a:off x="4428720" y="2805480"/>
-            <a:ext cx="3401280" cy="694080"/>
+            <a:ext cx="3400920" cy="693720"/>
           </a:xfrm>
           <a:prstGeom prst="rect">
             <a:avLst/>
@@ -9514,7 +9508,7 @@
         <p:spPr>
           <a:xfrm>
             <a:off x="8131680" y="1287000"/>
-            <a:ext cx="3695040" cy="2626560"/>
+            <a:ext cx="3694680" cy="2626200"/>
           </a:xfrm>
           <a:custGeom>
             <a:avLst/>
@@ -9568,7 +9562,7 @@
         <p:spPr>
           <a:xfrm>
             <a:off x="8314200" y="1469520"/>
-            <a:ext cx="426600" cy="426600"/>
+            <a:ext cx="426240" cy="426240"/>
           </a:xfrm>
           <a:custGeom>
             <a:avLst/>
@@ -9619,7 +9613,7 @@
         <p:spPr>
           <a:xfrm>
             <a:off x="8439120" y="1594080"/>
-            <a:ext cx="177480" cy="177480"/>
+            <a:ext cx="177120" cy="177120"/>
           </a:xfrm>
           <a:custGeom>
             <a:avLst/>
@@ -9719,7 +9713,7 @@
         <p:spPr>
           <a:xfrm>
             <a:off x="8848800" y="1558440"/>
-            <a:ext cx="2038680" cy="248760"/>
+            <a:ext cx="2038320" cy="248400"/>
           </a:xfrm>
           <a:prstGeom prst="rect">
             <a:avLst/>
@@ -9771,7 +9765,7 @@
         <p:spPr>
           <a:xfrm>
             <a:off x="8314200" y="2003760"/>
-            <a:ext cx="3401280" cy="694080"/>
+            <a:ext cx="3400920" cy="693720"/>
           </a:xfrm>
           <a:prstGeom prst="rect">
             <a:avLst/>
@@ -9833,7 +9827,7 @@
         <p:spPr>
           <a:xfrm>
             <a:off x="8314200" y="2805480"/>
-            <a:ext cx="3401280" cy="694080"/>
+            <a:ext cx="3400920" cy="693720"/>
           </a:xfrm>
           <a:prstGeom prst="rect">
             <a:avLst/>
@@ -9895,7 +9889,7 @@
         <p:spPr>
           <a:xfrm>
             <a:off x="360720" y="4101120"/>
-            <a:ext cx="3695040" cy="2395080"/>
+            <a:ext cx="3694680" cy="2394720"/>
           </a:xfrm>
           <a:custGeom>
             <a:avLst/>
@@ -9949,7 +9943,7 @@
         <p:spPr>
           <a:xfrm>
             <a:off x="543240" y="4283640"/>
-            <a:ext cx="426600" cy="426600"/>
+            <a:ext cx="426240" cy="426240"/>
           </a:xfrm>
           <a:custGeom>
             <a:avLst/>
@@ -10000,7 +9994,7 @@
         <p:spPr>
           <a:xfrm>
             <a:off x="645840" y="4408200"/>
-            <a:ext cx="221760" cy="177480"/>
+            <a:ext cx="221400" cy="177120"/>
           </a:xfrm>
           <a:custGeom>
             <a:avLst/>
@@ -10232,7 +10226,7 @@
         <p:spPr>
           <a:xfrm>
             <a:off x="1077480" y="4372560"/>
-            <a:ext cx="1931760" cy="248760"/>
+            <a:ext cx="1931400" cy="248400"/>
           </a:xfrm>
           <a:prstGeom prst="rect">
             <a:avLst/>
@@ -10284,7 +10278,7 @@
         <p:spPr>
           <a:xfrm>
             <a:off x="543240" y="4817880"/>
-            <a:ext cx="3401280" cy="694080"/>
+            <a:ext cx="3400920" cy="693720"/>
           </a:xfrm>
           <a:prstGeom prst="rect">
             <a:avLst/>
@@ -10346,7 +10340,7 @@
         <p:spPr>
           <a:xfrm>
             <a:off x="543240" y="5619600"/>
-            <a:ext cx="3401280" cy="694080"/>
+            <a:ext cx="3400920" cy="693720"/>
           </a:xfrm>
           <a:prstGeom prst="rect">
             <a:avLst/>
@@ -10408,7 +10402,7 @@
         <p:spPr>
           <a:xfrm>
             <a:off x="4246200" y="4101120"/>
-            <a:ext cx="7587000" cy="2395080"/>
+            <a:ext cx="7586640" cy="2394720"/>
           </a:xfrm>
           <a:custGeom>
             <a:avLst/>
@@ -10462,7 +10456,7 @@
         <p:spPr>
           <a:xfrm>
             <a:off x="4428720" y="4283640"/>
-            <a:ext cx="426600" cy="426600"/>
+            <a:ext cx="426240" cy="426240"/>
           </a:xfrm>
           <a:custGeom>
             <a:avLst/>
@@ -10513,7 +10507,7 @@
         <p:spPr>
           <a:xfrm>
             <a:off x="4553280" y="4408200"/>
-            <a:ext cx="177480" cy="177480"/>
+            <a:ext cx="177120" cy="177120"/>
           </a:xfrm>
           <a:custGeom>
             <a:avLst/>
@@ -10646,7 +10640,7 @@
         <p:spPr>
           <a:xfrm>
             <a:off x="4962960" y="4372560"/>
-            <a:ext cx="2047680" cy="248760"/>
+            <a:ext cx="2047320" cy="248400"/>
           </a:xfrm>
           <a:prstGeom prst="rect">
             <a:avLst/>
@@ -10698,7 +10692,7 @@
         <p:spPr>
           <a:xfrm>
             <a:off x="4428720" y="4817880"/>
-            <a:ext cx="3606120" cy="694080"/>
+            <a:ext cx="3605760" cy="693720"/>
           </a:xfrm>
           <a:prstGeom prst="rect">
             <a:avLst/>
@@ -10760,7 +10754,7 @@
         <p:spPr>
           <a:xfrm>
             <a:off x="4428720" y="5583960"/>
-            <a:ext cx="3606120" cy="462240"/>
+            <a:ext cx="3605760" cy="461880"/>
           </a:xfrm>
           <a:prstGeom prst="rect">
             <a:avLst/>
@@ -10812,7 +10806,7 @@
         <p:spPr>
           <a:xfrm>
             <a:off x="8109360" y="4817880"/>
-            <a:ext cx="3606120" cy="694080"/>
+            <a:ext cx="3605760" cy="693720"/>
           </a:xfrm>
           <a:prstGeom prst="rect">
             <a:avLst/>
@@ -10874,7 +10868,7 @@
         <p:spPr>
           <a:xfrm>
             <a:off x="8109360" y="5583960"/>
-            <a:ext cx="3606120" cy="462240"/>
+            <a:ext cx="3605760" cy="461880"/>
           </a:xfrm>
           <a:prstGeom prst="rect">
             <a:avLst/>
@@ -10963,7 +10957,7 @@
         <p:spPr>
           <a:xfrm>
             <a:off x="609480" y="2066760"/>
-            <a:ext cx="12191400" cy="1218600"/>
+            <a:ext cx="12191040" cy="1218240"/>
           </a:xfrm>
           <a:prstGeom prst="rect">
             <a:avLst/>
@@ -11017,7 +11011,7 @@
         <p:spPr>
           <a:xfrm>
             <a:off x="609480" y="3438360"/>
-            <a:ext cx="11867400" cy="570960"/>
+            <a:ext cx="11867040" cy="570600"/>
           </a:xfrm>
           <a:prstGeom prst="rect">
             <a:avLst/>
@@ -11069,7 +11063,7 @@
         <p:spPr>
           <a:xfrm>
             <a:off x="609480" y="4238640"/>
-            <a:ext cx="1218600" cy="18360"/>
+            <a:ext cx="1218240" cy="18000"/>
           </a:xfrm>
           <a:custGeom>
             <a:avLst/>
@@ -11120,7 +11114,7 @@
         <p:spPr>
           <a:xfrm>
             <a:off x="609480" y="4486320"/>
-            <a:ext cx="11696040" cy="304200"/>
+            <a:ext cx="11695680" cy="303840"/>
           </a:xfrm>
           <a:prstGeom prst="rect">
             <a:avLst/>
@@ -11209,7 +11203,7 @@
         <p:spPr>
           <a:xfrm>
             <a:off x="380880" y="380880"/>
-            <a:ext cx="11505600" cy="227880"/>
+            <a:ext cx="11505240" cy="227520"/>
           </a:xfrm>
           <a:prstGeom prst="rect">
             <a:avLst/>
@@ -11237,7 +11231,7 @@
               <a:buNone/>
             </a:pPr>
             <a:r>
-              <a:rPr b="1" lang="en-US" sz="1200" spc="55" strike="noStrike">
+              <a:rPr b="1" lang="en-US" sz="1200" spc="52" strike="noStrike">
                 <a:solidFill>
                   <a:srgbClr val="0984e3"/>
                 </a:solidFill>
@@ -11261,7 +11255,7 @@
         <p:spPr>
           <a:xfrm>
             <a:off x="380880" y="685800"/>
-            <a:ext cx="11657880" cy="456480"/>
+            <a:ext cx="11657520" cy="456120"/>
           </a:xfrm>
           <a:prstGeom prst="rect">
             <a:avLst/>
@@ -11313,7 +11307,7 @@
         <p:spPr>
           <a:xfrm>
             <a:off x="380880" y="1295280"/>
-            <a:ext cx="5657040" cy="1237680"/>
+            <a:ext cx="5656680" cy="1237320"/>
           </a:xfrm>
           <a:prstGeom prst="rect">
             <a:avLst/>
@@ -11375,7 +11369,7 @@
         <p:spPr>
           <a:xfrm>
             <a:off x="380880" y="2647800"/>
-            <a:ext cx="5637960" cy="742320"/>
+            <a:ext cx="5637600" cy="741960"/>
           </a:xfrm>
           <a:prstGeom prst="rect">
             <a:avLst/>
@@ -11427,7 +11421,7 @@
         <p:spPr>
           <a:xfrm>
             <a:off x="385920" y="3548160"/>
-            <a:ext cx="5552280" cy="2028240"/>
+            <a:ext cx="5551920" cy="2027880"/>
           </a:xfrm>
           <a:custGeom>
             <a:avLst/>
@@ -11481,7 +11475,7 @@
         <p:spPr>
           <a:xfrm>
             <a:off x="495360" y="3705120"/>
-            <a:ext cx="5333400" cy="266040"/>
+            <a:ext cx="5333040" cy="265680"/>
           </a:xfrm>
           <a:prstGeom prst="rect">
             <a:avLst/>
@@ -12007,7 +12001,7 @@
         <p:spPr>
           <a:xfrm>
             <a:off x="509760" y="5229360"/>
-            <a:ext cx="5304600" cy="189720"/>
+            <a:ext cx="5304240" cy="189360"/>
           </a:xfrm>
           <a:prstGeom prst="rect">
             <a:avLst/>
@@ -12059,7 +12053,7 @@
         <p:spPr>
           <a:xfrm>
             <a:off x="6253200" y="1300320"/>
-            <a:ext cx="5552280" cy="1608840"/>
+            <a:ext cx="5551920" cy="1608480"/>
           </a:xfrm>
           <a:custGeom>
             <a:avLst/>
@@ -12113,7 +12107,7 @@
         <p:spPr>
           <a:xfrm>
             <a:off x="6448320" y="1495440"/>
-            <a:ext cx="5257080" cy="266040"/>
+            <a:ext cx="5256720" cy="265680"/>
           </a:xfrm>
           <a:prstGeom prst="rect">
             <a:avLst/>
@@ -12165,7 +12159,7 @@
         <p:spPr>
           <a:xfrm>
             <a:off x="6448320" y="1876320"/>
-            <a:ext cx="5238000" cy="227880"/>
+            <a:ext cx="5237640" cy="227520"/>
           </a:xfrm>
           <a:prstGeom prst="rect">
             <a:avLst/>
@@ -12227,7 +12221,7 @@
         <p:spPr>
           <a:xfrm>
             <a:off x="6448320" y="2181240"/>
-            <a:ext cx="5238000" cy="227880"/>
+            <a:ext cx="5237640" cy="227520"/>
           </a:xfrm>
           <a:prstGeom prst="rect">
             <a:avLst/>
@@ -12289,7 +12283,7 @@
         <p:spPr>
           <a:xfrm>
             <a:off x="6448320" y="2486160"/>
-            <a:ext cx="5238000" cy="227880"/>
+            <a:ext cx="5237640" cy="227520"/>
           </a:xfrm>
           <a:prstGeom prst="rect">
             <a:avLst/>
@@ -12341,7 +12335,7 @@
         <p:spPr>
           <a:xfrm>
             <a:off x="6267600" y="3067200"/>
-            <a:ext cx="5542920" cy="2133000"/>
+            <a:ext cx="5542560" cy="2132640"/>
           </a:xfrm>
           <a:custGeom>
             <a:avLst/>
@@ -12392,7 +12386,7 @@
         <p:spPr>
           <a:xfrm>
             <a:off x="6267600" y="3067200"/>
-            <a:ext cx="37440" cy="2133000"/>
+            <a:ext cx="37080" cy="2132640"/>
           </a:xfrm>
           <a:custGeom>
             <a:avLst/>
@@ -12443,7 +12437,7 @@
         <p:spPr>
           <a:xfrm>
             <a:off x="6477120" y="3257640"/>
-            <a:ext cx="5238000" cy="266040"/>
+            <a:ext cx="5237640" cy="265680"/>
           </a:xfrm>
           <a:prstGeom prst="rect">
             <a:avLst/>
@@ -12495,7 +12489,7 @@
         <p:spPr>
           <a:xfrm>
             <a:off x="6496200" y="3672000"/>
-            <a:ext cx="151560" cy="151560"/>
+            <a:ext cx="151200" cy="151200"/>
           </a:xfrm>
           <a:custGeom>
             <a:avLst/>
@@ -12619,7 +12613,7 @@
         <p:spPr>
           <a:xfrm>
             <a:off x="6724800" y="3638520"/>
-            <a:ext cx="4971240" cy="456480"/>
+            <a:ext cx="4970880" cy="456120"/>
           </a:xfrm>
           <a:prstGeom prst="rect">
             <a:avLst/>
@@ -12681,7 +12675,7 @@
         <p:spPr>
           <a:xfrm>
             <a:off x="6496200" y="4205160"/>
-            <a:ext cx="151560" cy="151560"/>
+            <a:ext cx="151200" cy="151200"/>
           </a:xfrm>
           <a:custGeom>
             <a:avLst/>
@@ -12804,7 +12798,7 @@
         <p:spPr>
           <a:xfrm>
             <a:off x="6724800" y="4172040"/>
-            <a:ext cx="4971240" cy="227880"/>
+            <a:ext cx="4970880" cy="227520"/>
           </a:xfrm>
           <a:prstGeom prst="rect">
             <a:avLst/>
@@ -12866,7 +12860,7 @@
         <p:spPr>
           <a:xfrm>
             <a:off x="6515280" y="4510080"/>
-            <a:ext cx="113760" cy="151560"/>
+            <a:ext cx="113400" cy="151200"/>
           </a:xfrm>
           <a:custGeom>
             <a:avLst/>
@@ -13107,7 +13101,7 @@
         <p:spPr>
           <a:xfrm>
             <a:off x="6724800" y="4476600"/>
-            <a:ext cx="4971240" cy="227880"/>
+            <a:ext cx="4970880" cy="227520"/>
           </a:xfrm>
           <a:prstGeom prst="rect">
             <a:avLst/>
@@ -13169,7 +13163,7 @@
         <p:spPr>
           <a:xfrm>
             <a:off x="6486480" y="4815000"/>
-            <a:ext cx="170640" cy="151560"/>
+            <a:ext cx="170280" cy="151200"/>
           </a:xfrm>
           <a:custGeom>
             <a:avLst/>
@@ -13405,7 +13399,7 @@
         <p:spPr>
           <a:xfrm>
             <a:off x="6724800" y="4781520"/>
-            <a:ext cx="4971240" cy="227880"/>
+            <a:ext cx="4970880" cy="227520"/>
           </a:xfrm>
           <a:prstGeom prst="rect">
             <a:avLst/>
@@ -13504,7 +13498,7 @@
         <p:spPr>
           <a:xfrm>
             <a:off x="358560" y="358560"/>
-            <a:ext cx="11545920" cy="214560"/>
+            <a:ext cx="11545560" cy="214200"/>
           </a:xfrm>
           <a:prstGeom prst="rect">
             <a:avLst/>
@@ -13532,7 +13526,7 @@
               <a:buNone/>
             </a:pPr>
             <a:r>
-              <a:rPr b="1" lang="en-US" sz="1130" spc="52" strike="noStrike">
+              <a:rPr b="1" lang="en-US" sz="1130" spc="49" strike="noStrike">
                 <a:solidFill>
                   <a:srgbClr val="0984e3"/>
                 </a:solidFill>
@@ -13556,7 +13550,7 @@
         <p:spPr>
           <a:xfrm>
             <a:off x="358560" y="645480"/>
-            <a:ext cx="11689200" cy="429480"/>
+            <a:ext cx="11688840" cy="429120"/>
           </a:xfrm>
           <a:prstGeom prst="rect">
             <a:avLst/>
@@ -13608,7 +13602,7 @@
         <p:spPr>
           <a:xfrm>
             <a:off x="358560" y="1290960"/>
-            <a:ext cx="5700960" cy="286200"/>
+            <a:ext cx="5700600" cy="285840"/>
           </a:xfrm>
           <a:prstGeom prst="rect">
             <a:avLst/>
@@ -13660,7 +13654,7 @@
         <p:spPr>
           <a:xfrm>
             <a:off x="358560" y="1725840"/>
-            <a:ext cx="5473800" cy="440640"/>
+            <a:ext cx="5473440" cy="440280"/>
           </a:xfrm>
           <a:prstGeom prst="rect">
             <a:avLst/>
@@ -13712,7 +13706,7 @@
         <p:spPr>
           <a:xfrm>
             <a:off x="358560" y="2317320"/>
-            <a:ext cx="5664960" cy="465480"/>
+            <a:ext cx="5664600" cy="465120"/>
           </a:xfrm>
           <a:prstGeom prst="rect">
             <a:avLst/>
@@ -13764,7 +13758,7 @@
         <p:spPr>
           <a:xfrm>
             <a:off x="363240" y="2931480"/>
-            <a:ext cx="5584320" cy="1873080"/>
+            <a:ext cx="5583960" cy="1872720"/>
           </a:xfrm>
           <a:custGeom>
             <a:avLst/>
@@ -13818,7 +13812,7 @@
         <p:spPr>
           <a:xfrm>
             <a:off x="470520" y="3079440"/>
-            <a:ext cx="5369040" cy="250200"/>
+            <a:ext cx="5368680" cy="249840"/>
           </a:xfrm>
           <a:prstGeom prst="rect">
             <a:avLst/>
@@ -14346,7 +14340,7 @@
         <p:spPr>
           <a:xfrm>
             <a:off x="479520" y="4478040"/>
-            <a:ext cx="5351040" cy="178560"/>
+            <a:ext cx="5350680" cy="178200"/>
           </a:xfrm>
           <a:prstGeom prst="rect">
             <a:avLst/>
@@ -14398,7 +14392,7 @@
         <p:spPr>
           <a:xfrm>
             <a:off x="376560" y="4952880"/>
-            <a:ext cx="5575320" cy="752400"/>
+            <a:ext cx="5574960" cy="752040"/>
           </a:xfrm>
           <a:custGeom>
             <a:avLst/>
@@ -14449,7 +14443,7 @@
         <p:spPr>
           <a:xfrm>
             <a:off x="376560" y="4952880"/>
-            <a:ext cx="35280" cy="752400"/>
+            <a:ext cx="34920" cy="752040"/>
           </a:xfrm>
           <a:custGeom>
             <a:avLst/>
@@ -14500,7 +14494,7 @@
         <p:spPr>
           <a:xfrm>
             <a:off x="537840" y="5096520"/>
-            <a:ext cx="5342400" cy="465480"/>
+            <a:ext cx="5342040" cy="465120"/>
           </a:xfrm>
           <a:prstGeom prst="rect">
             <a:avLst/>
@@ -14562,7 +14556,7 @@
         <p:spPr>
           <a:xfrm>
             <a:off x="6239520" y="1290960"/>
-            <a:ext cx="5700960" cy="286200"/>
+            <a:ext cx="5700600" cy="285840"/>
           </a:xfrm>
           <a:prstGeom prst="rect">
             <a:avLst/>
@@ -14614,7 +14608,7 @@
         <p:spPr>
           <a:xfrm>
             <a:off x="6239520" y="1685520"/>
-            <a:ext cx="5673960" cy="528120"/>
+            <a:ext cx="5673600" cy="527760"/>
           </a:xfrm>
           <a:prstGeom prst="rect">
             <a:avLst/>
@@ -14676,7 +14670,7 @@
         <p:spPr>
           <a:xfrm>
             <a:off x="6239520" y="2317320"/>
-            <a:ext cx="5664960" cy="698400"/>
+            <a:ext cx="5664600" cy="698040"/>
           </a:xfrm>
           <a:prstGeom prst="rect">
             <a:avLst/>
@@ -14728,7 +14722,7 @@
         <p:spPr>
           <a:xfrm>
             <a:off x="6243840" y="3164400"/>
-            <a:ext cx="5584320" cy="1873080"/>
+            <a:ext cx="5583960" cy="1872720"/>
           </a:xfrm>
           <a:custGeom>
             <a:avLst/>
@@ -14782,7 +14776,7 @@
         <p:spPr>
           <a:xfrm>
             <a:off x="6351480" y="3312360"/>
-            <a:ext cx="5369040" cy="250200"/>
+            <a:ext cx="5368680" cy="249840"/>
           </a:xfrm>
           <a:prstGeom prst="rect">
             <a:avLst/>
@@ -15308,7 +15302,7 @@
         <p:spPr>
           <a:xfrm>
             <a:off x="6360480" y="4710960"/>
-            <a:ext cx="5351040" cy="178560"/>
+            <a:ext cx="5350680" cy="178200"/>
           </a:xfrm>
           <a:prstGeom prst="rect">
             <a:avLst/>
@@ -15360,7 +15354,7 @@
         <p:spPr>
           <a:xfrm>
             <a:off x="6239520" y="5186160"/>
-            <a:ext cx="5593320" cy="1308240"/>
+            <a:ext cx="5592960" cy="1307880"/>
           </a:xfrm>
           <a:custGeom>
             <a:avLst/>
@@ -15411,7 +15405,7 @@
         <p:spPr>
           <a:xfrm>
             <a:off x="6382800" y="5329440"/>
-            <a:ext cx="5387040" cy="250200"/>
+            <a:ext cx="5386680" cy="249840"/>
           </a:xfrm>
           <a:prstGeom prst="rect">
             <a:avLst/>
@@ -15463,7 +15457,7 @@
         <p:spPr>
           <a:xfrm>
             <a:off x="6382800" y="5652360"/>
-            <a:ext cx="5378040" cy="698400"/>
+            <a:ext cx="5377680" cy="698040"/>
           </a:xfrm>
           <a:prstGeom prst="rect">
             <a:avLst/>
@@ -15552,7 +15546,7 @@
         <p:spPr>
           <a:xfrm>
             <a:off x="609480" y="1781280"/>
-            <a:ext cx="12191400" cy="1218600"/>
+            <a:ext cx="12191040" cy="1218240"/>
           </a:xfrm>
           <a:prstGeom prst="rect">
             <a:avLst/>
@@ -15606,7 +15600,7 @@
         <p:spPr>
           <a:xfrm>
             <a:off x="609480" y="3152880"/>
-            <a:ext cx="11867400" cy="1142280"/>
+            <a:ext cx="11867040" cy="1141920"/>
           </a:xfrm>
           <a:prstGeom prst="rect">
             <a:avLst/>
@@ -15679,7 +15673,7 @@
         <p:spPr>
           <a:xfrm>
             <a:off x="609480" y="4524480"/>
-            <a:ext cx="1218600" cy="18360"/>
+            <a:ext cx="1218240" cy="18000"/>
           </a:xfrm>
           <a:custGeom>
             <a:avLst/>
@@ -15730,7 +15724,7 @@
         <p:spPr>
           <a:xfrm>
             <a:off x="609480" y="4772160"/>
-            <a:ext cx="11696040" cy="304200"/>
+            <a:ext cx="11695680" cy="303840"/>
           </a:xfrm>
           <a:prstGeom prst="rect">
             <a:avLst/>
@@ -15819,7 +15813,7 @@
         <p:spPr>
           <a:xfrm>
             <a:off x="380880" y="380880"/>
-            <a:ext cx="11505600" cy="227880"/>
+            <a:ext cx="11505240" cy="227520"/>
           </a:xfrm>
           <a:prstGeom prst="rect">
             <a:avLst/>
@@ -15847,7 +15841,7 @@
               <a:buNone/>
             </a:pPr>
             <a:r>
-              <a:rPr b="1" lang="en-US" sz="1200" spc="55" strike="noStrike">
+              <a:rPr b="1" lang="en-US" sz="1200" spc="52" strike="noStrike">
                 <a:solidFill>
                   <a:srgbClr val="0984e3"/>
                 </a:solidFill>
@@ -15871,7 +15865,7 @@
         <p:spPr>
           <a:xfrm>
             <a:off x="380880" y="685800"/>
-            <a:ext cx="11657880" cy="456480"/>
+            <a:ext cx="11657520" cy="456120"/>
           </a:xfrm>
           <a:prstGeom prst="rect">
             <a:avLst/>
@@ -15923,7 +15917,7 @@
         <p:spPr>
           <a:xfrm>
             <a:off x="380880" y="1295280"/>
-            <a:ext cx="7647840" cy="932760"/>
+            <a:ext cx="7647480" cy="932400"/>
           </a:xfrm>
           <a:prstGeom prst="rect">
             <a:avLst/>
@@ -15985,7 +15979,7 @@
         <p:spPr>
           <a:xfrm>
             <a:off x="385920" y="2381400"/>
-            <a:ext cx="3695040" cy="1723320"/>
+            <a:ext cx="3694680" cy="1722960"/>
           </a:xfrm>
           <a:custGeom>
             <a:avLst/>
@@ -16039,7 +16033,7 @@
         <p:spPr>
           <a:xfrm>
             <a:off x="542880" y="2538360"/>
-            <a:ext cx="3475800" cy="266040"/>
+            <a:ext cx="3475440" cy="265680"/>
           </a:xfrm>
           <a:prstGeom prst="rect">
             <a:avLst/>
@@ -16091,7 +16085,7 @@
         <p:spPr>
           <a:xfrm>
             <a:off x="542880" y="2881440"/>
-            <a:ext cx="3456720" cy="494640"/>
+            <a:ext cx="3456360" cy="494280"/>
           </a:xfrm>
           <a:prstGeom prst="rect">
             <a:avLst/>
@@ -16153,7 +16147,7 @@
         <p:spPr>
           <a:xfrm>
             <a:off x="542880" y="3452760"/>
-            <a:ext cx="3456720" cy="494640"/>
+            <a:ext cx="3456360" cy="494280"/>
           </a:xfrm>
           <a:prstGeom prst="rect">
             <a:avLst/>
@@ -16215,7 +16209,7 @@
         <p:spPr>
           <a:xfrm>
             <a:off x="4240080" y="2381400"/>
-            <a:ext cx="3695040" cy="1723320"/>
+            <a:ext cx="3694680" cy="1722960"/>
           </a:xfrm>
           <a:custGeom>
             <a:avLst/>
@@ -16269,7 +16263,7 @@
         <p:spPr>
           <a:xfrm>
             <a:off x="4397400" y="2538360"/>
-            <a:ext cx="3475800" cy="266040"/>
+            <a:ext cx="3475440" cy="265680"/>
           </a:xfrm>
           <a:prstGeom prst="rect">
             <a:avLst/>
@@ -16321,7 +16315,7 @@
         <p:spPr>
           <a:xfrm>
             <a:off x="4397400" y="2881440"/>
-            <a:ext cx="3456720" cy="494640"/>
+            <a:ext cx="3456360" cy="494280"/>
           </a:xfrm>
           <a:prstGeom prst="rect">
             <a:avLst/>
@@ -16383,7 +16377,7 @@
         <p:spPr>
           <a:xfrm>
             <a:off x="4397400" y="3452760"/>
-            <a:ext cx="3456720" cy="494640"/>
+            <a:ext cx="3456360" cy="494280"/>
           </a:xfrm>
           <a:prstGeom prst="rect">
             <a:avLst/>
@@ -16445,7 +16439,7 @@
         <p:spPr>
           <a:xfrm>
             <a:off x="399960" y="4262400"/>
-            <a:ext cx="7533720" cy="1637640"/>
+            <a:ext cx="7533360" cy="1637280"/>
           </a:xfrm>
           <a:custGeom>
             <a:avLst/>
@@ -16496,7 +16490,7 @@
         <p:spPr>
           <a:xfrm>
             <a:off x="399960" y="4262400"/>
-            <a:ext cx="37440" cy="1637640"/>
+            <a:ext cx="37080" cy="1637280"/>
           </a:xfrm>
           <a:custGeom>
             <a:avLst/>
@@ -16547,7 +16541,7 @@
         <p:spPr>
           <a:xfrm>
             <a:off x="571680" y="4414680"/>
-            <a:ext cx="7305120" cy="266040"/>
+            <a:ext cx="7304760" cy="265680"/>
           </a:xfrm>
           <a:prstGeom prst="rect">
             <a:avLst/>
@@ -16599,7 +16593,7 @@
         <p:spPr>
           <a:xfrm>
             <a:off x="619200" y="4791240"/>
-            <a:ext cx="94680" cy="151560"/>
+            <a:ext cx="94320" cy="151200"/>
           </a:xfrm>
           <a:custGeom>
             <a:avLst/>
@@ -16754,7 +16748,7 @@
         <p:spPr>
           <a:xfrm>
             <a:off x="819000" y="4757760"/>
-            <a:ext cx="3361680" cy="456480"/>
+            <a:ext cx="3361320" cy="456120"/>
           </a:xfrm>
           <a:prstGeom prst="rect">
             <a:avLst/>
@@ -16816,7 +16810,7 @@
         <p:spPr>
           <a:xfrm>
             <a:off x="4282920" y="4791240"/>
-            <a:ext cx="132480" cy="151560"/>
+            <a:ext cx="132120" cy="151200"/>
           </a:xfrm>
           <a:custGeom>
             <a:avLst/>
@@ -16948,7 +16942,7 @@
         <p:spPr>
           <a:xfrm>
             <a:off x="4502160" y="4757760"/>
-            <a:ext cx="3361680" cy="456480"/>
+            <a:ext cx="3361320" cy="456120"/>
           </a:xfrm>
           <a:prstGeom prst="rect">
             <a:avLst/>
@@ -17010,7 +17004,7 @@
         <p:spPr>
           <a:xfrm>
             <a:off x="590400" y="5324400"/>
-            <a:ext cx="151560" cy="151560"/>
+            <a:ext cx="151200" cy="151200"/>
           </a:xfrm>
           <a:custGeom>
             <a:avLst/>
@@ -17233,7 +17227,7 @@
         <p:spPr>
           <a:xfrm>
             <a:off x="819000" y="5291280"/>
-            <a:ext cx="3361680" cy="456480"/>
+            <a:ext cx="3361320" cy="456120"/>
           </a:xfrm>
           <a:prstGeom prst="rect">
             <a:avLst/>
@@ -17295,7 +17289,7 @@
         <p:spPr>
           <a:xfrm>
             <a:off x="4263840" y="5324400"/>
-            <a:ext cx="170640" cy="151560"/>
+            <a:ext cx="170280" cy="151200"/>
           </a:xfrm>
           <a:custGeom>
             <a:avLst/>
@@ -17492,7 +17486,7 @@
         <p:spPr>
           <a:xfrm>
             <a:off x="4502160" y="5291280"/>
-            <a:ext cx="3361680" cy="456480"/>
+            <a:ext cx="3361320" cy="456120"/>
           </a:xfrm>
           <a:prstGeom prst="rect">
             <a:avLst/>
@@ -17554,7 +17548,7 @@
         <p:spPr>
           <a:xfrm>
             <a:off x="8132760" y="1300320"/>
-            <a:ext cx="3675960" cy="2637720"/>
+            <a:ext cx="3675600" cy="2637360"/>
           </a:xfrm>
           <a:custGeom>
             <a:avLst/>
@@ -17608,7 +17602,7 @@
         <p:spPr>
           <a:xfrm>
             <a:off x="8242200" y="1457280"/>
-            <a:ext cx="3456720" cy="266040"/>
+            <a:ext cx="3456360" cy="265680"/>
           </a:xfrm>
           <a:prstGeom prst="rect">
             <a:avLst/>
@@ -17660,7 +17654,7 @@
         <p:spPr>
           <a:xfrm>
             <a:off x="8289720" y="1838160"/>
-            <a:ext cx="3361680" cy="1332720"/>
+            <a:ext cx="3361320" cy="1332360"/>
           </a:xfrm>
           <a:prstGeom prst="roundRect">
             <a:avLst>
@@ -17692,7 +17686,7 @@
         <p:spPr>
           <a:xfrm>
             <a:off x="8251920" y="3286080"/>
-            <a:ext cx="3437640" cy="494640"/>
+            <a:ext cx="3437280" cy="494280"/>
           </a:xfrm>
           <a:prstGeom prst="rect">
             <a:avLst/>
@@ -17744,7 +17738,7 @@
         <p:spPr>
           <a:xfrm>
             <a:off x="8128080" y="4095720"/>
-            <a:ext cx="3685320" cy="1637640"/>
+            <a:ext cx="3684960" cy="1637280"/>
           </a:xfrm>
           <a:custGeom>
             <a:avLst/>
@@ -17795,7 +17789,7 @@
         <p:spPr>
           <a:xfrm>
             <a:off x="8280360" y="4248000"/>
-            <a:ext cx="3466440" cy="266040"/>
+            <a:ext cx="3466080" cy="265680"/>
           </a:xfrm>
           <a:prstGeom prst="rect">
             <a:avLst/>
@@ -17847,7 +17841,7 @@
         <p:spPr>
           <a:xfrm>
             <a:off x="8280360" y="4591080"/>
-            <a:ext cx="3456720" cy="990000"/>
+            <a:ext cx="3456360" cy="989640"/>
           </a:xfrm>
           <a:prstGeom prst="rect">
             <a:avLst/>
@@ -17936,7 +17930,7 @@
         <p:spPr>
           <a:xfrm>
             <a:off x="370440" y="370440"/>
-            <a:ext cx="11524320" cy="221760"/>
+            <a:ext cx="11523960" cy="221400"/>
           </a:xfrm>
           <a:prstGeom prst="rect">
             <a:avLst/>
@@ -17964,7 +17958,7 @@
               <a:buNone/>
             </a:pPr>
             <a:r>
-              <a:rPr b="1" lang="en-US" sz="1170" spc="52" strike="noStrike">
+              <a:rPr b="1" lang="en-US" sz="1170" spc="49" strike="noStrike">
                 <a:solidFill>
                   <a:srgbClr val="0984e3"/>
                 </a:solidFill>
@@ -17988,7 +17982,7 @@
         <p:spPr>
           <a:xfrm>
             <a:off x="370440" y="667080"/>
-            <a:ext cx="11672640" cy="443880"/>
+            <a:ext cx="11672280" cy="443520"/>
           </a:xfrm>
           <a:prstGeom prst="rect">
             <a:avLst/>
@@ -18040,7 +18034,7 @@
         <p:spPr>
           <a:xfrm>
             <a:off x="370440" y="1334160"/>
-            <a:ext cx="5669280" cy="1203480"/>
+            <a:ext cx="5668920" cy="1203120"/>
           </a:xfrm>
           <a:prstGeom prst="rect">
             <a:avLst/>
@@ -18102,7 +18096,7 @@
         <p:spPr>
           <a:xfrm>
             <a:off x="375120" y="2691360"/>
-            <a:ext cx="5567040" cy="2157840"/>
+            <a:ext cx="5566680" cy="2157480"/>
           </a:xfrm>
           <a:custGeom>
             <a:avLst/>
@@ -18156,7 +18150,7 @@
         <p:spPr>
           <a:xfrm>
             <a:off x="565200" y="2881080"/>
-            <a:ext cx="5280120" cy="258840"/>
+            <a:ext cx="5279760" cy="258480"/>
           </a:xfrm>
           <a:prstGeom prst="rect">
             <a:avLst/>
@@ -18208,7 +18202,7 @@
         <p:spPr>
           <a:xfrm>
             <a:off x="565200" y="3251880"/>
-            <a:ext cx="5261400" cy="480960"/>
+            <a:ext cx="5261040" cy="480600"/>
           </a:xfrm>
           <a:prstGeom prst="rect">
             <a:avLst/>
@@ -18260,7 +18254,7 @@
         <p:spPr>
           <a:xfrm>
             <a:off x="592920" y="3877200"/>
-            <a:ext cx="128880" cy="147600"/>
+            <a:ext cx="128520" cy="147240"/>
           </a:xfrm>
           <a:custGeom>
             <a:avLst/>
@@ -18341,7 +18335,7 @@
         <p:spPr>
           <a:xfrm>
             <a:off x="804600" y="3844800"/>
-            <a:ext cx="5022000" cy="221760"/>
+            <a:ext cx="5021640" cy="221400"/>
           </a:xfrm>
           <a:prstGeom prst="rect">
             <a:avLst/>
@@ -18393,7 +18387,7 @@
         <p:spPr>
           <a:xfrm>
             <a:off x="592920" y="4173480"/>
-            <a:ext cx="128880" cy="147600"/>
+            <a:ext cx="128520" cy="147240"/>
           </a:xfrm>
           <a:custGeom>
             <a:avLst/>
@@ -18474,7 +18468,7 @@
         <p:spPr>
           <a:xfrm>
             <a:off x="804600" y="4141080"/>
-            <a:ext cx="5022000" cy="221760"/>
+            <a:ext cx="5021640" cy="221400"/>
           </a:xfrm>
           <a:prstGeom prst="rect">
             <a:avLst/>
@@ -18526,7 +18520,7 @@
         <p:spPr>
           <a:xfrm>
             <a:off x="592920" y="4470120"/>
-            <a:ext cx="128880" cy="147600"/>
+            <a:ext cx="128520" cy="147240"/>
           </a:xfrm>
           <a:custGeom>
             <a:avLst/>
@@ -18607,7 +18601,7 @@
         <p:spPr>
           <a:xfrm>
             <a:off x="804600" y="4437720"/>
-            <a:ext cx="5022000" cy="221760"/>
+            <a:ext cx="5021640" cy="221400"/>
           </a:xfrm>
           <a:prstGeom prst="rect">
             <a:avLst/>
@@ -18659,7 +18653,7 @@
         <p:spPr>
           <a:xfrm>
             <a:off x="375120" y="5007600"/>
-            <a:ext cx="5567040" cy="1472400"/>
+            <a:ext cx="5566680" cy="1472040"/>
           </a:xfrm>
           <a:custGeom>
             <a:avLst/>
@@ -18713,7 +18707,7 @@
         <p:spPr>
           <a:xfrm>
             <a:off x="565200" y="5197320"/>
-            <a:ext cx="5280120" cy="258840"/>
+            <a:ext cx="5279760" cy="258480"/>
           </a:xfrm>
           <a:prstGeom prst="rect">
             <a:avLst/>
@@ -18765,7 +18759,7 @@
         <p:spPr>
           <a:xfrm>
             <a:off x="565200" y="5567760"/>
-            <a:ext cx="5261400" cy="721800"/>
+            <a:ext cx="5261040" cy="721440"/>
           </a:xfrm>
           <a:prstGeom prst="rect">
             <a:avLst/>
@@ -18817,7 +18811,7 @@
         <p:spPr>
           <a:xfrm>
             <a:off x="6242040" y="1334160"/>
-            <a:ext cx="5576400" cy="2843640"/>
+            <a:ext cx="5576040" cy="2843280"/>
           </a:xfrm>
           <a:custGeom>
             <a:avLst/>
@@ -18868,7 +18862,7 @@
         <p:spPr>
           <a:xfrm>
             <a:off x="6427440" y="1519200"/>
-            <a:ext cx="5317200" cy="295920"/>
+            <a:ext cx="5316840" cy="295560"/>
           </a:xfrm>
           <a:prstGeom prst="rect">
             <a:avLst/>
@@ -18920,7 +18914,7 @@
         <p:spPr>
           <a:xfrm>
             <a:off x="6427440" y="1968840"/>
-            <a:ext cx="5145840" cy="455400"/>
+            <a:ext cx="5145480" cy="455040"/>
           </a:xfrm>
           <a:prstGeom prst="rect">
             <a:avLst/>
@@ -18972,7 +18966,7 @@
         <p:spPr>
           <a:xfrm>
             <a:off x="6427440" y="2580120"/>
-            <a:ext cx="5280120" cy="480960"/>
+            <a:ext cx="5279760" cy="480600"/>
           </a:xfrm>
           <a:prstGeom prst="rect">
             <a:avLst/>
@@ -19024,7 +19018,7 @@
         <p:spPr>
           <a:xfrm>
             <a:off x="6436800" y="3205440"/>
-            <a:ext cx="165960" cy="147600"/>
+            <a:ext cx="165600" cy="147240"/>
           </a:xfrm>
           <a:custGeom>
             <a:avLst/>
@@ -19209,7 +19203,7 @@
         <p:spPr>
           <a:xfrm>
             <a:off x="6666840" y="3173040"/>
-            <a:ext cx="5040720" cy="221760"/>
+            <a:ext cx="5040360" cy="221400"/>
           </a:xfrm>
           <a:prstGeom prst="rect">
             <a:avLst/>
@@ -19271,7 +19265,7 @@
         <p:spPr>
           <a:xfrm>
             <a:off x="6445800" y="3502080"/>
-            <a:ext cx="147600" cy="147600"/>
+            <a:ext cx="147240" cy="147240"/>
           </a:xfrm>
           <a:custGeom>
             <a:avLst/>
@@ -19438,7 +19432,7 @@
         <p:spPr>
           <a:xfrm>
             <a:off x="6666840" y="3469680"/>
-            <a:ext cx="5040720" cy="221760"/>
+            <a:ext cx="5040360" cy="221400"/>
           </a:xfrm>
           <a:prstGeom prst="rect">
             <a:avLst/>
@@ -19500,7 +19494,7 @@
         <p:spPr>
           <a:xfrm>
             <a:off x="6427440" y="3798360"/>
-            <a:ext cx="184680" cy="147600"/>
+            <a:ext cx="184320" cy="147240"/>
           </a:xfrm>
           <a:custGeom>
             <a:avLst/>
@@ -19732,7 +19726,7 @@
         <p:spPr>
           <a:xfrm>
             <a:off x="6666840" y="3765960"/>
-            <a:ext cx="5040720" cy="221760"/>
+            <a:ext cx="5040360" cy="221400"/>
           </a:xfrm>
           <a:prstGeom prst="rect">
             <a:avLst/>
@@ -19794,7 +19788,7 @@
         <p:spPr>
           <a:xfrm>
             <a:off x="6260760" y="4321800"/>
-            <a:ext cx="5558040" cy="870120"/>
+            <a:ext cx="5557680" cy="869760"/>
           </a:xfrm>
           <a:custGeom>
             <a:avLst/>
@@ -19845,7 +19839,7 @@
         <p:spPr>
           <a:xfrm>
             <a:off x="6260760" y="4321800"/>
-            <a:ext cx="36360" cy="870120"/>
+            <a:ext cx="36000" cy="869760"/>
           </a:xfrm>
           <a:custGeom>
             <a:avLst/>
@@ -19896,7 +19890,7 @@
         <p:spPr>
           <a:xfrm>
             <a:off x="6464520" y="4507200"/>
-            <a:ext cx="5243040" cy="240120"/>
+            <a:ext cx="5242680" cy="239760"/>
           </a:xfrm>
           <a:prstGeom prst="rect">
             <a:avLst/>
@@ -19948,7 +19942,7 @@
         <p:spPr>
           <a:xfrm>
             <a:off x="6464520" y="4822200"/>
-            <a:ext cx="5233680" cy="184680"/>
+            <a:ext cx="5233320" cy="184320"/>
           </a:xfrm>
           <a:prstGeom prst="rect">
             <a:avLst/>
@@ -20047,7 +20041,7 @@
         <p:spPr>
           <a:xfrm>
             <a:off x="380880" y="380880"/>
-            <a:ext cx="11657880" cy="456480"/>
+            <a:ext cx="11657520" cy="456120"/>
           </a:xfrm>
           <a:prstGeom prst="rect">
             <a:avLst/>
@@ -20099,7 +20093,7 @@
         <p:spPr>
           <a:xfrm>
             <a:off x="380880" y="952560"/>
-            <a:ext cx="761400" cy="18360"/>
+            <a:ext cx="761040" cy="18000"/>
           </a:xfrm>
           <a:custGeom>
             <a:avLst/>
@@ -20150,7 +20144,7 @@
         <p:spPr>
           <a:xfrm>
             <a:off x="380880" y="1428840"/>
-            <a:ext cx="751680" cy="570960"/>
+            <a:ext cx="751320" cy="570600"/>
           </a:xfrm>
           <a:prstGeom prst="rect">
             <a:avLst/>
@@ -20204,7 +20198,7 @@
         <p:spPr>
           <a:xfrm>
             <a:off x="1034280" y="1504800"/>
-            <a:ext cx="4190400" cy="304200"/>
+            <a:ext cx="4190040" cy="303840"/>
           </a:xfrm>
           <a:prstGeom prst="rect">
             <a:avLst/>
@@ -20256,7 +20250,7 @@
         <p:spPr>
           <a:xfrm>
             <a:off x="1034280" y="1886040"/>
-            <a:ext cx="4161600" cy="275400"/>
+            <a:ext cx="4161240" cy="275040"/>
           </a:xfrm>
           <a:prstGeom prst="rect">
             <a:avLst/>
@@ -20308,7 +20302,7 @@
         <p:spPr>
           <a:xfrm>
             <a:off x="6400800" y="1428840"/>
-            <a:ext cx="856440" cy="570960"/>
+            <a:ext cx="856080" cy="570600"/>
           </a:xfrm>
           <a:prstGeom prst="rect">
             <a:avLst/>
@@ -20362,7 +20356,7 @@
         <p:spPr>
           <a:xfrm>
             <a:off x="7160040" y="1504800"/>
-            <a:ext cx="4761720" cy="304200"/>
+            <a:ext cx="4761360" cy="303840"/>
           </a:xfrm>
           <a:prstGeom prst="rect">
             <a:avLst/>
@@ -20414,7 +20408,7 @@
         <p:spPr>
           <a:xfrm>
             <a:off x="7160040" y="1886040"/>
-            <a:ext cx="4733280" cy="561240"/>
+            <a:ext cx="4732920" cy="560880"/>
           </a:xfrm>
           <a:prstGeom prst="rect">
             <a:avLst/>
@@ -20466,7 +20460,7 @@
         <p:spPr>
           <a:xfrm>
             <a:off x="380880" y="2824200"/>
-            <a:ext cx="856440" cy="570960"/>
+            <a:ext cx="856080" cy="570600"/>
           </a:xfrm>
           <a:prstGeom prst="rect">
             <a:avLst/>
@@ -20520,7 +20514,7 @@
         <p:spPr>
           <a:xfrm>
             <a:off x="1143000" y="2900520"/>
-            <a:ext cx="3971160" cy="304200"/>
+            <a:ext cx="3970800" cy="303840"/>
           </a:xfrm>
           <a:prstGeom prst="rect">
             <a:avLst/>
@@ -20572,7 +20566,7 @@
         <p:spPr>
           <a:xfrm>
             <a:off x="1143000" y="3281400"/>
-            <a:ext cx="3942720" cy="275400"/>
+            <a:ext cx="3942360" cy="275040"/>
           </a:xfrm>
           <a:prstGeom prst="rect">
             <a:avLst/>
@@ -20624,7 +20618,7 @@
         <p:spPr>
           <a:xfrm>
             <a:off x="6400800" y="2824200"/>
-            <a:ext cx="885240" cy="570960"/>
+            <a:ext cx="884880" cy="570600"/>
           </a:xfrm>
           <a:prstGeom prst="rect">
             <a:avLst/>
@@ -20678,7 +20672,7 @@
         <p:spPr>
           <a:xfrm>
             <a:off x="7188480" y="2900520"/>
-            <a:ext cx="2475720" cy="304200"/>
+            <a:ext cx="2475360" cy="303840"/>
           </a:xfrm>
           <a:prstGeom prst="rect">
             <a:avLst/>
@@ -20730,7 +20724,7 @@
         <p:spPr>
           <a:xfrm>
             <a:off x="7188480" y="3281400"/>
-            <a:ext cx="2447280" cy="275400"/>
+            <a:ext cx="2446920" cy="275040"/>
           </a:xfrm>
           <a:prstGeom prst="rect">
             <a:avLst/>
@@ -20782,7 +20776,7 @@
         <p:spPr>
           <a:xfrm>
             <a:off x="380880" y="3940920"/>
-            <a:ext cx="847080" cy="570960"/>
+            <a:ext cx="846720" cy="570600"/>
           </a:xfrm>
           <a:prstGeom prst="rect">
             <a:avLst/>
@@ -20836,7 +20830,7 @@
         <p:spPr>
           <a:xfrm>
             <a:off x="1137240" y="4017240"/>
-            <a:ext cx="2866320" cy="304200"/>
+            <a:ext cx="2865960" cy="303840"/>
           </a:xfrm>
           <a:prstGeom prst="rect">
             <a:avLst/>
@@ -20888,7 +20882,7 @@
         <p:spPr>
           <a:xfrm>
             <a:off x="1137240" y="4398120"/>
-            <a:ext cx="2837880" cy="275400"/>
+            <a:ext cx="2837520" cy="275040"/>
           </a:xfrm>
           <a:prstGeom prst="rect">
             <a:avLst/>
@@ -20940,7 +20934,7 @@
         <p:spPr>
           <a:xfrm>
             <a:off x="6400800" y="3940920"/>
-            <a:ext cx="866160" cy="570960"/>
+            <a:ext cx="865800" cy="570600"/>
           </a:xfrm>
           <a:prstGeom prst="rect">
             <a:avLst/>
@@ -20994,7 +20988,7 @@
         <p:spPr>
           <a:xfrm>
             <a:off x="7171560" y="4017240"/>
-            <a:ext cx="3075840" cy="304200"/>
+            <a:ext cx="3075480" cy="303840"/>
           </a:xfrm>
           <a:prstGeom prst="rect">
             <a:avLst/>
@@ -21046,7 +21040,7 @@
         <p:spPr>
           <a:xfrm>
             <a:off x="7171560" y="4398120"/>
-            <a:ext cx="3047400" cy="275400"/>
+            <a:ext cx="3047040" cy="275040"/>
           </a:xfrm>
           <a:prstGeom prst="rect">
             <a:avLst/>
@@ -21135,7 +21129,7 @@
         <p:spPr>
           <a:xfrm>
             <a:off x="335880" y="335880"/>
-            <a:ext cx="11586600" cy="200880"/>
+            <a:ext cx="11586240" cy="200520"/>
           </a:xfrm>
           <a:prstGeom prst="rect">
             <a:avLst/>
@@ -21163,7 +21157,7 @@
               <a:buNone/>
             </a:pPr>
             <a:r>
-              <a:rPr b="1" lang="en-US" sz="1060" spc="49" strike="noStrike">
+              <a:rPr b="1" lang="en-US" sz="1060" spc="46" strike="noStrike">
                 <a:solidFill>
                   <a:srgbClr val="0984e3"/>
                 </a:solidFill>
@@ -21187,7 +21181,7 @@
         <p:spPr>
           <a:xfrm>
             <a:off x="335880" y="604440"/>
-            <a:ext cx="11721240" cy="402480"/>
+            <a:ext cx="11720880" cy="402120"/>
           </a:xfrm>
           <a:prstGeom prst="rect">
             <a:avLst/>
@@ -21239,7 +21233,7 @@
         <p:spPr>
           <a:xfrm>
             <a:off x="335880" y="1251000"/>
-            <a:ext cx="5995440" cy="456840"/>
+            <a:ext cx="5995080" cy="456480"/>
           </a:xfrm>
           <a:prstGeom prst="rect">
             <a:avLst/>
@@ -21291,7 +21285,7 @@
         <p:spPr>
           <a:xfrm>
             <a:off x="335880" y="1889280"/>
-            <a:ext cx="6876000" cy="654120"/>
+            <a:ext cx="6875640" cy="653760"/>
           </a:xfrm>
           <a:prstGeom prst="rect">
             <a:avLst/>
@@ -21343,7 +21337,7 @@
         <p:spPr>
           <a:xfrm>
             <a:off x="340200" y="2682720"/>
-            <a:ext cx="6800760" cy="1955880"/>
+            <a:ext cx="6800400" cy="1955520"/>
           </a:xfrm>
           <a:custGeom>
             <a:avLst/>
@@ -21397,7 +21391,7 @@
         <p:spPr>
           <a:xfrm>
             <a:off x="512280" y="2854800"/>
-            <a:ext cx="6540480" cy="234360"/>
+            <a:ext cx="6540120" cy="234000"/>
           </a:xfrm>
           <a:prstGeom prst="rect">
             <a:avLst/>
@@ -21449,7 +21443,7 @@
         <p:spPr>
           <a:xfrm>
             <a:off x="512280" y="3190680"/>
-            <a:ext cx="6523560" cy="217440"/>
+            <a:ext cx="6523200" cy="217080"/>
           </a:xfrm>
           <a:prstGeom prst="rect">
             <a:avLst/>
@@ -21501,7 +21495,7 @@
         <p:spPr>
           <a:xfrm>
             <a:off x="512280" y="3509640"/>
-            <a:ext cx="6456240" cy="637560"/>
+            <a:ext cx="6455880" cy="637200"/>
           </a:xfrm>
           <a:custGeom>
             <a:avLst/>
@@ -21552,7 +21546,7 @@
         <p:spPr>
           <a:xfrm>
             <a:off x="613080" y="3610440"/>
-            <a:ext cx="6321960" cy="200880"/>
+            <a:ext cx="6321600" cy="200520"/>
           </a:xfrm>
           <a:prstGeom prst="rect">
             <a:avLst/>
@@ -21604,7 +21598,7 @@
         <p:spPr>
           <a:xfrm>
             <a:off x="613080" y="3845520"/>
-            <a:ext cx="6321960" cy="200880"/>
+            <a:ext cx="6321600" cy="200520"/>
           </a:xfrm>
           <a:prstGeom prst="rect">
             <a:avLst/>
@@ -21656,7 +21650,7 @@
         <p:spPr>
           <a:xfrm>
             <a:off x="512280" y="4248720"/>
-            <a:ext cx="6523560" cy="217440"/>
+            <a:ext cx="6523200" cy="217080"/>
           </a:xfrm>
           <a:prstGeom prst="rect">
             <a:avLst/>
@@ -21708,7 +21702,7 @@
         <p:spPr>
           <a:xfrm>
             <a:off x="352800" y="4777560"/>
-            <a:ext cx="6792120" cy="1527480"/>
+            <a:ext cx="6791760" cy="1527120"/>
           </a:xfrm>
           <a:custGeom>
             <a:avLst/>
@@ -21759,7 +21753,7 @@
         <p:spPr>
           <a:xfrm>
             <a:off x="352800" y="4777560"/>
-            <a:ext cx="32760" cy="1527480"/>
+            <a:ext cx="32400" cy="1527120"/>
           </a:xfrm>
           <a:custGeom>
             <a:avLst/>
@@ -21810,7 +21804,7 @@
         <p:spPr>
           <a:xfrm>
             <a:off x="537480" y="4945680"/>
-            <a:ext cx="6523560" cy="234360"/>
+            <a:ext cx="6523200" cy="234000"/>
           </a:xfrm>
           <a:prstGeom prst="rect">
             <a:avLst/>
@@ -21862,7 +21856,7 @@
         <p:spPr>
           <a:xfrm>
             <a:off x="537480" y="5281560"/>
-            <a:ext cx="6506640" cy="217440"/>
+            <a:ext cx="6506280" cy="217080"/>
           </a:xfrm>
           <a:prstGeom prst="rect">
             <a:avLst/>
@@ -21914,7 +21908,7 @@
         <p:spPr>
           <a:xfrm>
             <a:off x="537480" y="5600520"/>
-            <a:ext cx="3215160" cy="200880"/>
+            <a:ext cx="3214800" cy="200520"/>
           </a:xfrm>
           <a:prstGeom prst="rect">
             <a:avLst/>
@@ -21976,7 +21970,7 @@
         <p:spPr>
           <a:xfrm>
             <a:off x="3823200" y="5600520"/>
-            <a:ext cx="3215160" cy="200880"/>
+            <a:ext cx="3214800" cy="200520"/>
           </a:xfrm>
           <a:prstGeom prst="rect">
             <a:avLst/>
@@ -22038,7 +22032,7 @@
         <p:spPr>
           <a:xfrm>
             <a:off x="537480" y="5936400"/>
-            <a:ext cx="3215160" cy="200880"/>
+            <a:ext cx="3214800" cy="200520"/>
           </a:xfrm>
           <a:prstGeom prst="rect">
             <a:avLst/>
@@ -22100,7 +22094,7 @@
         <p:spPr>
           <a:xfrm>
             <a:off x="3823200" y="5936400"/>
-            <a:ext cx="3215160" cy="200880"/>
+            <a:ext cx="3214800" cy="200520"/>
           </a:xfrm>
           <a:prstGeom prst="rect">
             <a:avLst/>
@@ -22162,7 +22156,7 @@
         <p:spPr>
           <a:xfrm>
             <a:off x="7415640" y="1213200"/>
-            <a:ext cx="4440960" cy="3500640"/>
+            <a:ext cx="4440600" cy="3500280"/>
           </a:xfrm>
           <a:custGeom>
             <a:avLst/>
@@ -22216,7 +22210,7 @@
         <p:spPr>
           <a:xfrm>
             <a:off x="7587720" y="1385280"/>
-            <a:ext cx="4096800" cy="1678680"/>
+            <a:ext cx="4096440" cy="1678320"/>
           </a:xfrm>
           <a:prstGeom prst="roundRect">
             <a:avLst>
@@ -22248,7 +22242,7 @@
         <p:spPr>
           <a:xfrm>
             <a:off x="7545600" y="3199320"/>
-            <a:ext cx="4180680" cy="234360"/>
+            <a:ext cx="4180320" cy="234000"/>
           </a:xfrm>
           <a:prstGeom prst="rect">
             <a:avLst/>
@@ -22300,7 +22294,7 @@
         <p:spPr>
           <a:xfrm>
             <a:off x="7621200" y="3564360"/>
-            <a:ext cx="100080" cy="133560"/>
+            <a:ext cx="99720" cy="133200"/>
           </a:xfrm>
           <a:custGeom>
             <a:avLst/>
@@ -22499,7 +22493,7 @@
         <p:spPr>
           <a:xfrm>
             <a:off x="7800120" y="3534840"/>
-            <a:ext cx="3951720" cy="200880"/>
+            <a:ext cx="3951360" cy="200520"/>
           </a:xfrm>
           <a:prstGeom prst="rect">
             <a:avLst/>
@@ -22561,7 +22555,7 @@
         <p:spPr>
           <a:xfrm>
             <a:off x="7604640" y="3832920"/>
-            <a:ext cx="133560" cy="133560"/>
+            <a:ext cx="133200" cy="133200"/>
           </a:xfrm>
           <a:custGeom>
             <a:avLst/>
@@ -22768,7 +22762,7 @@
         <p:spPr>
           <a:xfrm>
             <a:off x="7800120" y="3803760"/>
-            <a:ext cx="3951720" cy="200880"/>
+            <a:ext cx="3951360" cy="200520"/>
           </a:xfrm>
           <a:prstGeom prst="rect">
             <a:avLst/>
@@ -22830,7 +22824,7 @@
         <p:spPr>
           <a:xfrm>
             <a:off x="7604640" y="4101840"/>
-            <a:ext cx="133560" cy="133560"/>
+            <a:ext cx="133200" cy="133200"/>
           </a:xfrm>
           <a:custGeom>
             <a:avLst/>
@@ -23021,7 +23015,7 @@
         <p:spPr>
           <a:xfrm>
             <a:off x="7800120" y="4072320"/>
-            <a:ext cx="3951720" cy="200880"/>
+            <a:ext cx="3951360" cy="200520"/>
           </a:xfrm>
           <a:prstGeom prst="rect">
             <a:avLst/>
@@ -23083,7 +23077,7 @@
         <p:spPr>
           <a:xfrm>
             <a:off x="7587720" y="4370400"/>
-            <a:ext cx="167040" cy="133560"/>
+            <a:ext cx="166680" cy="133200"/>
           </a:xfrm>
           <a:custGeom>
             <a:avLst/>
@@ -23299,7 +23293,7 @@
         <p:spPr>
           <a:xfrm>
             <a:off x="7800120" y="4341240"/>
-            <a:ext cx="3951720" cy="200880"/>
+            <a:ext cx="3951360" cy="200520"/>
           </a:xfrm>
           <a:prstGeom prst="rect">
             <a:avLst/>
@@ -23361,7 +23355,7 @@
         <p:spPr>
           <a:xfrm>
             <a:off x="7411320" y="4853160"/>
-            <a:ext cx="4449600" cy="1292400"/>
+            <a:ext cx="4449240" cy="1292040"/>
           </a:xfrm>
           <a:custGeom>
             <a:avLst/>
@@ -23412,7 +23406,7 @@
         <p:spPr>
           <a:xfrm>
             <a:off x="7579440" y="5021280"/>
-            <a:ext cx="4189320" cy="234360"/>
+            <a:ext cx="4188960" cy="234000"/>
           </a:xfrm>
           <a:prstGeom prst="rect">
             <a:avLst/>
@@ -23464,7 +23458,7 @@
         <p:spPr>
           <a:xfrm>
             <a:off x="7579440" y="5323680"/>
-            <a:ext cx="4180680" cy="654120"/>
+            <a:ext cx="4180320" cy="653760"/>
           </a:xfrm>
           <a:prstGeom prst="rect">
             <a:avLst/>
@@ -23553,7 +23547,7 @@
         <p:spPr>
           <a:xfrm>
             <a:off x="5486400" y="585720"/>
-            <a:ext cx="1218600" cy="18360"/>
+            <a:ext cx="1218240" cy="18000"/>
           </a:xfrm>
           <a:custGeom>
             <a:avLst/>
@@ -23604,7 +23598,7 @@
         <p:spPr>
           <a:xfrm>
             <a:off x="3664080" y="909720"/>
-            <a:ext cx="4866480" cy="1428120"/>
+            <a:ext cx="4866120" cy="1427760"/>
           </a:xfrm>
           <a:prstGeom prst="rect">
             <a:avLst/>
@@ -23677,7 +23671,7 @@
         <p:spPr>
           <a:xfrm>
             <a:off x="5486400" y="2643120"/>
-            <a:ext cx="1218600" cy="18360"/>
+            <a:ext cx="1218240" cy="18000"/>
           </a:xfrm>
           <a:custGeom>
             <a:avLst/>
@@ -23728,7 +23722,7 @@
         <p:spPr>
           <a:xfrm>
             <a:off x="1771560" y="2967120"/>
-            <a:ext cx="8647920" cy="1113840"/>
+            <a:ext cx="8647560" cy="1113480"/>
           </a:xfrm>
           <a:prstGeom prst="rect">
             <a:avLst/>
@@ -23780,7 +23774,7 @@
         <p:spPr>
           <a:xfrm>
             <a:off x="1781280" y="4309920"/>
-            <a:ext cx="8628840" cy="1237680"/>
+            <a:ext cx="8628480" cy="1237320"/>
           </a:xfrm>
           <a:prstGeom prst="rect">
             <a:avLst/>
@@ -23832,7 +23826,7 @@
         <p:spPr>
           <a:xfrm>
             <a:off x="2615400" y="6005520"/>
-            <a:ext cx="6962040" cy="266040"/>
+            <a:ext cx="6961680" cy="265680"/>
           </a:xfrm>
           <a:prstGeom prst="rect">
             <a:avLst/>
@@ -23921,7 +23915,7 @@
         <p:spPr>
           <a:xfrm>
             <a:off x="609480" y="1781280"/>
-            <a:ext cx="12191400" cy="1218600"/>
+            <a:ext cx="12191040" cy="1218240"/>
           </a:xfrm>
           <a:prstGeom prst="rect">
             <a:avLst/>
@@ -23975,7 +23969,7 @@
         <p:spPr>
           <a:xfrm>
             <a:off x="609480" y="3152880"/>
-            <a:ext cx="11867400" cy="1142280"/>
+            <a:ext cx="11867040" cy="1141920"/>
           </a:xfrm>
           <a:prstGeom prst="rect">
             <a:avLst/>
@@ -24048,7 +24042,7 @@
         <p:spPr>
           <a:xfrm>
             <a:off x="609480" y="4524480"/>
-            <a:ext cx="1218600" cy="18360"/>
+            <a:ext cx="1218240" cy="18000"/>
           </a:xfrm>
           <a:custGeom>
             <a:avLst/>
@@ -24099,7 +24093,7 @@
         <p:spPr>
           <a:xfrm>
             <a:off x="609480" y="4772160"/>
-            <a:ext cx="11696040" cy="304200"/>
+            <a:ext cx="11695680" cy="303840"/>
           </a:xfrm>
           <a:prstGeom prst="rect">
             <a:avLst/>
@@ -24188,7 +24182,7 @@
         <p:spPr>
           <a:xfrm>
             <a:off x="380880" y="380880"/>
-            <a:ext cx="11505600" cy="227880"/>
+            <a:ext cx="11505240" cy="227520"/>
           </a:xfrm>
           <a:prstGeom prst="rect">
             <a:avLst/>
@@ -24216,7 +24210,7 @@
               <a:buNone/>
             </a:pPr>
             <a:r>
-              <a:rPr b="1" lang="en-US" sz="1200" spc="55" strike="noStrike">
+              <a:rPr b="1" lang="en-US" sz="1200" spc="52" strike="noStrike">
                 <a:solidFill>
                   <a:srgbClr val="0984e3"/>
                 </a:solidFill>
@@ -24240,7 +24234,7 @@
         <p:spPr>
           <a:xfrm>
             <a:off x="380880" y="685800"/>
-            <a:ext cx="11657880" cy="456480"/>
+            <a:ext cx="11657520" cy="456120"/>
           </a:xfrm>
           <a:prstGeom prst="rect">
             <a:avLst/>
@@ -24292,7 +24286,7 @@
         <p:spPr>
           <a:xfrm>
             <a:off x="380880" y="1371600"/>
-            <a:ext cx="6828840" cy="1237680"/>
+            <a:ext cx="6828480" cy="1237320"/>
           </a:xfrm>
           <a:prstGeom prst="rect">
             <a:avLst/>
@@ -24354,7 +24348,7 @@
         <p:spPr>
           <a:xfrm>
             <a:off x="380880" y="2838600"/>
-            <a:ext cx="6819120" cy="1113840"/>
+            <a:ext cx="6818760" cy="1113480"/>
           </a:xfrm>
           <a:prstGeom prst="rect">
             <a:avLst/>
@@ -24406,7 +24400,7 @@
         <p:spPr>
           <a:xfrm>
             <a:off x="399960" y="4986360"/>
-            <a:ext cx="6714360" cy="1361520"/>
+            <a:ext cx="6714000" cy="1361160"/>
           </a:xfrm>
           <a:custGeom>
             <a:avLst/>
@@ -24457,7 +24451,7 @@
         <p:spPr>
           <a:xfrm>
             <a:off x="399960" y="4986360"/>
-            <a:ext cx="37440" cy="1361520"/>
+            <a:ext cx="37080" cy="1361160"/>
           </a:xfrm>
           <a:custGeom>
             <a:avLst/>
@@ -24508,7 +24502,7 @@
         <p:spPr>
           <a:xfrm>
             <a:off x="647640" y="5214960"/>
-            <a:ext cx="6323760" cy="561240"/>
+            <a:ext cx="6323400" cy="560880"/>
           </a:xfrm>
           <a:prstGeom prst="rect">
             <a:avLst/>
@@ -24560,7 +24554,7 @@
         <p:spPr>
           <a:xfrm>
             <a:off x="647640" y="5886360"/>
-            <a:ext cx="6314400" cy="227880"/>
+            <a:ext cx="6314040" cy="227520"/>
           </a:xfrm>
           <a:prstGeom prst="rect">
             <a:avLst/>
@@ -24622,7 +24616,7 @@
         <p:spPr>
           <a:xfrm>
             <a:off x="7426440" y="1376280"/>
-            <a:ext cx="4380840" cy="1494720"/>
+            <a:ext cx="4380480" cy="1494360"/>
           </a:xfrm>
           <a:custGeom>
             <a:avLst/>
@@ -24676,7 +24670,7 @@
         <p:spPr>
           <a:xfrm>
             <a:off x="7660080" y="1609560"/>
-            <a:ext cx="380160" cy="380160"/>
+            <a:ext cx="379800" cy="379800"/>
           </a:xfrm>
           <a:custGeom>
             <a:avLst/>
@@ -24727,7 +24721,7 @@
         <p:spPr>
           <a:xfrm>
             <a:off x="7745760" y="1714680"/>
-            <a:ext cx="213480" cy="170640"/>
+            <a:ext cx="213120" cy="170280"/>
           </a:xfrm>
           <a:custGeom>
             <a:avLst/>
@@ -24943,7 +24937,7 @@
         <p:spPr>
           <a:xfrm>
             <a:off x="8155440" y="1666800"/>
-            <a:ext cx="637560" cy="266040"/>
+            <a:ext cx="637200" cy="265680"/>
           </a:xfrm>
           <a:prstGeom prst="rect">
             <a:avLst/>
@@ -24995,7 +24989,7 @@
         <p:spPr>
           <a:xfrm>
             <a:off x="7660080" y="2143080"/>
-            <a:ext cx="3990240" cy="494640"/>
+            <a:ext cx="3989880" cy="494280"/>
           </a:xfrm>
           <a:prstGeom prst="rect">
             <a:avLst/>
@@ -25047,7 +25041,7 @@
         <p:spPr>
           <a:xfrm>
             <a:off x="7426440" y="3110040"/>
-            <a:ext cx="4380840" cy="1494720"/>
+            <a:ext cx="4380480" cy="1494360"/>
           </a:xfrm>
           <a:custGeom>
             <a:avLst/>
@@ -25101,7 +25095,7 @@
         <p:spPr>
           <a:xfrm>
             <a:off x="7660080" y="3343320"/>
-            <a:ext cx="380160" cy="380160"/>
+            <a:ext cx="379800" cy="379800"/>
           </a:xfrm>
           <a:custGeom>
             <a:avLst/>
@@ -25152,7 +25146,7 @@
         <p:spPr>
           <a:xfrm>
             <a:off x="7767000" y="3448080"/>
-            <a:ext cx="170640" cy="170640"/>
+            <a:ext cx="170280" cy="170280"/>
           </a:xfrm>
           <a:custGeom>
             <a:avLst/>
@@ -25428,7 +25422,7 @@
         <p:spPr>
           <a:xfrm>
             <a:off x="8155440" y="3400560"/>
-            <a:ext cx="866160" cy="266040"/>
+            <a:ext cx="865800" cy="265680"/>
           </a:xfrm>
           <a:prstGeom prst="rect">
             <a:avLst/>
@@ -25480,7 +25474,7 @@
         <p:spPr>
           <a:xfrm>
             <a:off x="7660080" y="3876840"/>
-            <a:ext cx="3990240" cy="494640"/>
+            <a:ext cx="3989880" cy="494280"/>
           </a:xfrm>
           <a:prstGeom prst="rect">
             <a:avLst/>
@@ -25532,7 +25526,7 @@
         <p:spPr>
           <a:xfrm>
             <a:off x="7426440" y="4843440"/>
-            <a:ext cx="4380840" cy="1494720"/>
+            <a:ext cx="4380480" cy="1494360"/>
           </a:xfrm>
           <a:custGeom>
             <a:avLst/>
@@ -25586,7 +25580,7 @@
         <p:spPr>
           <a:xfrm>
             <a:off x="7660080" y="5076720"/>
-            <a:ext cx="380160" cy="380160"/>
+            <a:ext cx="379800" cy="379800"/>
           </a:xfrm>
           <a:custGeom>
             <a:avLst/>
@@ -25637,7 +25631,7 @@
         <p:spPr>
           <a:xfrm>
             <a:off x="7767000" y="5181480"/>
-            <a:ext cx="170640" cy="170640"/>
+            <a:ext cx="170280" cy="170280"/>
           </a:xfrm>
           <a:custGeom>
             <a:avLst/>
@@ -25814,7 +25808,7 @@
         <p:spPr>
           <a:xfrm>
             <a:off x="8155440" y="5133960"/>
-            <a:ext cx="656640" cy="266040"/>
+            <a:ext cx="656280" cy="265680"/>
           </a:xfrm>
           <a:prstGeom prst="rect">
             <a:avLst/>
@@ -25866,7 +25860,7 @@
         <p:spPr>
           <a:xfrm>
             <a:off x="7660080" y="5610240"/>
-            <a:ext cx="3990240" cy="494640"/>
+            <a:ext cx="3989880" cy="494280"/>
           </a:xfrm>
           <a:prstGeom prst="rect">
             <a:avLst/>
@@ -25955,7 +25949,7 @@
         <p:spPr>
           <a:xfrm>
             <a:off x="609480" y="1781280"/>
-            <a:ext cx="12191400" cy="1218600"/>
+            <a:ext cx="12191040" cy="1218240"/>
           </a:xfrm>
           <a:prstGeom prst="rect">
             <a:avLst/>
@@ -26009,7 +26003,7 @@
         <p:spPr>
           <a:xfrm>
             <a:off x="609480" y="3152880"/>
-            <a:ext cx="11867400" cy="1142280"/>
+            <a:ext cx="11867040" cy="1141920"/>
           </a:xfrm>
           <a:prstGeom prst="rect">
             <a:avLst/>
@@ -26082,7 +26076,7 @@
         <p:spPr>
           <a:xfrm>
             <a:off x="609480" y="4524480"/>
-            <a:ext cx="1218600" cy="18360"/>
+            <a:ext cx="1218240" cy="18000"/>
           </a:xfrm>
           <a:custGeom>
             <a:avLst/>
@@ -26133,7 +26127,7 @@
         <p:spPr>
           <a:xfrm>
             <a:off x="609480" y="4772160"/>
-            <a:ext cx="11696040" cy="304200"/>
+            <a:ext cx="11695680" cy="303840"/>
           </a:xfrm>
           <a:prstGeom prst="rect">
             <a:avLst/>
@@ -26222,7 +26216,7 @@
         <p:spPr>
           <a:xfrm>
             <a:off x="324360" y="324360"/>
-            <a:ext cx="11607480" cy="193680"/>
+            <a:ext cx="11607120" cy="193320"/>
           </a:xfrm>
           <a:prstGeom prst="rect">
             <a:avLst/>
@@ -26250,7 +26244,7 @@
               <a:buNone/>
             </a:pPr>
             <a:r>
-              <a:rPr b="1" lang="en-US" sz="1020" spc="46" strike="noStrike">
+              <a:rPr b="1" lang="en-US" sz="1020" spc="43" strike="noStrike">
                 <a:solidFill>
                   <a:srgbClr val="0984e3"/>
                 </a:solidFill>
@@ -26274,7 +26268,7 @@
         <p:spPr>
           <a:xfrm>
             <a:off x="324360" y="583560"/>
-            <a:ext cx="11737440" cy="388440"/>
+            <a:ext cx="11737080" cy="388080"/>
           </a:xfrm>
           <a:prstGeom prst="rect">
             <a:avLst/>
@@ -26326,7 +26320,7 @@
         <p:spPr>
           <a:xfrm>
             <a:off x="6095880" y="1167480"/>
-            <a:ext cx="15480" cy="4976640"/>
+            <a:ext cx="15120" cy="4976280"/>
           </a:xfrm>
           <a:custGeom>
             <a:avLst/>
@@ -26377,7 +26371,7 @@
         <p:spPr>
           <a:xfrm>
             <a:off x="1638000" y="1171440"/>
-            <a:ext cx="3866040" cy="720720"/>
+            <a:ext cx="3865680" cy="720360"/>
           </a:xfrm>
           <a:custGeom>
             <a:avLst/>
@@ -26431,7 +26425,7 @@
         <p:spPr>
           <a:xfrm>
             <a:off x="1698840" y="1305000"/>
-            <a:ext cx="3671640" cy="226080"/>
+            <a:ext cx="3671280" cy="225720"/>
           </a:xfrm>
           <a:prstGeom prst="rect">
             <a:avLst/>
@@ -26483,7 +26477,7 @@
         <p:spPr>
           <a:xfrm>
             <a:off x="1706760" y="1564560"/>
-            <a:ext cx="3663360" cy="193680"/>
+            <a:ext cx="3663000" cy="193320"/>
           </a:xfrm>
           <a:prstGeom prst="rect">
             <a:avLst/>
@@ -26535,7 +26529,7 @@
         <p:spPr>
           <a:xfrm>
             <a:off x="6683760" y="2030760"/>
-            <a:ext cx="3290400" cy="720720"/>
+            <a:ext cx="3290040" cy="720360"/>
           </a:xfrm>
           <a:custGeom>
             <a:avLst/>
@@ -26589,7 +26583,7 @@
         <p:spPr>
           <a:xfrm>
             <a:off x="6817320" y="2164320"/>
-            <a:ext cx="3096000" cy="226080"/>
+            <a:ext cx="3095640" cy="225720"/>
           </a:xfrm>
           <a:prstGeom prst="rect">
             <a:avLst/>
@@ -26641,7 +26635,7 @@
         <p:spPr>
           <a:xfrm>
             <a:off x="6817320" y="2423880"/>
-            <a:ext cx="3087720" cy="193680"/>
+            <a:ext cx="3087360" cy="193320"/>
           </a:xfrm>
           <a:prstGeom prst="rect">
             <a:avLst/>
@@ -26693,7 +26687,7 @@
         <p:spPr>
           <a:xfrm>
             <a:off x="633600" y="2885760"/>
-            <a:ext cx="4879440" cy="712800"/>
+            <a:ext cx="4879080" cy="712440"/>
           </a:xfrm>
           <a:custGeom>
             <a:avLst/>
@@ -26744,7 +26738,7 @@
         <p:spPr>
           <a:xfrm>
             <a:off x="633600" y="2885760"/>
-            <a:ext cx="31680" cy="712800"/>
+            <a:ext cx="31320" cy="712440"/>
           </a:xfrm>
           <a:custGeom>
             <a:avLst/>
@@ -26795,7 +26789,7 @@
         <p:spPr>
           <a:xfrm>
             <a:off x="706680" y="3015720"/>
-            <a:ext cx="4676760" cy="226080"/>
+            <a:ext cx="4676400" cy="225720"/>
           </a:xfrm>
           <a:prstGeom prst="rect">
             <a:avLst/>
@@ -26847,7 +26841,7 @@
         <p:spPr>
           <a:xfrm>
             <a:off x="714960" y="3274920"/>
-            <a:ext cx="4668480" cy="193680"/>
+            <a:ext cx="4668120" cy="193320"/>
           </a:xfrm>
           <a:prstGeom prst="rect">
             <a:avLst/>
@@ -26909,7 +26903,7 @@
         <p:spPr>
           <a:xfrm>
             <a:off x="6696000" y="3728880"/>
-            <a:ext cx="5016960" cy="712800"/>
+            <a:ext cx="5016600" cy="712440"/>
           </a:xfrm>
           <a:custGeom>
             <a:avLst/>
@@ -26960,7 +26954,7 @@
         <p:spPr>
           <a:xfrm>
             <a:off x="6696000" y="3728880"/>
-            <a:ext cx="31680" cy="712800"/>
+            <a:ext cx="31320" cy="712440"/>
           </a:xfrm>
           <a:custGeom>
             <a:avLst/>
@@ -27011,7 +27005,7 @@
         <p:spPr>
           <a:xfrm>
             <a:off x="6841800" y="3858480"/>
-            <a:ext cx="4814640" cy="226080"/>
+            <a:ext cx="4814280" cy="225720"/>
           </a:xfrm>
           <a:prstGeom prst="rect">
             <a:avLst/>
@@ -27063,7 +27057,7 @@
         <p:spPr>
           <a:xfrm>
             <a:off x="6841800" y="4118040"/>
-            <a:ext cx="4806360" cy="193680"/>
+            <a:ext cx="4806000" cy="193320"/>
           </a:xfrm>
           <a:prstGeom prst="rect">
             <a:avLst/>
@@ -27125,7 +27119,7 @@
         <p:spPr>
           <a:xfrm>
             <a:off x="1476360" y="4572000"/>
-            <a:ext cx="4036320" cy="712800"/>
+            <a:ext cx="4035960" cy="712440"/>
           </a:xfrm>
           <a:custGeom>
             <a:avLst/>
@@ -27176,7 +27170,7 @@
         <p:spPr>
           <a:xfrm>
             <a:off x="1532880" y="4701600"/>
-            <a:ext cx="3849840" cy="226080"/>
+            <a:ext cx="3849480" cy="225720"/>
           </a:xfrm>
           <a:prstGeom prst="rect">
             <a:avLst/>
@@ -27228,7 +27222,7 @@
         <p:spPr>
           <a:xfrm>
             <a:off x="1541160" y="4961160"/>
-            <a:ext cx="3841560" cy="193680"/>
+            <a:ext cx="3841200" cy="193320"/>
           </a:xfrm>
           <a:prstGeom prst="rect">
             <a:avLst/>
@@ -27290,7 +27284,7 @@
         <p:spPr>
           <a:xfrm>
             <a:off x="6683760" y="5419080"/>
-            <a:ext cx="3987720" cy="720720"/>
+            <a:ext cx="3987360" cy="720360"/>
           </a:xfrm>
           <a:custGeom>
             <a:avLst/>
@@ -27344,7 +27338,7 @@
         <p:spPr>
           <a:xfrm>
             <a:off x="6817320" y="5553000"/>
-            <a:ext cx="3792960" cy="226080"/>
+            <a:ext cx="3792600" cy="225720"/>
           </a:xfrm>
           <a:prstGeom prst="rect">
             <a:avLst/>
@@ -27396,7 +27390,7 @@
         <p:spPr>
           <a:xfrm>
             <a:off x="6817320" y="5812200"/>
-            <a:ext cx="3785040" cy="193680"/>
+            <a:ext cx="3784680" cy="193320"/>
           </a:xfrm>
           <a:prstGeom prst="rect">
             <a:avLst/>
@@ -27448,7 +27442,7 @@
         <p:spPr>
           <a:xfrm>
             <a:off x="6031080" y="1467360"/>
-            <a:ext cx="128880" cy="128880"/>
+            <a:ext cx="128520" cy="128520"/>
           </a:xfrm>
           <a:custGeom>
             <a:avLst/>
@@ -27519,7 +27513,7 @@
         <p:spPr>
           <a:xfrm>
             <a:off x="6031080" y="2326680"/>
-            <a:ext cx="128880" cy="128880"/>
+            <a:ext cx="128520" cy="128520"/>
           </a:xfrm>
           <a:custGeom>
             <a:avLst/>
@@ -27590,7 +27584,7 @@
         <p:spPr>
           <a:xfrm>
             <a:off x="6031080" y="3177720"/>
-            <a:ext cx="128880" cy="128880"/>
+            <a:ext cx="128520" cy="128520"/>
           </a:xfrm>
           <a:custGeom>
             <a:avLst/>
@@ -27661,7 +27655,7 @@
         <p:spPr>
           <a:xfrm>
             <a:off x="6031080" y="4020840"/>
-            <a:ext cx="128880" cy="128880"/>
+            <a:ext cx="128520" cy="128520"/>
           </a:xfrm>
           <a:custGeom>
             <a:avLst/>
@@ -27732,7 +27726,7 @@
         <p:spPr>
           <a:xfrm>
             <a:off x="6031080" y="4863960"/>
-            <a:ext cx="128880" cy="128880"/>
+            <a:ext cx="128520" cy="128520"/>
           </a:xfrm>
           <a:custGeom>
             <a:avLst/>
@@ -27803,7 +27797,7 @@
         <p:spPr>
           <a:xfrm>
             <a:off x="6031080" y="5715000"/>
-            <a:ext cx="128880" cy="128880"/>
+            <a:ext cx="128520" cy="128520"/>
           </a:xfrm>
           <a:custGeom>
             <a:avLst/>
@@ -27911,7 +27905,7 @@
         <p:spPr>
           <a:xfrm>
             <a:off x="380880" y="380880"/>
-            <a:ext cx="11505600" cy="227880"/>
+            <a:ext cx="11505240" cy="227520"/>
           </a:xfrm>
           <a:prstGeom prst="rect">
             <a:avLst/>
@@ -27939,7 +27933,7 @@
               <a:buNone/>
             </a:pPr>
             <a:r>
-              <a:rPr b="1" lang="en-US" sz="1200" spc="55" strike="noStrike">
+              <a:rPr b="1" lang="en-US" sz="1200" spc="52" strike="noStrike">
                 <a:solidFill>
                   <a:srgbClr val="0984e3"/>
                 </a:solidFill>
@@ -27963,7 +27957,7 @@
         <p:spPr>
           <a:xfrm>
             <a:off x="380880" y="685800"/>
-            <a:ext cx="11657880" cy="456480"/>
+            <a:ext cx="11657520" cy="456120"/>
           </a:xfrm>
           <a:prstGeom prst="rect">
             <a:avLst/>
@@ -28015,7 +28009,7 @@
         <p:spPr>
           <a:xfrm>
             <a:off x="380880" y="1371600"/>
-            <a:ext cx="4390200" cy="3047400"/>
+            <a:ext cx="4389840" cy="3047040"/>
           </a:xfrm>
           <a:prstGeom prst="roundRect">
             <a:avLst>
@@ -28047,7 +28041,7 @@
         <p:spPr>
           <a:xfrm>
             <a:off x="399960" y="4648320"/>
-            <a:ext cx="4371120" cy="1142280"/>
+            <a:ext cx="4370760" cy="1141920"/>
           </a:xfrm>
           <a:custGeom>
             <a:avLst/>
@@ -28098,7 +28092,7 @@
         <p:spPr>
           <a:xfrm>
             <a:off x="399960" y="4648320"/>
-            <a:ext cx="37440" cy="1142280"/>
+            <a:ext cx="37080" cy="1141920"/>
           </a:xfrm>
           <a:custGeom>
             <a:avLst/>
@@ -28149,7 +28143,7 @@
         <p:spPr>
           <a:xfrm>
             <a:off x="609480" y="4838760"/>
-            <a:ext cx="4047480" cy="494640"/>
+            <a:ext cx="4047120" cy="494280"/>
           </a:xfrm>
           <a:prstGeom prst="rect">
             <a:avLst/>
@@ -28201,7 +28195,7 @@
         <p:spPr>
           <a:xfrm>
             <a:off x="609480" y="5410080"/>
-            <a:ext cx="4037760" cy="189720"/>
+            <a:ext cx="4037400" cy="189360"/>
           </a:xfrm>
           <a:prstGeom prst="rect">
             <a:avLst/>
@@ -28263,7 +28257,7 @@
         <p:spPr>
           <a:xfrm>
             <a:off x="5074920" y="1371600"/>
-            <a:ext cx="6847920" cy="304200"/>
+            <a:ext cx="6847560" cy="303840"/>
           </a:xfrm>
           <a:prstGeom prst="rect">
             <a:avLst/>
@@ -28315,7 +28309,7 @@
         <p:spPr>
           <a:xfrm>
             <a:off x="5074920" y="1752480"/>
-            <a:ext cx="6809760" cy="990000"/>
+            <a:ext cx="6809400" cy="989640"/>
           </a:xfrm>
           <a:prstGeom prst="rect">
             <a:avLst/>
@@ -28367,7 +28361,7 @@
         <p:spPr>
           <a:xfrm>
             <a:off x="5074920" y="2895480"/>
-            <a:ext cx="6847920" cy="304200"/>
+            <a:ext cx="6847560" cy="303840"/>
           </a:xfrm>
           <a:prstGeom prst="rect">
             <a:avLst/>
@@ -28419,7 +28413,7 @@
         <p:spPr>
           <a:xfrm>
             <a:off x="5074920" y="3276720"/>
-            <a:ext cx="6809760" cy="990000"/>
+            <a:ext cx="6809400" cy="989640"/>
           </a:xfrm>
           <a:prstGeom prst="rect">
             <a:avLst/>
@@ -28491,7 +28485,7 @@
         <p:spPr>
           <a:xfrm>
             <a:off x="5074920" y="4419720"/>
-            <a:ext cx="6847920" cy="304200"/>
+            <a:ext cx="6847560" cy="303840"/>
           </a:xfrm>
           <a:prstGeom prst="rect">
             <a:avLst/>
@@ -28543,7 +28537,7 @@
         <p:spPr>
           <a:xfrm>
             <a:off x="5074920" y="4800600"/>
-            <a:ext cx="6809760" cy="990000"/>
+            <a:ext cx="6809400" cy="989640"/>
           </a:xfrm>
           <a:prstGeom prst="rect">
             <a:avLst/>
@@ -28652,7 +28646,7 @@
         <p:spPr>
           <a:xfrm>
             <a:off x="609480" y="1781280"/>
-            <a:ext cx="12191400" cy="1218600"/>
+            <a:ext cx="12191040" cy="1218240"/>
           </a:xfrm>
           <a:prstGeom prst="rect">
             <a:avLst/>
@@ -28706,7 +28700,7 @@
         <p:spPr>
           <a:xfrm>
             <a:off x="609480" y="3152880"/>
-            <a:ext cx="11867400" cy="1142280"/>
+            <a:ext cx="11867040" cy="1141920"/>
           </a:xfrm>
           <a:prstGeom prst="rect">
             <a:avLst/>
@@ -28779,7 +28773,7 @@
         <p:spPr>
           <a:xfrm>
             <a:off x="609480" y="4524480"/>
-            <a:ext cx="1218600" cy="18360"/>
+            <a:ext cx="1218240" cy="18000"/>
           </a:xfrm>
           <a:custGeom>
             <a:avLst/>
@@ -28830,7 +28824,7 @@
         <p:spPr>
           <a:xfrm>
             <a:off x="609480" y="4772160"/>
-            <a:ext cx="11696040" cy="304200"/>
+            <a:ext cx="11695680" cy="303840"/>
           </a:xfrm>
           <a:prstGeom prst="rect">
             <a:avLst/>
@@ -28919,7 +28913,7 @@
         <p:spPr>
           <a:xfrm>
             <a:off x="380880" y="380880"/>
-            <a:ext cx="11505600" cy="227880"/>
+            <a:ext cx="11505240" cy="227520"/>
           </a:xfrm>
           <a:prstGeom prst="rect">
             <a:avLst/>
@@ -28947,7 +28941,7 @@
               <a:buNone/>
             </a:pPr>
             <a:r>
-              <a:rPr b="1" lang="en-US" sz="1200" spc="55" strike="noStrike">
+              <a:rPr b="1" lang="en-US" sz="1200" spc="52" strike="noStrike">
                 <a:solidFill>
                   <a:srgbClr val="0984e3"/>
                 </a:solidFill>
@@ -28971,7 +28965,7 @@
         <p:spPr>
           <a:xfrm>
             <a:off x="380880" y="685800"/>
-            <a:ext cx="11657880" cy="456480"/>
+            <a:ext cx="11657520" cy="456120"/>
           </a:xfrm>
           <a:prstGeom prst="rect">
             <a:avLst/>
@@ -29023,7 +29017,7 @@
         <p:spPr>
           <a:xfrm>
             <a:off x="380880" y="1371600"/>
-            <a:ext cx="5657040" cy="1237680"/>
+            <a:ext cx="5656680" cy="1237320"/>
           </a:xfrm>
           <a:prstGeom prst="rect">
             <a:avLst/>
@@ -29085,7 +29079,7 @@
         <p:spPr>
           <a:xfrm>
             <a:off x="380880" y="2762280"/>
-            <a:ext cx="5647680" cy="837360"/>
+            <a:ext cx="5647320" cy="837000"/>
           </a:xfrm>
           <a:prstGeom prst="rect">
             <a:avLst/>
@@ -29137,7 +29131,7 @@
         <p:spPr>
           <a:xfrm>
             <a:off x="399960" y="3750480"/>
-            <a:ext cx="5542920" cy="1599480"/>
+            <a:ext cx="5542560" cy="1599120"/>
           </a:xfrm>
           <a:custGeom>
             <a:avLst/>
@@ -29188,7 +29182,7 @@
         <p:spPr>
           <a:xfrm>
             <a:off x="399960" y="3750480"/>
-            <a:ext cx="37440" cy="1599480"/>
+            <a:ext cx="37080" cy="1599120"/>
           </a:xfrm>
           <a:custGeom>
             <a:avLst/>
@@ -29239,7 +29233,7 @@
         <p:spPr>
           <a:xfrm>
             <a:off x="609480" y="3940920"/>
-            <a:ext cx="5238000" cy="266040"/>
+            <a:ext cx="5237640" cy="265680"/>
           </a:xfrm>
           <a:prstGeom prst="rect">
             <a:avLst/>
@@ -29291,7 +29285,7 @@
         <p:spPr>
           <a:xfrm>
             <a:off x="609480" y="4321800"/>
-            <a:ext cx="5218920" cy="227880"/>
+            <a:ext cx="5218560" cy="227520"/>
           </a:xfrm>
           <a:prstGeom prst="rect">
             <a:avLst/>
@@ -29353,7 +29347,7 @@
         <p:spPr>
           <a:xfrm>
             <a:off x="609480" y="4626720"/>
-            <a:ext cx="5218920" cy="227880"/>
+            <a:ext cx="5218560" cy="227520"/>
           </a:xfrm>
           <a:prstGeom prst="rect">
             <a:avLst/>
@@ -29415,7 +29409,7 @@
         <p:spPr>
           <a:xfrm>
             <a:off x="609480" y="4931640"/>
-            <a:ext cx="5218920" cy="227880"/>
+            <a:ext cx="5218560" cy="227520"/>
           </a:xfrm>
           <a:prstGeom prst="rect">
             <a:avLst/>
@@ -29477,7 +29471,7 @@
         <p:spPr>
           <a:xfrm>
             <a:off x="6253200" y="1618200"/>
-            <a:ext cx="5552280" cy="3485520"/>
+            <a:ext cx="5551920" cy="3485160"/>
           </a:xfrm>
           <a:custGeom>
             <a:avLst/>
@@ -29531,7 +29525,7 @@
         <p:spPr>
           <a:xfrm>
             <a:off x="6438960" y="1851480"/>
-            <a:ext cx="5180760" cy="266040"/>
+            <a:ext cx="5180400" cy="265680"/>
           </a:xfrm>
           <a:prstGeom prst="rect">
             <a:avLst/>
@@ -29583,7 +29577,7 @@
         <p:spPr>
           <a:xfrm>
             <a:off x="6448320" y="2270520"/>
-            <a:ext cx="5161680" cy="227880"/>
+            <a:ext cx="5161320" cy="227520"/>
           </a:xfrm>
           <a:prstGeom prst="rect">
             <a:avLst/>
@@ -30107,7 +30101,7 @@
         <p:spPr>
           <a:xfrm>
             <a:off x="6486480" y="4218480"/>
-            <a:ext cx="5085720" cy="8640"/>
+            <a:ext cx="5085360" cy="8280"/>
           </a:xfrm>
           <a:custGeom>
             <a:avLst/>
@@ -30158,7 +30152,7 @@
         <p:spPr>
           <a:xfrm>
             <a:off x="6486480" y="4375440"/>
-            <a:ext cx="5161680" cy="494640"/>
+            <a:ext cx="5161320" cy="494280"/>
           </a:xfrm>
           <a:prstGeom prst="rect">
             <a:avLst/>

--- a/assets/libreoffice_impr_njc/8a9fd669-2142-46d4-bd0c-32cd6323b57f/Game Theory.pptx
+++ b/assets/libreoffice_impr_njc/8a9fd669-2142-46d4-bd0c-32cd6323b57f/Game Theory.pptx
@@ -30,7 +30,7 @@
     <p:sldId id="275" r:id="rId23"/>
     <p:sldId id="276" r:id="rId24"/>
   </p:sldIdLst>
-  <p:sldSz cx="12192000" cy="6858000"/>
+  <p:sldSz cx="12193588" cy="6858000"/>
   <p:notesSz cx="6858000" cy="12192000"/>
 </p:presentation>
 </file>
@@ -312,7 +312,7 @@
             <a:pPr algn="r">
               <a:buNone/>
             </a:pPr>
-            <a:fld id="{6956C64B-2FAF-4791-BF89-4C80E11DF9D2}" type="slidenum">
+            <a:fld id="{C20B5335-A69C-49C6-ACE9-7B93ED8CAE3D}" type="slidenum">
               <a:rPr b="0" lang="en-HK" sz="1400" spc="-1" strike="noStrike">
                 <a:latin typeface="Times New Roman"/>
               </a:rPr>
@@ -360,7 +360,7 @@
         <p:spPr>
           <a:xfrm>
             <a:off x="685800" y="1143000"/>
-            <a:ext cx="5485320" cy="3085200"/>
+            <a:ext cx="5484960" cy="3084840"/>
           </a:xfrm>
           <a:prstGeom prst="rect">
             <a:avLst/>
@@ -383,7 +383,7 @@
         <p:spPr>
           <a:xfrm>
             <a:off x="685800" y="4400640"/>
-            <a:ext cx="5485320" cy="3599280"/>
+            <a:ext cx="5484960" cy="3598920"/>
           </a:xfrm>
           <a:prstGeom prst="rect">
             <a:avLst/>
@@ -417,7 +417,7 @@
         <p:spPr>
           <a:xfrm>
             <a:off x="3884760" y="8685360"/>
-            <a:ext cx="2970720" cy="457560"/>
+            <a:ext cx="2970360" cy="457200"/>
           </a:xfrm>
           <a:prstGeom prst="rect">
             <a:avLst/>
@@ -449,7 +449,7 @@
               </a:lnSpc>
               <a:buNone/>
             </a:pPr>
-            <a:fld id="{AB38B43C-DFD9-4003-B957-0E975FADEC5C}" type="slidenum">
+            <a:fld id="{D5C00367-9E4A-4700-B44E-43712536FFDB}" type="slidenum">
               <a:rPr b="0" lang="en-US" sz="1200" spc="-1" strike="noStrike">
                 <a:latin typeface="Times New Roman"/>
               </a:rPr>
@@ -496,7 +496,7 @@
         <p:spPr>
           <a:xfrm>
             <a:off x="685800" y="1143000"/>
-            <a:ext cx="5485320" cy="3085200"/>
+            <a:ext cx="5484960" cy="3084840"/>
           </a:xfrm>
           <a:prstGeom prst="rect">
             <a:avLst/>
@@ -519,7 +519,7 @@
         <p:spPr>
           <a:xfrm>
             <a:off x="685800" y="4400640"/>
-            <a:ext cx="5485320" cy="3599280"/>
+            <a:ext cx="5484960" cy="3598920"/>
           </a:xfrm>
           <a:prstGeom prst="rect">
             <a:avLst/>
@@ -553,7 +553,7 @@
         <p:spPr>
           <a:xfrm>
             <a:off x="3884760" y="8685360"/>
-            <a:ext cx="2970720" cy="457560"/>
+            <a:ext cx="2970360" cy="457200"/>
           </a:xfrm>
           <a:prstGeom prst="rect">
             <a:avLst/>
@@ -585,7 +585,7 @@
               </a:lnSpc>
               <a:buNone/>
             </a:pPr>
-            <a:fld id="{99512475-A3CE-4E1F-ACD9-C6D09A9FD71A}" type="slidenum">
+            <a:fld id="{836D4F69-70BD-472C-B746-F92F8FDC2D47}" type="slidenum">
               <a:rPr b="0" lang="en-US" sz="1200" spc="-1" strike="noStrike">
                 <a:latin typeface="Times New Roman"/>
               </a:rPr>
@@ -632,7 +632,7 @@
         <p:spPr>
           <a:xfrm>
             <a:off x="685800" y="1143000"/>
-            <a:ext cx="5485320" cy="3085200"/>
+            <a:ext cx="5484960" cy="3084840"/>
           </a:xfrm>
           <a:prstGeom prst="rect">
             <a:avLst/>
@@ -655,7 +655,7 @@
         <p:spPr>
           <a:xfrm>
             <a:off x="685800" y="4400640"/>
-            <a:ext cx="5485320" cy="3599280"/>
+            <a:ext cx="5484960" cy="3598920"/>
           </a:xfrm>
           <a:prstGeom prst="rect">
             <a:avLst/>
@@ -689,7 +689,7 @@
         <p:spPr>
           <a:xfrm>
             <a:off x="3884760" y="8685360"/>
-            <a:ext cx="2970720" cy="457560"/>
+            <a:ext cx="2970360" cy="457200"/>
           </a:xfrm>
           <a:prstGeom prst="rect">
             <a:avLst/>
@@ -721,7 +721,7 @@
               </a:lnSpc>
               <a:buNone/>
             </a:pPr>
-            <a:fld id="{7E7E7668-06A0-42DE-8378-AC97BAE1646E}" type="slidenum">
+            <a:fld id="{D9BBAF2D-BF53-48CB-8909-15C2BC17C50F}" type="slidenum">
               <a:rPr b="0" lang="en-US" sz="1200" spc="-1" strike="noStrike">
                 <a:latin typeface="Times New Roman"/>
               </a:rPr>
@@ -768,7 +768,7 @@
         <p:spPr>
           <a:xfrm>
             <a:off x="685800" y="1143000"/>
-            <a:ext cx="5485320" cy="3085200"/>
+            <a:ext cx="5484960" cy="3084840"/>
           </a:xfrm>
           <a:prstGeom prst="rect">
             <a:avLst/>
@@ -791,7 +791,7 @@
         <p:spPr>
           <a:xfrm>
             <a:off x="685800" y="4400640"/>
-            <a:ext cx="5485320" cy="3599280"/>
+            <a:ext cx="5484960" cy="3598920"/>
           </a:xfrm>
           <a:prstGeom prst="rect">
             <a:avLst/>
@@ -825,7 +825,7 @@
         <p:spPr>
           <a:xfrm>
             <a:off x="3884760" y="8685360"/>
-            <a:ext cx="2970720" cy="457560"/>
+            <a:ext cx="2970360" cy="457200"/>
           </a:xfrm>
           <a:prstGeom prst="rect">
             <a:avLst/>
@@ -857,7 +857,7 @@
               </a:lnSpc>
               <a:buNone/>
             </a:pPr>
-            <a:fld id="{BABB765F-5FCD-4ED9-8580-DC5F1DF72F03}" type="slidenum">
+            <a:fld id="{0B5532B2-BC49-4D8C-96B9-1E281C6CFA43}" type="slidenum">
               <a:rPr b="0" lang="en-US" sz="1200" spc="-1" strike="noStrike">
                 <a:latin typeface="Times New Roman"/>
               </a:rPr>
@@ -904,7 +904,7 @@
         <p:spPr>
           <a:xfrm>
             <a:off x="685800" y="1143000"/>
-            <a:ext cx="5485320" cy="3085200"/>
+            <a:ext cx="5484960" cy="3084840"/>
           </a:xfrm>
           <a:prstGeom prst="rect">
             <a:avLst/>
@@ -927,7 +927,7 @@
         <p:spPr>
           <a:xfrm>
             <a:off x="685800" y="4400640"/>
-            <a:ext cx="5485320" cy="3599280"/>
+            <a:ext cx="5484960" cy="3598920"/>
           </a:xfrm>
           <a:prstGeom prst="rect">
             <a:avLst/>
@@ -961,7 +961,7 @@
         <p:spPr>
           <a:xfrm>
             <a:off x="3884760" y="8685360"/>
-            <a:ext cx="2970720" cy="457560"/>
+            <a:ext cx="2970360" cy="457200"/>
           </a:xfrm>
           <a:prstGeom prst="rect">
             <a:avLst/>
@@ -993,7 +993,7 @@
               </a:lnSpc>
               <a:buNone/>
             </a:pPr>
-            <a:fld id="{B14F65CE-E1C7-4D7B-827A-9DCF894BD01E}" type="slidenum">
+            <a:fld id="{59FCAC4C-D4EB-4248-83CD-47DEA5551A14}" type="slidenum">
               <a:rPr b="0" lang="en-US" sz="1200" spc="-1" strike="noStrike">
                 <a:latin typeface="Times New Roman"/>
               </a:rPr>
@@ -1040,7 +1040,7 @@
         <p:spPr>
           <a:xfrm>
             <a:off x="685800" y="1143000"/>
-            <a:ext cx="5485320" cy="3085200"/>
+            <a:ext cx="5484960" cy="3084840"/>
           </a:xfrm>
           <a:prstGeom prst="rect">
             <a:avLst/>
@@ -1063,7 +1063,7 @@
         <p:spPr>
           <a:xfrm>
             <a:off x="685800" y="4400640"/>
-            <a:ext cx="5485320" cy="3599280"/>
+            <a:ext cx="5484960" cy="3598920"/>
           </a:xfrm>
           <a:prstGeom prst="rect">
             <a:avLst/>
@@ -1097,7 +1097,7 @@
         <p:spPr>
           <a:xfrm>
             <a:off x="3884760" y="8685360"/>
-            <a:ext cx="2970720" cy="457560"/>
+            <a:ext cx="2970360" cy="457200"/>
           </a:xfrm>
           <a:prstGeom prst="rect">
             <a:avLst/>
@@ -1129,7 +1129,7 @@
               </a:lnSpc>
               <a:buNone/>
             </a:pPr>
-            <a:fld id="{0665917F-904E-425A-8732-08D97469B13E}" type="slidenum">
+            <a:fld id="{A5E78F5A-397F-4ADA-8C2B-37ECB46679C8}" type="slidenum">
               <a:rPr b="0" lang="en-US" sz="1200" spc="-1" strike="noStrike">
                 <a:latin typeface="Times New Roman"/>
               </a:rPr>
@@ -1176,7 +1176,7 @@
         <p:spPr>
           <a:xfrm>
             <a:off x="685800" y="1143000"/>
-            <a:ext cx="5485320" cy="3085200"/>
+            <a:ext cx="5484960" cy="3084840"/>
           </a:xfrm>
           <a:prstGeom prst="rect">
             <a:avLst/>
@@ -1199,7 +1199,7 @@
         <p:spPr>
           <a:xfrm>
             <a:off x="685800" y="4400640"/>
-            <a:ext cx="5485320" cy="3599280"/>
+            <a:ext cx="5484960" cy="3598920"/>
           </a:xfrm>
           <a:prstGeom prst="rect">
             <a:avLst/>
@@ -1233,7 +1233,7 @@
         <p:spPr>
           <a:xfrm>
             <a:off x="3884760" y="8685360"/>
-            <a:ext cx="2970720" cy="457560"/>
+            <a:ext cx="2970360" cy="457200"/>
           </a:xfrm>
           <a:prstGeom prst="rect">
             <a:avLst/>
@@ -1265,7 +1265,7 @@
               </a:lnSpc>
               <a:buNone/>
             </a:pPr>
-            <a:fld id="{88A3CABC-B137-4E98-B662-71D4436D3DF6}" type="slidenum">
+            <a:fld id="{1EDA2A34-6A1D-4D32-BDC2-0A992DE16F2C}" type="slidenum">
               <a:rPr b="0" lang="en-US" sz="1200" spc="-1" strike="noStrike">
                 <a:latin typeface="Times New Roman"/>
               </a:rPr>
@@ -1312,7 +1312,7 @@
         <p:spPr>
           <a:xfrm>
             <a:off x="685800" y="1143000"/>
-            <a:ext cx="5485320" cy="3085200"/>
+            <a:ext cx="5484960" cy="3084840"/>
           </a:xfrm>
           <a:prstGeom prst="rect">
             <a:avLst/>
@@ -1335,7 +1335,7 @@
         <p:spPr>
           <a:xfrm>
             <a:off x="685800" y="4400640"/>
-            <a:ext cx="5485320" cy="3599280"/>
+            <a:ext cx="5484960" cy="3598920"/>
           </a:xfrm>
           <a:prstGeom prst="rect">
             <a:avLst/>
@@ -1369,7 +1369,7 @@
         <p:spPr>
           <a:xfrm>
             <a:off x="3884760" y="8685360"/>
-            <a:ext cx="2970720" cy="457560"/>
+            <a:ext cx="2970360" cy="457200"/>
           </a:xfrm>
           <a:prstGeom prst="rect">
             <a:avLst/>
@@ -1401,7 +1401,7 @@
               </a:lnSpc>
               <a:buNone/>
             </a:pPr>
-            <a:fld id="{BF171FA0-61B9-4735-A72F-9E59BC9235E2}" type="slidenum">
+            <a:fld id="{9677E852-1893-41CD-944E-2D3D920855C8}" type="slidenum">
               <a:rPr b="0" lang="en-US" sz="1200" spc="-1" strike="noStrike">
                 <a:latin typeface="Times New Roman"/>
               </a:rPr>
@@ -1448,7 +1448,7 @@
         <p:spPr>
           <a:xfrm>
             <a:off x="685800" y="1143000"/>
-            <a:ext cx="5485320" cy="3085200"/>
+            <a:ext cx="5484960" cy="3084840"/>
           </a:xfrm>
           <a:prstGeom prst="rect">
             <a:avLst/>
@@ -1471,7 +1471,7 @@
         <p:spPr>
           <a:xfrm>
             <a:off x="685800" y="4400640"/>
-            <a:ext cx="5485320" cy="3599280"/>
+            <a:ext cx="5484960" cy="3598920"/>
           </a:xfrm>
           <a:prstGeom prst="rect">
             <a:avLst/>
@@ -1505,7 +1505,7 @@
         <p:spPr>
           <a:xfrm>
             <a:off x="3884760" y="8685360"/>
-            <a:ext cx="2970720" cy="457560"/>
+            <a:ext cx="2970360" cy="457200"/>
           </a:xfrm>
           <a:prstGeom prst="rect">
             <a:avLst/>
@@ -1537,7 +1537,7 @@
               </a:lnSpc>
               <a:buNone/>
             </a:pPr>
-            <a:fld id="{19BAB682-2343-45B4-B1CA-CFDE50254F51}" type="slidenum">
+            <a:fld id="{47149CD1-AD4E-4E6C-9B9D-F151D054CA89}" type="slidenum">
               <a:rPr b="0" lang="en-US" sz="1200" spc="-1" strike="noStrike">
                 <a:latin typeface="Times New Roman"/>
               </a:rPr>
@@ -1584,7 +1584,7 @@
         <p:spPr>
           <a:xfrm>
             <a:off x="685800" y="1143000"/>
-            <a:ext cx="5485320" cy="3085200"/>
+            <a:ext cx="5484960" cy="3084840"/>
           </a:xfrm>
           <a:prstGeom prst="rect">
             <a:avLst/>
@@ -1607,7 +1607,7 @@
         <p:spPr>
           <a:xfrm>
             <a:off x="685800" y="4400640"/>
-            <a:ext cx="5485320" cy="3599280"/>
+            <a:ext cx="5484960" cy="3598920"/>
           </a:xfrm>
           <a:prstGeom prst="rect">
             <a:avLst/>
@@ -1641,7 +1641,7 @@
         <p:spPr>
           <a:xfrm>
             <a:off x="3884760" y="8685360"/>
-            <a:ext cx="2970720" cy="457560"/>
+            <a:ext cx="2970360" cy="457200"/>
           </a:xfrm>
           <a:prstGeom prst="rect">
             <a:avLst/>
@@ -1673,7 +1673,7 @@
               </a:lnSpc>
               <a:buNone/>
             </a:pPr>
-            <a:fld id="{18F17A85-9C36-43B2-A76E-83B2AA8F540C}" type="slidenum">
+            <a:fld id="{4ED7ABC5-A7D0-44F0-9E24-E51ADEC2AB53}" type="slidenum">
               <a:rPr b="0" lang="en-US" sz="1200" spc="-1" strike="noStrike">
                 <a:latin typeface="Times New Roman"/>
               </a:rPr>
@@ -1720,7 +1720,7 @@
         <p:spPr>
           <a:xfrm>
             <a:off x="685800" y="1143000"/>
-            <a:ext cx="5485320" cy="3085200"/>
+            <a:ext cx="5484960" cy="3084840"/>
           </a:xfrm>
           <a:prstGeom prst="rect">
             <a:avLst/>
@@ -1743,7 +1743,7 @@
         <p:spPr>
           <a:xfrm>
             <a:off x="685800" y="4400640"/>
-            <a:ext cx="5485320" cy="3599280"/>
+            <a:ext cx="5484960" cy="3598920"/>
           </a:xfrm>
           <a:prstGeom prst="rect">
             <a:avLst/>
@@ -1777,7 +1777,7 @@
         <p:spPr>
           <a:xfrm>
             <a:off x="3884760" y="8685360"/>
-            <a:ext cx="2970720" cy="457560"/>
+            <a:ext cx="2970360" cy="457200"/>
           </a:xfrm>
           <a:prstGeom prst="rect">
             <a:avLst/>
@@ -1809,7 +1809,7 @@
               </a:lnSpc>
               <a:buNone/>
             </a:pPr>
-            <a:fld id="{2C6E8248-3353-4DD7-91B9-4A81BEE882BC}" type="slidenum">
+            <a:fld id="{CEFDC706-FBBF-4795-B30D-FCA243BCEDA0}" type="slidenum">
               <a:rPr b="0" lang="en-US" sz="1200" spc="-1" strike="noStrike">
                 <a:latin typeface="Times New Roman"/>
               </a:rPr>
@@ -1856,7 +1856,7 @@
         <p:spPr>
           <a:xfrm>
             <a:off x="685800" y="1143000"/>
-            <a:ext cx="5485320" cy="3085200"/>
+            <a:ext cx="5484960" cy="3084840"/>
           </a:xfrm>
           <a:prstGeom prst="rect">
             <a:avLst/>
@@ -1879,7 +1879,7 @@
         <p:spPr>
           <a:xfrm>
             <a:off x="685800" y="4400640"/>
-            <a:ext cx="5485320" cy="3599280"/>
+            <a:ext cx="5484960" cy="3598920"/>
           </a:xfrm>
           <a:prstGeom prst="rect">
             <a:avLst/>
@@ -1913,7 +1913,7 @@
         <p:spPr>
           <a:xfrm>
             <a:off x="3884760" y="8685360"/>
-            <a:ext cx="2970720" cy="457560"/>
+            <a:ext cx="2970360" cy="457200"/>
           </a:xfrm>
           <a:prstGeom prst="rect">
             <a:avLst/>
@@ -1945,7 +1945,7 @@
               </a:lnSpc>
               <a:buNone/>
             </a:pPr>
-            <a:fld id="{30083641-FE33-4D03-8631-FBB006A6888A}" type="slidenum">
+            <a:fld id="{940DE7E5-CC62-4981-A77F-461F40FADA36}" type="slidenum">
               <a:rPr b="0" lang="en-US" sz="1200" spc="-1" strike="noStrike">
                 <a:latin typeface="Times New Roman"/>
               </a:rPr>
@@ -1992,7 +1992,7 @@
         <p:spPr>
           <a:xfrm>
             <a:off x="685800" y="1143000"/>
-            <a:ext cx="5485320" cy="3085200"/>
+            <a:ext cx="5484960" cy="3084840"/>
           </a:xfrm>
           <a:prstGeom prst="rect">
             <a:avLst/>
@@ -2015,7 +2015,7 @@
         <p:spPr>
           <a:xfrm>
             <a:off x="685800" y="4400640"/>
-            <a:ext cx="5485320" cy="3599280"/>
+            <a:ext cx="5484960" cy="3598920"/>
           </a:xfrm>
           <a:prstGeom prst="rect">
             <a:avLst/>
@@ -2049,7 +2049,7 @@
         <p:spPr>
           <a:xfrm>
             <a:off x="3884760" y="8685360"/>
-            <a:ext cx="2970720" cy="457560"/>
+            <a:ext cx="2970360" cy="457200"/>
           </a:xfrm>
           <a:prstGeom prst="rect">
             <a:avLst/>
@@ -2081,7 +2081,7 @@
               </a:lnSpc>
               <a:buNone/>
             </a:pPr>
-            <a:fld id="{FC9E967B-67B8-4702-957A-75B88E4042EB}" type="slidenum">
+            <a:fld id="{9372447D-F38C-4973-A413-859DD2094455}" type="slidenum">
               <a:rPr b="0" lang="en-US" sz="1200" spc="-1" strike="noStrike">
                 <a:latin typeface="Times New Roman"/>
               </a:rPr>
@@ -2128,7 +2128,7 @@
         <p:spPr>
           <a:xfrm>
             <a:off x="685800" y="1143000"/>
-            <a:ext cx="5485320" cy="3085200"/>
+            <a:ext cx="5484960" cy="3084840"/>
           </a:xfrm>
           <a:prstGeom prst="rect">
             <a:avLst/>
@@ -2151,7 +2151,7 @@
         <p:spPr>
           <a:xfrm>
             <a:off x="685800" y="4400640"/>
-            <a:ext cx="5485320" cy="3599280"/>
+            <a:ext cx="5484960" cy="3598920"/>
           </a:xfrm>
           <a:prstGeom prst="rect">
             <a:avLst/>
@@ -2185,7 +2185,7 @@
         <p:spPr>
           <a:xfrm>
             <a:off x="3884760" y="8685360"/>
-            <a:ext cx="2970720" cy="457560"/>
+            <a:ext cx="2970360" cy="457200"/>
           </a:xfrm>
           <a:prstGeom prst="rect">
             <a:avLst/>
@@ -2217,7 +2217,7 @@
               </a:lnSpc>
               <a:buNone/>
             </a:pPr>
-            <a:fld id="{F10DA348-1261-404B-AF31-CB4AF888E702}" type="slidenum">
+            <a:fld id="{EEA79CDA-E759-4E0B-918D-E79075A1F51B}" type="slidenum">
               <a:rPr b="0" lang="en-US" sz="1200" spc="-1" strike="noStrike">
                 <a:latin typeface="Times New Roman"/>
               </a:rPr>
@@ -2264,7 +2264,7 @@
         <p:spPr>
           <a:xfrm>
             <a:off x="685800" y="1143000"/>
-            <a:ext cx="5485320" cy="3085200"/>
+            <a:ext cx="5484960" cy="3084840"/>
           </a:xfrm>
           <a:prstGeom prst="rect">
             <a:avLst/>
@@ -2287,7 +2287,7 @@
         <p:spPr>
           <a:xfrm>
             <a:off x="685800" y="4400640"/>
-            <a:ext cx="5485320" cy="3599280"/>
+            <a:ext cx="5484960" cy="3598920"/>
           </a:xfrm>
           <a:prstGeom prst="rect">
             <a:avLst/>
@@ -2321,7 +2321,7 @@
         <p:spPr>
           <a:xfrm>
             <a:off x="3884760" y="8685360"/>
-            <a:ext cx="2970720" cy="457560"/>
+            <a:ext cx="2970360" cy="457200"/>
           </a:xfrm>
           <a:prstGeom prst="rect">
             <a:avLst/>
@@ -2353,7 +2353,7 @@
               </a:lnSpc>
               <a:buNone/>
             </a:pPr>
-            <a:fld id="{874E664E-0A93-4510-B995-016F2037C66F}" type="slidenum">
+            <a:fld id="{17230DEA-E658-4AEB-BD08-E994C8F52936}" type="slidenum">
               <a:rPr b="0" lang="en-US" sz="1200" spc="-1" strike="noStrike">
                 <a:latin typeface="Times New Roman"/>
               </a:rPr>
@@ -2400,7 +2400,7 @@
         <p:spPr>
           <a:xfrm>
             <a:off x="685800" y="1143000"/>
-            <a:ext cx="5485320" cy="3085200"/>
+            <a:ext cx="5484960" cy="3084840"/>
           </a:xfrm>
           <a:prstGeom prst="rect">
             <a:avLst/>
@@ -2423,7 +2423,7 @@
         <p:spPr>
           <a:xfrm>
             <a:off x="685800" y="4400640"/>
-            <a:ext cx="5485320" cy="3599280"/>
+            <a:ext cx="5484960" cy="3598920"/>
           </a:xfrm>
           <a:prstGeom prst="rect">
             <a:avLst/>
@@ -2457,7 +2457,7 @@
         <p:spPr>
           <a:xfrm>
             <a:off x="3884760" y="8685360"/>
-            <a:ext cx="2970720" cy="457560"/>
+            <a:ext cx="2970360" cy="457200"/>
           </a:xfrm>
           <a:prstGeom prst="rect">
             <a:avLst/>
@@ -2489,7 +2489,7 @@
               </a:lnSpc>
               <a:buNone/>
             </a:pPr>
-            <a:fld id="{CDB8B1EB-5949-4101-9C8A-5F31747E2546}" type="slidenum">
+            <a:fld id="{40913CD0-3663-4F3A-AAFC-37B0197CE757}" type="slidenum">
               <a:rPr b="0" lang="en-US" sz="1200" spc="-1" strike="noStrike">
                 <a:latin typeface="Times New Roman"/>
               </a:rPr>
@@ -2536,7 +2536,7 @@
         <p:spPr>
           <a:xfrm>
             <a:off x="685800" y="1143000"/>
-            <a:ext cx="5485320" cy="3085200"/>
+            <a:ext cx="5484960" cy="3084840"/>
           </a:xfrm>
           <a:prstGeom prst="rect">
             <a:avLst/>
@@ -2559,7 +2559,7 @@
         <p:spPr>
           <a:xfrm>
             <a:off x="685800" y="4400640"/>
-            <a:ext cx="5485320" cy="3599280"/>
+            <a:ext cx="5484960" cy="3598920"/>
           </a:xfrm>
           <a:prstGeom prst="rect">
             <a:avLst/>
@@ -2593,7 +2593,7 @@
         <p:spPr>
           <a:xfrm>
             <a:off x="3884760" y="8685360"/>
-            <a:ext cx="2970720" cy="457560"/>
+            <a:ext cx="2970360" cy="457200"/>
           </a:xfrm>
           <a:prstGeom prst="rect">
             <a:avLst/>
@@ -2625,7 +2625,7 @@
               </a:lnSpc>
               <a:buNone/>
             </a:pPr>
-            <a:fld id="{A74AEC41-E38A-4E5E-AB74-5BF9F7756C54}" type="slidenum">
+            <a:fld id="{1AC0BE30-06DC-486C-866F-F7029E259540}" type="slidenum">
               <a:rPr b="0" lang="en-US" sz="1200" spc="-1" strike="noStrike">
                 <a:latin typeface="Times New Roman"/>
               </a:rPr>
@@ -2672,7 +2672,7 @@
         <p:spPr>
           <a:xfrm>
             <a:off x="685800" y="1143000"/>
-            <a:ext cx="5485320" cy="3085200"/>
+            <a:ext cx="5484960" cy="3084840"/>
           </a:xfrm>
           <a:prstGeom prst="rect">
             <a:avLst/>
@@ -2695,7 +2695,7 @@
         <p:spPr>
           <a:xfrm>
             <a:off x="685800" y="4400640"/>
-            <a:ext cx="5485320" cy="3599280"/>
+            <a:ext cx="5484960" cy="3598920"/>
           </a:xfrm>
           <a:prstGeom prst="rect">
             <a:avLst/>
@@ -2729,7 +2729,7 @@
         <p:spPr>
           <a:xfrm>
             <a:off x="3884760" y="8685360"/>
-            <a:ext cx="2970720" cy="457560"/>
+            <a:ext cx="2970360" cy="457200"/>
           </a:xfrm>
           <a:prstGeom prst="rect">
             <a:avLst/>
@@ -2761,7 +2761,7 @@
               </a:lnSpc>
               <a:buNone/>
             </a:pPr>
-            <a:fld id="{4DECE65C-5355-4C9B-9AD9-EDCB92F7590E}" type="slidenum">
+            <a:fld id="{254F14B6-9AC1-4B5D-9A8E-F3EBD22E808D}" type="slidenum">
               <a:rPr b="0" lang="en-US" sz="1200" spc="-1" strike="noStrike">
                 <a:latin typeface="Times New Roman"/>
               </a:rPr>
@@ -2808,7 +2808,7 @@
         <p:spPr>
           <a:xfrm>
             <a:off x="685800" y="1143000"/>
-            <a:ext cx="5485320" cy="3085200"/>
+            <a:ext cx="5484960" cy="3084840"/>
           </a:xfrm>
           <a:prstGeom prst="rect">
             <a:avLst/>
@@ -2831,7 +2831,7 @@
         <p:spPr>
           <a:xfrm>
             <a:off x="685800" y="4400640"/>
-            <a:ext cx="5485320" cy="3599280"/>
+            <a:ext cx="5484960" cy="3598920"/>
           </a:xfrm>
           <a:prstGeom prst="rect">
             <a:avLst/>
@@ -2865,7 +2865,7 @@
         <p:spPr>
           <a:xfrm>
             <a:off x="3884760" y="8685360"/>
-            <a:ext cx="2970720" cy="457560"/>
+            <a:ext cx="2970360" cy="457200"/>
           </a:xfrm>
           <a:prstGeom prst="rect">
             <a:avLst/>
@@ -2897,7 +2897,7 @@
               </a:lnSpc>
               <a:buNone/>
             </a:pPr>
-            <a:fld id="{DBD6448A-6AED-4470-9D10-CE9C9449FCF4}" type="slidenum">
+            <a:fld id="{29C9C778-2BE2-4952-A574-E682C78EC501}" type="slidenum">
               <a:rPr b="0" lang="en-US" sz="1200" spc="-1" strike="noStrike">
                 <a:latin typeface="Times New Roman"/>
               </a:rPr>
@@ -2944,7 +2944,7 @@
         <p:spPr>
           <a:xfrm>
             <a:off x="685800" y="1143000"/>
-            <a:ext cx="5485320" cy="3085200"/>
+            <a:ext cx="5484960" cy="3084840"/>
           </a:xfrm>
           <a:prstGeom prst="rect">
             <a:avLst/>
@@ -2967,7 +2967,7 @@
         <p:spPr>
           <a:xfrm>
             <a:off x="685800" y="4400640"/>
-            <a:ext cx="5485320" cy="3599280"/>
+            <a:ext cx="5484960" cy="3598920"/>
           </a:xfrm>
           <a:prstGeom prst="rect">
             <a:avLst/>
@@ -3001,7 +3001,7 @@
         <p:spPr>
           <a:xfrm>
             <a:off x="3884760" y="8685360"/>
-            <a:ext cx="2970720" cy="457560"/>
+            <a:ext cx="2970360" cy="457200"/>
           </a:xfrm>
           <a:prstGeom prst="rect">
             <a:avLst/>
@@ -3033,7 +3033,7 @@
               </a:lnSpc>
               <a:buNone/>
             </a:pPr>
-            <a:fld id="{479188AC-D418-41E9-9264-ACC9AD05DA5D}" type="slidenum">
+            <a:fld id="{9E7B72C5-29C9-4F15-8011-435CFE03FAB7}" type="slidenum">
               <a:rPr b="0" lang="en-US" sz="1200" spc="-1" strike="noStrike">
                 <a:latin typeface="Times New Roman"/>
               </a:rPr>
@@ -3080,7 +3080,7 @@
         <p:spPr>
           <a:xfrm>
             <a:off x="685800" y="1143000"/>
-            <a:ext cx="5485320" cy="3085200"/>
+            <a:ext cx="5484960" cy="3084840"/>
           </a:xfrm>
           <a:prstGeom prst="rect">
             <a:avLst/>
@@ -3103,7 +3103,7 @@
         <p:spPr>
           <a:xfrm>
             <a:off x="685800" y="4400640"/>
-            <a:ext cx="5485320" cy="3599280"/>
+            <a:ext cx="5484960" cy="3598920"/>
           </a:xfrm>
           <a:prstGeom prst="rect">
             <a:avLst/>
@@ -3137,7 +3137,7 @@
         <p:spPr>
           <a:xfrm>
             <a:off x="3884760" y="8685360"/>
-            <a:ext cx="2970720" cy="457560"/>
+            <a:ext cx="2970360" cy="457200"/>
           </a:xfrm>
           <a:prstGeom prst="rect">
             <a:avLst/>
@@ -3169,7 +3169,7 @@
               </a:lnSpc>
               <a:buNone/>
             </a:pPr>
-            <a:fld id="{E1114AE3-B9E3-4422-81FD-1F1489ABFCB9}" type="slidenum">
+            <a:fld id="{0066C030-D25A-44D2-8DC8-D3FE75CFE4EE}" type="slidenum">
               <a:rPr b="0" lang="en-US" sz="1200" spc="-1" strike="noStrike">
                 <a:latin typeface="Times New Roman"/>
               </a:rPr>
@@ -3238,7 +3238,7 @@
         <p:spPr>
           <a:xfrm>
             <a:off x="609480" y="273600"/>
-            <a:ext cx="10972440" cy="1144800"/>
+            <a:ext cx="10973520" cy="1144800"/>
           </a:xfrm>
           <a:prstGeom prst="rect">
             <a:avLst/>
@@ -3275,7 +3275,7 @@
         <p:spPr>
           <a:xfrm>
             <a:off x="609480" y="1604520"/>
-            <a:ext cx="10972440" cy="1896840"/>
+            <a:ext cx="10973520" cy="1896840"/>
           </a:xfrm>
           <a:prstGeom prst="rect">
             <a:avLst/>
@@ -3309,7 +3309,7 @@
         <p:spPr>
           <a:xfrm>
             <a:off x="609480" y="3682080"/>
-            <a:ext cx="10972440" cy="1896840"/>
+            <a:ext cx="10973520" cy="1896840"/>
           </a:xfrm>
           <a:prstGeom prst="rect">
             <a:avLst/>
@@ -3365,7 +3365,7 @@
         <p:spPr>
           <a:xfrm>
             <a:off x="609480" y="273600"/>
-            <a:ext cx="10972440" cy="1144800"/>
+            <a:ext cx="10973520" cy="1144800"/>
           </a:xfrm>
           <a:prstGeom prst="rect">
             <a:avLst/>
@@ -3402,7 +3402,7 @@
         <p:spPr>
           <a:xfrm>
             <a:off x="609480" y="1604520"/>
-            <a:ext cx="5354280" cy="1896840"/>
+            <a:ext cx="5355000" cy="1896840"/>
           </a:xfrm>
           <a:prstGeom prst="rect">
             <a:avLst/>
@@ -3435,8 +3435,8 @@
         </p:nvSpPr>
         <p:spPr>
           <a:xfrm>
-            <a:off x="6231960" y="1604520"/>
-            <a:ext cx="5354280" cy="1896840"/>
+            <a:off x="6232680" y="1604520"/>
+            <a:ext cx="5355000" cy="1896840"/>
           </a:xfrm>
           <a:prstGeom prst="rect">
             <a:avLst/>
@@ -3470,7 +3470,7 @@
         <p:spPr>
           <a:xfrm>
             <a:off x="609480" y="3682080"/>
-            <a:ext cx="5354280" cy="1896840"/>
+            <a:ext cx="5355000" cy="1896840"/>
           </a:xfrm>
           <a:prstGeom prst="rect">
             <a:avLst/>
@@ -3503,8 +3503,8 @@
         </p:nvSpPr>
         <p:spPr>
           <a:xfrm>
-            <a:off x="6231960" y="3682080"/>
-            <a:ext cx="5354280" cy="1896840"/>
+            <a:off x="6232680" y="3682080"/>
+            <a:ext cx="5355000" cy="1896840"/>
           </a:xfrm>
           <a:prstGeom prst="rect">
             <a:avLst/>
@@ -3560,7 +3560,7 @@
         <p:spPr>
           <a:xfrm>
             <a:off x="609480" y="273600"/>
-            <a:ext cx="10972440" cy="1144800"/>
+            <a:ext cx="10973520" cy="1144800"/>
           </a:xfrm>
           <a:prstGeom prst="rect">
             <a:avLst/>
@@ -3597,7 +3597,7 @@
         <p:spPr>
           <a:xfrm>
             <a:off x="609480" y="1604520"/>
-            <a:ext cx="3533040" cy="1896840"/>
+            <a:ext cx="3533400" cy="1896840"/>
           </a:xfrm>
           <a:prstGeom prst="rect">
             <a:avLst/>
@@ -3630,8 +3630,8 @@
         </p:nvSpPr>
         <p:spPr>
           <a:xfrm>
-            <a:off x="4319640" y="1604520"/>
-            <a:ext cx="3533040" cy="1896840"/>
+            <a:off x="4320000" y="1604520"/>
+            <a:ext cx="3533400" cy="1896840"/>
           </a:xfrm>
           <a:prstGeom prst="rect">
             <a:avLst/>
@@ -3664,8 +3664,8 @@
         </p:nvSpPr>
         <p:spPr>
           <a:xfrm>
-            <a:off x="8029800" y="1604520"/>
-            <a:ext cx="3533040" cy="1896840"/>
+            <a:off x="8030520" y="1604520"/>
+            <a:ext cx="3533400" cy="1896840"/>
           </a:xfrm>
           <a:prstGeom prst="rect">
             <a:avLst/>
@@ -3699,7 +3699,7 @@
         <p:spPr>
           <a:xfrm>
             <a:off x="609480" y="3682080"/>
-            <a:ext cx="3533040" cy="1896840"/>
+            <a:ext cx="3533400" cy="1896840"/>
           </a:xfrm>
           <a:prstGeom prst="rect">
             <a:avLst/>
@@ -3732,8 +3732,8 @@
         </p:nvSpPr>
         <p:spPr>
           <a:xfrm>
-            <a:off x="4319640" y="3682080"/>
-            <a:ext cx="3533040" cy="1896840"/>
+            <a:off x="4320000" y="3682080"/>
+            <a:ext cx="3533400" cy="1896840"/>
           </a:xfrm>
           <a:prstGeom prst="rect">
             <a:avLst/>
@@ -3766,8 +3766,8 @@
         </p:nvSpPr>
         <p:spPr>
           <a:xfrm>
-            <a:off x="8029800" y="3682080"/>
-            <a:ext cx="3533040" cy="1896840"/>
+            <a:off x="8030520" y="3682080"/>
+            <a:ext cx="3533400" cy="1896840"/>
           </a:xfrm>
           <a:prstGeom prst="rect">
             <a:avLst/>
@@ -3823,7 +3823,7 @@
         <p:spPr>
           <a:xfrm>
             <a:off x="609480" y="273600"/>
-            <a:ext cx="10972440" cy="1144800"/>
+            <a:ext cx="10973520" cy="1144800"/>
           </a:xfrm>
           <a:prstGeom prst="rect">
             <a:avLst/>
@@ -3860,7 +3860,7 @@
         <p:spPr>
           <a:xfrm>
             <a:off x="609480" y="1604520"/>
-            <a:ext cx="10972440" cy="3977280"/>
+            <a:ext cx="10973520" cy="3977280"/>
           </a:xfrm>
           <a:prstGeom prst="rect">
             <a:avLst/>
@@ -3919,7 +3919,7 @@
         <p:spPr>
           <a:xfrm>
             <a:off x="609480" y="273600"/>
-            <a:ext cx="10972440" cy="1144800"/>
+            <a:ext cx="10973520" cy="1144800"/>
           </a:xfrm>
           <a:prstGeom prst="rect">
             <a:avLst/>
@@ -3956,7 +3956,7 @@
         <p:spPr>
           <a:xfrm>
             <a:off x="609480" y="1604520"/>
-            <a:ext cx="10972440" cy="3977280"/>
+            <a:ext cx="10973520" cy="3977280"/>
           </a:xfrm>
           <a:prstGeom prst="rect">
             <a:avLst/>
@@ -4012,7 +4012,7 @@
         <p:spPr>
           <a:xfrm>
             <a:off x="609480" y="273600"/>
-            <a:ext cx="10972440" cy="1144800"/>
+            <a:ext cx="10973520" cy="1144800"/>
           </a:xfrm>
           <a:prstGeom prst="rect">
             <a:avLst/>
@@ -4049,7 +4049,7 @@
         <p:spPr>
           <a:xfrm>
             <a:off x="609480" y="1604520"/>
-            <a:ext cx="5354280" cy="3977280"/>
+            <a:ext cx="5355000" cy="3977280"/>
           </a:xfrm>
           <a:prstGeom prst="rect">
             <a:avLst/>
@@ -4082,8 +4082,8 @@
         </p:nvSpPr>
         <p:spPr>
           <a:xfrm>
-            <a:off x="6231960" y="1604520"/>
-            <a:ext cx="5354280" cy="3977280"/>
+            <a:off x="6232680" y="1604520"/>
+            <a:ext cx="5355000" cy="3977280"/>
           </a:xfrm>
           <a:prstGeom prst="rect">
             <a:avLst/>
@@ -4139,7 +4139,7 @@
         <p:spPr>
           <a:xfrm>
             <a:off x="609480" y="273600"/>
-            <a:ext cx="10972440" cy="1144800"/>
+            <a:ext cx="10973520" cy="1144800"/>
           </a:xfrm>
           <a:prstGeom prst="rect">
             <a:avLst/>
@@ -4198,7 +4198,7 @@
         <p:spPr>
           <a:xfrm>
             <a:off x="609480" y="273600"/>
-            <a:ext cx="10972440" cy="5307840"/>
+            <a:ext cx="10973520" cy="5307840"/>
           </a:xfrm>
           <a:prstGeom prst="rect">
             <a:avLst/>
@@ -4257,7 +4257,7 @@
         <p:spPr>
           <a:xfrm>
             <a:off x="609480" y="273600"/>
-            <a:ext cx="10972440" cy="1144800"/>
+            <a:ext cx="10973520" cy="1144800"/>
           </a:xfrm>
           <a:prstGeom prst="rect">
             <a:avLst/>
@@ -4294,7 +4294,7 @@
         <p:spPr>
           <a:xfrm>
             <a:off x="609480" y="1604520"/>
-            <a:ext cx="5354280" cy="1896840"/>
+            <a:ext cx="5355000" cy="1896840"/>
           </a:xfrm>
           <a:prstGeom prst="rect">
             <a:avLst/>
@@ -4327,8 +4327,8 @@
         </p:nvSpPr>
         <p:spPr>
           <a:xfrm>
-            <a:off x="6231960" y="1604520"/>
-            <a:ext cx="5354280" cy="3977280"/>
+            <a:off x="6232680" y="1604520"/>
+            <a:ext cx="5355000" cy="3977280"/>
           </a:xfrm>
           <a:prstGeom prst="rect">
             <a:avLst/>
@@ -4362,7 +4362,7 @@
         <p:spPr>
           <a:xfrm>
             <a:off x="609480" y="3682080"/>
-            <a:ext cx="5354280" cy="1896840"/>
+            <a:ext cx="5355000" cy="1896840"/>
           </a:xfrm>
           <a:prstGeom prst="rect">
             <a:avLst/>
@@ -4418,7 +4418,7 @@
         <p:spPr>
           <a:xfrm>
             <a:off x="609480" y="273600"/>
-            <a:ext cx="10972440" cy="1144800"/>
+            <a:ext cx="10973520" cy="1144800"/>
           </a:xfrm>
           <a:prstGeom prst="rect">
             <a:avLst/>
@@ -4455,7 +4455,7 @@
         <p:spPr>
           <a:xfrm>
             <a:off x="609480" y="1604520"/>
-            <a:ext cx="5354280" cy="3977280"/>
+            <a:ext cx="5355000" cy="3977280"/>
           </a:xfrm>
           <a:prstGeom prst="rect">
             <a:avLst/>
@@ -4488,8 +4488,8 @@
         </p:nvSpPr>
         <p:spPr>
           <a:xfrm>
-            <a:off x="6231960" y="1604520"/>
-            <a:ext cx="5354280" cy="1896840"/>
+            <a:off x="6232680" y="1604520"/>
+            <a:ext cx="5355000" cy="1896840"/>
           </a:xfrm>
           <a:prstGeom prst="rect">
             <a:avLst/>
@@ -4522,8 +4522,8 @@
         </p:nvSpPr>
         <p:spPr>
           <a:xfrm>
-            <a:off x="6231960" y="3682080"/>
-            <a:ext cx="5354280" cy="1896840"/>
+            <a:off x="6232680" y="3682080"/>
+            <a:ext cx="5355000" cy="1896840"/>
           </a:xfrm>
           <a:prstGeom prst="rect">
             <a:avLst/>
@@ -4579,7 +4579,7 @@
         <p:spPr>
           <a:xfrm>
             <a:off x="609480" y="273600"/>
-            <a:ext cx="10972440" cy="1144800"/>
+            <a:ext cx="10973520" cy="1144800"/>
           </a:xfrm>
           <a:prstGeom prst="rect">
             <a:avLst/>
@@ -4616,7 +4616,7 @@
         <p:spPr>
           <a:xfrm>
             <a:off x="609480" y="1604520"/>
-            <a:ext cx="5354280" cy="1896840"/>
+            <a:ext cx="5355000" cy="1896840"/>
           </a:xfrm>
           <a:prstGeom prst="rect">
             <a:avLst/>
@@ -4649,8 +4649,8 @@
         </p:nvSpPr>
         <p:spPr>
           <a:xfrm>
-            <a:off x="6231960" y="1604520"/>
-            <a:ext cx="5354280" cy="1896840"/>
+            <a:off x="6232680" y="1604520"/>
+            <a:ext cx="5355000" cy="1896840"/>
           </a:xfrm>
           <a:prstGeom prst="rect">
             <a:avLst/>
@@ -4684,7 +4684,7 @@
         <p:spPr>
           <a:xfrm>
             <a:off x="609480" y="3682080"/>
-            <a:ext cx="10972440" cy="1896840"/>
+            <a:ext cx="10973520" cy="1896840"/>
           </a:xfrm>
           <a:prstGeom prst="rect">
             <a:avLst/>
@@ -4747,7 +4747,7 @@
         <p:spPr>
           <a:xfrm>
             <a:off x="609480" y="273600"/>
-            <a:ext cx="10972440" cy="1144800"/>
+            <a:ext cx="10973520" cy="1144800"/>
           </a:xfrm>
           <a:prstGeom prst="rect">
             <a:avLst/>
@@ -4790,7 +4790,7 @@
         <p:spPr>
           <a:xfrm>
             <a:off x="609480" y="1604520"/>
-            <a:ext cx="10972440" cy="3977280"/>
+            <a:ext cx="10973520" cy="3977280"/>
           </a:xfrm>
           <a:prstGeom prst="rect">
             <a:avLst/>
@@ -5012,8 +5012,8 @@
         </p:nvSpPr>
         <p:spPr>
           <a:xfrm>
-            <a:off x="5638680" y="2266920"/>
-            <a:ext cx="913320" cy="18000"/>
+            <a:off x="5639040" y="2266920"/>
+            <a:ext cx="912960" cy="17640"/>
           </a:xfrm>
           <a:custGeom>
             <a:avLst/>
@@ -5064,7 +5064,7 @@
         <p:spPr>
           <a:xfrm>
             <a:off x="3633840" y="2514600"/>
-            <a:ext cx="4923360" cy="913320"/>
+            <a:ext cx="4923360" cy="912960"/>
           </a:xfrm>
           <a:prstGeom prst="rect">
             <a:avLst/>
@@ -5102,6 +5102,9 @@
               <a:t>Game Theory</a:t>
             </a:r>
             <a:endParaRPr b="0" lang="en-HK" sz="7200" spc="-1" strike="noStrike">
+              <a:solidFill>
+                <a:srgbClr val="ffffff"/>
+              </a:solidFill>
               <a:latin typeface="Arial"/>
             </a:endParaRPr>
           </a:p>
@@ -5115,8 +5118,8 @@
         </p:nvSpPr>
         <p:spPr>
           <a:xfrm>
-            <a:off x="5638680" y="3657600"/>
-            <a:ext cx="913320" cy="18000"/>
+            <a:off x="5639040" y="3657600"/>
+            <a:ext cx="912960" cy="17640"/>
           </a:xfrm>
           <a:custGeom>
             <a:avLst/>
@@ -5167,7 +5170,7 @@
         <p:spPr>
           <a:xfrm>
             <a:off x="3545640" y="4286160"/>
-            <a:ext cx="5094720" cy="303840"/>
+            <a:ext cx="5094720" cy="303480"/>
           </a:xfrm>
           <a:prstGeom prst="rect">
             <a:avLst/>
@@ -5195,14 +5198,24 @@
               <a:buNone/>
             </a:pPr>
             <a:r>
-              <a:rPr b="0" lang="en-US" sz="1800" spc="38" strike="noStrike">
+              <a:rPr b="0" lang="en-US" sz="1800" spc="35" strike="noStrike">
                 <a:solidFill>
                   <a:srgbClr val="ffffff"/>
                 </a:solidFill>
                 <a:latin typeface="Liter"/>
                 <a:ea typeface="Liter"/>
               </a:rPr>
-              <a:t>The Mathematics of Strategic Decision-Making</a:t>
+              <a:t>The Mathematics of</a:t>
+            </a:r>
+            <a:r>
+              <a:rPr b="0" lang="en-US" sz="1800" spc="35" strike="noStrike">
+                <a:solidFill>
+                  <a:srgbClr val="ffffff"/>
+                </a:solidFill>
+                <a:latin typeface="Liter"/>
+                <a:ea typeface="Liter"/>
+              </a:rPr>
+              <a:t> Strategic Decision-Making</a:t>
             </a:r>
             <a:endParaRPr b="0" lang="en-HK" sz="1800" spc="-1" strike="noStrike">
               <a:latin typeface="Arial"/>
@@ -5256,7 +5269,7 @@
         <p:spPr>
           <a:xfrm>
             <a:off x="380880" y="380880"/>
-            <a:ext cx="11505240" cy="227520"/>
+            <a:ext cx="11505960" cy="227160"/>
           </a:xfrm>
           <a:prstGeom prst="rect">
             <a:avLst/>
@@ -5284,7 +5297,7 @@
               <a:buNone/>
             </a:pPr>
             <a:r>
-              <a:rPr b="1" lang="en-US" sz="1200" spc="52" strike="noStrike">
+              <a:rPr b="1" lang="en-US" sz="1200" spc="49" strike="noStrike">
                 <a:solidFill>
                   <a:srgbClr val="0984e3"/>
                 </a:solidFill>
@@ -5308,7 +5321,7 @@
         <p:spPr>
           <a:xfrm>
             <a:off x="380880" y="685800"/>
-            <a:ext cx="11657520" cy="456120"/>
+            <a:ext cx="11658240" cy="455760"/>
           </a:xfrm>
           <a:prstGeom prst="rect">
             <a:avLst/>
@@ -5360,7 +5373,7 @@
         <p:spPr>
           <a:xfrm>
             <a:off x="380880" y="1419120"/>
-            <a:ext cx="5496120" cy="827640"/>
+            <a:ext cx="5496120" cy="827280"/>
           </a:xfrm>
           <a:prstGeom prst="rect">
             <a:avLst/>
@@ -5412,7 +5425,7 @@
         <p:spPr>
           <a:xfrm>
             <a:off x="380880" y="2452680"/>
-            <a:ext cx="5647320" cy="837000"/>
+            <a:ext cx="5647320" cy="836640"/>
           </a:xfrm>
           <a:prstGeom prst="rect">
             <a:avLst/>
@@ -5464,7 +5477,7 @@
         <p:spPr>
           <a:xfrm>
             <a:off x="380880" y="3867120"/>
-            <a:ext cx="5561640" cy="2018160"/>
+            <a:ext cx="5561640" cy="2017800"/>
           </a:xfrm>
           <a:custGeom>
             <a:avLst/>
@@ -5515,7 +5528,7 @@
         <p:spPr>
           <a:xfrm>
             <a:off x="609480" y="4095720"/>
-            <a:ext cx="5199480" cy="265680"/>
+            <a:ext cx="5199480" cy="265320"/>
           </a:xfrm>
           <a:prstGeom prst="rect">
             <a:avLst/>
@@ -5567,7 +5580,7 @@
         <p:spPr>
           <a:xfrm>
             <a:off x="609480" y="4476600"/>
-            <a:ext cx="5180400" cy="246600"/>
+            <a:ext cx="5180400" cy="246240"/>
           </a:xfrm>
           <a:prstGeom prst="rect">
             <a:avLst/>
@@ -5659,7 +5672,7 @@
         <p:spPr>
           <a:xfrm>
             <a:off x="609480" y="4838760"/>
-            <a:ext cx="5104440" cy="456120"/>
+            <a:ext cx="5104440" cy="455760"/>
           </a:xfrm>
           <a:custGeom>
             <a:avLst/>
@@ -5710,7 +5723,7 @@
         <p:spPr>
           <a:xfrm>
             <a:off x="609480" y="4838760"/>
-            <a:ext cx="5180400" cy="456120"/>
+            <a:ext cx="5180400" cy="455760"/>
           </a:xfrm>
           <a:prstGeom prst="rect">
             <a:avLst/>
@@ -5762,7 +5775,7 @@
         <p:spPr>
           <a:xfrm>
             <a:off x="609480" y="5410080"/>
-            <a:ext cx="5180400" cy="246600"/>
+            <a:ext cx="5180400" cy="246240"/>
           </a:xfrm>
           <a:prstGeom prst="rect">
             <a:avLst/>
@@ -5833,8 +5846,8 @@
         </p:nvSpPr>
         <p:spPr>
           <a:xfrm>
-            <a:off x="6253200" y="1376280"/>
-            <a:ext cx="5551920" cy="3208680"/>
+            <a:off x="6253560" y="1376280"/>
+            <a:ext cx="5551920" cy="3208320"/>
           </a:xfrm>
           <a:custGeom>
             <a:avLst/>
@@ -5887,8 +5900,8 @@
         </p:nvSpPr>
         <p:spPr>
           <a:xfrm>
-            <a:off x="6486480" y="1609560"/>
-            <a:ext cx="5180400" cy="265680"/>
+            <a:off x="6486840" y="1609560"/>
+            <a:ext cx="5180400" cy="265320"/>
           </a:xfrm>
           <a:prstGeom prst="rect">
             <a:avLst/>
@@ -5939,8 +5952,8 @@
         </p:nvSpPr>
         <p:spPr>
           <a:xfrm>
-            <a:off x="6486480" y="2028960"/>
-            <a:ext cx="303840" cy="303840"/>
+            <a:off x="6486840" y="2028960"/>
+            <a:ext cx="303480" cy="303480"/>
           </a:xfrm>
           <a:custGeom>
             <a:avLst/>
@@ -5990,8 +6003,8 @@
         </p:nvSpPr>
         <p:spPr>
           <a:xfrm>
-            <a:off x="6453360" y="2028960"/>
-            <a:ext cx="370440" cy="303840"/>
+            <a:off x="6453720" y="2028960"/>
+            <a:ext cx="370080" cy="303480"/>
           </a:xfrm>
           <a:prstGeom prst="rect">
             <a:avLst/>
@@ -6042,8 +6055,8 @@
         </p:nvSpPr>
         <p:spPr>
           <a:xfrm>
-            <a:off x="6905520" y="2028960"/>
-            <a:ext cx="3066120" cy="227520"/>
+            <a:off x="6905880" y="2028960"/>
+            <a:ext cx="3066120" cy="227160"/>
           </a:xfrm>
           <a:prstGeom prst="rect">
             <a:avLst/>
@@ -6094,8 +6107,8 @@
         </p:nvSpPr>
         <p:spPr>
           <a:xfrm>
-            <a:off x="6905520" y="2295360"/>
-            <a:ext cx="3066120" cy="227520"/>
+            <a:off x="6905880" y="2295360"/>
+            <a:ext cx="3066120" cy="227160"/>
           </a:xfrm>
           <a:prstGeom prst="rect">
             <a:avLst/>
@@ -6146,8 +6159,8 @@
         </p:nvSpPr>
         <p:spPr>
           <a:xfrm>
-            <a:off x="6486480" y="2638440"/>
-            <a:ext cx="303840" cy="303840"/>
+            <a:off x="6486840" y="2638440"/>
+            <a:ext cx="303480" cy="303480"/>
           </a:xfrm>
           <a:custGeom>
             <a:avLst/>
@@ -6197,8 +6210,8 @@
         </p:nvSpPr>
         <p:spPr>
           <a:xfrm>
-            <a:off x="6453360" y="2638440"/>
-            <a:ext cx="370440" cy="303840"/>
+            <a:off x="6453720" y="2638440"/>
+            <a:ext cx="370080" cy="303480"/>
           </a:xfrm>
           <a:prstGeom prst="rect">
             <a:avLst/>
@@ -6249,8 +6262,8 @@
         </p:nvSpPr>
         <p:spPr>
           <a:xfrm>
-            <a:off x="6905520" y="2638440"/>
-            <a:ext cx="3665880" cy="227520"/>
+            <a:off x="6905880" y="2638440"/>
+            <a:ext cx="3665880" cy="227160"/>
           </a:xfrm>
           <a:prstGeom prst="rect">
             <a:avLst/>
@@ -6301,8 +6314,8 @@
         </p:nvSpPr>
         <p:spPr>
           <a:xfrm>
-            <a:off x="6905520" y="2905200"/>
-            <a:ext cx="3665880" cy="227520"/>
+            <a:off x="6905880" y="2905200"/>
+            <a:ext cx="3665880" cy="227160"/>
           </a:xfrm>
           <a:prstGeom prst="rect">
             <a:avLst/>
@@ -6353,8 +6366,8 @@
         </p:nvSpPr>
         <p:spPr>
           <a:xfrm>
-            <a:off x="6486480" y="3247920"/>
-            <a:ext cx="303840" cy="303840"/>
+            <a:off x="6486840" y="3247920"/>
+            <a:ext cx="303480" cy="303480"/>
           </a:xfrm>
           <a:custGeom>
             <a:avLst/>
@@ -6404,8 +6417,8 @@
         </p:nvSpPr>
         <p:spPr>
           <a:xfrm>
-            <a:off x="6453360" y="3247920"/>
-            <a:ext cx="370440" cy="303840"/>
+            <a:off x="6453720" y="3247920"/>
+            <a:ext cx="370080" cy="303480"/>
           </a:xfrm>
           <a:prstGeom prst="rect">
             <a:avLst/>
@@ -6456,8 +6469,8 @@
         </p:nvSpPr>
         <p:spPr>
           <a:xfrm>
-            <a:off x="6905520" y="3247920"/>
-            <a:ext cx="3285000" cy="227520"/>
+            <a:off x="6905880" y="3247920"/>
+            <a:ext cx="3285000" cy="227160"/>
           </a:xfrm>
           <a:prstGeom prst="rect">
             <a:avLst/>
@@ -6508,8 +6521,8 @@
         </p:nvSpPr>
         <p:spPr>
           <a:xfrm>
-            <a:off x="6905520" y="3514680"/>
-            <a:ext cx="3285000" cy="227520"/>
+            <a:off x="6905880" y="3514680"/>
+            <a:ext cx="3285000" cy="227160"/>
           </a:xfrm>
           <a:prstGeom prst="rect">
             <a:avLst/>
@@ -6560,8 +6573,8 @@
         </p:nvSpPr>
         <p:spPr>
           <a:xfrm>
-            <a:off x="6486480" y="3857760"/>
-            <a:ext cx="303840" cy="303840"/>
+            <a:off x="6486840" y="3857760"/>
+            <a:ext cx="303480" cy="303480"/>
           </a:xfrm>
           <a:custGeom>
             <a:avLst/>
@@ -6611,8 +6624,8 @@
         </p:nvSpPr>
         <p:spPr>
           <a:xfrm>
-            <a:off x="6453360" y="3857760"/>
-            <a:ext cx="370440" cy="303840"/>
+            <a:off x="6453720" y="3857760"/>
+            <a:ext cx="370080" cy="303480"/>
           </a:xfrm>
           <a:prstGeom prst="rect">
             <a:avLst/>
@@ -6663,8 +6676,8 @@
         </p:nvSpPr>
         <p:spPr>
           <a:xfrm>
-            <a:off x="6905520" y="3857760"/>
-            <a:ext cx="4132800" cy="227520"/>
+            <a:off x="6905880" y="3857760"/>
+            <a:ext cx="4132800" cy="227160"/>
           </a:xfrm>
           <a:prstGeom prst="rect">
             <a:avLst/>
@@ -6715,8 +6728,8 @@
         </p:nvSpPr>
         <p:spPr>
           <a:xfrm>
-            <a:off x="6905520" y="4124160"/>
-            <a:ext cx="4132800" cy="227520"/>
+            <a:off x="6905880" y="4124160"/>
+            <a:ext cx="4132800" cy="227160"/>
           </a:xfrm>
           <a:prstGeom prst="rect">
             <a:avLst/>
@@ -6767,8 +6780,8 @@
         </p:nvSpPr>
         <p:spPr>
           <a:xfrm>
-            <a:off x="6267600" y="4743360"/>
-            <a:ext cx="5542560" cy="1141920"/>
+            <a:off x="6267960" y="4743360"/>
+            <a:ext cx="5542560" cy="1141560"/>
           </a:xfrm>
           <a:custGeom>
             <a:avLst/>
@@ -6818,8 +6831,8 @@
         </p:nvSpPr>
         <p:spPr>
           <a:xfrm>
-            <a:off x="6267600" y="4743360"/>
-            <a:ext cx="37080" cy="1141920"/>
+            <a:off x="6267960" y="4743360"/>
+            <a:ext cx="36720" cy="1141560"/>
           </a:xfrm>
           <a:custGeom>
             <a:avLst/>
@@ -6869,8 +6882,8 @@
         </p:nvSpPr>
         <p:spPr>
           <a:xfrm>
-            <a:off x="6477120" y="4933800"/>
-            <a:ext cx="5218560" cy="494280"/>
+            <a:off x="6477480" y="4933800"/>
+            <a:ext cx="5218560" cy="493920"/>
           </a:xfrm>
           <a:prstGeom prst="rect">
             <a:avLst/>
@@ -6921,8 +6934,8 @@
         </p:nvSpPr>
         <p:spPr>
           <a:xfrm>
-            <a:off x="6477120" y="5505480"/>
-            <a:ext cx="5209200" cy="189360"/>
+            <a:off x="6477480" y="5505480"/>
+            <a:ext cx="5209200" cy="189000"/>
           </a:xfrm>
           <a:prstGeom prst="rect">
             <a:avLst/>
@@ -7021,7 +7034,7 @@
         <p:spPr>
           <a:xfrm>
             <a:off x="379440" y="379440"/>
-            <a:ext cx="11507760" cy="226800"/>
+            <a:ext cx="11508480" cy="226440"/>
           </a:xfrm>
           <a:prstGeom prst="rect">
             <a:avLst/>
@@ -7049,7 +7062,7 @@
               <a:buNone/>
             </a:pPr>
             <a:r>
-              <a:rPr b="1" lang="en-US" sz="1200" spc="52" strike="noStrike">
+              <a:rPr b="1" lang="en-US" sz="1200" spc="49" strike="noStrike">
                 <a:solidFill>
                   <a:srgbClr val="0984e3"/>
                 </a:solidFill>
@@ -7073,7 +7086,7 @@
         <p:spPr>
           <a:xfrm>
             <a:off x="379440" y="683280"/>
-            <a:ext cx="11659680" cy="454320"/>
+            <a:ext cx="11660400" cy="453960"/>
           </a:xfrm>
           <a:prstGeom prst="rect">
             <a:avLst/>
@@ -7125,7 +7138,7 @@
         <p:spPr>
           <a:xfrm>
             <a:off x="379440" y="1366200"/>
-            <a:ext cx="5682240" cy="302400"/>
+            <a:ext cx="5682240" cy="302040"/>
           </a:xfrm>
           <a:prstGeom prst="rect">
             <a:avLst/>
@@ -7177,7 +7190,7 @@
         <p:spPr>
           <a:xfrm>
             <a:off x="379440" y="1826280"/>
-            <a:ext cx="5096160" cy="466200"/>
+            <a:ext cx="5096160" cy="465840"/>
           </a:xfrm>
           <a:prstGeom prst="rect">
             <a:avLst/>
@@ -7229,7 +7242,7 @@
         <p:spPr>
           <a:xfrm>
             <a:off x="379440" y="2452680"/>
-            <a:ext cx="5644080" cy="739080"/>
+            <a:ext cx="5644080" cy="738720"/>
           </a:xfrm>
           <a:prstGeom prst="rect">
             <a:avLst/>
@@ -7281,7 +7294,7 @@
         <p:spPr>
           <a:xfrm>
             <a:off x="398520" y="3306600"/>
-            <a:ext cx="5549400" cy="757800"/>
+            <a:ext cx="5549400" cy="757440"/>
           </a:xfrm>
           <a:custGeom>
             <a:avLst/>
@@ -7332,7 +7345,7 @@
         <p:spPr>
           <a:xfrm>
             <a:off x="398520" y="3306600"/>
-            <a:ext cx="36720" cy="757800"/>
+            <a:ext cx="36360" cy="757440"/>
           </a:xfrm>
           <a:custGeom>
             <a:avLst/>
@@ -7383,7 +7396,7 @@
         <p:spPr>
           <a:xfrm>
             <a:off x="569160" y="3458520"/>
-            <a:ext cx="5302800" cy="454320"/>
+            <a:ext cx="5302800" cy="453960"/>
           </a:xfrm>
           <a:prstGeom prst="rect">
             <a:avLst/>
@@ -7476,7 +7489,7 @@
         <p:spPr>
           <a:xfrm>
             <a:off x="379440" y="4217400"/>
-            <a:ext cx="5682240" cy="302400"/>
+            <a:ext cx="5682240" cy="302040"/>
           </a:xfrm>
           <a:prstGeom prst="rect">
             <a:avLst/>
@@ -7528,7 +7541,7 @@
         <p:spPr>
           <a:xfrm>
             <a:off x="379440" y="4635000"/>
-            <a:ext cx="5644080" cy="739080"/>
+            <a:ext cx="5644080" cy="738720"/>
           </a:xfrm>
           <a:prstGeom prst="rect">
             <a:avLst/>
@@ -7579,8 +7592,8 @@
         </p:nvSpPr>
         <p:spPr>
           <a:xfrm>
-            <a:off x="6249240" y="1366200"/>
-            <a:ext cx="5682240" cy="302400"/>
+            <a:off x="6249600" y="1366200"/>
+            <a:ext cx="5682240" cy="302040"/>
           </a:xfrm>
           <a:prstGeom prst="rect">
             <a:avLst/>
@@ -7631,8 +7644,8 @@
         </p:nvSpPr>
         <p:spPr>
           <a:xfrm>
-            <a:off x="6249240" y="1826280"/>
-            <a:ext cx="5249520" cy="466200"/>
+            <a:off x="6249600" y="1826280"/>
+            <a:ext cx="5249520" cy="465840"/>
           </a:xfrm>
           <a:prstGeom prst="rect">
             <a:avLst/>
@@ -7683,8 +7696,8 @@
         </p:nvSpPr>
         <p:spPr>
           <a:xfrm>
-            <a:off x="6249240" y="2452680"/>
-            <a:ext cx="5644080" cy="739080"/>
+            <a:off x="6249600" y="2452680"/>
+            <a:ext cx="5644080" cy="738720"/>
           </a:xfrm>
           <a:prstGeom prst="rect">
             <a:avLst/>
@@ -7735,8 +7748,8 @@
         </p:nvSpPr>
         <p:spPr>
           <a:xfrm>
-            <a:off x="6249240" y="3344400"/>
-            <a:ext cx="5568480" cy="2181240"/>
+            <a:off x="6249600" y="3344400"/>
+            <a:ext cx="5568480" cy="2180880"/>
           </a:xfrm>
           <a:custGeom>
             <a:avLst/>
@@ -7786,8 +7799,8 @@
         </p:nvSpPr>
         <p:spPr>
           <a:xfrm>
-            <a:off x="6438960" y="3534120"/>
-            <a:ext cx="5283720" cy="264600"/>
+            <a:off x="6439320" y="3534120"/>
+            <a:ext cx="5283720" cy="264240"/>
           </a:xfrm>
           <a:prstGeom prst="rect">
             <a:avLst/>
@@ -7838,8 +7851,8 @@
         </p:nvSpPr>
         <p:spPr>
           <a:xfrm>
-            <a:off x="6438960" y="3913920"/>
-            <a:ext cx="5264640" cy="245520"/>
+            <a:off x="6439320" y="3913920"/>
+            <a:ext cx="5264640" cy="245160"/>
           </a:xfrm>
           <a:prstGeom prst="rect">
             <a:avLst/>
@@ -7890,8 +7903,8 @@
         </p:nvSpPr>
         <p:spPr>
           <a:xfrm>
-            <a:off x="6438960" y="4274280"/>
-            <a:ext cx="5188680" cy="454320"/>
+            <a:off x="6439320" y="4274280"/>
+            <a:ext cx="5188680" cy="453960"/>
           </a:xfrm>
           <a:custGeom>
             <a:avLst/>
@@ -7941,25 +7954,25 @@
         </p:nvSpPr>
         <p:spPr>
           <a:xfrm>
-            <a:off x="6438960" y="4274280"/>
-            <a:ext cx="5264640" cy="454320"/>
-          </a:xfrm>
-          <a:prstGeom prst="rect">
-            <a:avLst/>
-          </a:prstGeom>
-          <a:noFill/>
-          <a:ln w="0">
-            <a:noFill/>
-          </a:ln>
-        </p:spPr>
-        <p:style>
-          <a:lnRef idx="0"/>
-          <a:fillRef idx="0"/>
-          <a:effectRef idx="0"/>
-          <a:fontRef idx="minor"/>
-        </p:style>
-        <p:txBody>
-          <a:bodyPr lIns="113760" rIns="113760" tIns="227520" bIns="227520" anchor="ctr">
+            <a:off x="6439320" y="4274280"/>
+            <a:ext cx="5264640" cy="453960"/>
+          </a:xfrm>
+          <a:prstGeom prst="rect">
+            <a:avLst/>
+          </a:prstGeom>
+          <a:noFill/>
+          <a:ln w="0">
+            <a:noFill/>
+          </a:ln>
+        </p:spPr>
+        <p:style>
+          <a:lnRef idx="0"/>
+          <a:fillRef idx="0"/>
+          <a:effectRef idx="0"/>
+          <a:fontRef idx="minor"/>
+        </p:style>
+        <p:txBody>
+          <a:bodyPr lIns="113760" rIns="113760" tIns="454320" bIns="454320" anchor="ctr">
             <a:noAutofit/>
           </a:bodyPr>
           <a:p>
@@ -7993,8 +8006,8 @@
         </p:nvSpPr>
         <p:spPr>
           <a:xfrm>
-            <a:off x="6438960" y="4843440"/>
-            <a:ext cx="5264640" cy="492120"/>
+            <a:off x="6439320" y="4843440"/>
+            <a:ext cx="5264640" cy="491760"/>
           </a:xfrm>
           <a:prstGeom prst="rect">
             <a:avLst/>
@@ -8045,8 +8058,8 @@
         </p:nvSpPr>
         <p:spPr>
           <a:xfrm>
-            <a:off x="6268320" y="5678640"/>
-            <a:ext cx="5549400" cy="795960"/>
+            <a:off x="6268680" y="5678640"/>
+            <a:ext cx="5549400" cy="795600"/>
           </a:xfrm>
           <a:custGeom>
             <a:avLst/>
@@ -8096,8 +8109,8 @@
         </p:nvSpPr>
         <p:spPr>
           <a:xfrm>
-            <a:off x="6268320" y="5678640"/>
-            <a:ext cx="36720" cy="795960"/>
+            <a:off x="6268680" y="5678640"/>
+            <a:ext cx="36360" cy="795600"/>
           </a:xfrm>
           <a:custGeom>
             <a:avLst/>
@@ -8147,8 +8160,8 @@
         </p:nvSpPr>
         <p:spPr>
           <a:xfrm>
-            <a:off x="6438960" y="5830200"/>
-            <a:ext cx="5302800" cy="492120"/>
+            <a:off x="6439320" y="5830200"/>
+            <a:ext cx="5302800" cy="491760"/>
           </a:xfrm>
           <a:prstGeom prst="rect">
             <a:avLst/>
@@ -8247,7 +8260,7 @@
         <p:spPr>
           <a:xfrm>
             <a:off x="609480" y="2066760"/>
-            <a:ext cx="12191040" cy="1218240"/>
+            <a:ext cx="12191760" cy="1217880"/>
           </a:xfrm>
           <a:prstGeom prst="rect">
             <a:avLst/>
@@ -8301,7 +8314,7 @@
         <p:spPr>
           <a:xfrm>
             <a:off x="609480" y="3438360"/>
-            <a:ext cx="11867040" cy="570600"/>
+            <a:ext cx="11867760" cy="570240"/>
           </a:xfrm>
           <a:prstGeom prst="rect">
             <a:avLst/>
@@ -8353,7 +8366,7 @@
         <p:spPr>
           <a:xfrm>
             <a:off x="609480" y="4238640"/>
-            <a:ext cx="1218240" cy="18000"/>
+            <a:ext cx="1217880" cy="17640"/>
           </a:xfrm>
           <a:custGeom>
             <a:avLst/>
@@ -8404,7 +8417,7 @@
         <p:spPr>
           <a:xfrm>
             <a:off x="609480" y="4486320"/>
-            <a:ext cx="11695680" cy="303840"/>
+            <a:ext cx="11696400" cy="303480"/>
           </a:xfrm>
           <a:prstGeom prst="rect">
             <a:avLst/>
@@ -8493,7 +8506,7 @@
         <p:spPr>
           <a:xfrm>
             <a:off x="356400" y="356400"/>
-            <a:ext cx="11549880" cy="212760"/>
+            <a:ext cx="11550600" cy="212400"/>
           </a:xfrm>
           <a:prstGeom prst="rect">
             <a:avLst/>
@@ -8521,7 +8534,7 @@
               <a:buNone/>
             </a:pPr>
             <a:r>
-              <a:rPr b="1" lang="en-US" sz="1120" spc="49" strike="noStrike">
+              <a:rPr b="1" lang="en-US" sz="1120" spc="46" strike="noStrike">
                 <a:solidFill>
                   <a:srgbClr val="0984e3"/>
                 </a:solidFill>
@@ -8545,7 +8558,7 @@
         <p:spPr>
           <a:xfrm>
             <a:off x="356400" y="641160"/>
-            <a:ext cx="11692080" cy="426240"/>
+            <a:ext cx="11692800" cy="425880"/>
           </a:xfrm>
           <a:prstGeom prst="rect">
             <a:avLst/>
@@ -8597,7 +8610,7 @@
         <p:spPr>
           <a:xfrm>
             <a:off x="360720" y="1287000"/>
-            <a:ext cx="3694680" cy="2626200"/>
+            <a:ext cx="3694680" cy="2625840"/>
           </a:xfrm>
           <a:custGeom>
             <a:avLst/>
@@ -8651,7 +8664,7 @@
         <p:spPr>
           <a:xfrm>
             <a:off x="543240" y="1469520"/>
-            <a:ext cx="426240" cy="426240"/>
+            <a:ext cx="425880" cy="425880"/>
           </a:xfrm>
           <a:custGeom>
             <a:avLst/>
@@ -8702,7 +8715,7 @@
         <p:spPr>
           <a:xfrm>
             <a:off x="656640" y="1594080"/>
-            <a:ext cx="199440" cy="177120"/>
+            <a:ext cx="199080" cy="176760"/>
           </a:xfrm>
           <a:custGeom>
             <a:avLst/>
@@ -8899,7 +8912,7 @@
         <p:spPr>
           <a:xfrm>
             <a:off x="1077480" y="1558440"/>
-            <a:ext cx="2341080" cy="248400"/>
+            <a:ext cx="2341080" cy="248040"/>
           </a:xfrm>
           <a:prstGeom prst="rect">
             <a:avLst/>
@@ -8951,7 +8964,7 @@
         <p:spPr>
           <a:xfrm>
             <a:off x="543240" y="2003760"/>
-            <a:ext cx="3400920" cy="693720"/>
+            <a:ext cx="3400920" cy="693360"/>
           </a:xfrm>
           <a:prstGeom prst="rect">
             <a:avLst/>
@@ -9013,7 +9026,7 @@
         <p:spPr>
           <a:xfrm>
             <a:off x="543240" y="2805480"/>
-            <a:ext cx="3400920" cy="925200"/>
+            <a:ext cx="3400920" cy="924840"/>
           </a:xfrm>
           <a:prstGeom prst="rect">
             <a:avLst/>
@@ -9074,8 +9087,8 @@
         </p:nvSpPr>
         <p:spPr>
           <a:xfrm>
-            <a:off x="4246200" y="1287000"/>
-            <a:ext cx="3694680" cy="2626200"/>
+            <a:off x="4246560" y="1287000"/>
+            <a:ext cx="3694680" cy="2625840"/>
           </a:xfrm>
           <a:custGeom>
             <a:avLst/>
@@ -9128,8 +9141,8 @@
         </p:nvSpPr>
         <p:spPr>
           <a:xfrm>
-            <a:off x="4428720" y="1469520"/>
-            <a:ext cx="426240" cy="426240"/>
+            <a:off x="4429080" y="1469520"/>
+            <a:ext cx="425880" cy="425880"/>
           </a:xfrm>
           <a:custGeom>
             <a:avLst/>
@@ -9179,8 +9192,8 @@
         </p:nvSpPr>
         <p:spPr>
           <a:xfrm>
-            <a:off x="4542120" y="1594080"/>
-            <a:ext cx="199440" cy="177120"/>
+            <a:off x="4542480" y="1594080"/>
+            <a:ext cx="199080" cy="176760"/>
           </a:xfrm>
           <a:custGeom>
             <a:avLst/>
@@ -9331,8 +9344,8 @@
         </p:nvSpPr>
         <p:spPr>
           <a:xfrm>
-            <a:off x="4962960" y="1558440"/>
-            <a:ext cx="2430360" cy="248400"/>
+            <a:off x="4963320" y="1558440"/>
+            <a:ext cx="2430360" cy="248040"/>
           </a:xfrm>
           <a:prstGeom prst="rect">
             <a:avLst/>
@@ -9383,8 +9396,8 @@
         </p:nvSpPr>
         <p:spPr>
           <a:xfrm>
-            <a:off x="4428720" y="2003760"/>
-            <a:ext cx="3400920" cy="693720"/>
+            <a:off x="4429080" y="2003760"/>
+            <a:ext cx="3400920" cy="693360"/>
           </a:xfrm>
           <a:prstGeom prst="rect">
             <a:avLst/>
@@ -9445,8 +9458,8 @@
         </p:nvSpPr>
         <p:spPr>
           <a:xfrm>
-            <a:off x="4428720" y="2805480"/>
-            <a:ext cx="3400920" cy="693720"/>
+            <a:off x="4429080" y="2805480"/>
+            <a:ext cx="3400920" cy="693360"/>
           </a:xfrm>
           <a:prstGeom prst="rect">
             <a:avLst/>
@@ -9507,8 +9520,8 @@
         </p:nvSpPr>
         <p:spPr>
           <a:xfrm>
-            <a:off x="8131680" y="1287000"/>
-            <a:ext cx="3694680" cy="2626200"/>
+            <a:off x="8132040" y="1287000"/>
+            <a:ext cx="3694680" cy="2625840"/>
           </a:xfrm>
           <a:custGeom>
             <a:avLst/>
@@ -9561,8 +9574,8 @@
         </p:nvSpPr>
         <p:spPr>
           <a:xfrm>
-            <a:off x="8314200" y="1469520"/>
-            <a:ext cx="426240" cy="426240"/>
+            <a:off x="8314920" y="1469520"/>
+            <a:ext cx="425880" cy="425880"/>
           </a:xfrm>
           <a:custGeom>
             <a:avLst/>
@@ -9612,8 +9625,8 @@
         </p:nvSpPr>
         <p:spPr>
           <a:xfrm>
-            <a:off x="8439120" y="1594080"/>
-            <a:ext cx="177120" cy="177120"/>
+            <a:off x="8439840" y="1594080"/>
+            <a:ext cx="176760" cy="176760"/>
           </a:xfrm>
           <a:custGeom>
             <a:avLst/>
@@ -9712,8 +9725,8 @@
         </p:nvSpPr>
         <p:spPr>
           <a:xfrm>
-            <a:off x="8848800" y="1558440"/>
-            <a:ext cx="2038320" cy="248400"/>
+            <a:off x="8849520" y="1558440"/>
+            <a:ext cx="2038320" cy="248040"/>
           </a:xfrm>
           <a:prstGeom prst="rect">
             <a:avLst/>
@@ -9764,8 +9777,8 @@
         </p:nvSpPr>
         <p:spPr>
           <a:xfrm>
-            <a:off x="8314200" y="2003760"/>
-            <a:ext cx="3400920" cy="693720"/>
+            <a:off x="8314920" y="2003760"/>
+            <a:ext cx="3400920" cy="693360"/>
           </a:xfrm>
           <a:prstGeom prst="rect">
             <a:avLst/>
@@ -9826,8 +9839,8 @@
         </p:nvSpPr>
         <p:spPr>
           <a:xfrm>
-            <a:off x="8314200" y="2805480"/>
-            <a:ext cx="3400920" cy="693720"/>
+            <a:off x="8314920" y="2805480"/>
+            <a:ext cx="3400920" cy="693360"/>
           </a:xfrm>
           <a:prstGeom prst="rect">
             <a:avLst/>
@@ -9889,7 +9902,7 @@
         <p:spPr>
           <a:xfrm>
             <a:off x="360720" y="4101120"/>
-            <a:ext cx="3694680" cy="2394720"/>
+            <a:ext cx="3694680" cy="2394360"/>
           </a:xfrm>
           <a:custGeom>
             <a:avLst/>
@@ -9943,7 +9956,7 @@
         <p:spPr>
           <a:xfrm>
             <a:off x="543240" y="4283640"/>
-            <a:ext cx="426240" cy="426240"/>
+            <a:ext cx="425880" cy="425880"/>
           </a:xfrm>
           <a:custGeom>
             <a:avLst/>
@@ -9994,7 +10007,7 @@
         <p:spPr>
           <a:xfrm>
             <a:off x="645840" y="4408200"/>
-            <a:ext cx="221400" cy="177120"/>
+            <a:ext cx="221040" cy="176760"/>
           </a:xfrm>
           <a:custGeom>
             <a:avLst/>
@@ -10226,7 +10239,7 @@
         <p:spPr>
           <a:xfrm>
             <a:off x="1077480" y="4372560"/>
-            <a:ext cx="1931400" cy="248400"/>
+            <a:ext cx="1931040" cy="248040"/>
           </a:xfrm>
           <a:prstGeom prst="rect">
             <a:avLst/>
@@ -10278,7 +10291,7 @@
         <p:spPr>
           <a:xfrm>
             <a:off x="543240" y="4817880"/>
-            <a:ext cx="3400920" cy="693720"/>
+            <a:ext cx="3400920" cy="693360"/>
           </a:xfrm>
           <a:prstGeom prst="rect">
             <a:avLst/>
@@ -10340,7 +10353,7 @@
         <p:spPr>
           <a:xfrm>
             <a:off x="543240" y="5619600"/>
-            <a:ext cx="3400920" cy="693720"/>
+            <a:ext cx="3400920" cy="693360"/>
           </a:xfrm>
           <a:prstGeom prst="rect">
             <a:avLst/>
@@ -10401,8 +10414,8 @@
         </p:nvSpPr>
         <p:spPr>
           <a:xfrm>
-            <a:off x="4246200" y="4101120"/>
-            <a:ext cx="7586640" cy="2394720"/>
+            <a:off x="4246560" y="4101120"/>
+            <a:ext cx="7587000" cy="2394360"/>
           </a:xfrm>
           <a:custGeom>
             <a:avLst/>
@@ -10455,8 +10468,8 @@
         </p:nvSpPr>
         <p:spPr>
           <a:xfrm>
-            <a:off x="4428720" y="4283640"/>
-            <a:ext cx="426240" cy="426240"/>
+            <a:off x="4429080" y="4283640"/>
+            <a:ext cx="425880" cy="425880"/>
           </a:xfrm>
           <a:custGeom>
             <a:avLst/>
@@ -10506,8 +10519,8 @@
         </p:nvSpPr>
         <p:spPr>
           <a:xfrm>
-            <a:off x="4553280" y="4408200"/>
-            <a:ext cx="177120" cy="177120"/>
+            <a:off x="4553640" y="4408200"/>
+            <a:ext cx="176760" cy="176760"/>
           </a:xfrm>
           <a:custGeom>
             <a:avLst/>
@@ -10639,8 +10652,8 @@
         </p:nvSpPr>
         <p:spPr>
           <a:xfrm>
-            <a:off x="4962960" y="4372560"/>
-            <a:ext cx="2047320" cy="248400"/>
+            <a:off x="4963320" y="4372560"/>
+            <a:ext cx="2047320" cy="248040"/>
           </a:xfrm>
           <a:prstGeom prst="rect">
             <a:avLst/>
@@ -10691,8 +10704,8 @@
         </p:nvSpPr>
         <p:spPr>
           <a:xfrm>
-            <a:off x="4428720" y="4817880"/>
-            <a:ext cx="3605760" cy="693720"/>
+            <a:off x="4429080" y="4817880"/>
+            <a:ext cx="3605760" cy="693360"/>
           </a:xfrm>
           <a:prstGeom prst="rect">
             <a:avLst/>
@@ -10753,8 +10766,8 @@
         </p:nvSpPr>
         <p:spPr>
           <a:xfrm>
-            <a:off x="4428720" y="5583960"/>
-            <a:ext cx="3605760" cy="461880"/>
+            <a:off x="4429080" y="5583960"/>
+            <a:ext cx="3605760" cy="461520"/>
           </a:xfrm>
           <a:prstGeom prst="rect">
             <a:avLst/>
@@ -10805,8 +10818,8 @@
         </p:nvSpPr>
         <p:spPr>
           <a:xfrm>
-            <a:off x="8109360" y="4817880"/>
-            <a:ext cx="3605760" cy="693720"/>
+            <a:off x="8109720" y="4817880"/>
+            <a:ext cx="3605760" cy="693360"/>
           </a:xfrm>
           <a:prstGeom prst="rect">
             <a:avLst/>
@@ -10867,8 +10880,8 @@
         </p:nvSpPr>
         <p:spPr>
           <a:xfrm>
-            <a:off x="8109360" y="5583960"/>
-            <a:ext cx="3605760" cy="461880"/>
+            <a:off x="8109720" y="5583960"/>
+            <a:ext cx="3605760" cy="461520"/>
           </a:xfrm>
           <a:prstGeom prst="rect">
             <a:avLst/>
@@ -10957,7 +10970,7 @@
         <p:spPr>
           <a:xfrm>
             <a:off x="609480" y="2066760"/>
-            <a:ext cx="12191040" cy="1218240"/>
+            <a:ext cx="12191760" cy="1217880"/>
           </a:xfrm>
           <a:prstGeom prst="rect">
             <a:avLst/>
@@ -11011,7 +11024,7 @@
         <p:spPr>
           <a:xfrm>
             <a:off x="609480" y="3438360"/>
-            <a:ext cx="11867040" cy="570600"/>
+            <a:ext cx="11867760" cy="570240"/>
           </a:xfrm>
           <a:prstGeom prst="rect">
             <a:avLst/>
@@ -11063,7 +11076,7 @@
         <p:spPr>
           <a:xfrm>
             <a:off x="609480" y="4238640"/>
-            <a:ext cx="1218240" cy="18000"/>
+            <a:ext cx="1217880" cy="17640"/>
           </a:xfrm>
           <a:custGeom>
             <a:avLst/>
@@ -11114,7 +11127,7 @@
         <p:spPr>
           <a:xfrm>
             <a:off x="609480" y="4486320"/>
-            <a:ext cx="11695680" cy="303840"/>
+            <a:ext cx="11696400" cy="303480"/>
           </a:xfrm>
           <a:prstGeom prst="rect">
             <a:avLst/>
@@ -11203,7 +11216,7 @@
         <p:spPr>
           <a:xfrm>
             <a:off x="380880" y="380880"/>
-            <a:ext cx="11505240" cy="227520"/>
+            <a:ext cx="11505960" cy="227160"/>
           </a:xfrm>
           <a:prstGeom prst="rect">
             <a:avLst/>
@@ -11231,7 +11244,7 @@
               <a:buNone/>
             </a:pPr>
             <a:r>
-              <a:rPr b="1" lang="en-US" sz="1200" spc="52" strike="noStrike">
+              <a:rPr b="1" lang="en-US" sz="1200" spc="49" strike="noStrike">
                 <a:solidFill>
                   <a:srgbClr val="0984e3"/>
                 </a:solidFill>
@@ -11255,7 +11268,7 @@
         <p:spPr>
           <a:xfrm>
             <a:off x="380880" y="685800"/>
-            <a:ext cx="11657520" cy="456120"/>
+            <a:ext cx="11658240" cy="455760"/>
           </a:xfrm>
           <a:prstGeom prst="rect">
             <a:avLst/>
@@ -11307,7 +11320,7 @@
         <p:spPr>
           <a:xfrm>
             <a:off x="380880" y="1295280"/>
-            <a:ext cx="5656680" cy="1237320"/>
+            <a:ext cx="5656680" cy="1236960"/>
           </a:xfrm>
           <a:prstGeom prst="rect">
             <a:avLst/>
@@ -11369,7 +11382,7 @@
         <p:spPr>
           <a:xfrm>
             <a:off x="380880" y="2647800"/>
-            <a:ext cx="5637600" cy="741960"/>
+            <a:ext cx="5637600" cy="741600"/>
           </a:xfrm>
           <a:prstGeom prst="rect">
             <a:avLst/>
@@ -11421,7 +11434,7 @@
         <p:spPr>
           <a:xfrm>
             <a:off x="385920" y="3548160"/>
-            <a:ext cx="5551920" cy="2027880"/>
+            <a:ext cx="5551920" cy="2027520"/>
           </a:xfrm>
           <a:custGeom>
             <a:avLst/>
@@ -11475,7 +11488,7 @@
         <p:spPr>
           <a:xfrm>
             <a:off x="495360" y="3705120"/>
-            <a:ext cx="5333040" cy="265680"/>
+            <a:ext cx="5333040" cy="265320"/>
           </a:xfrm>
           <a:prstGeom prst="rect">
             <a:avLst/>
@@ -11526,7 +11539,7 @@
         </p:nvGraphicFramePr>
         <p:xfrm>
           <a:off x="542880" y="4086360"/>
-          <a:ext cx="5238000" cy="1065960"/>
+          <a:ext cx="5238360" cy="1065960"/>
         </p:xfrm>
         <a:graphic>
           <a:graphicData uri="http://schemas.openxmlformats.org/drawingml/2006/table">
@@ -12001,7 +12014,7 @@
         <p:spPr>
           <a:xfrm>
             <a:off x="509760" y="5229360"/>
-            <a:ext cx="5304240" cy="189360"/>
+            <a:ext cx="5304240" cy="189000"/>
           </a:xfrm>
           <a:prstGeom prst="rect">
             <a:avLst/>
@@ -12052,8 +12065,8 @@
         </p:nvSpPr>
         <p:spPr>
           <a:xfrm>
-            <a:off x="6253200" y="1300320"/>
-            <a:ext cx="5551920" cy="1608480"/>
+            <a:off x="6253560" y="1300320"/>
+            <a:ext cx="5551920" cy="1608120"/>
           </a:xfrm>
           <a:custGeom>
             <a:avLst/>
@@ -12106,8 +12119,8 @@
         </p:nvSpPr>
         <p:spPr>
           <a:xfrm>
-            <a:off x="6448320" y="1495440"/>
-            <a:ext cx="5256720" cy="265680"/>
+            <a:off x="6448680" y="1495440"/>
+            <a:ext cx="5256720" cy="265320"/>
           </a:xfrm>
           <a:prstGeom prst="rect">
             <a:avLst/>
@@ -12158,8 +12171,8 @@
         </p:nvSpPr>
         <p:spPr>
           <a:xfrm>
-            <a:off x="6448320" y="1876320"/>
-            <a:ext cx="5237640" cy="227520"/>
+            <a:off x="6448680" y="1876320"/>
+            <a:ext cx="5237640" cy="227160"/>
           </a:xfrm>
           <a:prstGeom prst="rect">
             <a:avLst/>
@@ -12220,8 +12233,8 @@
         </p:nvSpPr>
         <p:spPr>
           <a:xfrm>
-            <a:off x="6448320" y="2181240"/>
-            <a:ext cx="5237640" cy="227520"/>
+            <a:off x="6448680" y="2181240"/>
+            <a:ext cx="5237640" cy="227160"/>
           </a:xfrm>
           <a:prstGeom prst="rect">
             <a:avLst/>
@@ -12282,8 +12295,8 @@
         </p:nvSpPr>
         <p:spPr>
           <a:xfrm>
-            <a:off x="6448320" y="2486160"/>
-            <a:ext cx="5237640" cy="227520"/>
+            <a:off x="6448680" y="2486160"/>
+            <a:ext cx="5237640" cy="227160"/>
           </a:xfrm>
           <a:prstGeom prst="rect">
             <a:avLst/>
@@ -12334,8 +12347,8 @@
         </p:nvSpPr>
         <p:spPr>
           <a:xfrm>
-            <a:off x="6267600" y="3067200"/>
-            <a:ext cx="5542560" cy="2132640"/>
+            <a:off x="6267960" y="3067200"/>
+            <a:ext cx="5542560" cy="2132280"/>
           </a:xfrm>
           <a:custGeom>
             <a:avLst/>
@@ -12385,8 +12398,8 @@
         </p:nvSpPr>
         <p:spPr>
           <a:xfrm>
-            <a:off x="6267600" y="3067200"/>
-            <a:ext cx="37080" cy="2132640"/>
+            <a:off x="6267960" y="3067200"/>
+            <a:ext cx="36720" cy="2132280"/>
           </a:xfrm>
           <a:custGeom>
             <a:avLst/>
@@ -12436,8 +12449,8 @@
         </p:nvSpPr>
         <p:spPr>
           <a:xfrm>
-            <a:off x="6477120" y="3257640"/>
-            <a:ext cx="5237640" cy="265680"/>
+            <a:off x="6477480" y="3257640"/>
+            <a:ext cx="5237640" cy="265320"/>
           </a:xfrm>
           <a:prstGeom prst="rect">
             <a:avLst/>
@@ -12488,8 +12501,8 @@
         </p:nvSpPr>
         <p:spPr>
           <a:xfrm>
-            <a:off x="6496200" y="3672000"/>
-            <a:ext cx="151200" cy="151200"/>
+            <a:off x="6496560" y="3672000"/>
+            <a:ext cx="150840" cy="150840"/>
           </a:xfrm>
           <a:custGeom>
             <a:avLst/>
@@ -12612,8 +12625,8 @@
         </p:nvSpPr>
         <p:spPr>
           <a:xfrm>
-            <a:off x="6724800" y="3638520"/>
-            <a:ext cx="4970880" cy="456120"/>
+            <a:off x="6725160" y="3638520"/>
+            <a:ext cx="4970880" cy="455760"/>
           </a:xfrm>
           <a:prstGeom prst="rect">
             <a:avLst/>
@@ -12674,8 +12687,8 @@
         </p:nvSpPr>
         <p:spPr>
           <a:xfrm>
-            <a:off x="6496200" y="4205160"/>
-            <a:ext cx="151200" cy="151200"/>
+            <a:off x="6496560" y="4205160"/>
+            <a:ext cx="150840" cy="150840"/>
           </a:xfrm>
           <a:custGeom>
             <a:avLst/>
@@ -12797,8 +12810,8 @@
         </p:nvSpPr>
         <p:spPr>
           <a:xfrm>
-            <a:off x="6724800" y="4172040"/>
-            <a:ext cx="4970880" cy="227520"/>
+            <a:off x="6725160" y="4172040"/>
+            <a:ext cx="4970880" cy="227160"/>
           </a:xfrm>
           <a:prstGeom prst="rect">
             <a:avLst/>
@@ -12859,8 +12872,8 @@
         </p:nvSpPr>
         <p:spPr>
           <a:xfrm>
-            <a:off x="6515280" y="4510080"/>
-            <a:ext cx="113400" cy="151200"/>
+            <a:off x="6515640" y="4510080"/>
+            <a:ext cx="113040" cy="150840"/>
           </a:xfrm>
           <a:custGeom>
             <a:avLst/>
@@ -13100,8 +13113,8 @@
         </p:nvSpPr>
         <p:spPr>
           <a:xfrm>
-            <a:off x="6724800" y="4476600"/>
-            <a:ext cx="4970880" cy="227520"/>
+            <a:off x="6725160" y="4476600"/>
+            <a:ext cx="4970880" cy="227160"/>
           </a:xfrm>
           <a:prstGeom prst="rect">
             <a:avLst/>
@@ -13162,8 +13175,8 @@
         </p:nvSpPr>
         <p:spPr>
           <a:xfrm>
-            <a:off x="6486480" y="4815000"/>
-            <a:ext cx="170280" cy="151200"/>
+            <a:off x="6486840" y="4815000"/>
+            <a:ext cx="169920" cy="150840"/>
           </a:xfrm>
           <a:custGeom>
             <a:avLst/>
@@ -13398,8 +13411,8 @@
         </p:nvSpPr>
         <p:spPr>
           <a:xfrm>
-            <a:off x="6724800" y="4781520"/>
-            <a:ext cx="4970880" cy="227520"/>
+            <a:off x="6725160" y="4781520"/>
+            <a:ext cx="4970880" cy="227160"/>
           </a:xfrm>
           <a:prstGeom prst="rect">
             <a:avLst/>
@@ -13498,7 +13511,7 @@
         <p:spPr>
           <a:xfrm>
             <a:off x="358560" y="358560"/>
-            <a:ext cx="11545560" cy="214200"/>
+            <a:ext cx="11546280" cy="213840"/>
           </a:xfrm>
           <a:prstGeom prst="rect">
             <a:avLst/>
@@ -13526,7 +13539,7 @@
               <a:buNone/>
             </a:pPr>
             <a:r>
-              <a:rPr b="1" lang="en-US" sz="1130" spc="49" strike="noStrike">
+              <a:rPr b="1" lang="en-US" sz="1130" spc="46" strike="noStrike">
                 <a:solidFill>
                   <a:srgbClr val="0984e3"/>
                 </a:solidFill>
@@ -13550,7 +13563,7 @@
         <p:spPr>
           <a:xfrm>
             <a:off x="358560" y="645480"/>
-            <a:ext cx="11688840" cy="429120"/>
+            <a:ext cx="11689560" cy="428760"/>
           </a:xfrm>
           <a:prstGeom prst="rect">
             <a:avLst/>
@@ -13602,7 +13615,7 @@
         <p:spPr>
           <a:xfrm>
             <a:off x="358560" y="1290960"/>
-            <a:ext cx="5700600" cy="285840"/>
+            <a:ext cx="5700600" cy="285480"/>
           </a:xfrm>
           <a:prstGeom prst="rect">
             <a:avLst/>
@@ -13654,7 +13667,7 @@
         <p:spPr>
           <a:xfrm>
             <a:off x="358560" y="1725840"/>
-            <a:ext cx="5473440" cy="440280"/>
+            <a:ext cx="5473440" cy="439920"/>
           </a:xfrm>
           <a:prstGeom prst="rect">
             <a:avLst/>
@@ -13706,7 +13719,7 @@
         <p:spPr>
           <a:xfrm>
             <a:off x="358560" y="2317320"/>
-            <a:ext cx="5664600" cy="465120"/>
+            <a:ext cx="5664600" cy="464760"/>
           </a:xfrm>
           <a:prstGeom prst="rect">
             <a:avLst/>
@@ -13758,7 +13771,7 @@
         <p:spPr>
           <a:xfrm>
             <a:off x="363240" y="2931480"/>
-            <a:ext cx="5583960" cy="1872720"/>
+            <a:ext cx="5583960" cy="1872360"/>
           </a:xfrm>
           <a:custGeom>
             <a:avLst/>
@@ -13812,7 +13825,7 @@
         <p:spPr>
           <a:xfrm>
             <a:off x="470520" y="3079440"/>
-            <a:ext cx="5368680" cy="249840"/>
+            <a:ext cx="5368680" cy="249480"/>
           </a:xfrm>
           <a:prstGeom prst="rect">
             <a:avLst/>
@@ -13863,7 +13876,7 @@
         </p:nvGraphicFramePr>
         <p:xfrm>
           <a:off x="510840" y="3402000"/>
-          <a:ext cx="5288400" cy="1003320"/>
+          <a:ext cx="5288760" cy="1003320"/>
         </p:xfrm>
         <a:graphic>
           <a:graphicData uri="http://schemas.openxmlformats.org/drawingml/2006/table">
@@ -14340,7 +14353,7 @@
         <p:spPr>
           <a:xfrm>
             <a:off x="479520" y="4478040"/>
-            <a:ext cx="5350680" cy="178200"/>
+            <a:ext cx="5350680" cy="177840"/>
           </a:xfrm>
           <a:prstGeom prst="rect">
             <a:avLst/>
@@ -14392,7 +14405,7 @@
         <p:spPr>
           <a:xfrm>
             <a:off x="376560" y="4952880"/>
-            <a:ext cx="5574960" cy="752040"/>
+            <a:ext cx="5574960" cy="751680"/>
           </a:xfrm>
           <a:custGeom>
             <a:avLst/>
@@ -14443,7 +14456,7 @@
         <p:spPr>
           <a:xfrm>
             <a:off x="376560" y="4952880"/>
-            <a:ext cx="34920" cy="752040"/>
+            <a:ext cx="34560" cy="751680"/>
           </a:xfrm>
           <a:custGeom>
             <a:avLst/>
@@ -14494,7 +14507,7 @@
         <p:spPr>
           <a:xfrm>
             <a:off x="537840" y="5096520"/>
-            <a:ext cx="5342040" cy="465120"/>
+            <a:ext cx="5342040" cy="464760"/>
           </a:xfrm>
           <a:prstGeom prst="rect">
             <a:avLst/>
@@ -14555,8 +14568,8 @@
         </p:nvSpPr>
         <p:spPr>
           <a:xfrm>
-            <a:off x="6239520" y="1290960"/>
-            <a:ext cx="5700600" cy="285840"/>
+            <a:off x="6239880" y="1290960"/>
+            <a:ext cx="5700600" cy="285480"/>
           </a:xfrm>
           <a:prstGeom prst="rect">
             <a:avLst/>
@@ -14607,8 +14620,8 @@
         </p:nvSpPr>
         <p:spPr>
           <a:xfrm>
-            <a:off x="6239520" y="1685520"/>
-            <a:ext cx="5673600" cy="527760"/>
+            <a:off x="6239880" y="1685520"/>
+            <a:ext cx="5673600" cy="527400"/>
           </a:xfrm>
           <a:prstGeom prst="rect">
             <a:avLst/>
@@ -14669,8 +14682,8 @@
         </p:nvSpPr>
         <p:spPr>
           <a:xfrm>
-            <a:off x="6239520" y="2317320"/>
-            <a:ext cx="5664600" cy="698040"/>
+            <a:off x="6239880" y="2317320"/>
+            <a:ext cx="5664600" cy="697680"/>
           </a:xfrm>
           <a:prstGeom prst="rect">
             <a:avLst/>
@@ -14721,8 +14734,8 @@
         </p:nvSpPr>
         <p:spPr>
           <a:xfrm>
-            <a:off x="6243840" y="3164400"/>
-            <a:ext cx="5583960" cy="1872720"/>
+            <a:off x="6244200" y="3164400"/>
+            <a:ext cx="5583960" cy="1872360"/>
           </a:xfrm>
           <a:custGeom>
             <a:avLst/>
@@ -14775,8 +14788,8 @@
         </p:nvSpPr>
         <p:spPr>
           <a:xfrm>
-            <a:off x="6351480" y="3312360"/>
-            <a:ext cx="5368680" cy="249840"/>
+            <a:off x="6351840" y="3312360"/>
+            <a:ext cx="5368680" cy="249480"/>
           </a:xfrm>
           <a:prstGeom prst="rect">
             <a:avLst/>
@@ -14826,8 +14839,8 @@
           <p:nvPr/>
         </p:nvGraphicFramePr>
         <p:xfrm>
-          <a:off x="6391800" y="3635280"/>
-          <a:ext cx="5288400" cy="1003320"/>
+          <a:off x="6392160" y="3635280"/>
+          <a:ext cx="5288760" cy="1003320"/>
         </p:xfrm>
         <a:graphic>
           <a:graphicData uri="http://schemas.openxmlformats.org/drawingml/2006/table">
@@ -15301,8 +15314,8 @@
         </p:nvSpPr>
         <p:spPr>
           <a:xfrm>
-            <a:off x="6360480" y="4710960"/>
-            <a:ext cx="5350680" cy="178200"/>
+            <a:off x="6360840" y="4710960"/>
+            <a:ext cx="5350680" cy="177840"/>
           </a:xfrm>
           <a:prstGeom prst="rect">
             <a:avLst/>
@@ -15353,8 +15366,8 @@
         </p:nvSpPr>
         <p:spPr>
           <a:xfrm>
-            <a:off x="6239520" y="5186160"/>
-            <a:ext cx="5592960" cy="1307880"/>
+            <a:off x="6239880" y="5186160"/>
+            <a:ext cx="5592960" cy="1307520"/>
           </a:xfrm>
           <a:custGeom>
             <a:avLst/>
@@ -15404,8 +15417,8 @@
         </p:nvSpPr>
         <p:spPr>
           <a:xfrm>
-            <a:off x="6382800" y="5329440"/>
-            <a:ext cx="5386680" cy="249840"/>
+            <a:off x="6383160" y="5329440"/>
+            <a:ext cx="5386680" cy="249480"/>
           </a:xfrm>
           <a:prstGeom prst="rect">
             <a:avLst/>
@@ -15456,8 +15469,8 @@
         </p:nvSpPr>
         <p:spPr>
           <a:xfrm>
-            <a:off x="6382800" y="5652360"/>
-            <a:ext cx="5377680" cy="698040"/>
+            <a:off x="6383160" y="5652360"/>
+            <a:ext cx="5377680" cy="697680"/>
           </a:xfrm>
           <a:prstGeom prst="rect">
             <a:avLst/>
@@ -15546,7 +15559,7 @@
         <p:spPr>
           <a:xfrm>
             <a:off x="609480" y="1781280"/>
-            <a:ext cx="12191040" cy="1218240"/>
+            <a:ext cx="12191760" cy="1217880"/>
           </a:xfrm>
           <a:prstGeom prst="rect">
             <a:avLst/>
@@ -15600,7 +15613,7 @@
         <p:spPr>
           <a:xfrm>
             <a:off x="609480" y="3152880"/>
-            <a:ext cx="11867040" cy="1141920"/>
+            <a:ext cx="11867760" cy="1141560"/>
           </a:xfrm>
           <a:prstGeom prst="rect">
             <a:avLst/>
@@ -15673,7 +15686,7 @@
         <p:spPr>
           <a:xfrm>
             <a:off x="609480" y="4524480"/>
-            <a:ext cx="1218240" cy="18000"/>
+            <a:ext cx="1217880" cy="17640"/>
           </a:xfrm>
           <a:custGeom>
             <a:avLst/>
@@ -15724,7 +15737,7 @@
         <p:spPr>
           <a:xfrm>
             <a:off x="609480" y="4772160"/>
-            <a:ext cx="11695680" cy="303840"/>
+            <a:ext cx="11696400" cy="303480"/>
           </a:xfrm>
           <a:prstGeom prst="rect">
             <a:avLst/>
@@ -15813,7 +15826,7 @@
         <p:spPr>
           <a:xfrm>
             <a:off x="380880" y="380880"/>
-            <a:ext cx="11505240" cy="227520"/>
+            <a:ext cx="11505960" cy="227160"/>
           </a:xfrm>
           <a:prstGeom prst="rect">
             <a:avLst/>
@@ -15841,7 +15854,7 @@
               <a:buNone/>
             </a:pPr>
             <a:r>
-              <a:rPr b="1" lang="en-US" sz="1200" spc="52" strike="noStrike">
+              <a:rPr b="1" lang="en-US" sz="1200" spc="49" strike="noStrike">
                 <a:solidFill>
                   <a:srgbClr val="0984e3"/>
                 </a:solidFill>
@@ -15865,7 +15878,7 @@
         <p:spPr>
           <a:xfrm>
             <a:off x="380880" y="685800"/>
-            <a:ext cx="11657520" cy="456120"/>
+            <a:ext cx="11658240" cy="455760"/>
           </a:xfrm>
           <a:prstGeom prst="rect">
             <a:avLst/>
@@ -15917,7 +15930,7 @@
         <p:spPr>
           <a:xfrm>
             <a:off x="380880" y="1295280"/>
-            <a:ext cx="7647480" cy="932400"/>
+            <a:ext cx="7647840" cy="932040"/>
           </a:xfrm>
           <a:prstGeom prst="rect">
             <a:avLst/>
@@ -15979,7 +15992,7 @@
         <p:spPr>
           <a:xfrm>
             <a:off x="385920" y="2381400"/>
-            <a:ext cx="3694680" cy="1722960"/>
+            <a:ext cx="3694680" cy="1722600"/>
           </a:xfrm>
           <a:custGeom>
             <a:avLst/>
@@ -16033,7 +16046,7 @@
         <p:spPr>
           <a:xfrm>
             <a:off x="542880" y="2538360"/>
-            <a:ext cx="3475440" cy="265680"/>
+            <a:ext cx="3475440" cy="265320"/>
           </a:xfrm>
           <a:prstGeom prst="rect">
             <a:avLst/>
@@ -16085,7 +16098,7 @@
         <p:spPr>
           <a:xfrm>
             <a:off x="542880" y="2881440"/>
-            <a:ext cx="3456360" cy="494280"/>
+            <a:ext cx="3456360" cy="493920"/>
           </a:xfrm>
           <a:prstGeom prst="rect">
             <a:avLst/>
@@ -16147,7 +16160,7 @@
         <p:spPr>
           <a:xfrm>
             <a:off x="542880" y="3452760"/>
-            <a:ext cx="3456360" cy="494280"/>
+            <a:ext cx="3456360" cy="493920"/>
           </a:xfrm>
           <a:prstGeom prst="rect">
             <a:avLst/>
@@ -16208,8 +16221,8 @@
         </p:nvSpPr>
         <p:spPr>
           <a:xfrm>
-            <a:off x="4240080" y="2381400"/>
-            <a:ext cx="3694680" cy="1722960"/>
+            <a:off x="4240440" y="2381400"/>
+            <a:ext cx="3694680" cy="1722600"/>
           </a:xfrm>
           <a:custGeom>
             <a:avLst/>
@@ -16262,8 +16275,8 @@
         </p:nvSpPr>
         <p:spPr>
           <a:xfrm>
-            <a:off x="4397400" y="2538360"/>
-            <a:ext cx="3475440" cy="265680"/>
+            <a:off x="4397760" y="2538360"/>
+            <a:ext cx="3475440" cy="265320"/>
           </a:xfrm>
           <a:prstGeom prst="rect">
             <a:avLst/>
@@ -16314,8 +16327,8 @@
         </p:nvSpPr>
         <p:spPr>
           <a:xfrm>
-            <a:off x="4397400" y="2881440"/>
-            <a:ext cx="3456360" cy="494280"/>
+            <a:off x="4397760" y="2881440"/>
+            <a:ext cx="3456360" cy="493920"/>
           </a:xfrm>
           <a:prstGeom prst="rect">
             <a:avLst/>
@@ -16376,8 +16389,8 @@
         </p:nvSpPr>
         <p:spPr>
           <a:xfrm>
-            <a:off x="4397400" y="3452760"/>
-            <a:ext cx="3456360" cy="494280"/>
+            <a:off x="4397760" y="3452760"/>
+            <a:ext cx="3456360" cy="493920"/>
           </a:xfrm>
           <a:prstGeom prst="rect">
             <a:avLst/>
@@ -16439,7 +16452,7 @@
         <p:spPr>
           <a:xfrm>
             <a:off x="399960" y="4262400"/>
-            <a:ext cx="7533360" cy="1637280"/>
+            <a:ext cx="7533720" cy="1636920"/>
           </a:xfrm>
           <a:custGeom>
             <a:avLst/>
@@ -16490,7 +16503,7 @@
         <p:spPr>
           <a:xfrm>
             <a:off x="399960" y="4262400"/>
-            <a:ext cx="37080" cy="1637280"/>
+            <a:ext cx="36720" cy="1636920"/>
           </a:xfrm>
           <a:custGeom>
             <a:avLst/>
@@ -16541,7 +16554,7 @@
         <p:spPr>
           <a:xfrm>
             <a:off x="571680" y="4414680"/>
-            <a:ext cx="7304760" cy="265680"/>
+            <a:ext cx="7305120" cy="265320"/>
           </a:xfrm>
           <a:prstGeom prst="rect">
             <a:avLst/>
@@ -16593,7 +16606,7 @@
         <p:spPr>
           <a:xfrm>
             <a:off x="619200" y="4791240"/>
-            <a:ext cx="94320" cy="151200"/>
+            <a:ext cx="93960" cy="150840"/>
           </a:xfrm>
           <a:custGeom>
             <a:avLst/>
@@ -16748,7 +16761,7 @@
         <p:spPr>
           <a:xfrm>
             <a:off x="819000" y="4757760"/>
-            <a:ext cx="3361320" cy="456120"/>
+            <a:ext cx="3361320" cy="455760"/>
           </a:xfrm>
           <a:prstGeom prst="rect">
             <a:avLst/>
@@ -16809,8 +16822,8 @@
         </p:nvSpPr>
         <p:spPr>
           <a:xfrm>
-            <a:off x="4282920" y="4791240"/>
-            <a:ext cx="132120" cy="151200"/>
+            <a:off x="4283280" y="4791240"/>
+            <a:ext cx="131760" cy="150840"/>
           </a:xfrm>
           <a:custGeom>
             <a:avLst/>
@@ -16941,8 +16954,8 @@
         </p:nvSpPr>
         <p:spPr>
           <a:xfrm>
-            <a:off x="4502160" y="4757760"/>
-            <a:ext cx="3361320" cy="456120"/>
+            <a:off x="4502520" y="4757760"/>
+            <a:ext cx="3361320" cy="455760"/>
           </a:xfrm>
           <a:prstGeom prst="rect">
             <a:avLst/>
@@ -17004,7 +17017,7 @@
         <p:spPr>
           <a:xfrm>
             <a:off x="590400" y="5324400"/>
-            <a:ext cx="151200" cy="151200"/>
+            <a:ext cx="150840" cy="150840"/>
           </a:xfrm>
           <a:custGeom>
             <a:avLst/>
@@ -17227,7 +17240,7 @@
         <p:spPr>
           <a:xfrm>
             <a:off x="819000" y="5291280"/>
-            <a:ext cx="3361320" cy="456120"/>
+            <a:ext cx="3361320" cy="455760"/>
           </a:xfrm>
           <a:prstGeom prst="rect">
             <a:avLst/>
@@ -17288,8 +17301,8 @@
         </p:nvSpPr>
         <p:spPr>
           <a:xfrm>
-            <a:off x="4263840" y="5324400"/>
-            <a:ext cx="170280" cy="151200"/>
+            <a:off x="4264200" y="5324400"/>
+            <a:ext cx="169920" cy="150840"/>
           </a:xfrm>
           <a:custGeom>
             <a:avLst/>
@@ -17485,8 +17498,8 @@
         </p:nvSpPr>
         <p:spPr>
           <a:xfrm>
-            <a:off x="4502160" y="5291280"/>
-            <a:ext cx="3361320" cy="456120"/>
+            <a:off x="4502520" y="5291280"/>
+            <a:ext cx="3361320" cy="455760"/>
           </a:xfrm>
           <a:prstGeom prst="rect">
             <a:avLst/>
@@ -17547,8 +17560,8 @@
         </p:nvSpPr>
         <p:spPr>
           <a:xfrm>
-            <a:off x="8132760" y="1300320"/>
-            <a:ext cx="3675600" cy="2637360"/>
+            <a:off x="8133120" y="1300320"/>
+            <a:ext cx="3675600" cy="2637000"/>
           </a:xfrm>
           <a:custGeom>
             <a:avLst/>
@@ -17601,8 +17614,8 @@
         </p:nvSpPr>
         <p:spPr>
           <a:xfrm>
-            <a:off x="8242200" y="1457280"/>
-            <a:ext cx="3456360" cy="265680"/>
+            <a:off x="8242920" y="1457280"/>
+            <a:ext cx="3456360" cy="265320"/>
           </a:xfrm>
           <a:prstGeom prst="rect">
             <a:avLst/>
@@ -17653,8 +17666,8 @@
         </p:nvSpPr>
         <p:spPr>
           <a:xfrm>
-            <a:off x="8289720" y="1838160"/>
-            <a:ext cx="3361320" cy="1332360"/>
+            <a:off x="8290440" y="1838160"/>
+            <a:ext cx="3361320" cy="1332000"/>
           </a:xfrm>
           <a:prstGeom prst="roundRect">
             <a:avLst>
@@ -17685,8 +17698,8 @@
         </p:nvSpPr>
         <p:spPr>
           <a:xfrm>
-            <a:off x="8251920" y="3286080"/>
-            <a:ext cx="3437280" cy="494280"/>
+            <a:off x="8252640" y="3286080"/>
+            <a:ext cx="3437280" cy="493920"/>
           </a:xfrm>
           <a:prstGeom prst="rect">
             <a:avLst/>
@@ -17737,8 +17750,8 @@
         </p:nvSpPr>
         <p:spPr>
           <a:xfrm>
-            <a:off x="8128080" y="4095720"/>
-            <a:ext cx="3684960" cy="1637280"/>
+            <a:off x="8128440" y="4095720"/>
+            <a:ext cx="3684960" cy="1636920"/>
           </a:xfrm>
           <a:custGeom>
             <a:avLst/>
@@ -17788,8 +17801,8 @@
         </p:nvSpPr>
         <p:spPr>
           <a:xfrm>
-            <a:off x="8280360" y="4248000"/>
-            <a:ext cx="3466080" cy="265680"/>
+            <a:off x="8281080" y="4248000"/>
+            <a:ext cx="3466080" cy="265320"/>
           </a:xfrm>
           <a:prstGeom prst="rect">
             <a:avLst/>
@@ -17840,8 +17853,8 @@
         </p:nvSpPr>
         <p:spPr>
           <a:xfrm>
-            <a:off x="8280360" y="4591080"/>
-            <a:ext cx="3456360" cy="989640"/>
+            <a:off x="8281080" y="4591080"/>
+            <a:ext cx="3456360" cy="989280"/>
           </a:xfrm>
           <a:prstGeom prst="rect">
             <a:avLst/>
@@ -17930,7 +17943,7 @@
         <p:spPr>
           <a:xfrm>
             <a:off x="370440" y="370440"/>
-            <a:ext cx="11523960" cy="221400"/>
+            <a:ext cx="11524680" cy="221040"/>
           </a:xfrm>
           <a:prstGeom prst="rect">
             <a:avLst/>
@@ -17958,7 +17971,7 @@
               <a:buNone/>
             </a:pPr>
             <a:r>
-              <a:rPr b="1" lang="en-US" sz="1170" spc="49" strike="noStrike">
+              <a:rPr b="1" lang="en-US" sz="1170" spc="46" strike="noStrike">
                 <a:solidFill>
                   <a:srgbClr val="0984e3"/>
                 </a:solidFill>
@@ -17982,7 +17995,7 @@
         <p:spPr>
           <a:xfrm>
             <a:off x="370440" y="667080"/>
-            <a:ext cx="11672280" cy="443520"/>
+            <a:ext cx="11673000" cy="443160"/>
           </a:xfrm>
           <a:prstGeom prst="rect">
             <a:avLst/>
@@ -18034,7 +18047,7 @@
         <p:spPr>
           <a:xfrm>
             <a:off x="370440" y="1334160"/>
-            <a:ext cx="5668920" cy="1203120"/>
+            <a:ext cx="5668920" cy="1202760"/>
           </a:xfrm>
           <a:prstGeom prst="rect">
             <a:avLst/>
@@ -18096,7 +18109,7 @@
         <p:spPr>
           <a:xfrm>
             <a:off x="375120" y="2691360"/>
-            <a:ext cx="5566680" cy="2157480"/>
+            <a:ext cx="5566680" cy="2157120"/>
           </a:xfrm>
           <a:custGeom>
             <a:avLst/>
@@ -18150,7 +18163,7 @@
         <p:spPr>
           <a:xfrm>
             <a:off x="565200" y="2881080"/>
-            <a:ext cx="5279760" cy="258480"/>
+            <a:ext cx="5279760" cy="258120"/>
           </a:xfrm>
           <a:prstGeom prst="rect">
             <a:avLst/>
@@ -18202,7 +18215,7 @@
         <p:spPr>
           <a:xfrm>
             <a:off x="565200" y="3251880"/>
-            <a:ext cx="5261040" cy="480600"/>
+            <a:ext cx="5261040" cy="480240"/>
           </a:xfrm>
           <a:prstGeom prst="rect">
             <a:avLst/>
@@ -18254,7 +18267,7 @@
         <p:spPr>
           <a:xfrm>
             <a:off x="592920" y="3877200"/>
-            <a:ext cx="128520" cy="147240"/>
+            <a:ext cx="128160" cy="146880"/>
           </a:xfrm>
           <a:custGeom>
             <a:avLst/>
@@ -18335,7 +18348,7 @@
         <p:spPr>
           <a:xfrm>
             <a:off x="804600" y="3844800"/>
-            <a:ext cx="5021640" cy="221400"/>
+            <a:ext cx="5021640" cy="221040"/>
           </a:xfrm>
           <a:prstGeom prst="rect">
             <a:avLst/>
@@ -18387,7 +18400,7 @@
         <p:spPr>
           <a:xfrm>
             <a:off x="592920" y="4173480"/>
-            <a:ext cx="128520" cy="147240"/>
+            <a:ext cx="128160" cy="146880"/>
           </a:xfrm>
           <a:custGeom>
             <a:avLst/>
@@ -18468,7 +18481,7 @@
         <p:spPr>
           <a:xfrm>
             <a:off x="804600" y="4141080"/>
-            <a:ext cx="5021640" cy="221400"/>
+            <a:ext cx="5021640" cy="221040"/>
           </a:xfrm>
           <a:prstGeom prst="rect">
             <a:avLst/>
@@ -18520,7 +18533,7 @@
         <p:spPr>
           <a:xfrm>
             <a:off x="592920" y="4470120"/>
-            <a:ext cx="128520" cy="147240"/>
+            <a:ext cx="128160" cy="146880"/>
           </a:xfrm>
           <a:custGeom>
             <a:avLst/>
@@ -18601,7 +18614,7 @@
         <p:spPr>
           <a:xfrm>
             <a:off x="804600" y="4437720"/>
-            <a:ext cx="5021640" cy="221400"/>
+            <a:ext cx="5021640" cy="221040"/>
           </a:xfrm>
           <a:prstGeom prst="rect">
             <a:avLst/>
@@ -18653,7 +18666,7 @@
         <p:spPr>
           <a:xfrm>
             <a:off x="375120" y="5007600"/>
-            <a:ext cx="5566680" cy="1472040"/>
+            <a:ext cx="5566680" cy="1471680"/>
           </a:xfrm>
           <a:custGeom>
             <a:avLst/>
@@ -18707,7 +18720,7 @@
         <p:spPr>
           <a:xfrm>
             <a:off x="565200" y="5197320"/>
-            <a:ext cx="5279760" cy="258480"/>
+            <a:ext cx="5279760" cy="258120"/>
           </a:xfrm>
           <a:prstGeom prst="rect">
             <a:avLst/>
@@ -18759,7 +18772,7 @@
         <p:spPr>
           <a:xfrm>
             <a:off x="565200" y="5567760"/>
-            <a:ext cx="5261040" cy="721440"/>
+            <a:ext cx="5261040" cy="721080"/>
           </a:xfrm>
           <a:prstGeom prst="rect">
             <a:avLst/>
@@ -18810,8 +18823,8 @@
         </p:nvSpPr>
         <p:spPr>
           <a:xfrm>
-            <a:off x="6242040" y="1334160"/>
-            <a:ext cx="5576040" cy="2843280"/>
+            <a:off x="6242400" y="1334160"/>
+            <a:ext cx="5576040" cy="2842920"/>
           </a:xfrm>
           <a:custGeom>
             <a:avLst/>
@@ -18861,8 +18874,8 @@
         </p:nvSpPr>
         <p:spPr>
           <a:xfrm>
-            <a:off x="6427440" y="1519200"/>
-            <a:ext cx="5316840" cy="295560"/>
+            <a:off x="6427800" y="1519200"/>
+            <a:ext cx="5316840" cy="295200"/>
           </a:xfrm>
           <a:prstGeom prst="rect">
             <a:avLst/>
@@ -18913,8 +18926,8 @@
         </p:nvSpPr>
         <p:spPr>
           <a:xfrm>
-            <a:off x="6427440" y="1968840"/>
-            <a:ext cx="5145480" cy="455040"/>
+            <a:off x="6427800" y="1968840"/>
+            <a:ext cx="5145480" cy="454680"/>
           </a:xfrm>
           <a:prstGeom prst="rect">
             <a:avLst/>
@@ -18965,8 +18978,8 @@
         </p:nvSpPr>
         <p:spPr>
           <a:xfrm>
-            <a:off x="6427440" y="2580120"/>
-            <a:ext cx="5279760" cy="480600"/>
+            <a:off x="6427800" y="2580120"/>
+            <a:ext cx="5279760" cy="480240"/>
           </a:xfrm>
           <a:prstGeom prst="rect">
             <a:avLst/>
@@ -19017,8 +19030,8 @@
         </p:nvSpPr>
         <p:spPr>
           <a:xfrm>
-            <a:off x="6436800" y="3205440"/>
-            <a:ext cx="165600" cy="147240"/>
+            <a:off x="6437160" y="3205440"/>
+            <a:ext cx="165240" cy="146880"/>
           </a:xfrm>
           <a:custGeom>
             <a:avLst/>
@@ -19202,8 +19215,8 @@
         </p:nvSpPr>
         <p:spPr>
           <a:xfrm>
-            <a:off x="6666840" y="3173040"/>
-            <a:ext cx="5040360" cy="221400"/>
+            <a:off x="6667200" y="3173040"/>
+            <a:ext cx="5040360" cy="221040"/>
           </a:xfrm>
           <a:prstGeom prst="rect">
             <a:avLst/>
@@ -19264,8 +19277,8 @@
         </p:nvSpPr>
         <p:spPr>
           <a:xfrm>
-            <a:off x="6445800" y="3502080"/>
-            <a:ext cx="147240" cy="147240"/>
+            <a:off x="6446160" y="3502080"/>
+            <a:ext cx="146880" cy="146880"/>
           </a:xfrm>
           <a:custGeom>
             <a:avLst/>
@@ -19431,8 +19444,8 @@
         </p:nvSpPr>
         <p:spPr>
           <a:xfrm>
-            <a:off x="6666840" y="3469680"/>
-            <a:ext cx="5040360" cy="221400"/>
+            <a:off x="6667200" y="3469680"/>
+            <a:ext cx="5040360" cy="221040"/>
           </a:xfrm>
           <a:prstGeom prst="rect">
             <a:avLst/>
@@ -19493,8 +19506,8 @@
         </p:nvSpPr>
         <p:spPr>
           <a:xfrm>
-            <a:off x="6427440" y="3798360"/>
-            <a:ext cx="184320" cy="147240"/>
+            <a:off x="6427800" y="3798360"/>
+            <a:ext cx="183960" cy="146880"/>
           </a:xfrm>
           <a:custGeom>
             <a:avLst/>
@@ -19725,8 +19738,8 @@
         </p:nvSpPr>
         <p:spPr>
           <a:xfrm>
-            <a:off x="6666840" y="3765960"/>
-            <a:ext cx="5040360" cy="221400"/>
+            <a:off x="6667200" y="3765960"/>
+            <a:ext cx="5040360" cy="221040"/>
           </a:xfrm>
           <a:prstGeom prst="rect">
             <a:avLst/>
@@ -19787,8 +19800,8 @@
         </p:nvSpPr>
         <p:spPr>
           <a:xfrm>
-            <a:off x="6260760" y="4321800"/>
-            <a:ext cx="5557680" cy="869760"/>
+            <a:off x="6261120" y="4321800"/>
+            <a:ext cx="5557680" cy="869400"/>
           </a:xfrm>
           <a:custGeom>
             <a:avLst/>
@@ -19838,8 +19851,8 @@
         </p:nvSpPr>
         <p:spPr>
           <a:xfrm>
-            <a:off x="6260760" y="4321800"/>
-            <a:ext cx="36000" cy="869760"/>
+            <a:off x="6261120" y="4321800"/>
+            <a:ext cx="35640" cy="869400"/>
           </a:xfrm>
           <a:custGeom>
             <a:avLst/>
@@ -19889,8 +19902,8 @@
         </p:nvSpPr>
         <p:spPr>
           <a:xfrm>
-            <a:off x="6464520" y="4507200"/>
-            <a:ext cx="5242680" cy="239760"/>
+            <a:off x="6464880" y="4507200"/>
+            <a:ext cx="5242680" cy="239400"/>
           </a:xfrm>
           <a:prstGeom prst="rect">
             <a:avLst/>
@@ -19941,8 +19954,8 @@
         </p:nvSpPr>
         <p:spPr>
           <a:xfrm>
-            <a:off x="6464520" y="4822200"/>
-            <a:ext cx="5233320" cy="184320"/>
+            <a:off x="6464880" y="4822200"/>
+            <a:ext cx="5233320" cy="183960"/>
           </a:xfrm>
           <a:prstGeom prst="rect">
             <a:avLst/>
@@ -20041,7 +20054,7 @@
         <p:spPr>
           <a:xfrm>
             <a:off x="380880" y="380880"/>
-            <a:ext cx="11657520" cy="456120"/>
+            <a:ext cx="11658240" cy="455760"/>
           </a:xfrm>
           <a:prstGeom prst="rect">
             <a:avLst/>
@@ -20093,7 +20106,7 @@
         <p:spPr>
           <a:xfrm>
             <a:off x="380880" y="952560"/>
-            <a:ext cx="761040" cy="18000"/>
+            <a:ext cx="760680" cy="17640"/>
           </a:xfrm>
           <a:custGeom>
             <a:avLst/>
@@ -20144,7 +20157,7 @@
         <p:spPr>
           <a:xfrm>
             <a:off x="380880" y="1428840"/>
-            <a:ext cx="751320" cy="570600"/>
+            <a:ext cx="750960" cy="570240"/>
           </a:xfrm>
           <a:prstGeom prst="rect">
             <a:avLst/>
@@ -20198,7 +20211,7 @@
         <p:spPr>
           <a:xfrm>
             <a:off x="1034280" y="1504800"/>
-            <a:ext cx="4190040" cy="303840"/>
+            <a:ext cx="4190040" cy="303480"/>
           </a:xfrm>
           <a:prstGeom prst="rect">
             <a:avLst/>
@@ -20250,7 +20263,7 @@
         <p:spPr>
           <a:xfrm>
             <a:off x="1034280" y="1886040"/>
-            <a:ext cx="4161240" cy="275040"/>
+            <a:ext cx="4161240" cy="274680"/>
           </a:xfrm>
           <a:prstGeom prst="rect">
             <a:avLst/>
@@ -20301,8 +20314,8 @@
         </p:nvSpPr>
         <p:spPr>
           <a:xfrm>
-            <a:off x="6400800" y="1428840"/>
-            <a:ext cx="856080" cy="570600"/>
+            <a:off x="6401160" y="1428840"/>
+            <a:ext cx="855720" cy="570240"/>
           </a:xfrm>
           <a:prstGeom prst="rect">
             <a:avLst/>
@@ -20355,8 +20368,8 @@
         </p:nvSpPr>
         <p:spPr>
           <a:xfrm>
-            <a:off x="7160040" y="1504800"/>
-            <a:ext cx="4761360" cy="303840"/>
+            <a:off x="7160400" y="1504800"/>
+            <a:ext cx="4761360" cy="303480"/>
           </a:xfrm>
           <a:prstGeom prst="rect">
             <a:avLst/>
@@ -20407,8 +20420,8 @@
         </p:nvSpPr>
         <p:spPr>
           <a:xfrm>
-            <a:off x="7160040" y="1886040"/>
-            <a:ext cx="4732920" cy="560880"/>
+            <a:off x="7160400" y="1886040"/>
+            <a:ext cx="4732920" cy="560520"/>
           </a:xfrm>
           <a:prstGeom prst="rect">
             <a:avLst/>
@@ -20460,7 +20473,7 @@
         <p:spPr>
           <a:xfrm>
             <a:off x="380880" y="2824200"/>
-            <a:ext cx="856080" cy="570600"/>
+            <a:ext cx="855720" cy="570240"/>
           </a:xfrm>
           <a:prstGeom prst="rect">
             <a:avLst/>
@@ -20514,7 +20527,7 @@
         <p:spPr>
           <a:xfrm>
             <a:off x="1143000" y="2900520"/>
-            <a:ext cx="3970800" cy="303840"/>
+            <a:ext cx="3970800" cy="303480"/>
           </a:xfrm>
           <a:prstGeom prst="rect">
             <a:avLst/>
@@ -20566,7 +20579,7 @@
         <p:spPr>
           <a:xfrm>
             <a:off x="1143000" y="3281400"/>
-            <a:ext cx="3942360" cy="275040"/>
+            <a:ext cx="3942360" cy="274680"/>
           </a:xfrm>
           <a:prstGeom prst="rect">
             <a:avLst/>
@@ -20617,8 +20630,8 @@
         </p:nvSpPr>
         <p:spPr>
           <a:xfrm>
-            <a:off x="6400800" y="2824200"/>
-            <a:ext cx="884880" cy="570600"/>
+            <a:off x="6401160" y="2824200"/>
+            <a:ext cx="884520" cy="570240"/>
           </a:xfrm>
           <a:prstGeom prst="rect">
             <a:avLst/>
@@ -20671,8 +20684,8 @@
         </p:nvSpPr>
         <p:spPr>
           <a:xfrm>
-            <a:off x="7188480" y="2900520"/>
-            <a:ext cx="2475360" cy="303840"/>
+            <a:off x="7188840" y="2900520"/>
+            <a:ext cx="2475360" cy="303480"/>
           </a:xfrm>
           <a:prstGeom prst="rect">
             <a:avLst/>
@@ -20723,8 +20736,8 @@
         </p:nvSpPr>
         <p:spPr>
           <a:xfrm>
-            <a:off x="7188480" y="3281400"/>
-            <a:ext cx="2446920" cy="275040"/>
+            <a:off x="7188840" y="3281400"/>
+            <a:ext cx="2446920" cy="274680"/>
           </a:xfrm>
           <a:prstGeom prst="rect">
             <a:avLst/>
@@ -20776,7 +20789,7 @@
         <p:spPr>
           <a:xfrm>
             <a:off x="380880" y="3940920"/>
-            <a:ext cx="846720" cy="570600"/>
+            <a:ext cx="846360" cy="570240"/>
           </a:xfrm>
           <a:prstGeom prst="rect">
             <a:avLst/>
@@ -20830,7 +20843,7 @@
         <p:spPr>
           <a:xfrm>
             <a:off x="1137240" y="4017240"/>
-            <a:ext cx="2865960" cy="303840"/>
+            <a:ext cx="2865960" cy="303480"/>
           </a:xfrm>
           <a:prstGeom prst="rect">
             <a:avLst/>
@@ -20882,7 +20895,7 @@
         <p:spPr>
           <a:xfrm>
             <a:off x="1137240" y="4398120"/>
-            <a:ext cx="2837520" cy="275040"/>
+            <a:ext cx="2837520" cy="274680"/>
           </a:xfrm>
           <a:prstGeom prst="rect">
             <a:avLst/>
@@ -20933,8 +20946,8 @@
         </p:nvSpPr>
         <p:spPr>
           <a:xfrm>
-            <a:off x="6400800" y="3940920"/>
-            <a:ext cx="865800" cy="570600"/>
+            <a:off x="6401160" y="3940920"/>
+            <a:ext cx="865440" cy="570240"/>
           </a:xfrm>
           <a:prstGeom prst="rect">
             <a:avLst/>
@@ -20987,8 +21000,8 @@
         </p:nvSpPr>
         <p:spPr>
           <a:xfrm>
-            <a:off x="7171560" y="4017240"/>
-            <a:ext cx="3075480" cy="303840"/>
+            <a:off x="7171920" y="4017240"/>
+            <a:ext cx="3075480" cy="303480"/>
           </a:xfrm>
           <a:prstGeom prst="rect">
             <a:avLst/>
@@ -21039,8 +21052,8 @@
         </p:nvSpPr>
         <p:spPr>
           <a:xfrm>
-            <a:off x="7171560" y="4398120"/>
-            <a:ext cx="3047040" cy="275040"/>
+            <a:off x="7171920" y="4398120"/>
+            <a:ext cx="3047040" cy="274680"/>
           </a:xfrm>
           <a:prstGeom prst="rect">
             <a:avLst/>
@@ -21129,7 +21142,7 @@
         <p:spPr>
           <a:xfrm>
             <a:off x="335880" y="335880"/>
-            <a:ext cx="11586240" cy="200520"/>
+            <a:ext cx="11586960" cy="200160"/>
           </a:xfrm>
           <a:prstGeom prst="rect">
             <a:avLst/>
@@ -21157,7 +21170,7 @@
               <a:buNone/>
             </a:pPr>
             <a:r>
-              <a:rPr b="1" lang="en-US" sz="1060" spc="46" strike="noStrike">
+              <a:rPr b="1" lang="en-US" sz="1060" spc="43" strike="noStrike">
                 <a:solidFill>
                   <a:srgbClr val="0984e3"/>
                 </a:solidFill>
@@ -21181,7 +21194,7 @@
         <p:spPr>
           <a:xfrm>
             <a:off x="335880" y="604440"/>
-            <a:ext cx="11720880" cy="402120"/>
+            <a:ext cx="11721600" cy="401760"/>
           </a:xfrm>
           <a:prstGeom prst="rect">
             <a:avLst/>
@@ -21233,7 +21246,7 @@
         <p:spPr>
           <a:xfrm>
             <a:off x="335880" y="1251000"/>
-            <a:ext cx="5995080" cy="456480"/>
+            <a:ext cx="5995080" cy="456120"/>
           </a:xfrm>
           <a:prstGeom prst="rect">
             <a:avLst/>
@@ -21285,7 +21298,7 @@
         <p:spPr>
           <a:xfrm>
             <a:off x="335880" y="1889280"/>
-            <a:ext cx="6875640" cy="653760"/>
+            <a:ext cx="6876000" cy="653400"/>
           </a:xfrm>
           <a:prstGeom prst="rect">
             <a:avLst/>
@@ -21337,7 +21350,7 @@
         <p:spPr>
           <a:xfrm>
             <a:off x="340200" y="2682720"/>
-            <a:ext cx="6800400" cy="1955520"/>
+            <a:ext cx="6800760" cy="1955160"/>
           </a:xfrm>
           <a:custGeom>
             <a:avLst/>
@@ -21391,7 +21404,7 @@
         <p:spPr>
           <a:xfrm>
             <a:off x="512280" y="2854800"/>
-            <a:ext cx="6540120" cy="234000"/>
+            <a:ext cx="6540480" cy="233640"/>
           </a:xfrm>
           <a:prstGeom prst="rect">
             <a:avLst/>
@@ -21443,7 +21456,7 @@
         <p:spPr>
           <a:xfrm>
             <a:off x="512280" y="3190680"/>
-            <a:ext cx="6523200" cy="217080"/>
+            <a:ext cx="6523560" cy="216720"/>
           </a:xfrm>
           <a:prstGeom prst="rect">
             <a:avLst/>
@@ -21495,7 +21508,7 @@
         <p:spPr>
           <a:xfrm>
             <a:off x="512280" y="3509640"/>
-            <a:ext cx="6455880" cy="637200"/>
+            <a:ext cx="6456240" cy="636840"/>
           </a:xfrm>
           <a:custGeom>
             <a:avLst/>
@@ -21546,7 +21559,7 @@
         <p:spPr>
           <a:xfrm>
             <a:off x="613080" y="3610440"/>
-            <a:ext cx="6321600" cy="200520"/>
+            <a:ext cx="6321960" cy="200160"/>
           </a:xfrm>
           <a:prstGeom prst="rect">
             <a:avLst/>
@@ -21598,7 +21611,7 @@
         <p:spPr>
           <a:xfrm>
             <a:off x="613080" y="3845520"/>
-            <a:ext cx="6321600" cy="200520"/>
+            <a:ext cx="6321960" cy="200160"/>
           </a:xfrm>
           <a:prstGeom prst="rect">
             <a:avLst/>
@@ -21650,7 +21663,7 @@
         <p:spPr>
           <a:xfrm>
             <a:off x="512280" y="4248720"/>
-            <a:ext cx="6523200" cy="217080"/>
+            <a:ext cx="6523560" cy="216720"/>
           </a:xfrm>
           <a:prstGeom prst="rect">
             <a:avLst/>
@@ -21702,7 +21715,7 @@
         <p:spPr>
           <a:xfrm>
             <a:off x="352800" y="4777560"/>
-            <a:ext cx="6791760" cy="1527120"/>
+            <a:ext cx="6792120" cy="1526760"/>
           </a:xfrm>
           <a:custGeom>
             <a:avLst/>
@@ -21753,7 +21766,7 @@
         <p:spPr>
           <a:xfrm>
             <a:off x="352800" y="4777560"/>
-            <a:ext cx="32400" cy="1527120"/>
+            <a:ext cx="32040" cy="1526760"/>
           </a:xfrm>
           <a:custGeom>
             <a:avLst/>
@@ -21804,7 +21817,7 @@
         <p:spPr>
           <a:xfrm>
             <a:off x="537480" y="4945680"/>
-            <a:ext cx="6523200" cy="234000"/>
+            <a:ext cx="6523560" cy="233640"/>
           </a:xfrm>
           <a:prstGeom prst="rect">
             <a:avLst/>
@@ -21856,7 +21869,7 @@
         <p:spPr>
           <a:xfrm>
             <a:off x="537480" y="5281560"/>
-            <a:ext cx="6506280" cy="217080"/>
+            <a:ext cx="6506640" cy="216720"/>
           </a:xfrm>
           <a:prstGeom prst="rect">
             <a:avLst/>
@@ -21908,7 +21921,7 @@
         <p:spPr>
           <a:xfrm>
             <a:off x="537480" y="5600520"/>
-            <a:ext cx="3214800" cy="200520"/>
+            <a:ext cx="3214800" cy="200160"/>
           </a:xfrm>
           <a:prstGeom prst="rect">
             <a:avLst/>
@@ -21970,7 +21983,7 @@
         <p:spPr>
           <a:xfrm>
             <a:off x="3823200" y="5600520"/>
-            <a:ext cx="3214800" cy="200520"/>
+            <a:ext cx="3214800" cy="200160"/>
           </a:xfrm>
           <a:prstGeom prst="rect">
             <a:avLst/>
@@ -22032,7 +22045,7 @@
         <p:spPr>
           <a:xfrm>
             <a:off x="537480" y="5936400"/>
-            <a:ext cx="3214800" cy="200520"/>
+            <a:ext cx="3214800" cy="200160"/>
           </a:xfrm>
           <a:prstGeom prst="rect">
             <a:avLst/>
@@ -22094,7 +22107,7 @@
         <p:spPr>
           <a:xfrm>
             <a:off x="3823200" y="5936400"/>
-            <a:ext cx="3214800" cy="200520"/>
+            <a:ext cx="3214800" cy="200160"/>
           </a:xfrm>
           <a:prstGeom prst="rect">
             <a:avLst/>
@@ -22155,8 +22168,8 @@
         </p:nvSpPr>
         <p:spPr>
           <a:xfrm>
-            <a:off x="7415640" y="1213200"/>
-            <a:ext cx="4440600" cy="3500280"/>
+            <a:off x="7416000" y="1213200"/>
+            <a:ext cx="4440600" cy="3499920"/>
           </a:xfrm>
           <a:custGeom>
             <a:avLst/>
@@ -22209,8 +22222,8 @@
         </p:nvSpPr>
         <p:spPr>
           <a:xfrm>
-            <a:off x="7587720" y="1385280"/>
-            <a:ext cx="4096440" cy="1678320"/>
+            <a:off x="7588080" y="1385280"/>
+            <a:ext cx="4096440" cy="1677960"/>
           </a:xfrm>
           <a:prstGeom prst="roundRect">
             <a:avLst>
@@ -22241,8 +22254,8 @@
         </p:nvSpPr>
         <p:spPr>
           <a:xfrm>
-            <a:off x="7545600" y="3199320"/>
-            <a:ext cx="4180320" cy="234000"/>
+            <a:off x="7545960" y="3199320"/>
+            <a:ext cx="4180320" cy="233640"/>
           </a:xfrm>
           <a:prstGeom prst="rect">
             <a:avLst/>
@@ -22293,8 +22306,8 @@
         </p:nvSpPr>
         <p:spPr>
           <a:xfrm>
-            <a:off x="7621200" y="3564360"/>
-            <a:ext cx="99720" cy="133200"/>
+            <a:off x="7621560" y="3564360"/>
+            <a:ext cx="99360" cy="132840"/>
           </a:xfrm>
           <a:custGeom>
             <a:avLst/>
@@ -22492,8 +22505,8 @@
         </p:nvSpPr>
         <p:spPr>
           <a:xfrm>
-            <a:off x="7800120" y="3534840"/>
-            <a:ext cx="3951360" cy="200520"/>
+            <a:off x="7800480" y="3534840"/>
+            <a:ext cx="3951360" cy="200160"/>
           </a:xfrm>
           <a:prstGeom prst="rect">
             <a:avLst/>
@@ -22554,8 +22567,8 @@
         </p:nvSpPr>
         <p:spPr>
           <a:xfrm>
-            <a:off x="7604640" y="3832920"/>
-            <a:ext cx="133200" cy="133200"/>
+            <a:off x="7605000" y="3832920"/>
+            <a:ext cx="132840" cy="132840"/>
           </a:xfrm>
           <a:custGeom>
             <a:avLst/>
@@ -22761,8 +22774,8 @@
         </p:nvSpPr>
         <p:spPr>
           <a:xfrm>
-            <a:off x="7800120" y="3803760"/>
-            <a:ext cx="3951360" cy="200520"/>
+            <a:off x="7800480" y="3803760"/>
+            <a:ext cx="3951360" cy="200160"/>
           </a:xfrm>
           <a:prstGeom prst="rect">
             <a:avLst/>
@@ -22823,8 +22836,8 @@
         </p:nvSpPr>
         <p:spPr>
           <a:xfrm>
-            <a:off x="7604640" y="4101840"/>
-            <a:ext cx="133200" cy="133200"/>
+            <a:off x="7605000" y="4101840"/>
+            <a:ext cx="132840" cy="132840"/>
           </a:xfrm>
           <a:custGeom>
             <a:avLst/>
@@ -23014,8 +23027,8 @@
         </p:nvSpPr>
         <p:spPr>
           <a:xfrm>
-            <a:off x="7800120" y="4072320"/>
-            <a:ext cx="3951360" cy="200520"/>
+            <a:off x="7800480" y="4072320"/>
+            <a:ext cx="3951360" cy="200160"/>
           </a:xfrm>
           <a:prstGeom prst="rect">
             <a:avLst/>
@@ -23076,8 +23089,8 @@
         </p:nvSpPr>
         <p:spPr>
           <a:xfrm>
-            <a:off x="7587720" y="4370400"/>
-            <a:ext cx="166680" cy="133200"/>
+            <a:off x="7588080" y="4370400"/>
+            <a:ext cx="166320" cy="132840"/>
           </a:xfrm>
           <a:custGeom>
             <a:avLst/>
@@ -23292,8 +23305,8 @@
         </p:nvSpPr>
         <p:spPr>
           <a:xfrm>
-            <a:off x="7800120" y="4341240"/>
-            <a:ext cx="3951360" cy="200520"/>
+            <a:off x="7800480" y="4341240"/>
+            <a:ext cx="3951360" cy="200160"/>
           </a:xfrm>
           <a:prstGeom prst="rect">
             <a:avLst/>
@@ -23354,8 +23367,8 @@
         </p:nvSpPr>
         <p:spPr>
           <a:xfrm>
-            <a:off x="7411320" y="4853160"/>
-            <a:ext cx="4449240" cy="1292040"/>
+            <a:off x="7411680" y="4853160"/>
+            <a:ext cx="4449240" cy="1291680"/>
           </a:xfrm>
           <a:custGeom>
             <a:avLst/>
@@ -23405,8 +23418,8 @@
         </p:nvSpPr>
         <p:spPr>
           <a:xfrm>
-            <a:off x="7579440" y="5021280"/>
-            <a:ext cx="4188960" cy="234000"/>
+            <a:off x="7579800" y="5021280"/>
+            <a:ext cx="4188960" cy="233640"/>
           </a:xfrm>
           <a:prstGeom prst="rect">
             <a:avLst/>
@@ -23457,8 +23470,8 @@
         </p:nvSpPr>
         <p:spPr>
           <a:xfrm>
-            <a:off x="7579440" y="5323680"/>
-            <a:ext cx="4180320" cy="653760"/>
+            <a:off x="7579800" y="5323680"/>
+            <a:ext cx="4180320" cy="653400"/>
           </a:xfrm>
           <a:prstGeom prst="rect">
             <a:avLst/>
@@ -23546,8 +23559,8 @@
         </p:nvSpPr>
         <p:spPr>
           <a:xfrm>
-            <a:off x="5486400" y="585720"/>
-            <a:ext cx="1218240" cy="18000"/>
+            <a:off x="5486760" y="585720"/>
+            <a:ext cx="1217880" cy="17640"/>
           </a:xfrm>
           <a:custGeom>
             <a:avLst/>
@@ -23598,7 +23611,7 @@
         <p:spPr>
           <a:xfrm>
             <a:off x="3664080" y="909720"/>
-            <a:ext cx="4866120" cy="1427760"/>
+            <a:ext cx="4866120" cy="1427400"/>
           </a:xfrm>
           <a:prstGeom prst="rect">
             <a:avLst/>
@@ -23670,8 +23683,8 @@
         </p:nvSpPr>
         <p:spPr>
           <a:xfrm>
-            <a:off x="5486400" y="2643120"/>
-            <a:ext cx="1218240" cy="18000"/>
+            <a:off x="5486760" y="2643120"/>
+            <a:ext cx="1217880" cy="17640"/>
           </a:xfrm>
           <a:custGeom>
             <a:avLst/>
@@ -23722,7 +23735,7 @@
         <p:spPr>
           <a:xfrm>
             <a:off x="1771560" y="2967120"/>
-            <a:ext cx="8647560" cy="1113480"/>
+            <a:ext cx="8647920" cy="1113120"/>
           </a:xfrm>
           <a:prstGeom prst="rect">
             <a:avLst/>
@@ -23774,7 +23787,7 @@
         <p:spPr>
           <a:xfrm>
             <a:off x="1781280" y="4309920"/>
-            <a:ext cx="8628480" cy="1237320"/>
+            <a:ext cx="8628840" cy="1236960"/>
           </a:xfrm>
           <a:prstGeom prst="rect">
             <a:avLst/>
@@ -23826,7 +23839,7 @@
         <p:spPr>
           <a:xfrm>
             <a:off x="2615400" y="6005520"/>
-            <a:ext cx="6961680" cy="265680"/>
+            <a:ext cx="6962040" cy="265320"/>
           </a:xfrm>
           <a:prstGeom prst="rect">
             <a:avLst/>
@@ -23915,7 +23928,7 @@
         <p:spPr>
           <a:xfrm>
             <a:off x="609480" y="1781280"/>
-            <a:ext cx="12191040" cy="1218240"/>
+            <a:ext cx="12191760" cy="1217880"/>
           </a:xfrm>
           <a:prstGeom prst="rect">
             <a:avLst/>
@@ -23969,7 +23982,7 @@
         <p:spPr>
           <a:xfrm>
             <a:off x="609480" y="3152880"/>
-            <a:ext cx="11867040" cy="1141920"/>
+            <a:ext cx="11867760" cy="1141560"/>
           </a:xfrm>
           <a:prstGeom prst="rect">
             <a:avLst/>
@@ -24042,7 +24055,7 @@
         <p:spPr>
           <a:xfrm>
             <a:off x="609480" y="4524480"/>
-            <a:ext cx="1218240" cy="18000"/>
+            <a:ext cx="1217880" cy="17640"/>
           </a:xfrm>
           <a:custGeom>
             <a:avLst/>
@@ -24093,7 +24106,7 @@
         <p:spPr>
           <a:xfrm>
             <a:off x="609480" y="4772160"/>
-            <a:ext cx="11695680" cy="303840"/>
+            <a:ext cx="11696400" cy="303480"/>
           </a:xfrm>
           <a:prstGeom prst="rect">
             <a:avLst/>
@@ -24182,7 +24195,7 @@
         <p:spPr>
           <a:xfrm>
             <a:off x="380880" y="380880"/>
-            <a:ext cx="11505240" cy="227520"/>
+            <a:ext cx="11505960" cy="227160"/>
           </a:xfrm>
           <a:prstGeom prst="rect">
             <a:avLst/>
@@ -24210,7 +24223,7 @@
               <a:buNone/>
             </a:pPr>
             <a:r>
-              <a:rPr b="1" lang="en-US" sz="1200" spc="52" strike="noStrike">
+              <a:rPr b="1" lang="en-US" sz="1200" spc="49" strike="noStrike">
                 <a:solidFill>
                   <a:srgbClr val="0984e3"/>
                 </a:solidFill>
@@ -24234,7 +24247,7 @@
         <p:spPr>
           <a:xfrm>
             <a:off x="380880" y="685800"/>
-            <a:ext cx="11657520" cy="456120"/>
+            <a:ext cx="11658240" cy="455760"/>
           </a:xfrm>
           <a:prstGeom prst="rect">
             <a:avLst/>
@@ -24286,7 +24299,7 @@
         <p:spPr>
           <a:xfrm>
             <a:off x="380880" y="1371600"/>
-            <a:ext cx="6828480" cy="1237320"/>
+            <a:ext cx="6828840" cy="1236960"/>
           </a:xfrm>
           <a:prstGeom prst="rect">
             <a:avLst/>
@@ -24348,7 +24361,7 @@
         <p:spPr>
           <a:xfrm>
             <a:off x="380880" y="2838600"/>
-            <a:ext cx="6818760" cy="1113480"/>
+            <a:ext cx="6819120" cy="1113120"/>
           </a:xfrm>
           <a:prstGeom prst="rect">
             <a:avLst/>
@@ -24400,7 +24413,7 @@
         <p:spPr>
           <a:xfrm>
             <a:off x="399960" y="4986360"/>
-            <a:ext cx="6714000" cy="1361160"/>
+            <a:ext cx="6714360" cy="1360800"/>
           </a:xfrm>
           <a:custGeom>
             <a:avLst/>
@@ -24451,7 +24464,7 @@
         <p:spPr>
           <a:xfrm>
             <a:off x="399960" y="4986360"/>
-            <a:ext cx="37080" cy="1361160"/>
+            <a:ext cx="36720" cy="1360800"/>
           </a:xfrm>
           <a:custGeom>
             <a:avLst/>
@@ -24502,7 +24515,7 @@
         <p:spPr>
           <a:xfrm>
             <a:off x="647640" y="5214960"/>
-            <a:ext cx="6323400" cy="560880"/>
+            <a:ext cx="6323760" cy="560520"/>
           </a:xfrm>
           <a:prstGeom prst="rect">
             <a:avLst/>
@@ -24554,7 +24567,7 @@
         <p:spPr>
           <a:xfrm>
             <a:off x="647640" y="5886360"/>
-            <a:ext cx="6314040" cy="227520"/>
+            <a:ext cx="6314400" cy="227160"/>
           </a:xfrm>
           <a:prstGeom prst="rect">
             <a:avLst/>
@@ -24615,8 +24628,8 @@
         </p:nvSpPr>
         <p:spPr>
           <a:xfrm>
-            <a:off x="7426440" y="1376280"/>
-            <a:ext cx="4380480" cy="1494360"/>
+            <a:off x="7426800" y="1376280"/>
+            <a:ext cx="4380480" cy="1494000"/>
           </a:xfrm>
           <a:custGeom>
             <a:avLst/>
@@ -24669,8 +24682,8 @@
         </p:nvSpPr>
         <p:spPr>
           <a:xfrm>
-            <a:off x="7660080" y="1609560"/>
-            <a:ext cx="379800" cy="379800"/>
+            <a:off x="7660440" y="1609560"/>
+            <a:ext cx="379440" cy="379440"/>
           </a:xfrm>
           <a:custGeom>
             <a:avLst/>
@@ -24720,8 +24733,8 @@
         </p:nvSpPr>
         <p:spPr>
           <a:xfrm>
-            <a:off x="7745760" y="1714680"/>
-            <a:ext cx="213120" cy="170280"/>
+            <a:off x="7746120" y="1714680"/>
+            <a:ext cx="212760" cy="169920"/>
           </a:xfrm>
           <a:custGeom>
             <a:avLst/>
@@ -24936,8 +24949,8 @@
         </p:nvSpPr>
         <p:spPr>
           <a:xfrm>
-            <a:off x="8155440" y="1666800"/>
-            <a:ext cx="637200" cy="265680"/>
+            <a:off x="8156160" y="1666800"/>
+            <a:ext cx="636840" cy="265320"/>
           </a:xfrm>
           <a:prstGeom prst="rect">
             <a:avLst/>
@@ -24988,8 +25001,8 @@
         </p:nvSpPr>
         <p:spPr>
           <a:xfrm>
-            <a:off x="7660080" y="2143080"/>
-            <a:ext cx="3989880" cy="494280"/>
+            <a:off x="7660440" y="2143080"/>
+            <a:ext cx="3989880" cy="493920"/>
           </a:xfrm>
           <a:prstGeom prst="rect">
             <a:avLst/>
@@ -25040,8 +25053,8 @@
         </p:nvSpPr>
         <p:spPr>
           <a:xfrm>
-            <a:off x="7426440" y="3110040"/>
-            <a:ext cx="4380480" cy="1494360"/>
+            <a:off x="7426800" y="3110040"/>
+            <a:ext cx="4380480" cy="1494000"/>
           </a:xfrm>
           <a:custGeom>
             <a:avLst/>
@@ -25094,8 +25107,8 @@
         </p:nvSpPr>
         <p:spPr>
           <a:xfrm>
-            <a:off x="7660080" y="3343320"/>
-            <a:ext cx="379800" cy="379800"/>
+            <a:off x="7660440" y="3343320"/>
+            <a:ext cx="379440" cy="379440"/>
           </a:xfrm>
           <a:custGeom>
             <a:avLst/>
@@ -25145,8 +25158,8 @@
         </p:nvSpPr>
         <p:spPr>
           <a:xfrm>
-            <a:off x="7767000" y="3448080"/>
-            <a:ext cx="170280" cy="170280"/>
+            <a:off x="7767360" y="3448080"/>
+            <a:ext cx="169920" cy="169920"/>
           </a:xfrm>
           <a:custGeom>
             <a:avLst/>
@@ -25421,8 +25434,8 @@
         </p:nvSpPr>
         <p:spPr>
           <a:xfrm>
-            <a:off x="8155440" y="3400560"/>
-            <a:ext cx="865800" cy="265680"/>
+            <a:off x="8156160" y="3400560"/>
+            <a:ext cx="865440" cy="265320"/>
           </a:xfrm>
           <a:prstGeom prst="rect">
             <a:avLst/>
@@ -25473,8 +25486,8 @@
         </p:nvSpPr>
         <p:spPr>
           <a:xfrm>
-            <a:off x="7660080" y="3876840"/>
-            <a:ext cx="3989880" cy="494280"/>
+            <a:off x="7660440" y="3876840"/>
+            <a:ext cx="3989880" cy="493920"/>
           </a:xfrm>
           <a:prstGeom prst="rect">
             <a:avLst/>
@@ -25525,8 +25538,8 @@
         </p:nvSpPr>
         <p:spPr>
           <a:xfrm>
-            <a:off x="7426440" y="4843440"/>
-            <a:ext cx="4380480" cy="1494360"/>
+            <a:off x="7426800" y="4843440"/>
+            <a:ext cx="4380480" cy="1494000"/>
           </a:xfrm>
           <a:custGeom>
             <a:avLst/>
@@ -25579,8 +25592,8 @@
         </p:nvSpPr>
         <p:spPr>
           <a:xfrm>
-            <a:off x="7660080" y="5076720"/>
-            <a:ext cx="379800" cy="379800"/>
+            <a:off x="7660440" y="5076720"/>
+            <a:ext cx="379440" cy="379440"/>
           </a:xfrm>
           <a:custGeom>
             <a:avLst/>
@@ -25630,8 +25643,8 @@
         </p:nvSpPr>
         <p:spPr>
           <a:xfrm>
-            <a:off x="7767000" y="5181480"/>
-            <a:ext cx="170280" cy="170280"/>
+            <a:off x="7767360" y="5181480"/>
+            <a:ext cx="169920" cy="169920"/>
           </a:xfrm>
           <a:custGeom>
             <a:avLst/>
@@ -25807,8 +25820,8 @@
         </p:nvSpPr>
         <p:spPr>
           <a:xfrm>
-            <a:off x="8155440" y="5133960"/>
-            <a:ext cx="656280" cy="265680"/>
+            <a:off x="8156160" y="5133960"/>
+            <a:ext cx="655920" cy="265320"/>
           </a:xfrm>
           <a:prstGeom prst="rect">
             <a:avLst/>
@@ -25859,8 +25872,8 @@
         </p:nvSpPr>
         <p:spPr>
           <a:xfrm>
-            <a:off x="7660080" y="5610240"/>
-            <a:ext cx="3989880" cy="494280"/>
+            <a:off x="7660440" y="5610240"/>
+            <a:ext cx="3989880" cy="493920"/>
           </a:xfrm>
           <a:prstGeom prst="rect">
             <a:avLst/>
@@ -25949,7 +25962,7 @@
         <p:spPr>
           <a:xfrm>
             <a:off x="609480" y="1781280"/>
-            <a:ext cx="12191040" cy="1218240"/>
+            <a:ext cx="12191760" cy="1217880"/>
           </a:xfrm>
           <a:prstGeom prst="rect">
             <a:avLst/>
@@ -26003,7 +26016,7 @@
         <p:spPr>
           <a:xfrm>
             <a:off x="609480" y="3152880"/>
-            <a:ext cx="11867040" cy="1141920"/>
+            <a:ext cx="11867760" cy="1141560"/>
           </a:xfrm>
           <a:prstGeom prst="rect">
             <a:avLst/>
@@ -26076,7 +26089,7 @@
         <p:spPr>
           <a:xfrm>
             <a:off x="609480" y="4524480"/>
-            <a:ext cx="1218240" cy="18000"/>
+            <a:ext cx="1217880" cy="17640"/>
           </a:xfrm>
           <a:custGeom>
             <a:avLst/>
@@ -26127,7 +26140,7 @@
         <p:spPr>
           <a:xfrm>
             <a:off x="609480" y="4772160"/>
-            <a:ext cx="11695680" cy="303840"/>
+            <a:ext cx="11696400" cy="303480"/>
           </a:xfrm>
           <a:prstGeom prst="rect">
             <a:avLst/>
@@ -26216,7 +26229,7 @@
         <p:spPr>
           <a:xfrm>
             <a:off x="324360" y="324360"/>
-            <a:ext cx="11607120" cy="193320"/>
+            <a:ext cx="11607840" cy="192960"/>
           </a:xfrm>
           <a:prstGeom prst="rect">
             <a:avLst/>
@@ -26244,7 +26257,7 @@
               <a:buNone/>
             </a:pPr>
             <a:r>
-              <a:rPr b="1" lang="en-US" sz="1020" spc="43" strike="noStrike">
+              <a:rPr b="1" lang="en-US" sz="1020" spc="41" strike="noStrike">
                 <a:solidFill>
                   <a:srgbClr val="0984e3"/>
                 </a:solidFill>
@@ -26268,7 +26281,7 @@
         <p:spPr>
           <a:xfrm>
             <a:off x="324360" y="583560"/>
-            <a:ext cx="11737080" cy="388080"/>
+            <a:ext cx="11737800" cy="387720"/>
           </a:xfrm>
           <a:prstGeom prst="rect">
             <a:avLst/>
@@ -26319,8 +26332,8 @@
         </p:nvSpPr>
         <p:spPr>
           <a:xfrm>
-            <a:off x="6095880" y="1167480"/>
-            <a:ext cx="15120" cy="4976280"/>
+            <a:off x="6096240" y="1167480"/>
+            <a:ext cx="14760" cy="4975920"/>
           </a:xfrm>
           <a:custGeom>
             <a:avLst/>
@@ -26371,7 +26384,7 @@
         <p:spPr>
           <a:xfrm>
             <a:off x="1638000" y="1171440"/>
-            <a:ext cx="3865680" cy="720360"/>
+            <a:ext cx="3865680" cy="720000"/>
           </a:xfrm>
           <a:custGeom>
             <a:avLst/>
@@ -26425,7 +26438,7 @@
         <p:spPr>
           <a:xfrm>
             <a:off x="1698840" y="1305000"/>
-            <a:ext cx="3671280" cy="225720"/>
+            <a:ext cx="3671280" cy="225360"/>
           </a:xfrm>
           <a:prstGeom prst="rect">
             <a:avLst/>
@@ -26477,7 +26490,7 @@
         <p:spPr>
           <a:xfrm>
             <a:off x="1706760" y="1564560"/>
-            <a:ext cx="3663000" cy="193320"/>
+            <a:ext cx="3663000" cy="192960"/>
           </a:xfrm>
           <a:prstGeom prst="rect">
             <a:avLst/>
@@ -26528,8 +26541,8 @@
         </p:nvSpPr>
         <p:spPr>
           <a:xfrm>
-            <a:off x="6683760" y="2030760"/>
-            <a:ext cx="3290040" cy="720360"/>
+            <a:off x="6684120" y="2030760"/>
+            <a:ext cx="3290040" cy="720000"/>
           </a:xfrm>
           <a:custGeom>
             <a:avLst/>
@@ -26582,8 +26595,8 @@
         </p:nvSpPr>
         <p:spPr>
           <a:xfrm>
-            <a:off x="6817320" y="2164320"/>
-            <a:ext cx="3095640" cy="225720"/>
+            <a:off x="6817680" y="2164320"/>
+            <a:ext cx="3095640" cy="225360"/>
           </a:xfrm>
           <a:prstGeom prst="rect">
             <a:avLst/>
@@ -26634,8 +26647,8 @@
         </p:nvSpPr>
         <p:spPr>
           <a:xfrm>
-            <a:off x="6817320" y="2423880"/>
-            <a:ext cx="3087360" cy="193320"/>
+            <a:off x="6817680" y="2423880"/>
+            <a:ext cx="3087360" cy="192960"/>
           </a:xfrm>
           <a:prstGeom prst="rect">
             <a:avLst/>
@@ -26687,7 +26700,7 @@
         <p:spPr>
           <a:xfrm>
             <a:off x="633600" y="2885760"/>
-            <a:ext cx="4879080" cy="712440"/>
+            <a:ext cx="4879080" cy="712080"/>
           </a:xfrm>
           <a:custGeom>
             <a:avLst/>
@@ -26738,7 +26751,7 @@
         <p:spPr>
           <a:xfrm>
             <a:off x="633600" y="2885760"/>
-            <a:ext cx="31320" cy="712440"/>
+            <a:ext cx="30960" cy="712080"/>
           </a:xfrm>
           <a:custGeom>
             <a:avLst/>
@@ -26789,7 +26802,7 @@
         <p:spPr>
           <a:xfrm>
             <a:off x="706680" y="3015720"/>
-            <a:ext cx="4676400" cy="225720"/>
+            <a:ext cx="4676400" cy="225360"/>
           </a:xfrm>
           <a:prstGeom prst="rect">
             <a:avLst/>
@@ -26841,7 +26854,7 @@
         <p:spPr>
           <a:xfrm>
             <a:off x="714960" y="3274920"/>
-            <a:ext cx="4668120" cy="193320"/>
+            <a:ext cx="4668120" cy="192960"/>
           </a:xfrm>
           <a:prstGeom prst="rect">
             <a:avLst/>
@@ -26902,8 +26915,8 @@
         </p:nvSpPr>
         <p:spPr>
           <a:xfrm>
-            <a:off x="6696000" y="3728880"/>
-            <a:ext cx="5016600" cy="712440"/>
+            <a:off x="6696360" y="3728880"/>
+            <a:ext cx="5016600" cy="712080"/>
           </a:xfrm>
           <a:custGeom>
             <a:avLst/>
@@ -26953,8 +26966,8 @@
         </p:nvSpPr>
         <p:spPr>
           <a:xfrm>
-            <a:off x="6696000" y="3728880"/>
-            <a:ext cx="31320" cy="712440"/>
+            <a:off x="6696360" y="3728880"/>
+            <a:ext cx="30960" cy="712080"/>
           </a:xfrm>
           <a:custGeom>
             <a:avLst/>
@@ -27004,8 +27017,8 @@
         </p:nvSpPr>
         <p:spPr>
           <a:xfrm>
-            <a:off x="6841800" y="3858480"/>
-            <a:ext cx="4814280" cy="225720"/>
+            <a:off x="6842160" y="3858480"/>
+            <a:ext cx="4814280" cy="225360"/>
           </a:xfrm>
           <a:prstGeom prst="rect">
             <a:avLst/>
@@ -27056,8 +27069,8 @@
         </p:nvSpPr>
         <p:spPr>
           <a:xfrm>
-            <a:off x="6841800" y="4118040"/>
-            <a:ext cx="4806000" cy="193320"/>
+            <a:off x="6842160" y="4118040"/>
+            <a:ext cx="4806000" cy="192960"/>
           </a:xfrm>
           <a:prstGeom prst="rect">
             <a:avLst/>
@@ -27119,7 +27132,7 @@
         <p:spPr>
           <a:xfrm>
             <a:off x="1476360" y="4572000"/>
-            <a:ext cx="4035960" cy="712440"/>
+            <a:ext cx="4035960" cy="712080"/>
           </a:xfrm>
           <a:custGeom>
             <a:avLst/>
@@ -27170,7 +27183,7 @@
         <p:spPr>
           <a:xfrm>
             <a:off x="1532880" y="4701600"/>
-            <a:ext cx="3849480" cy="225720"/>
+            <a:ext cx="3849480" cy="225360"/>
           </a:xfrm>
           <a:prstGeom prst="rect">
             <a:avLst/>
@@ -27222,7 +27235,7 @@
         <p:spPr>
           <a:xfrm>
             <a:off x="1541160" y="4961160"/>
-            <a:ext cx="3841200" cy="193320"/>
+            <a:ext cx="3841200" cy="192960"/>
           </a:xfrm>
           <a:prstGeom prst="rect">
             <a:avLst/>
@@ -27283,8 +27296,8 @@
         </p:nvSpPr>
         <p:spPr>
           <a:xfrm>
-            <a:off x="6683760" y="5419080"/>
-            <a:ext cx="3987360" cy="720360"/>
+            <a:off x="6684120" y="5419080"/>
+            <a:ext cx="3987360" cy="720000"/>
           </a:xfrm>
           <a:custGeom>
             <a:avLst/>
@@ -27337,8 +27350,8 @@
         </p:nvSpPr>
         <p:spPr>
           <a:xfrm>
-            <a:off x="6817320" y="5553000"/>
-            <a:ext cx="3792600" cy="225720"/>
+            <a:off x="6817680" y="5553000"/>
+            <a:ext cx="3792600" cy="225360"/>
           </a:xfrm>
           <a:prstGeom prst="rect">
             <a:avLst/>
@@ -27389,8 +27402,8 @@
         </p:nvSpPr>
         <p:spPr>
           <a:xfrm>
-            <a:off x="6817320" y="5812200"/>
-            <a:ext cx="3784680" cy="193320"/>
+            <a:off x="6817680" y="5812200"/>
+            <a:ext cx="3784680" cy="192960"/>
           </a:xfrm>
           <a:prstGeom prst="rect">
             <a:avLst/>
@@ -27441,8 +27454,8 @@
         </p:nvSpPr>
         <p:spPr>
           <a:xfrm>
-            <a:off x="6031080" y="1467360"/>
-            <a:ext cx="128520" cy="128520"/>
+            <a:off x="6031440" y="1467360"/>
+            <a:ext cx="128160" cy="128160"/>
           </a:xfrm>
           <a:custGeom>
             <a:avLst/>
@@ -27512,8 +27525,8 @@
         </p:nvSpPr>
         <p:spPr>
           <a:xfrm>
-            <a:off x="6031080" y="2326680"/>
-            <a:ext cx="128520" cy="128520"/>
+            <a:off x="6031440" y="2326680"/>
+            <a:ext cx="128160" cy="128160"/>
           </a:xfrm>
           <a:custGeom>
             <a:avLst/>
@@ -27583,8 +27596,8 @@
         </p:nvSpPr>
         <p:spPr>
           <a:xfrm>
-            <a:off x="6031080" y="3177720"/>
-            <a:ext cx="128520" cy="128520"/>
+            <a:off x="6031440" y="3177720"/>
+            <a:ext cx="128160" cy="128160"/>
           </a:xfrm>
           <a:custGeom>
             <a:avLst/>
@@ -27654,8 +27667,8 @@
         </p:nvSpPr>
         <p:spPr>
           <a:xfrm>
-            <a:off x="6031080" y="4020840"/>
-            <a:ext cx="128520" cy="128520"/>
+            <a:off x="6031440" y="4020840"/>
+            <a:ext cx="128160" cy="128160"/>
           </a:xfrm>
           <a:custGeom>
             <a:avLst/>
@@ -27725,8 +27738,8 @@
         </p:nvSpPr>
         <p:spPr>
           <a:xfrm>
-            <a:off x="6031080" y="4863960"/>
-            <a:ext cx="128520" cy="128520"/>
+            <a:off x="6031440" y="4863960"/>
+            <a:ext cx="128160" cy="128160"/>
           </a:xfrm>
           <a:custGeom>
             <a:avLst/>
@@ -27796,8 +27809,8 @@
         </p:nvSpPr>
         <p:spPr>
           <a:xfrm>
-            <a:off x="6031080" y="5715000"/>
-            <a:ext cx="128520" cy="128520"/>
+            <a:off x="6031440" y="5715000"/>
+            <a:ext cx="128160" cy="128160"/>
           </a:xfrm>
           <a:custGeom>
             <a:avLst/>
@@ -27905,7 +27918,7 @@
         <p:spPr>
           <a:xfrm>
             <a:off x="380880" y="380880"/>
-            <a:ext cx="11505240" cy="227520"/>
+            <a:ext cx="11505960" cy="227160"/>
           </a:xfrm>
           <a:prstGeom prst="rect">
             <a:avLst/>
@@ -27933,7 +27946,7 @@
               <a:buNone/>
             </a:pPr>
             <a:r>
-              <a:rPr b="1" lang="en-US" sz="1200" spc="52" strike="noStrike">
+              <a:rPr b="1" lang="en-US" sz="1200" spc="49" strike="noStrike">
                 <a:solidFill>
                   <a:srgbClr val="0984e3"/>
                 </a:solidFill>
@@ -27957,7 +27970,7 @@
         <p:spPr>
           <a:xfrm>
             <a:off x="380880" y="685800"/>
-            <a:ext cx="11657520" cy="456120"/>
+            <a:ext cx="11658240" cy="455760"/>
           </a:xfrm>
           <a:prstGeom prst="rect">
             <a:avLst/>
@@ -28009,7 +28022,7 @@
         <p:spPr>
           <a:xfrm>
             <a:off x="380880" y="1371600"/>
-            <a:ext cx="4389840" cy="3047040"/>
+            <a:ext cx="4389840" cy="3046680"/>
           </a:xfrm>
           <a:prstGeom prst="roundRect">
             <a:avLst>
@@ -28041,7 +28054,7 @@
         <p:spPr>
           <a:xfrm>
             <a:off x="399960" y="4648320"/>
-            <a:ext cx="4370760" cy="1141920"/>
+            <a:ext cx="4370760" cy="1141560"/>
           </a:xfrm>
           <a:custGeom>
             <a:avLst/>
@@ -28092,7 +28105,7 @@
         <p:spPr>
           <a:xfrm>
             <a:off x="399960" y="4648320"/>
-            <a:ext cx="37080" cy="1141920"/>
+            <a:ext cx="36720" cy="1141560"/>
           </a:xfrm>
           <a:custGeom>
             <a:avLst/>
@@ -28143,7 +28156,7 @@
         <p:spPr>
           <a:xfrm>
             <a:off x="609480" y="4838760"/>
-            <a:ext cx="4047120" cy="494280"/>
+            <a:ext cx="4047120" cy="493920"/>
           </a:xfrm>
           <a:prstGeom prst="rect">
             <a:avLst/>
@@ -28195,7 +28208,7 @@
         <p:spPr>
           <a:xfrm>
             <a:off x="609480" y="5410080"/>
-            <a:ext cx="4037400" cy="189360"/>
+            <a:ext cx="4037400" cy="189000"/>
           </a:xfrm>
           <a:prstGeom prst="rect">
             <a:avLst/>
@@ -28256,8 +28269,8 @@
         </p:nvSpPr>
         <p:spPr>
           <a:xfrm>
-            <a:off x="5074920" y="1371600"/>
-            <a:ext cx="6847560" cy="303840"/>
+            <a:off x="5075280" y="1371600"/>
+            <a:ext cx="6847920" cy="303480"/>
           </a:xfrm>
           <a:prstGeom prst="rect">
             <a:avLst/>
@@ -28308,8 +28321,8 @@
         </p:nvSpPr>
         <p:spPr>
           <a:xfrm>
-            <a:off x="5074920" y="1752480"/>
-            <a:ext cx="6809400" cy="989640"/>
+            <a:off x="5075280" y="1752480"/>
+            <a:ext cx="6809760" cy="989280"/>
           </a:xfrm>
           <a:prstGeom prst="rect">
             <a:avLst/>
@@ -28360,8 +28373,8 @@
         </p:nvSpPr>
         <p:spPr>
           <a:xfrm>
-            <a:off x="5074920" y="2895480"/>
-            <a:ext cx="6847560" cy="303840"/>
+            <a:off x="5075280" y="2895480"/>
+            <a:ext cx="6847920" cy="303480"/>
           </a:xfrm>
           <a:prstGeom prst="rect">
             <a:avLst/>
@@ -28412,8 +28425,8 @@
         </p:nvSpPr>
         <p:spPr>
           <a:xfrm>
-            <a:off x="5074920" y="3276720"/>
-            <a:ext cx="6809400" cy="989640"/>
+            <a:off x="5075280" y="3276720"/>
+            <a:ext cx="6809760" cy="989280"/>
           </a:xfrm>
           <a:prstGeom prst="rect">
             <a:avLst/>
@@ -28484,8 +28497,8 @@
         </p:nvSpPr>
         <p:spPr>
           <a:xfrm>
-            <a:off x="5074920" y="4419720"/>
-            <a:ext cx="6847560" cy="303840"/>
+            <a:off x="5075280" y="4419720"/>
+            <a:ext cx="6847920" cy="303480"/>
           </a:xfrm>
           <a:prstGeom prst="rect">
             <a:avLst/>
@@ -28536,8 +28549,8 @@
         </p:nvSpPr>
         <p:spPr>
           <a:xfrm>
-            <a:off x="5074920" y="4800600"/>
-            <a:ext cx="6809400" cy="989640"/>
+            <a:off x="5075280" y="4800600"/>
+            <a:ext cx="6809760" cy="989280"/>
           </a:xfrm>
           <a:prstGeom prst="rect">
             <a:avLst/>
@@ -28646,7 +28659,7 @@
         <p:spPr>
           <a:xfrm>
             <a:off x="609480" y="1781280"/>
-            <a:ext cx="12191040" cy="1218240"/>
+            <a:ext cx="12191760" cy="1217880"/>
           </a:xfrm>
           <a:prstGeom prst="rect">
             <a:avLst/>
@@ -28700,7 +28713,7 @@
         <p:spPr>
           <a:xfrm>
             <a:off x="609480" y="3152880"/>
-            <a:ext cx="11867040" cy="1141920"/>
+            <a:ext cx="11867760" cy="1141560"/>
           </a:xfrm>
           <a:prstGeom prst="rect">
             <a:avLst/>
@@ -28773,7 +28786,7 @@
         <p:spPr>
           <a:xfrm>
             <a:off x="609480" y="4524480"/>
-            <a:ext cx="1218240" cy="18000"/>
+            <a:ext cx="1217880" cy="17640"/>
           </a:xfrm>
           <a:custGeom>
             <a:avLst/>
@@ -28824,7 +28837,7 @@
         <p:spPr>
           <a:xfrm>
             <a:off x="609480" y="4772160"/>
-            <a:ext cx="11695680" cy="303840"/>
+            <a:ext cx="11696400" cy="303480"/>
           </a:xfrm>
           <a:prstGeom prst="rect">
             <a:avLst/>
@@ -28913,7 +28926,7 @@
         <p:spPr>
           <a:xfrm>
             <a:off x="380880" y="380880"/>
-            <a:ext cx="11505240" cy="227520"/>
+            <a:ext cx="11505960" cy="227160"/>
           </a:xfrm>
           <a:prstGeom prst="rect">
             <a:avLst/>
@@ -28941,7 +28954,7 @@
               <a:buNone/>
             </a:pPr>
             <a:r>
-              <a:rPr b="1" lang="en-US" sz="1200" spc="52" strike="noStrike">
+              <a:rPr b="1" lang="en-US" sz="1200" spc="49" strike="noStrike">
                 <a:solidFill>
                   <a:srgbClr val="0984e3"/>
                 </a:solidFill>
@@ -28965,7 +28978,7 @@
         <p:spPr>
           <a:xfrm>
             <a:off x="380880" y="685800"/>
-            <a:ext cx="11657520" cy="456120"/>
+            <a:ext cx="11658240" cy="455760"/>
           </a:xfrm>
           <a:prstGeom prst="rect">
             <a:avLst/>
@@ -29017,7 +29030,7 @@
         <p:spPr>
           <a:xfrm>
             <a:off x="380880" y="1371600"/>
-            <a:ext cx="5656680" cy="1237320"/>
+            <a:ext cx="5656680" cy="1236960"/>
           </a:xfrm>
           <a:prstGeom prst="rect">
             <a:avLst/>
@@ -29079,7 +29092,7 @@
         <p:spPr>
           <a:xfrm>
             <a:off x="380880" y="2762280"/>
-            <a:ext cx="5647320" cy="837000"/>
+            <a:ext cx="5647320" cy="836640"/>
           </a:xfrm>
           <a:prstGeom prst="rect">
             <a:avLst/>
@@ -29131,7 +29144,7 @@
         <p:spPr>
           <a:xfrm>
             <a:off x="399960" y="3750480"/>
-            <a:ext cx="5542560" cy="1599120"/>
+            <a:ext cx="5542560" cy="1598760"/>
           </a:xfrm>
           <a:custGeom>
             <a:avLst/>
@@ -29182,7 +29195,7 @@
         <p:spPr>
           <a:xfrm>
             <a:off x="399960" y="3750480"/>
-            <a:ext cx="37080" cy="1599120"/>
+            <a:ext cx="36720" cy="1598760"/>
           </a:xfrm>
           <a:custGeom>
             <a:avLst/>
@@ -29233,7 +29246,7 @@
         <p:spPr>
           <a:xfrm>
             <a:off x="609480" y="3940920"/>
-            <a:ext cx="5237640" cy="265680"/>
+            <a:ext cx="5237640" cy="265320"/>
           </a:xfrm>
           <a:prstGeom prst="rect">
             <a:avLst/>
@@ -29285,7 +29298,7 @@
         <p:spPr>
           <a:xfrm>
             <a:off x="609480" y="4321800"/>
-            <a:ext cx="5218560" cy="227520"/>
+            <a:ext cx="5218560" cy="227160"/>
           </a:xfrm>
           <a:prstGeom prst="rect">
             <a:avLst/>
@@ -29347,7 +29360,7 @@
         <p:spPr>
           <a:xfrm>
             <a:off x="609480" y="4626720"/>
-            <a:ext cx="5218560" cy="227520"/>
+            <a:ext cx="5218560" cy="227160"/>
           </a:xfrm>
           <a:prstGeom prst="rect">
             <a:avLst/>
@@ -29409,7 +29422,7 @@
         <p:spPr>
           <a:xfrm>
             <a:off x="609480" y="4931640"/>
-            <a:ext cx="5218560" cy="227520"/>
+            <a:ext cx="5218560" cy="227160"/>
           </a:xfrm>
           <a:prstGeom prst="rect">
             <a:avLst/>
@@ -29470,8 +29483,8 @@
         </p:nvSpPr>
         <p:spPr>
           <a:xfrm>
-            <a:off x="6253200" y="1618200"/>
-            <a:ext cx="5551920" cy="3485160"/>
+            <a:off x="6253560" y="1618200"/>
+            <a:ext cx="5551920" cy="3484800"/>
           </a:xfrm>
           <a:custGeom>
             <a:avLst/>
@@ -29524,8 +29537,8 @@
         </p:nvSpPr>
         <p:spPr>
           <a:xfrm>
-            <a:off x="6438960" y="1851480"/>
-            <a:ext cx="5180400" cy="265680"/>
+            <a:off x="6439320" y="1851480"/>
+            <a:ext cx="5180400" cy="265320"/>
           </a:xfrm>
           <a:prstGeom prst="rect">
             <a:avLst/>
@@ -29576,8 +29589,8 @@
         </p:nvSpPr>
         <p:spPr>
           <a:xfrm>
-            <a:off x="6448320" y="2270520"/>
-            <a:ext cx="5161320" cy="227520"/>
+            <a:off x="6448680" y="2270520"/>
+            <a:ext cx="5161320" cy="227160"/>
           </a:xfrm>
           <a:prstGeom prst="rect">
             <a:avLst/>
@@ -29627,8 +29640,8 @@
           <p:nvPr/>
         </p:nvGraphicFramePr>
         <p:xfrm>
-          <a:off x="6486480" y="2651400"/>
-          <a:ext cx="5085720" cy="1409040"/>
+          <a:off x="6486840" y="2651400"/>
+          <a:ext cx="5086080" cy="1409040"/>
         </p:xfrm>
         <a:graphic>
           <a:graphicData uri="http://schemas.openxmlformats.org/drawingml/2006/table">
@@ -30100,8 +30113,8 @@
         </p:nvSpPr>
         <p:spPr>
           <a:xfrm>
-            <a:off x="6486480" y="4218480"/>
-            <a:ext cx="5085360" cy="8280"/>
+            <a:off x="6486840" y="4218480"/>
+            <a:ext cx="5085360" cy="7920"/>
           </a:xfrm>
           <a:custGeom>
             <a:avLst/>
@@ -30151,8 +30164,8 @@
         </p:nvSpPr>
         <p:spPr>
           <a:xfrm>
-            <a:off x="6486480" y="4375440"/>
-            <a:ext cx="5161320" cy="494280"/>
+            <a:off x="6486840" y="4375440"/>
+            <a:ext cx="5161320" cy="493920"/>
           </a:xfrm>
           <a:prstGeom prst="rect">
             <a:avLst/>

--- a/assets/libreoffice_impr_njc/8a9fd669-2142-46d4-bd0c-32cd6323b57f/Game Theory.pptx
+++ b/assets/libreoffice_impr_njc/8a9fd669-2142-46d4-bd0c-32cd6323b57f/Game Theory.pptx
@@ -30,7 +30,7 @@
     <p:sldId id="275" r:id="rId23"/>
     <p:sldId id="276" r:id="rId24"/>
   </p:sldIdLst>
-  <p:sldSz cx="12193588" cy="6858000"/>
+  <p:sldSz cx="12192000" cy="6858000"/>
   <p:notesSz cx="6858000" cy="12192000"/>
 </p:presentation>
 </file>
@@ -312,7 +312,7 @@
             <a:pPr algn="r">
               <a:buNone/>
             </a:pPr>
-            <a:fld id="{C20B5335-A69C-49C6-ACE9-7B93ED8CAE3D}" type="slidenum">
+            <a:fld id="{C7EAE8C7-9422-4411-B4AF-1C0B2FA9F3D0}" type="slidenum">
               <a:rPr b="0" lang="en-HK" sz="1400" spc="-1" strike="noStrike">
                 <a:latin typeface="Times New Roman"/>
               </a:rPr>
@@ -360,7 +360,7 @@
         <p:spPr>
           <a:xfrm>
             <a:off x="685800" y="1143000"/>
-            <a:ext cx="5484960" cy="3084840"/>
+            <a:ext cx="5482800" cy="3082680"/>
           </a:xfrm>
           <a:prstGeom prst="rect">
             <a:avLst/>
@@ -383,7 +383,7 @@
         <p:spPr>
           <a:xfrm>
             <a:off x="685800" y="4400640"/>
-            <a:ext cx="5484960" cy="3598920"/>
+            <a:ext cx="5482800" cy="3596760"/>
           </a:xfrm>
           <a:prstGeom prst="rect">
             <a:avLst/>
@@ -417,7 +417,7 @@
         <p:spPr>
           <a:xfrm>
             <a:off x="3884760" y="8685360"/>
-            <a:ext cx="2970360" cy="457200"/>
+            <a:ext cx="2968200" cy="455040"/>
           </a:xfrm>
           <a:prstGeom prst="rect">
             <a:avLst/>
@@ -449,7 +449,7 @@
               </a:lnSpc>
               <a:buNone/>
             </a:pPr>
-            <a:fld id="{D5C00367-9E4A-4700-B44E-43712536FFDB}" type="slidenum">
+            <a:fld id="{6FE07907-647C-4F29-8413-0D7C0BC3A485}" type="slidenum">
               <a:rPr b="0" lang="en-US" sz="1200" spc="-1" strike="noStrike">
                 <a:latin typeface="Times New Roman"/>
               </a:rPr>
@@ -496,7 +496,7 @@
         <p:spPr>
           <a:xfrm>
             <a:off x="685800" y="1143000"/>
-            <a:ext cx="5484960" cy="3084840"/>
+            <a:ext cx="5482800" cy="3082680"/>
           </a:xfrm>
           <a:prstGeom prst="rect">
             <a:avLst/>
@@ -519,7 +519,7 @@
         <p:spPr>
           <a:xfrm>
             <a:off x="685800" y="4400640"/>
-            <a:ext cx="5484960" cy="3598920"/>
+            <a:ext cx="5482800" cy="3596760"/>
           </a:xfrm>
           <a:prstGeom prst="rect">
             <a:avLst/>
@@ -553,7 +553,7 @@
         <p:spPr>
           <a:xfrm>
             <a:off x="3884760" y="8685360"/>
-            <a:ext cx="2970360" cy="457200"/>
+            <a:ext cx="2968200" cy="455040"/>
           </a:xfrm>
           <a:prstGeom prst="rect">
             <a:avLst/>
@@ -585,7 +585,7 @@
               </a:lnSpc>
               <a:buNone/>
             </a:pPr>
-            <a:fld id="{836D4F69-70BD-472C-B746-F92F8FDC2D47}" type="slidenum">
+            <a:fld id="{7A1C80DD-DBF3-4B03-A483-EA1F53108C14}" type="slidenum">
               <a:rPr b="0" lang="en-US" sz="1200" spc="-1" strike="noStrike">
                 <a:latin typeface="Times New Roman"/>
               </a:rPr>
@@ -632,7 +632,7 @@
         <p:spPr>
           <a:xfrm>
             <a:off x="685800" y="1143000"/>
-            <a:ext cx="5484960" cy="3084840"/>
+            <a:ext cx="5482800" cy="3082680"/>
           </a:xfrm>
           <a:prstGeom prst="rect">
             <a:avLst/>
@@ -655,7 +655,7 @@
         <p:spPr>
           <a:xfrm>
             <a:off x="685800" y="4400640"/>
-            <a:ext cx="5484960" cy="3598920"/>
+            <a:ext cx="5482800" cy="3596760"/>
           </a:xfrm>
           <a:prstGeom prst="rect">
             <a:avLst/>
@@ -689,7 +689,7 @@
         <p:spPr>
           <a:xfrm>
             <a:off x="3884760" y="8685360"/>
-            <a:ext cx="2970360" cy="457200"/>
+            <a:ext cx="2968200" cy="455040"/>
           </a:xfrm>
           <a:prstGeom prst="rect">
             <a:avLst/>
@@ -721,7 +721,7 @@
               </a:lnSpc>
               <a:buNone/>
             </a:pPr>
-            <a:fld id="{D9BBAF2D-BF53-48CB-8909-15C2BC17C50F}" type="slidenum">
+            <a:fld id="{63420D5F-3C7F-4B8E-A519-82672078395E}" type="slidenum">
               <a:rPr b="0" lang="en-US" sz="1200" spc="-1" strike="noStrike">
                 <a:latin typeface="Times New Roman"/>
               </a:rPr>
@@ -768,7 +768,7 @@
         <p:spPr>
           <a:xfrm>
             <a:off x="685800" y="1143000"/>
-            <a:ext cx="5484960" cy="3084840"/>
+            <a:ext cx="5482800" cy="3082680"/>
           </a:xfrm>
           <a:prstGeom prst="rect">
             <a:avLst/>
@@ -791,7 +791,7 @@
         <p:spPr>
           <a:xfrm>
             <a:off x="685800" y="4400640"/>
-            <a:ext cx="5484960" cy="3598920"/>
+            <a:ext cx="5482800" cy="3596760"/>
           </a:xfrm>
           <a:prstGeom prst="rect">
             <a:avLst/>
@@ -825,7 +825,7 @@
         <p:spPr>
           <a:xfrm>
             <a:off x="3884760" y="8685360"/>
-            <a:ext cx="2970360" cy="457200"/>
+            <a:ext cx="2968200" cy="455040"/>
           </a:xfrm>
           <a:prstGeom prst="rect">
             <a:avLst/>
@@ -857,7 +857,7 @@
               </a:lnSpc>
               <a:buNone/>
             </a:pPr>
-            <a:fld id="{0B5532B2-BC49-4D8C-96B9-1E281C6CFA43}" type="slidenum">
+            <a:fld id="{8F815C8D-9812-4545-8638-A541F7F37D0F}" type="slidenum">
               <a:rPr b="0" lang="en-US" sz="1200" spc="-1" strike="noStrike">
                 <a:latin typeface="Times New Roman"/>
               </a:rPr>
@@ -904,7 +904,7 @@
         <p:spPr>
           <a:xfrm>
             <a:off x="685800" y="1143000"/>
-            <a:ext cx="5484960" cy="3084840"/>
+            <a:ext cx="5482800" cy="3082680"/>
           </a:xfrm>
           <a:prstGeom prst="rect">
             <a:avLst/>
@@ -927,7 +927,7 @@
         <p:spPr>
           <a:xfrm>
             <a:off x="685800" y="4400640"/>
-            <a:ext cx="5484960" cy="3598920"/>
+            <a:ext cx="5482800" cy="3596760"/>
           </a:xfrm>
           <a:prstGeom prst="rect">
             <a:avLst/>
@@ -961,7 +961,7 @@
         <p:spPr>
           <a:xfrm>
             <a:off x="3884760" y="8685360"/>
-            <a:ext cx="2970360" cy="457200"/>
+            <a:ext cx="2968200" cy="455040"/>
           </a:xfrm>
           <a:prstGeom prst="rect">
             <a:avLst/>
@@ -993,7 +993,7 @@
               </a:lnSpc>
               <a:buNone/>
             </a:pPr>
-            <a:fld id="{59FCAC4C-D4EB-4248-83CD-47DEA5551A14}" type="slidenum">
+            <a:fld id="{9B493334-C8D0-43E7-A31E-7FA7FDAC44B4}" type="slidenum">
               <a:rPr b="0" lang="en-US" sz="1200" spc="-1" strike="noStrike">
                 <a:latin typeface="Times New Roman"/>
               </a:rPr>
@@ -1040,7 +1040,7 @@
         <p:spPr>
           <a:xfrm>
             <a:off x="685800" y="1143000"/>
-            <a:ext cx="5484960" cy="3084840"/>
+            <a:ext cx="5482800" cy="3082680"/>
           </a:xfrm>
           <a:prstGeom prst="rect">
             <a:avLst/>
@@ -1063,7 +1063,7 @@
         <p:spPr>
           <a:xfrm>
             <a:off x="685800" y="4400640"/>
-            <a:ext cx="5484960" cy="3598920"/>
+            <a:ext cx="5482800" cy="3596760"/>
           </a:xfrm>
           <a:prstGeom prst="rect">
             <a:avLst/>
@@ -1097,7 +1097,7 @@
         <p:spPr>
           <a:xfrm>
             <a:off x="3884760" y="8685360"/>
-            <a:ext cx="2970360" cy="457200"/>
+            <a:ext cx="2968200" cy="455040"/>
           </a:xfrm>
           <a:prstGeom prst="rect">
             <a:avLst/>
@@ -1129,7 +1129,7 @@
               </a:lnSpc>
               <a:buNone/>
             </a:pPr>
-            <a:fld id="{A5E78F5A-397F-4ADA-8C2B-37ECB46679C8}" type="slidenum">
+            <a:fld id="{11F0E1FE-33F4-4EDC-9F99-C32064D2B5C4}" type="slidenum">
               <a:rPr b="0" lang="en-US" sz="1200" spc="-1" strike="noStrike">
                 <a:latin typeface="Times New Roman"/>
               </a:rPr>
@@ -1176,7 +1176,7 @@
         <p:spPr>
           <a:xfrm>
             <a:off x="685800" y="1143000"/>
-            <a:ext cx="5484960" cy="3084840"/>
+            <a:ext cx="5482800" cy="3082680"/>
           </a:xfrm>
           <a:prstGeom prst="rect">
             <a:avLst/>
@@ -1199,7 +1199,7 @@
         <p:spPr>
           <a:xfrm>
             <a:off x="685800" y="4400640"/>
-            <a:ext cx="5484960" cy="3598920"/>
+            <a:ext cx="5482800" cy="3596760"/>
           </a:xfrm>
           <a:prstGeom prst="rect">
             <a:avLst/>
@@ -1233,7 +1233,7 @@
         <p:spPr>
           <a:xfrm>
             <a:off x="3884760" y="8685360"/>
-            <a:ext cx="2970360" cy="457200"/>
+            <a:ext cx="2968200" cy="455040"/>
           </a:xfrm>
           <a:prstGeom prst="rect">
             <a:avLst/>
@@ -1265,7 +1265,7 @@
               </a:lnSpc>
               <a:buNone/>
             </a:pPr>
-            <a:fld id="{1EDA2A34-6A1D-4D32-BDC2-0A992DE16F2C}" type="slidenum">
+            <a:fld id="{291A73C2-65C4-4FC8-9F73-151D59D2371B}" type="slidenum">
               <a:rPr b="0" lang="en-US" sz="1200" spc="-1" strike="noStrike">
                 <a:latin typeface="Times New Roman"/>
               </a:rPr>
@@ -1312,7 +1312,7 @@
         <p:spPr>
           <a:xfrm>
             <a:off x="685800" y="1143000"/>
-            <a:ext cx="5484960" cy="3084840"/>
+            <a:ext cx="5482800" cy="3082680"/>
           </a:xfrm>
           <a:prstGeom prst="rect">
             <a:avLst/>
@@ -1335,7 +1335,7 @@
         <p:spPr>
           <a:xfrm>
             <a:off x="685800" y="4400640"/>
-            <a:ext cx="5484960" cy="3598920"/>
+            <a:ext cx="5482800" cy="3596760"/>
           </a:xfrm>
           <a:prstGeom prst="rect">
             <a:avLst/>
@@ -1369,7 +1369,7 @@
         <p:spPr>
           <a:xfrm>
             <a:off x="3884760" y="8685360"/>
-            <a:ext cx="2970360" cy="457200"/>
+            <a:ext cx="2968200" cy="455040"/>
           </a:xfrm>
           <a:prstGeom prst="rect">
             <a:avLst/>
@@ -1401,7 +1401,7 @@
               </a:lnSpc>
               <a:buNone/>
             </a:pPr>
-            <a:fld id="{9677E852-1893-41CD-944E-2D3D920855C8}" type="slidenum">
+            <a:fld id="{A4F25486-EE7C-49F6-83B5-74FBC159FB40}" type="slidenum">
               <a:rPr b="0" lang="en-US" sz="1200" spc="-1" strike="noStrike">
                 <a:latin typeface="Times New Roman"/>
               </a:rPr>
@@ -1448,7 +1448,7 @@
         <p:spPr>
           <a:xfrm>
             <a:off x="685800" y="1143000"/>
-            <a:ext cx="5484960" cy="3084840"/>
+            <a:ext cx="5482800" cy="3082680"/>
           </a:xfrm>
           <a:prstGeom prst="rect">
             <a:avLst/>
@@ -1471,7 +1471,7 @@
         <p:spPr>
           <a:xfrm>
             <a:off x="685800" y="4400640"/>
-            <a:ext cx="5484960" cy="3598920"/>
+            <a:ext cx="5482800" cy="3596760"/>
           </a:xfrm>
           <a:prstGeom prst="rect">
             <a:avLst/>
@@ -1505,7 +1505,7 @@
         <p:spPr>
           <a:xfrm>
             <a:off x="3884760" y="8685360"/>
-            <a:ext cx="2970360" cy="457200"/>
+            <a:ext cx="2968200" cy="455040"/>
           </a:xfrm>
           <a:prstGeom prst="rect">
             <a:avLst/>
@@ -1537,7 +1537,7 @@
               </a:lnSpc>
               <a:buNone/>
             </a:pPr>
-            <a:fld id="{47149CD1-AD4E-4E6C-9B9D-F151D054CA89}" type="slidenum">
+            <a:fld id="{F0EB241C-AA68-4572-9691-2CC3FF80E271}" type="slidenum">
               <a:rPr b="0" lang="en-US" sz="1200" spc="-1" strike="noStrike">
                 <a:latin typeface="Times New Roman"/>
               </a:rPr>
@@ -1584,7 +1584,7 @@
         <p:spPr>
           <a:xfrm>
             <a:off x="685800" y="1143000"/>
-            <a:ext cx="5484960" cy="3084840"/>
+            <a:ext cx="5482800" cy="3082680"/>
           </a:xfrm>
           <a:prstGeom prst="rect">
             <a:avLst/>
@@ -1607,7 +1607,7 @@
         <p:spPr>
           <a:xfrm>
             <a:off x="685800" y="4400640"/>
-            <a:ext cx="5484960" cy="3598920"/>
+            <a:ext cx="5482800" cy="3596760"/>
           </a:xfrm>
           <a:prstGeom prst="rect">
             <a:avLst/>
@@ -1641,7 +1641,7 @@
         <p:spPr>
           <a:xfrm>
             <a:off x="3884760" y="8685360"/>
-            <a:ext cx="2970360" cy="457200"/>
+            <a:ext cx="2968200" cy="455040"/>
           </a:xfrm>
           <a:prstGeom prst="rect">
             <a:avLst/>
@@ -1673,7 +1673,7 @@
               </a:lnSpc>
               <a:buNone/>
             </a:pPr>
-            <a:fld id="{4ED7ABC5-A7D0-44F0-9E24-E51ADEC2AB53}" type="slidenum">
+            <a:fld id="{8193ED02-F7C4-40EE-BBFC-FB80C2C8C202}" type="slidenum">
               <a:rPr b="0" lang="en-US" sz="1200" spc="-1" strike="noStrike">
                 <a:latin typeface="Times New Roman"/>
               </a:rPr>
@@ -1720,7 +1720,7 @@
         <p:spPr>
           <a:xfrm>
             <a:off x="685800" y="1143000"/>
-            <a:ext cx="5484960" cy="3084840"/>
+            <a:ext cx="5482800" cy="3082680"/>
           </a:xfrm>
           <a:prstGeom prst="rect">
             <a:avLst/>
@@ -1743,7 +1743,7 @@
         <p:spPr>
           <a:xfrm>
             <a:off x="685800" y="4400640"/>
-            <a:ext cx="5484960" cy="3598920"/>
+            <a:ext cx="5482800" cy="3596760"/>
           </a:xfrm>
           <a:prstGeom prst="rect">
             <a:avLst/>
@@ -1777,7 +1777,7 @@
         <p:spPr>
           <a:xfrm>
             <a:off x="3884760" y="8685360"/>
-            <a:ext cx="2970360" cy="457200"/>
+            <a:ext cx="2968200" cy="455040"/>
           </a:xfrm>
           <a:prstGeom prst="rect">
             <a:avLst/>
@@ -1809,7 +1809,7 @@
               </a:lnSpc>
               <a:buNone/>
             </a:pPr>
-            <a:fld id="{CEFDC706-FBBF-4795-B30D-FCA243BCEDA0}" type="slidenum">
+            <a:fld id="{F37493E1-D43B-42E1-BDDE-40D754F319C7}" type="slidenum">
               <a:rPr b="0" lang="en-US" sz="1200" spc="-1" strike="noStrike">
                 <a:latin typeface="Times New Roman"/>
               </a:rPr>
@@ -1856,7 +1856,7 @@
         <p:spPr>
           <a:xfrm>
             <a:off x="685800" y="1143000"/>
-            <a:ext cx="5484960" cy="3084840"/>
+            <a:ext cx="5482800" cy="3082680"/>
           </a:xfrm>
           <a:prstGeom prst="rect">
             <a:avLst/>
@@ -1879,7 +1879,7 @@
         <p:spPr>
           <a:xfrm>
             <a:off x="685800" y="4400640"/>
-            <a:ext cx="5484960" cy="3598920"/>
+            <a:ext cx="5482800" cy="3596760"/>
           </a:xfrm>
           <a:prstGeom prst="rect">
             <a:avLst/>
@@ -1913,7 +1913,7 @@
         <p:spPr>
           <a:xfrm>
             <a:off x="3884760" y="8685360"/>
-            <a:ext cx="2970360" cy="457200"/>
+            <a:ext cx="2968200" cy="455040"/>
           </a:xfrm>
           <a:prstGeom prst="rect">
             <a:avLst/>
@@ -1945,7 +1945,7 @@
               </a:lnSpc>
               <a:buNone/>
             </a:pPr>
-            <a:fld id="{940DE7E5-CC62-4981-A77F-461F40FADA36}" type="slidenum">
+            <a:fld id="{6DA55EA1-E95F-4E49-8272-DF562CE0168A}" type="slidenum">
               <a:rPr b="0" lang="en-US" sz="1200" spc="-1" strike="noStrike">
                 <a:latin typeface="Times New Roman"/>
               </a:rPr>
@@ -1992,7 +1992,7 @@
         <p:spPr>
           <a:xfrm>
             <a:off x="685800" y="1143000"/>
-            <a:ext cx="5484960" cy="3084840"/>
+            <a:ext cx="5482800" cy="3082680"/>
           </a:xfrm>
           <a:prstGeom prst="rect">
             <a:avLst/>
@@ -2015,7 +2015,7 @@
         <p:spPr>
           <a:xfrm>
             <a:off x="685800" y="4400640"/>
-            <a:ext cx="5484960" cy="3598920"/>
+            <a:ext cx="5482800" cy="3596760"/>
           </a:xfrm>
           <a:prstGeom prst="rect">
             <a:avLst/>
@@ -2049,7 +2049,7 @@
         <p:spPr>
           <a:xfrm>
             <a:off x="3884760" y="8685360"/>
-            <a:ext cx="2970360" cy="457200"/>
+            <a:ext cx="2968200" cy="455040"/>
           </a:xfrm>
           <a:prstGeom prst="rect">
             <a:avLst/>
@@ -2081,7 +2081,7 @@
               </a:lnSpc>
               <a:buNone/>
             </a:pPr>
-            <a:fld id="{9372447D-F38C-4973-A413-859DD2094455}" type="slidenum">
+            <a:fld id="{34E7AD00-676D-42E7-A296-59B6960D8507}" type="slidenum">
               <a:rPr b="0" lang="en-US" sz="1200" spc="-1" strike="noStrike">
                 <a:latin typeface="Times New Roman"/>
               </a:rPr>
@@ -2128,7 +2128,7 @@
         <p:spPr>
           <a:xfrm>
             <a:off x="685800" y="1143000"/>
-            <a:ext cx="5484960" cy="3084840"/>
+            <a:ext cx="5482800" cy="3082680"/>
           </a:xfrm>
           <a:prstGeom prst="rect">
             <a:avLst/>
@@ -2151,7 +2151,7 @@
         <p:spPr>
           <a:xfrm>
             <a:off x="685800" y="4400640"/>
-            <a:ext cx="5484960" cy="3598920"/>
+            <a:ext cx="5482800" cy="3596760"/>
           </a:xfrm>
           <a:prstGeom prst="rect">
             <a:avLst/>
@@ -2185,7 +2185,7 @@
         <p:spPr>
           <a:xfrm>
             <a:off x="3884760" y="8685360"/>
-            <a:ext cx="2970360" cy="457200"/>
+            <a:ext cx="2968200" cy="455040"/>
           </a:xfrm>
           <a:prstGeom prst="rect">
             <a:avLst/>
@@ -2217,7 +2217,7 @@
               </a:lnSpc>
               <a:buNone/>
             </a:pPr>
-            <a:fld id="{EEA79CDA-E759-4E0B-918D-E79075A1F51B}" type="slidenum">
+            <a:fld id="{AB2E4F51-945B-459A-B3D5-663E9EE8E375}" type="slidenum">
               <a:rPr b="0" lang="en-US" sz="1200" spc="-1" strike="noStrike">
                 <a:latin typeface="Times New Roman"/>
               </a:rPr>
@@ -2264,7 +2264,7 @@
         <p:spPr>
           <a:xfrm>
             <a:off x="685800" y="1143000"/>
-            <a:ext cx="5484960" cy="3084840"/>
+            <a:ext cx="5482800" cy="3082680"/>
           </a:xfrm>
           <a:prstGeom prst="rect">
             <a:avLst/>
@@ -2287,7 +2287,7 @@
         <p:spPr>
           <a:xfrm>
             <a:off x="685800" y="4400640"/>
-            <a:ext cx="5484960" cy="3598920"/>
+            <a:ext cx="5482800" cy="3596760"/>
           </a:xfrm>
           <a:prstGeom prst="rect">
             <a:avLst/>
@@ -2321,7 +2321,7 @@
         <p:spPr>
           <a:xfrm>
             <a:off x="3884760" y="8685360"/>
-            <a:ext cx="2970360" cy="457200"/>
+            <a:ext cx="2968200" cy="455040"/>
           </a:xfrm>
           <a:prstGeom prst="rect">
             <a:avLst/>
@@ -2353,7 +2353,7 @@
               </a:lnSpc>
               <a:buNone/>
             </a:pPr>
-            <a:fld id="{17230DEA-E658-4AEB-BD08-E994C8F52936}" type="slidenum">
+            <a:fld id="{C75DA414-7ACF-4DCB-AC1B-8497A33540ED}" type="slidenum">
               <a:rPr b="0" lang="en-US" sz="1200" spc="-1" strike="noStrike">
                 <a:latin typeface="Times New Roman"/>
               </a:rPr>
@@ -2400,7 +2400,7 @@
         <p:spPr>
           <a:xfrm>
             <a:off x="685800" y="1143000"/>
-            <a:ext cx="5484960" cy="3084840"/>
+            <a:ext cx="5482800" cy="3082680"/>
           </a:xfrm>
           <a:prstGeom prst="rect">
             <a:avLst/>
@@ -2423,7 +2423,7 @@
         <p:spPr>
           <a:xfrm>
             <a:off x="685800" y="4400640"/>
-            <a:ext cx="5484960" cy="3598920"/>
+            <a:ext cx="5482800" cy="3596760"/>
           </a:xfrm>
           <a:prstGeom prst="rect">
             <a:avLst/>
@@ -2457,7 +2457,7 @@
         <p:spPr>
           <a:xfrm>
             <a:off x="3884760" y="8685360"/>
-            <a:ext cx="2970360" cy="457200"/>
+            <a:ext cx="2968200" cy="455040"/>
           </a:xfrm>
           <a:prstGeom prst="rect">
             <a:avLst/>
@@ -2489,7 +2489,7 @@
               </a:lnSpc>
               <a:buNone/>
             </a:pPr>
-            <a:fld id="{40913CD0-3663-4F3A-AAFC-37B0197CE757}" type="slidenum">
+            <a:fld id="{3CEFBF4C-9548-40FF-A8FA-D524E8B53E6A}" type="slidenum">
               <a:rPr b="0" lang="en-US" sz="1200" spc="-1" strike="noStrike">
                 <a:latin typeface="Times New Roman"/>
               </a:rPr>
@@ -2536,7 +2536,7 @@
         <p:spPr>
           <a:xfrm>
             <a:off x="685800" y="1143000"/>
-            <a:ext cx="5484960" cy="3084840"/>
+            <a:ext cx="5482800" cy="3082680"/>
           </a:xfrm>
           <a:prstGeom prst="rect">
             <a:avLst/>
@@ -2559,7 +2559,7 @@
         <p:spPr>
           <a:xfrm>
             <a:off x="685800" y="4400640"/>
-            <a:ext cx="5484960" cy="3598920"/>
+            <a:ext cx="5482800" cy="3596760"/>
           </a:xfrm>
           <a:prstGeom prst="rect">
             <a:avLst/>
@@ -2593,7 +2593,7 @@
         <p:spPr>
           <a:xfrm>
             <a:off x="3884760" y="8685360"/>
-            <a:ext cx="2970360" cy="457200"/>
+            <a:ext cx="2968200" cy="455040"/>
           </a:xfrm>
           <a:prstGeom prst="rect">
             <a:avLst/>
@@ -2625,7 +2625,7 @@
               </a:lnSpc>
               <a:buNone/>
             </a:pPr>
-            <a:fld id="{1AC0BE30-06DC-486C-866F-F7029E259540}" type="slidenum">
+            <a:fld id="{F6BA5C22-499A-42A2-B68B-EA3A28B48FA3}" type="slidenum">
               <a:rPr b="0" lang="en-US" sz="1200" spc="-1" strike="noStrike">
                 <a:latin typeface="Times New Roman"/>
               </a:rPr>
@@ -2672,7 +2672,7 @@
         <p:spPr>
           <a:xfrm>
             <a:off x="685800" y="1143000"/>
-            <a:ext cx="5484960" cy="3084840"/>
+            <a:ext cx="5482800" cy="3082680"/>
           </a:xfrm>
           <a:prstGeom prst="rect">
             <a:avLst/>
@@ -2695,7 +2695,7 @@
         <p:spPr>
           <a:xfrm>
             <a:off x="685800" y="4400640"/>
-            <a:ext cx="5484960" cy="3598920"/>
+            <a:ext cx="5482800" cy="3596760"/>
           </a:xfrm>
           <a:prstGeom prst="rect">
             <a:avLst/>
@@ -2729,7 +2729,7 @@
         <p:spPr>
           <a:xfrm>
             <a:off x="3884760" y="8685360"/>
-            <a:ext cx="2970360" cy="457200"/>
+            <a:ext cx="2968200" cy="455040"/>
           </a:xfrm>
           <a:prstGeom prst="rect">
             <a:avLst/>
@@ -2761,7 +2761,7 @@
               </a:lnSpc>
               <a:buNone/>
             </a:pPr>
-            <a:fld id="{254F14B6-9AC1-4B5D-9A8E-F3EBD22E808D}" type="slidenum">
+            <a:fld id="{889FED1A-8EF4-4BCE-AC87-F17CC218AFDC}" type="slidenum">
               <a:rPr b="0" lang="en-US" sz="1200" spc="-1" strike="noStrike">
                 <a:latin typeface="Times New Roman"/>
               </a:rPr>
@@ -2808,7 +2808,7 @@
         <p:spPr>
           <a:xfrm>
             <a:off x="685800" y="1143000"/>
-            <a:ext cx="5484960" cy="3084840"/>
+            <a:ext cx="5482800" cy="3082680"/>
           </a:xfrm>
           <a:prstGeom prst="rect">
             <a:avLst/>
@@ -2831,7 +2831,7 @@
         <p:spPr>
           <a:xfrm>
             <a:off x="685800" y="4400640"/>
-            <a:ext cx="5484960" cy="3598920"/>
+            <a:ext cx="5482800" cy="3596760"/>
           </a:xfrm>
           <a:prstGeom prst="rect">
             <a:avLst/>
@@ -2865,7 +2865,7 @@
         <p:spPr>
           <a:xfrm>
             <a:off x="3884760" y="8685360"/>
-            <a:ext cx="2970360" cy="457200"/>
+            <a:ext cx="2968200" cy="455040"/>
           </a:xfrm>
           <a:prstGeom prst="rect">
             <a:avLst/>
@@ -2897,7 +2897,7 @@
               </a:lnSpc>
               <a:buNone/>
             </a:pPr>
-            <a:fld id="{29C9C778-2BE2-4952-A574-E682C78EC501}" type="slidenum">
+            <a:fld id="{B40D5E0E-4F07-42EB-8C02-543583D7E75F}" type="slidenum">
               <a:rPr b="0" lang="en-US" sz="1200" spc="-1" strike="noStrike">
                 <a:latin typeface="Times New Roman"/>
               </a:rPr>
@@ -2944,7 +2944,7 @@
         <p:spPr>
           <a:xfrm>
             <a:off x="685800" y="1143000"/>
-            <a:ext cx="5484960" cy="3084840"/>
+            <a:ext cx="5482800" cy="3082680"/>
           </a:xfrm>
           <a:prstGeom prst="rect">
             <a:avLst/>
@@ -2967,7 +2967,7 @@
         <p:spPr>
           <a:xfrm>
             <a:off x="685800" y="4400640"/>
-            <a:ext cx="5484960" cy="3598920"/>
+            <a:ext cx="5482800" cy="3596760"/>
           </a:xfrm>
           <a:prstGeom prst="rect">
             <a:avLst/>
@@ -3001,7 +3001,7 @@
         <p:spPr>
           <a:xfrm>
             <a:off x="3884760" y="8685360"/>
-            <a:ext cx="2970360" cy="457200"/>
+            <a:ext cx="2968200" cy="455040"/>
           </a:xfrm>
           <a:prstGeom prst="rect">
             <a:avLst/>
@@ -3033,7 +3033,7 @@
               </a:lnSpc>
               <a:buNone/>
             </a:pPr>
-            <a:fld id="{9E7B72C5-29C9-4F15-8011-435CFE03FAB7}" type="slidenum">
+            <a:fld id="{A2B51A96-37BE-4750-A1DB-57340FA7E40A}" type="slidenum">
               <a:rPr b="0" lang="en-US" sz="1200" spc="-1" strike="noStrike">
                 <a:latin typeface="Times New Roman"/>
               </a:rPr>
@@ -3080,7 +3080,7 @@
         <p:spPr>
           <a:xfrm>
             <a:off x="685800" y="1143000"/>
-            <a:ext cx="5484960" cy="3084840"/>
+            <a:ext cx="5482800" cy="3082680"/>
           </a:xfrm>
           <a:prstGeom prst="rect">
             <a:avLst/>
@@ -3103,7 +3103,7 @@
         <p:spPr>
           <a:xfrm>
             <a:off x="685800" y="4400640"/>
-            <a:ext cx="5484960" cy="3598920"/>
+            <a:ext cx="5482800" cy="3596760"/>
           </a:xfrm>
           <a:prstGeom prst="rect">
             <a:avLst/>
@@ -3137,7 +3137,7 @@
         <p:spPr>
           <a:xfrm>
             <a:off x="3884760" y="8685360"/>
-            <a:ext cx="2970360" cy="457200"/>
+            <a:ext cx="2968200" cy="455040"/>
           </a:xfrm>
           <a:prstGeom prst="rect">
             <a:avLst/>
@@ -3169,7 +3169,7 @@
               </a:lnSpc>
               <a:buNone/>
             </a:pPr>
-            <a:fld id="{0066C030-D25A-44D2-8DC8-D3FE75CFE4EE}" type="slidenum">
+            <a:fld id="{B54FDA76-B0A7-4AF6-B25F-0C85C9C1F331}" type="slidenum">
               <a:rPr b="0" lang="en-US" sz="1200" spc="-1" strike="noStrike">
                 <a:latin typeface="Times New Roman"/>
               </a:rPr>
@@ -3238,7 +3238,7 @@
         <p:spPr>
           <a:xfrm>
             <a:off x="609480" y="273600"/>
-            <a:ext cx="10973520" cy="1144800"/>
+            <a:ext cx="10972440" cy="1144800"/>
           </a:xfrm>
           <a:prstGeom prst="rect">
             <a:avLst/>
@@ -3275,7 +3275,7 @@
         <p:spPr>
           <a:xfrm>
             <a:off x="609480" y="1604520"/>
-            <a:ext cx="10973520" cy="1896840"/>
+            <a:ext cx="10972440" cy="1896840"/>
           </a:xfrm>
           <a:prstGeom prst="rect">
             <a:avLst/>
@@ -3309,7 +3309,7 @@
         <p:spPr>
           <a:xfrm>
             <a:off x="609480" y="3682080"/>
-            <a:ext cx="10973520" cy="1896840"/>
+            <a:ext cx="10972440" cy="1896840"/>
           </a:xfrm>
           <a:prstGeom prst="rect">
             <a:avLst/>
@@ -3365,7 +3365,7 @@
         <p:spPr>
           <a:xfrm>
             <a:off x="609480" y="273600"/>
-            <a:ext cx="10973520" cy="1144800"/>
+            <a:ext cx="10972440" cy="1144800"/>
           </a:xfrm>
           <a:prstGeom prst="rect">
             <a:avLst/>
@@ -3402,7 +3402,7 @@
         <p:spPr>
           <a:xfrm>
             <a:off x="609480" y="1604520"/>
-            <a:ext cx="5355000" cy="1896840"/>
+            <a:ext cx="5354280" cy="1896840"/>
           </a:xfrm>
           <a:prstGeom prst="rect">
             <a:avLst/>
@@ -3435,8 +3435,8 @@
         </p:nvSpPr>
         <p:spPr>
           <a:xfrm>
-            <a:off x="6232680" y="1604520"/>
-            <a:ext cx="5355000" cy="1896840"/>
+            <a:off x="6231960" y="1604520"/>
+            <a:ext cx="5354280" cy="1896840"/>
           </a:xfrm>
           <a:prstGeom prst="rect">
             <a:avLst/>
@@ -3470,7 +3470,7 @@
         <p:spPr>
           <a:xfrm>
             <a:off x="609480" y="3682080"/>
-            <a:ext cx="5355000" cy="1896840"/>
+            <a:ext cx="5354280" cy="1896840"/>
           </a:xfrm>
           <a:prstGeom prst="rect">
             <a:avLst/>
@@ -3503,8 +3503,8 @@
         </p:nvSpPr>
         <p:spPr>
           <a:xfrm>
-            <a:off x="6232680" y="3682080"/>
-            <a:ext cx="5355000" cy="1896840"/>
+            <a:off x="6231960" y="3682080"/>
+            <a:ext cx="5354280" cy="1896840"/>
           </a:xfrm>
           <a:prstGeom prst="rect">
             <a:avLst/>
@@ -3560,7 +3560,7 @@
         <p:spPr>
           <a:xfrm>
             <a:off x="609480" y="273600"/>
-            <a:ext cx="10973520" cy="1144800"/>
+            <a:ext cx="10972440" cy="1144800"/>
           </a:xfrm>
           <a:prstGeom prst="rect">
             <a:avLst/>
@@ -3597,7 +3597,7 @@
         <p:spPr>
           <a:xfrm>
             <a:off x="609480" y="1604520"/>
-            <a:ext cx="3533400" cy="1896840"/>
+            <a:ext cx="3533040" cy="1896840"/>
           </a:xfrm>
           <a:prstGeom prst="rect">
             <a:avLst/>
@@ -3630,8 +3630,8 @@
         </p:nvSpPr>
         <p:spPr>
           <a:xfrm>
-            <a:off x="4320000" y="1604520"/>
-            <a:ext cx="3533400" cy="1896840"/>
+            <a:off x="4319640" y="1604520"/>
+            <a:ext cx="3533040" cy="1896840"/>
           </a:xfrm>
           <a:prstGeom prst="rect">
             <a:avLst/>
@@ -3664,8 +3664,8 @@
         </p:nvSpPr>
         <p:spPr>
           <a:xfrm>
-            <a:off x="8030520" y="1604520"/>
-            <a:ext cx="3533400" cy="1896840"/>
+            <a:off x="8029800" y="1604520"/>
+            <a:ext cx="3533040" cy="1896840"/>
           </a:xfrm>
           <a:prstGeom prst="rect">
             <a:avLst/>
@@ -3699,7 +3699,7 @@
         <p:spPr>
           <a:xfrm>
             <a:off x="609480" y="3682080"/>
-            <a:ext cx="3533400" cy="1896840"/>
+            <a:ext cx="3533040" cy="1896840"/>
           </a:xfrm>
           <a:prstGeom prst="rect">
             <a:avLst/>
@@ -3732,8 +3732,8 @@
         </p:nvSpPr>
         <p:spPr>
           <a:xfrm>
-            <a:off x="4320000" y="3682080"/>
-            <a:ext cx="3533400" cy="1896840"/>
+            <a:off x="4319640" y="3682080"/>
+            <a:ext cx="3533040" cy="1896840"/>
           </a:xfrm>
           <a:prstGeom prst="rect">
             <a:avLst/>
@@ -3766,8 +3766,8 @@
         </p:nvSpPr>
         <p:spPr>
           <a:xfrm>
-            <a:off x="8030520" y="3682080"/>
-            <a:ext cx="3533400" cy="1896840"/>
+            <a:off x="8029800" y="3682080"/>
+            <a:ext cx="3533040" cy="1896840"/>
           </a:xfrm>
           <a:prstGeom prst="rect">
             <a:avLst/>
@@ -3823,7 +3823,7 @@
         <p:spPr>
           <a:xfrm>
             <a:off x="609480" y="273600"/>
-            <a:ext cx="10973520" cy="1144800"/>
+            <a:ext cx="10972440" cy="1144800"/>
           </a:xfrm>
           <a:prstGeom prst="rect">
             <a:avLst/>
@@ -3860,7 +3860,7 @@
         <p:spPr>
           <a:xfrm>
             <a:off x="609480" y="1604520"/>
-            <a:ext cx="10973520" cy="3977280"/>
+            <a:ext cx="10972440" cy="3977280"/>
           </a:xfrm>
           <a:prstGeom prst="rect">
             <a:avLst/>
@@ -3919,7 +3919,7 @@
         <p:spPr>
           <a:xfrm>
             <a:off x="609480" y="273600"/>
-            <a:ext cx="10973520" cy="1144800"/>
+            <a:ext cx="10972440" cy="1144800"/>
           </a:xfrm>
           <a:prstGeom prst="rect">
             <a:avLst/>
@@ -3956,7 +3956,7 @@
         <p:spPr>
           <a:xfrm>
             <a:off x="609480" y="1604520"/>
-            <a:ext cx="10973520" cy="3977280"/>
+            <a:ext cx="10972440" cy="3977280"/>
           </a:xfrm>
           <a:prstGeom prst="rect">
             <a:avLst/>
@@ -4012,7 +4012,7 @@
         <p:spPr>
           <a:xfrm>
             <a:off x="609480" y="273600"/>
-            <a:ext cx="10973520" cy="1144800"/>
+            <a:ext cx="10972440" cy="1144800"/>
           </a:xfrm>
           <a:prstGeom prst="rect">
             <a:avLst/>
@@ -4049,7 +4049,7 @@
         <p:spPr>
           <a:xfrm>
             <a:off x="609480" y="1604520"/>
-            <a:ext cx="5355000" cy="3977280"/>
+            <a:ext cx="5354280" cy="3977280"/>
           </a:xfrm>
           <a:prstGeom prst="rect">
             <a:avLst/>
@@ -4082,8 +4082,8 @@
         </p:nvSpPr>
         <p:spPr>
           <a:xfrm>
-            <a:off x="6232680" y="1604520"/>
-            <a:ext cx="5355000" cy="3977280"/>
+            <a:off x="6231960" y="1604520"/>
+            <a:ext cx="5354280" cy="3977280"/>
           </a:xfrm>
           <a:prstGeom prst="rect">
             <a:avLst/>
@@ -4139,7 +4139,7 @@
         <p:spPr>
           <a:xfrm>
             <a:off x="609480" y="273600"/>
-            <a:ext cx="10973520" cy="1144800"/>
+            <a:ext cx="10972440" cy="1144800"/>
           </a:xfrm>
           <a:prstGeom prst="rect">
             <a:avLst/>
@@ -4198,7 +4198,7 @@
         <p:spPr>
           <a:xfrm>
             <a:off x="609480" y="273600"/>
-            <a:ext cx="10973520" cy="5307840"/>
+            <a:ext cx="10972440" cy="5307840"/>
           </a:xfrm>
           <a:prstGeom prst="rect">
             <a:avLst/>
@@ -4257,7 +4257,7 @@
         <p:spPr>
           <a:xfrm>
             <a:off x="609480" y="273600"/>
-            <a:ext cx="10973520" cy="1144800"/>
+            <a:ext cx="10972440" cy="1144800"/>
           </a:xfrm>
           <a:prstGeom prst="rect">
             <a:avLst/>
@@ -4294,7 +4294,7 @@
         <p:spPr>
           <a:xfrm>
             <a:off x="609480" y="1604520"/>
-            <a:ext cx="5355000" cy="1896840"/>
+            <a:ext cx="5354280" cy="1896840"/>
           </a:xfrm>
           <a:prstGeom prst="rect">
             <a:avLst/>
@@ -4327,8 +4327,8 @@
         </p:nvSpPr>
         <p:spPr>
           <a:xfrm>
-            <a:off x="6232680" y="1604520"/>
-            <a:ext cx="5355000" cy="3977280"/>
+            <a:off x="6231960" y="1604520"/>
+            <a:ext cx="5354280" cy="3977280"/>
           </a:xfrm>
           <a:prstGeom prst="rect">
             <a:avLst/>
@@ -4362,7 +4362,7 @@
         <p:spPr>
           <a:xfrm>
             <a:off x="609480" y="3682080"/>
-            <a:ext cx="5355000" cy="1896840"/>
+            <a:ext cx="5354280" cy="1896840"/>
           </a:xfrm>
           <a:prstGeom prst="rect">
             <a:avLst/>
@@ -4418,7 +4418,7 @@
         <p:spPr>
           <a:xfrm>
             <a:off x="609480" y="273600"/>
-            <a:ext cx="10973520" cy="1144800"/>
+            <a:ext cx="10972440" cy="1144800"/>
           </a:xfrm>
           <a:prstGeom prst="rect">
             <a:avLst/>
@@ -4455,7 +4455,7 @@
         <p:spPr>
           <a:xfrm>
             <a:off x="609480" y="1604520"/>
-            <a:ext cx="5355000" cy="3977280"/>
+            <a:ext cx="5354280" cy="3977280"/>
           </a:xfrm>
           <a:prstGeom prst="rect">
             <a:avLst/>
@@ -4488,8 +4488,8 @@
         </p:nvSpPr>
         <p:spPr>
           <a:xfrm>
-            <a:off x="6232680" y="1604520"/>
-            <a:ext cx="5355000" cy="1896840"/>
+            <a:off x="6231960" y="1604520"/>
+            <a:ext cx="5354280" cy="1896840"/>
           </a:xfrm>
           <a:prstGeom prst="rect">
             <a:avLst/>
@@ -4522,8 +4522,8 @@
         </p:nvSpPr>
         <p:spPr>
           <a:xfrm>
-            <a:off x="6232680" y="3682080"/>
-            <a:ext cx="5355000" cy="1896840"/>
+            <a:off x="6231960" y="3682080"/>
+            <a:ext cx="5354280" cy="1896840"/>
           </a:xfrm>
           <a:prstGeom prst="rect">
             <a:avLst/>
@@ -4579,7 +4579,7 @@
         <p:spPr>
           <a:xfrm>
             <a:off x="609480" y="273600"/>
-            <a:ext cx="10973520" cy="1144800"/>
+            <a:ext cx="10972440" cy="1144800"/>
           </a:xfrm>
           <a:prstGeom prst="rect">
             <a:avLst/>
@@ -4616,7 +4616,7 @@
         <p:spPr>
           <a:xfrm>
             <a:off x="609480" y="1604520"/>
-            <a:ext cx="5355000" cy="1896840"/>
+            <a:ext cx="5354280" cy="1896840"/>
           </a:xfrm>
           <a:prstGeom prst="rect">
             <a:avLst/>
@@ -4649,8 +4649,8 @@
         </p:nvSpPr>
         <p:spPr>
           <a:xfrm>
-            <a:off x="6232680" y="1604520"/>
-            <a:ext cx="5355000" cy="1896840"/>
+            <a:off x="6231960" y="1604520"/>
+            <a:ext cx="5354280" cy="1896840"/>
           </a:xfrm>
           <a:prstGeom prst="rect">
             <a:avLst/>
@@ -4684,7 +4684,7 @@
         <p:spPr>
           <a:xfrm>
             <a:off x="609480" y="3682080"/>
-            <a:ext cx="10973520" cy="1896840"/>
+            <a:ext cx="10972440" cy="1896840"/>
           </a:xfrm>
           <a:prstGeom prst="rect">
             <a:avLst/>
@@ -4747,7 +4747,7 @@
         <p:spPr>
           <a:xfrm>
             <a:off x="609480" y="273600"/>
-            <a:ext cx="10973520" cy="1144800"/>
+            <a:ext cx="10972440" cy="1144800"/>
           </a:xfrm>
           <a:prstGeom prst="rect">
             <a:avLst/>
@@ -4790,7 +4790,7 @@
         <p:spPr>
           <a:xfrm>
             <a:off x="609480" y="1604520"/>
-            <a:ext cx="10973520" cy="3977280"/>
+            <a:ext cx="10972440" cy="3977280"/>
           </a:xfrm>
           <a:prstGeom prst="rect">
             <a:avLst/>
@@ -5012,8 +5012,8 @@
         </p:nvSpPr>
         <p:spPr>
           <a:xfrm>
-            <a:off x="5639040" y="2266920"/>
-            <a:ext cx="912960" cy="17640"/>
+            <a:off x="5638680" y="2266920"/>
+            <a:ext cx="910800" cy="15480"/>
           </a:xfrm>
           <a:custGeom>
             <a:avLst/>
@@ -5064,7 +5064,7 @@
         <p:spPr>
           <a:xfrm>
             <a:off x="3633840" y="2514600"/>
-            <a:ext cx="4923360" cy="912960"/>
+            <a:ext cx="4920840" cy="910800"/>
           </a:xfrm>
           <a:prstGeom prst="rect">
             <a:avLst/>
@@ -5102,9 +5102,6 @@
               <a:t>Game Theory</a:t>
             </a:r>
             <a:endParaRPr b="0" lang="en-HK" sz="7200" spc="-1" strike="noStrike">
-              <a:solidFill>
-                <a:srgbClr val="ffffff"/>
-              </a:solidFill>
               <a:latin typeface="Arial"/>
             </a:endParaRPr>
           </a:p>
@@ -5118,8 +5115,8 @@
         </p:nvSpPr>
         <p:spPr>
           <a:xfrm>
-            <a:off x="5639040" y="3657600"/>
-            <a:ext cx="912960" cy="17640"/>
+            <a:off x="5638680" y="3657600"/>
+            <a:ext cx="910800" cy="15480"/>
           </a:xfrm>
           <a:custGeom>
             <a:avLst/>
@@ -5170,7 +5167,7 @@
         <p:spPr>
           <a:xfrm>
             <a:off x="3545640" y="4286160"/>
-            <a:ext cx="5094720" cy="303480"/>
+            <a:ext cx="5092200" cy="301320"/>
           </a:xfrm>
           <a:prstGeom prst="rect">
             <a:avLst/>
@@ -5198,24 +5195,34 @@
               <a:buNone/>
             </a:pPr>
             <a:r>
-              <a:rPr b="0" lang="en-US" sz="1800" spc="35" strike="noStrike">
-                <a:solidFill>
-                  <a:srgbClr val="ffffff"/>
+              <a:rPr b="0" lang="en-US" sz="1800" spc="18" strike="noStrike">
+                <a:solidFill>
+                  <a:srgbClr val="c9211e"/>
                 </a:solidFill>
                 <a:latin typeface="Liter"/>
                 <a:ea typeface="Liter"/>
               </a:rPr>
-              <a:t>The Mathematics of</a:t>
-            </a:r>
-            <a:r>
-              <a:rPr b="0" lang="en-US" sz="1800" spc="35" strike="noStrike">
+              <a:t>Th</a:t>
+            </a:r>
+            <a:r>
+              <a:rPr b="0" lang="en-US" sz="1800" spc="18" strike="noStrike">
                 <a:solidFill>
                   <a:srgbClr val="ffffff"/>
                 </a:solidFill>
                 <a:latin typeface="Liter"/>
                 <a:ea typeface="Liter"/>
               </a:rPr>
-              <a:t> Strategic Decision-Making</a:t>
+              <a:t>e Mathematics of Strategic De</a:t>
+            </a:r>
+            <a:r>
+              <a:rPr b="0" lang="en-US" sz="1800" spc="18" strike="noStrike">
+                <a:solidFill>
+                  <a:srgbClr val="1c1c1c"/>
+                </a:solidFill>
+                <a:latin typeface="Liter"/>
+                <a:ea typeface="Liter"/>
+              </a:rPr>
+              <a:t>cision-Making</a:t>
             </a:r>
             <a:endParaRPr b="0" lang="en-HK" sz="1800" spc="-1" strike="noStrike">
               <a:latin typeface="Arial"/>
@@ -5269,7 +5276,7 @@
         <p:spPr>
           <a:xfrm>
             <a:off x="380880" y="380880"/>
-            <a:ext cx="11505960" cy="227160"/>
+            <a:ext cx="11502720" cy="225000"/>
           </a:xfrm>
           <a:prstGeom prst="rect">
             <a:avLst/>
@@ -5297,7 +5304,7 @@
               <a:buNone/>
             </a:pPr>
             <a:r>
-              <a:rPr b="1" lang="en-US" sz="1200" spc="49" strike="noStrike">
+              <a:rPr b="1" lang="en-US" sz="1200" spc="32" strike="noStrike">
                 <a:solidFill>
                   <a:srgbClr val="0984e3"/>
                 </a:solidFill>
@@ -5321,7 +5328,7 @@
         <p:spPr>
           <a:xfrm>
             <a:off x="380880" y="685800"/>
-            <a:ext cx="11658240" cy="455760"/>
+            <a:ext cx="11655000" cy="453600"/>
           </a:xfrm>
           <a:prstGeom prst="rect">
             <a:avLst/>
@@ -5373,7 +5380,7 @@
         <p:spPr>
           <a:xfrm>
             <a:off x="380880" y="1419120"/>
-            <a:ext cx="5496120" cy="827280"/>
+            <a:ext cx="5493600" cy="825120"/>
           </a:xfrm>
           <a:prstGeom prst="rect">
             <a:avLst/>
@@ -5425,7 +5432,7 @@
         <p:spPr>
           <a:xfrm>
             <a:off x="380880" y="2452680"/>
-            <a:ext cx="5647320" cy="836640"/>
+            <a:ext cx="5644800" cy="834480"/>
           </a:xfrm>
           <a:prstGeom prst="rect">
             <a:avLst/>
@@ -5477,7 +5484,7 @@
         <p:spPr>
           <a:xfrm>
             <a:off x="380880" y="3867120"/>
-            <a:ext cx="5561640" cy="2017800"/>
+            <a:ext cx="5559120" cy="2015640"/>
           </a:xfrm>
           <a:custGeom>
             <a:avLst/>
@@ -5528,7 +5535,7 @@
         <p:spPr>
           <a:xfrm>
             <a:off x="609480" y="4095720"/>
-            <a:ext cx="5199480" cy="265320"/>
+            <a:ext cx="5196960" cy="263160"/>
           </a:xfrm>
           <a:prstGeom prst="rect">
             <a:avLst/>
@@ -5580,7 +5587,7 @@
         <p:spPr>
           <a:xfrm>
             <a:off x="609480" y="4476600"/>
-            <a:ext cx="5180400" cy="246240"/>
+            <a:ext cx="5177880" cy="244080"/>
           </a:xfrm>
           <a:prstGeom prst="rect">
             <a:avLst/>
@@ -5672,7 +5679,7 @@
         <p:spPr>
           <a:xfrm>
             <a:off x="609480" y="4838760"/>
-            <a:ext cx="5104440" cy="455760"/>
+            <a:ext cx="5101920" cy="453600"/>
           </a:xfrm>
           <a:custGeom>
             <a:avLst/>
@@ -5723,24 +5730,24 @@
         <p:spPr>
           <a:xfrm>
             <a:off x="609480" y="4838760"/>
-            <a:ext cx="5180400" cy="455760"/>
-          </a:xfrm>
-          <a:prstGeom prst="rect">
-            <a:avLst/>
-          </a:prstGeom>
-          <a:noFill/>
-          <a:ln w="0">
-            <a:noFill/>
-          </a:ln>
-        </p:spPr>
-        <p:style>
-          <a:lnRef idx="0"/>
-          <a:fillRef idx="0"/>
-          <a:effectRef idx="0"/>
-          <a:fontRef idx="minor"/>
-        </p:style>
-        <p:txBody>
-          <a:bodyPr lIns="114480" rIns="114480" tIns="456480" bIns="456480" anchor="ctr">
+            <a:ext cx="5177880" cy="453600"/>
+          </a:xfrm>
+          <a:prstGeom prst="rect">
+            <a:avLst/>
+          </a:prstGeom>
+          <a:noFill/>
+          <a:ln w="0">
+            <a:noFill/>
+          </a:ln>
+        </p:spPr>
+        <p:style>
+          <a:lnRef idx="0"/>
+          <a:fillRef idx="0"/>
+          <a:effectRef idx="0"/>
+          <a:fontRef idx="minor"/>
+        </p:style>
+        <p:txBody>
+          <a:bodyPr lIns="114480" rIns="114480" tIns="454320" bIns="454320" anchor="ctr">
             <a:noAutofit/>
           </a:bodyPr>
           <a:p>
@@ -5775,7 +5782,7 @@
         <p:spPr>
           <a:xfrm>
             <a:off x="609480" y="5410080"/>
-            <a:ext cx="5180400" cy="246240"/>
+            <a:ext cx="5177880" cy="244080"/>
           </a:xfrm>
           <a:prstGeom prst="rect">
             <a:avLst/>
@@ -5846,8 +5853,8 @@
         </p:nvSpPr>
         <p:spPr>
           <a:xfrm>
-            <a:off x="6253560" y="1376280"/>
-            <a:ext cx="5551920" cy="3208320"/>
+            <a:off x="6253200" y="1376280"/>
+            <a:ext cx="5549400" cy="3206160"/>
           </a:xfrm>
           <a:custGeom>
             <a:avLst/>
@@ -5900,8 +5907,8 @@
         </p:nvSpPr>
         <p:spPr>
           <a:xfrm>
-            <a:off x="6486840" y="1609560"/>
-            <a:ext cx="5180400" cy="265320"/>
+            <a:off x="6486480" y="1609560"/>
+            <a:ext cx="5177880" cy="263160"/>
           </a:xfrm>
           <a:prstGeom prst="rect">
             <a:avLst/>
@@ -5952,8 +5959,8 @@
         </p:nvSpPr>
         <p:spPr>
           <a:xfrm>
-            <a:off x="6486840" y="2028960"/>
-            <a:ext cx="303480" cy="303480"/>
+            <a:off x="6486480" y="2028960"/>
+            <a:ext cx="301320" cy="301320"/>
           </a:xfrm>
           <a:custGeom>
             <a:avLst/>
@@ -6003,8 +6010,8 @@
         </p:nvSpPr>
         <p:spPr>
           <a:xfrm>
-            <a:off x="6453720" y="2028960"/>
-            <a:ext cx="370080" cy="303480"/>
+            <a:off x="6453360" y="2028960"/>
+            <a:ext cx="367920" cy="301320"/>
           </a:xfrm>
           <a:prstGeom prst="rect">
             <a:avLst/>
@@ -6055,8 +6062,8 @@
         </p:nvSpPr>
         <p:spPr>
           <a:xfrm>
-            <a:off x="6905880" y="2028960"/>
-            <a:ext cx="3066120" cy="227160"/>
+            <a:off x="6905520" y="2028960"/>
+            <a:ext cx="3063600" cy="225000"/>
           </a:xfrm>
           <a:prstGeom prst="rect">
             <a:avLst/>
@@ -6107,8 +6114,8 @@
         </p:nvSpPr>
         <p:spPr>
           <a:xfrm>
-            <a:off x="6905880" y="2295360"/>
-            <a:ext cx="3066120" cy="227160"/>
+            <a:off x="6905520" y="2295360"/>
+            <a:ext cx="3063600" cy="225000"/>
           </a:xfrm>
           <a:prstGeom prst="rect">
             <a:avLst/>
@@ -6159,8 +6166,8 @@
         </p:nvSpPr>
         <p:spPr>
           <a:xfrm>
-            <a:off x="6486840" y="2638440"/>
-            <a:ext cx="303480" cy="303480"/>
+            <a:off x="6486480" y="2638440"/>
+            <a:ext cx="301320" cy="301320"/>
           </a:xfrm>
           <a:custGeom>
             <a:avLst/>
@@ -6210,8 +6217,8 @@
         </p:nvSpPr>
         <p:spPr>
           <a:xfrm>
-            <a:off x="6453720" y="2638440"/>
-            <a:ext cx="370080" cy="303480"/>
+            <a:off x="6453360" y="2638440"/>
+            <a:ext cx="367920" cy="301320"/>
           </a:xfrm>
           <a:prstGeom prst="rect">
             <a:avLst/>
@@ -6262,8 +6269,8 @@
         </p:nvSpPr>
         <p:spPr>
           <a:xfrm>
-            <a:off x="6905880" y="2638440"/>
-            <a:ext cx="3665880" cy="227160"/>
+            <a:off x="6905520" y="2638440"/>
+            <a:ext cx="3663360" cy="225000"/>
           </a:xfrm>
           <a:prstGeom prst="rect">
             <a:avLst/>
@@ -6314,8 +6321,8 @@
         </p:nvSpPr>
         <p:spPr>
           <a:xfrm>
-            <a:off x="6905880" y="2905200"/>
-            <a:ext cx="3665880" cy="227160"/>
+            <a:off x="6905520" y="2905200"/>
+            <a:ext cx="3663360" cy="225000"/>
           </a:xfrm>
           <a:prstGeom prst="rect">
             <a:avLst/>
@@ -6366,8 +6373,8 @@
         </p:nvSpPr>
         <p:spPr>
           <a:xfrm>
-            <a:off x="6486840" y="3247920"/>
-            <a:ext cx="303480" cy="303480"/>
+            <a:off x="6486480" y="3247920"/>
+            <a:ext cx="301320" cy="301320"/>
           </a:xfrm>
           <a:custGeom>
             <a:avLst/>
@@ -6417,8 +6424,8 @@
         </p:nvSpPr>
         <p:spPr>
           <a:xfrm>
-            <a:off x="6453720" y="3247920"/>
-            <a:ext cx="370080" cy="303480"/>
+            <a:off x="6453360" y="3247920"/>
+            <a:ext cx="367920" cy="301320"/>
           </a:xfrm>
           <a:prstGeom prst="rect">
             <a:avLst/>
@@ -6469,8 +6476,8 @@
         </p:nvSpPr>
         <p:spPr>
           <a:xfrm>
-            <a:off x="6905880" y="3247920"/>
-            <a:ext cx="3285000" cy="227160"/>
+            <a:off x="6905520" y="3247920"/>
+            <a:ext cx="3282480" cy="225000"/>
           </a:xfrm>
           <a:prstGeom prst="rect">
             <a:avLst/>
@@ -6521,8 +6528,8 @@
         </p:nvSpPr>
         <p:spPr>
           <a:xfrm>
-            <a:off x="6905880" y="3514680"/>
-            <a:ext cx="3285000" cy="227160"/>
+            <a:off x="6905520" y="3514680"/>
+            <a:ext cx="3282480" cy="225000"/>
           </a:xfrm>
           <a:prstGeom prst="rect">
             <a:avLst/>
@@ -6573,8 +6580,8 @@
         </p:nvSpPr>
         <p:spPr>
           <a:xfrm>
-            <a:off x="6486840" y="3857760"/>
-            <a:ext cx="303480" cy="303480"/>
+            <a:off x="6486480" y="3857760"/>
+            <a:ext cx="301320" cy="301320"/>
           </a:xfrm>
           <a:custGeom>
             <a:avLst/>
@@ -6624,8 +6631,8 @@
         </p:nvSpPr>
         <p:spPr>
           <a:xfrm>
-            <a:off x="6453720" y="3857760"/>
-            <a:ext cx="370080" cy="303480"/>
+            <a:off x="6453360" y="3857760"/>
+            <a:ext cx="367920" cy="301320"/>
           </a:xfrm>
           <a:prstGeom prst="rect">
             <a:avLst/>
@@ -6676,8 +6683,8 @@
         </p:nvSpPr>
         <p:spPr>
           <a:xfrm>
-            <a:off x="6905880" y="3857760"/>
-            <a:ext cx="4132800" cy="227160"/>
+            <a:off x="6905520" y="3857760"/>
+            <a:ext cx="4130280" cy="225000"/>
           </a:xfrm>
           <a:prstGeom prst="rect">
             <a:avLst/>
@@ -6728,8 +6735,8 @@
         </p:nvSpPr>
         <p:spPr>
           <a:xfrm>
-            <a:off x="6905880" y="4124160"/>
-            <a:ext cx="4132800" cy="227160"/>
+            <a:off x="6905520" y="4124160"/>
+            <a:ext cx="4130280" cy="225000"/>
           </a:xfrm>
           <a:prstGeom prst="rect">
             <a:avLst/>
@@ -6780,8 +6787,8 @@
         </p:nvSpPr>
         <p:spPr>
           <a:xfrm>
-            <a:off x="6267960" y="4743360"/>
-            <a:ext cx="5542560" cy="1141560"/>
+            <a:off x="6267600" y="4743360"/>
+            <a:ext cx="5540040" cy="1139400"/>
           </a:xfrm>
           <a:custGeom>
             <a:avLst/>
@@ -6831,8 +6838,8 @@
         </p:nvSpPr>
         <p:spPr>
           <a:xfrm>
-            <a:off x="6267960" y="4743360"/>
-            <a:ext cx="36720" cy="1141560"/>
+            <a:off x="6267600" y="4743360"/>
+            <a:ext cx="34560" cy="1139400"/>
           </a:xfrm>
           <a:custGeom>
             <a:avLst/>
@@ -6882,8 +6889,8 @@
         </p:nvSpPr>
         <p:spPr>
           <a:xfrm>
-            <a:off x="6477480" y="4933800"/>
-            <a:ext cx="5218560" cy="493920"/>
+            <a:off x="6477120" y="4933800"/>
+            <a:ext cx="5216040" cy="491760"/>
           </a:xfrm>
           <a:prstGeom prst="rect">
             <a:avLst/>
@@ -6934,8 +6941,8 @@
         </p:nvSpPr>
         <p:spPr>
           <a:xfrm>
-            <a:off x="6477480" y="5505480"/>
-            <a:ext cx="5209200" cy="189000"/>
+            <a:off x="6477120" y="5505480"/>
+            <a:ext cx="5206680" cy="186840"/>
           </a:xfrm>
           <a:prstGeom prst="rect">
             <a:avLst/>
@@ -7034,7 +7041,7 @@
         <p:spPr>
           <a:xfrm>
             <a:off x="379440" y="379440"/>
-            <a:ext cx="11508480" cy="226440"/>
+            <a:ext cx="11505240" cy="224280"/>
           </a:xfrm>
           <a:prstGeom prst="rect">
             <a:avLst/>
@@ -7062,7 +7069,7 @@
               <a:buNone/>
             </a:pPr>
             <a:r>
-              <a:rPr b="1" lang="en-US" sz="1200" spc="49" strike="noStrike">
+              <a:rPr b="1" lang="en-US" sz="1200" spc="32" strike="noStrike">
                 <a:solidFill>
                   <a:srgbClr val="0984e3"/>
                 </a:solidFill>
@@ -7086,7 +7093,7 @@
         <p:spPr>
           <a:xfrm>
             <a:off x="379440" y="683280"/>
-            <a:ext cx="11660400" cy="453960"/>
+            <a:ext cx="11657160" cy="451800"/>
           </a:xfrm>
           <a:prstGeom prst="rect">
             <a:avLst/>
@@ -7138,7 +7145,7 @@
         <p:spPr>
           <a:xfrm>
             <a:off x="379440" y="1366200"/>
-            <a:ext cx="5682240" cy="302040"/>
+            <a:ext cx="5679720" cy="299880"/>
           </a:xfrm>
           <a:prstGeom prst="rect">
             <a:avLst/>
@@ -7190,7 +7197,7 @@
         <p:spPr>
           <a:xfrm>
             <a:off x="379440" y="1826280"/>
-            <a:ext cx="5096160" cy="465840"/>
+            <a:ext cx="5093640" cy="463680"/>
           </a:xfrm>
           <a:prstGeom prst="rect">
             <a:avLst/>
@@ -7242,7 +7249,7 @@
         <p:spPr>
           <a:xfrm>
             <a:off x="379440" y="2452680"/>
-            <a:ext cx="5644080" cy="738720"/>
+            <a:ext cx="5641560" cy="736560"/>
           </a:xfrm>
           <a:prstGeom prst="rect">
             <a:avLst/>
@@ -7294,7 +7301,7 @@
         <p:spPr>
           <a:xfrm>
             <a:off x="398520" y="3306600"/>
-            <a:ext cx="5549400" cy="757440"/>
+            <a:ext cx="5546880" cy="755280"/>
           </a:xfrm>
           <a:custGeom>
             <a:avLst/>
@@ -7345,7 +7352,7 @@
         <p:spPr>
           <a:xfrm>
             <a:off x="398520" y="3306600"/>
-            <a:ext cx="36360" cy="757440"/>
+            <a:ext cx="34200" cy="755280"/>
           </a:xfrm>
           <a:custGeom>
             <a:avLst/>
@@ -7396,7 +7403,7 @@
         <p:spPr>
           <a:xfrm>
             <a:off x="569160" y="3458520"/>
-            <a:ext cx="5302800" cy="453960"/>
+            <a:ext cx="5300280" cy="451800"/>
           </a:xfrm>
           <a:prstGeom prst="rect">
             <a:avLst/>
@@ -7489,7 +7496,7 @@
         <p:spPr>
           <a:xfrm>
             <a:off x="379440" y="4217400"/>
-            <a:ext cx="5682240" cy="302040"/>
+            <a:ext cx="5679720" cy="299880"/>
           </a:xfrm>
           <a:prstGeom prst="rect">
             <a:avLst/>
@@ -7541,7 +7548,7 @@
         <p:spPr>
           <a:xfrm>
             <a:off x="379440" y="4635000"/>
-            <a:ext cx="5644080" cy="738720"/>
+            <a:ext cx="5641560" cy="736560"/>
           </a:xfrm>
           <a:prstGeom prst="rect">
             <a:avLst/>
@@ -7592,8 +7599,8 @@
         </p:nvSpPr>
         <p:spPr>
           <a:xfrm>
-            <a:off x="6249600" y="1366200"/>
-            <a:ext cx="5682240" cy="302040"/>
+            <a:off x="6249240" y="1366200"/>
+            <a:ext cx="5679720" cy="299880"/>
           </a:xfrm>
           <a:prstGeom prst="rect">
             <a:avLst/>
@@ -7644,8 +7651,8 @@
         </p:nvSpPr>
         <p:spPr>
           <a:xfrm>
-            <a:off x="6249600" y="1826280"/>
-            <a:ext cx="5249520" cy="465840"/>
+            <a:off x="6249240" y="1826280"/>
+            <a:ext cx="5247000" cy="463680"/>
           </a:xfrm>
           <a:prstGeom prst="rect">
             <a:avLst/>
@@ -7696,8 +7703,8 @@
         </p:nvSpPr>
         <p:spPr>
           <a:xfrm>
-            <a:off x="6249600" y="2452680"/>
-            <a:ext cx="5644080" cy="738720"/>
+            <a:off x="6249240" y="2452680"/>
+            <a:ext cx="5641560" cy="736560"/>
           </a:xfrm>
           <a:prstGeom prst="rect">
             <a:avLst/>
@@ -7748,8 +7755,8 @@
         </p:nvSpPr>
         <p:spPr>
           <a:xfrm>
-            <a:off x="6249600" y="3344400"/>
-            <a:ext cx="5568480" cy="2180880"/>
+            <a:off x="6249240" y="3344400"/>
+            <a:ext cx="5565960" cy="2178720"/>
           </a:xfrm>
           <a:custGeom>
             <a:avLst/>
@@ -7799,8 +7806,8 @@
         </p:nvSpPr>
         <p:spPr>
           <a:xfrm>
-            <a:off x="6439320" y="3534120"/>
-            <a:ext cx="5283720" cy="264240"/>
+            <a:off x="6438960" y="3534120"/>
+            <a:ext cx="5281200" cy="262080"/>
           </a:xfrm>
           <a:prstGeom prst="rect">
             <a:avLst/>
@@ -7851,8 +7858,8 @@
         </p:nvSpPr>
         <p:spPr>
           <a:xfrm>
-            <a:off x="6439320" y="3913920"/>
-            <a:ext cx="5264640" cy="245160"/>
+            <a:off x="6438960" y="3913920"/>
+            <a:ext cx="5262120" cy="243000"/>
           </a:xfrm>
           <a:prstGeom prst="rect">
             <a:avLst/>
@@ -7903,8 +7910,8 @@
         </p:nvSpPr>
         <p:spPr>
           <a:xfrm>
-            <a:off x="6439320" y="4274280"/>
-            <a:ext cx="5188680" cy="453960"/>
+            <a:off x="6438960" y="4274280"/>
+            <a:ext cx="5186160" cy="451800"/>
           </a:xfrm>
           <a:custGeom>
             <a:avLst/>
@@ -7954,25 +7961,25 @@
         </p:nvSpPr>
         <p:spPr>
           <a:xfrm>
-            <a:off x="6439320" y="4274280"/>
-            <a:ext cx="5264640" cy="453960"/>
-          </a:xfrm>
-          <a:prstGeom prst="rect">
-            <a:avLst/>
-          </a:prstGeom>
-          <a:noFill/>
-          <a:ln w="0">
-            <a:noFill/>
-          </a:ln>
-        </p:spPr>
-        <p:style>
-          <a:lnRef idx="0"/>
-          <a:fillRef idx="0"/>
-          <a:effectRef idx="0"/>
-          <a:fontRef idx="minor"/>
-        </p:style>
-        <p:txBody>
-          <a:bodyPr lIns="113760" rIns="113760" tIns="454320" bIns="454320" anchor="ctr">
+            <a:off x="6438960" y="4274280"/>
+            <a:ext cx="5262120" cy="451800"/>
+          </a:xfrm>
+          <a:prstGeom prst="rect">
+            <a:avLst/>
+          </a:prstGeom>
+          <a:noFill/>
+          <a:ln w="0">
+            <a:noFill/>
+          </a:ln>
+        </p:spPr>
+        <p:style>
+          <a:lnRef idx="0"/>
+          <a:fillRef idx="0"/>
+          <a:effectRef idx="0"/>
+          <a:fontRef idx="minor"/>
+        </p:style>
+        <p:txBody>
+          <a:bodyPr lIns="113760" rIns="113760" tIns="452160" bIns="452160" anchor="ctr">
             <a:noAutofit/>
           </a:bodyPr>
           <a:p>
@@ -8006,8 +8013,8 @@
         </p:nvSpPr>
         <p:spPr>
           <a:xfrm>
-            <a:off x="6439320" y="4843440"/>
-            <a:ext cx="5264640" cy="491760"/>
+            <a:off x="6438960" y="4843440"/>
+            <a:ext cx="5262120" cy="489600"/>
           </a:xfrm>
           <a:prstGeom prst="rect">
             <a:avLst/>
@@ -8058,8 +8065,8 @@
         </p:nvSpPr>
         <p:spPr>
           <a:xfrm>
-            <a:off x="6268680" y="5678640"/>
-            <a:ext cx="5549400" cy="795600"/>
+            <a:off x="6268320" y="5678640"/>
+            <a:ext cx="5546880" cy="793440"/>
           </a:xfrm>
           <a:custGeom>
             <a:avLst/>
@@ -8109,8 +8116,8 @@
         </p:nvSpPr>
         <p:spPr>
           <a:xfrm>
-            <a:off x="6268680" y="5678640"/>
-            <a:ext cx="36360" cy="795600"/>
+            <a:off x="6268320" y="5678640"/>
+            <a:ext cx="34200" cy="793440"/>
           </a:xfrm>
           <a:custGeom>
             <a:avLst/>
@@ -8160,8 +8167,8 @@
         </p:nvSpPr>
         <p:spPr>
           <a:xfrm>
-            <a:off x="6439320" y="5830200"/>
-            <a:ext cx="5302800" cy="491760"/>
+            <a:off x="6438960" y="5830200"/>
+            <a:ext cx="5300280" cy="489600"/>
           </a:xfrm>
           <a:prstGeom prst="rect">
             <a:avLst/>
@@ -8260,7 +8267,7 @@
         <p:spPr>
           <a:xfrm>
             <a:off x="609480" y="2066760"/>
-            <a:ext cx="12191760" cy="1217880"/>
+            <a:ext cx="12188520" cy="1215720"/>
           </a:xfrm>
           <a:prstGeom prst="rect">
             <a:avLst/>
@@ -8314,7 +8321,7 @@
         <p:spPr>
           <a:xfrm>
             <a:off x="609480" y="3438360"/>
-            <a:ext cx="11867760" cy="570240"/>
+            <a:ext cx="11864520" cy="568080"/>
           </a:xfrm>
           <a:prstGeom prst="rect">
             <a:avLst/>
@@ -8366,7 +8373,7 @@
         <p:spPr>
           <a:xfrm>
             <a:off x="609480" y="4238640"/>
-            <a:ext cx="1217880" cy="17640"/>
+            <a:ext cx="1215720" cy="15480"/>
           </a:xfrm>
           <a:custGeom>
             <a:avLst/>
@@ -8417,7 +8424,7 @@
         <p:spPr>
           <a:xfrm>
             <a:off x="609480" y="4486320"/>
-            <a:ext cx="11696400" cy="303480"/>
+            <a:ext cx="11693160" cy="301320"/>
           </a:xfrm>
           <a:prstGeom prst="rect">
             <a:avLst/>
@@ -8506,7 +8513,7 @@
         <p:spPr>
           <a:xfrm>
             <a:off x="356400" y="356400"/>
-            <a:ext cx="11550600" cy="212400"/>
+            <a:ext cx="11547360" cy="210240"/>
           </a:xfrm>
           <a:prstGeom prst="rect">
             <a:avLst/>
@@ -8534,7 +8541,7 @@
               <a:buNone/>
             </a:pPr>
             <a:r>
-              <a:rPr b="1" lang="en-US" sz="1120" spc="46" strike="noStrike">
+              <a:rPr b="1" lang="en-US" sz="1120" spc="29" strike="noStrike">
                 <a:solidFill>
                   <a:srgbClr val="0984e3"/>
                 </a:solidFill>
@@ -8558,7 +8565,7 @@
         <p:spPr>
           <a:xfrm>
             <a:off x="356400" y="641160"/>
-            <a:ext cx="11692800" cy="425880"/>
+            <a:ext cx="11689560" cy="423720"/>
           </a:xfrm>
           <a:prstGeom prst="rect">
             <a:avLst/>
@@ -8610,7 +8617,7 @@
         <p:spPr>
           <a:xfrm>
             <a:off x="360720" y="1287000"/>
-            <a:ext cx="3694680" cy="2625840"/>
+            <a:ext cx="3692160" cy="2623680"/>
           </a:xfrm>
           <a:custGeom>
             <a:avLst/>
@@ -8664,7 +8671,7 @@
         <p:spPr>
           <a:xfrm>
             <a:off x="543240" y="1469520"/>
-            <a:ext cx="425880" cy="425880"/>
+            <a:ext cx="423720" cy="423720"/>
           </a:xfrm>
           <a:custGeom>
             <a:avLst/>
@@ -8715,7 +8722,7 @@
         <p:spPr>
           <a:xfrm>
             <a:off x="656640" y="1594080"/>
-            <a:ext cx="199080" cy="176760"/>
+            <a:ext cx="196920" cy="174600"/>
           </a:xfrm>
           <a:custGeom>
             <a:avLst/>
@@ -8912,7 +8919,7 @@
         <p:spPr>
           <a:xfrm>
             <a:off x="1077480" y="1558440"/>
-            <a:ext cx="2341080" cy="248040"/>
+            <a:ext cx="2338560" cy="245880"/>
           </a:xfrm>
           <a:prstGeom prst="rect">
             <a:avLst/>
@@ -8964,7 +8971,7 @@
         <p:spPr>
           <a:xfrm>
             <a:off x="543240" y="2003760"/>
-            <a:ext cx="3400920" cy="693360"/>
+            <a:ext cx="3398400" cy="691200"/>
           </a:xfrm>
           <a:prstGeom prst="rect">
             <a:avLst/>
@@ -9026,7 +9033,7 @@
         <p:spPr>
           <a:xfrm>
             <a:off x="543240" y="2805480"/>
-            <a:ext cx="3400920" cy="924840"/>
+            <a:ext cx="3398400" cy="922680"/>
           </a:xfrm>
           <a:prstGeom prst="rect">
             <a:avLst/>
@@ -9087,8 +9094,8 @@
         </p:nvSpPr>
         <p:spPr>
           <a:xfrm>
-            <a:off x="4246560" y="1287000"/>
-            <a:ext cx="3694680" cy="2625840"/>
+            <a:off x="4246200" y="1287000"/>
+            <a:ext cx="3692160" cy="2623680"/>
           </a:xfrm>
           <a:custGeom>
             <a:avLst/>
@@ -9141,8 +9148,8 @@
         </p:nvSpPr>
         <p:spPr>
           <a:xfrm>
-            <a:off x="4429080" y="1469520"/>
-            <a:ext cx="425880" cy="425880"/>
+            <a:off x="4428720" y="1469520"/>
+            <a:ext cx="423720" cy="423720"/>
           </a:xfrm>
           <a:custGeom>
             <a:avLst/>
@@ -9192,8 +9199,8 @@
         </p:nvSpPr>
         <p:spPr>
           <a:xfrm>
-            <a:off x="4542480" y="1594080"/>
-            <a:ext cx="199080" cy="176760"/>
+            <a:off x="4542120" y="1594080"/>
+            <a:ext cx="196920" cy="174600"/>
           </a:xfrm>
           <a:custGeom>
             <a:avLst/>
@@ -9344,8 +9351,8 @@
         </p:nvSpPr>
         <p:spPr>
           <a:xfrm>
-            <a:off x="4963320" y="1558440"/>
-            <a:ext cx="2430360" cy="248040"/>
+            <a:off x="4962960" y="1558440"/>
+            <a:ext cx="2427840" cy="245880"/>
           </a:xfrm>
           <a:prstGeom prst="rect">
             <a:avLst/>
@@ -9396,8 +9403,8 @@
         </p:nvSpPr>
         <p:spPr>
           <a:xfrm>
-            <a:off x="4429080" y="2003760"/>
-            <a:ext cx="3400920" cy="693360"/>
+            <a:off x="4428720" y="2003760"/>
+            <a:ext cx="3398400" cy="691200"/>
           </a:xfrm>
           <a:prstGeom prst="rect">
             <a:avLst/>
@@ -9458,8 +9465,8 @@
         </p:nvSpPr>
         <p:spPr>
           <a:xfrm>
-            <a:off x="4429080" y="2805480"/>
-            <a:ext cx="3400920" cy="693360"/>
+            <a:off x="4428720" y="2805480"/>
+            <a:ext cx="3398400" cy="691200"/>
           </a:xfrm>
           <a:prstGeom prst="rect">
             <a:avLst/>
@@ -9520,8 +9527,8 @@
         </p:nvSpPr>
         <p:spPr>
           <a:xfrm>
-            <a:off x="8132040" y="1287000"/>
-            <a:ext cx="3694680" cy="2625840"/>
+            <a:off x="8131680" y="1287000"/>
+            <a:ext cx="3692160" cy="2623680"/>
           </a:xfrm>
           <a:custGeom>
             <a:avLst/>
@@ -9574,8 +9581,8 @@
         </p:nvSpPr>
         <p:spPr>
           <a:xfrm>
-            <a:off x="8314920" y="1469520"/>
-            <a:ext cx="425880" cy="425880"/>
+            <a:off x="8314200" y="1469520"/>
+            <a:ext cx="423720" cy="423720"/>
           </a:xfrm>
           <a:custGeom>
             <a:avLst/>
@@ -9625,8 +9632,8 @@
         </p:nvSpPr>
         <p:spPr>
           <a:xfrm>
-            <a:off x="8439840" y="1594080"/>
-            <a:ext cx="176760" cy="176760"/>
+            <a:off x="8439120" y="1594080"/>
+            <a:ext cx="174600" cy="174600"/>
           </a:xfrm>
           <a:custGeom>
             <a:avLst/>
@@ -9725,8 +9732,8 @@
         </p:nvSpPr>
         <p:spPr>
           <a:xfrm>
-            <a:off x="8849520" y="1558440"/>
-            <a:ext cx="2038320" cy="248040"/>
+            <a:off x="8848800" y="1558440"/>
+            <a:ext cx="2035800" cy="245880"/>
           </a:xfrm>
           <a:prstGeom prst="rect">
             <a:avLst/>
@@ -9777,8 +9784,8 @@
         </p:nvSpPr>
         <p:spPr>
           <a:xfrm>
-            <a:off x="8314920" y="2003760"/>
-            <a:ext cx="3400920" cy="693360"/>
+            <a:off x="8314200" y="2003760"/>
+            <a:ext cx="3398400" cy="691200"/>
           </a:xfrm>
           <a:prstGeom prst="rect">
             <a:avLst/>
@@ -9839,8 +9846,8 @@
         </p:nvSpPr>
         <p:spPr>
           <a:xfrm>
-            <a:off x="8314920" y="2805480"/>
-            <a:ext cx="3400920" cy="693360"/>
+            <a:off x="8314200" y="2805480"/>
+            <a:ext cx="3398400" cy="691200"/>
           </a:xfrm>
           <a:prstGeom prst="rect">
             <a:avLst/>
@@ -9902,7 +9909,7 @@
         <p:spPr>
           <a:xfrm>
             <a:off x="360720" y="4101120"/>
-            <a:ext cx="3694680" cy="2394360"/>
+            <a:ext cx="3692160" cy="2392200"/>
           </a:xfrm>
           <a:custGeom>
             <a:avLst/>
@@ -9956,7 +9963,7 @@
         <p:spPr>
           <a:xfrm>
             <a:off x="543240" y="4283640"/>
-            <a:ext cx="425880" cy="425880"/>
+            <a:ext cx="423720" cy="423720"/>
           </a:xfrm>
           <a:custGeom>
             <a:avLst/>
@@ -10007,7 +10014,7 @@
         <p:spPr>
           <a:xfrm>
             <a:off x="645840" y="4408200"/>
-            <a:ext cx="221040" cy="176760"/>
+            <a:ext cx="218880" cy="174600"/>
           </a:xfrm>
           <a:custGeom>
             <a:avLst/>
@@ -10239,7 +10246,7 @@
         <p:spPr>
           <a:xfrm>
             <a:off x="1077480" y="4372560"/>
-            <a:ext cx="1931040" cy="248040"/>
+            <a:ext cx="1928880" cy="245880"/>
           </a:xfrm>
           <a:prstGeom prst="rect">
             <a:avLst/>
@@ -10291,7 +10298,7 @@
         <p:spPr>
           <a:xfrm>
             <a:off x="543240" y="4817880"/>
-            <a:ext cx="3400920" cy="693360"/>
+            <a:ext cx="3398400" cy="691200"/>
           </a:xfrm>
           <a:prstGeom prst="rect">
             <a:avLst/>
@@ -10353,7 +10360,7 @@
         <p:spPr>
           <a:xfrm>
             <a:off x="543240" y="5619600"/>
-            <a:ext cx="3400920" cy="693360"/>
+            <a:ext cx="3398400" cy="691200"/>
           </a:xfrm>
           <a:prstGeom prst="rect">
             <a:avLst/>
@@ -10414,8 +10421,8 @@
         </p:nvSpPr>
         <p:spPr>
           <a:xfrm>
-            <a:off x="4246560" y="4101120"/>
-            <a:ext cx="7587000" cy="2394360"/>
+            <a:off x="4246200" y="4101120"/>
+            <a:ext cx="7584120" cy="2392200"/>
           </a:xfrm>
           <a:custGeom>
             <a:avLst/>
@@ -10468,8 +10475,8 @@
         </p:nvSpPr>
         <p:spPr>
           <a:xfrm>
-            <a:off x="4429080" y="4283640"/>
-            <a:ext cx="425880" cy="425880"/>
+            <a:off x="4428720" y="4283640"/>
+            <a:ext cx="423720" cy="423720"/>
           </a:xfrm>
           <a:custGeom>
             <a:avLst/>
@@ -10519,8 +10526,8 @@
         </p:nvSpPr>
         <p:spPr>
           <a:xfrm>
-            <a:off x="4553640" y="4408200"/>
-            <a:ext cx="176760" cy="176760"/>
+            <a:off x="4553280" y="4408200"/>
+            <a:ext cx="174600" cy="174600"/>
           </a:xfrm>
           <a:custGeom>
             <a:avLst/>
@@ -10652,8 +10659,8 @@
         </p:nvSpPr>
         <p:spPr>
           <a:xfrm>
-            <a:off x="4963320" y="4372560"/>
-            <a:ext cx="2047320" cy="248040"/>
+            <a:off x="4962960" y="4372560"/>
+            <a:ext cx="2044800" cy="245880"/>
           </a:xfrm>
           <a:prstGeom prst="rect">
             <a:avLst/>
@@ -10704,8 +10711,8 @@
         </p:nvSpPr>
         <p:spPr>
           <a:xfrm>
-            <a:off x="4429080" y="4817880"/>
-            <a:ext cx="3605760" cy="693360"/>
+            <a:off x="4428720" y="4817880"/>
+            <a:ext cx="3603240" cy="691200"/>
           </a:xfrm>
           <a:prstGeom prst="rect">
             <a:avLst/>
@@ -10766,8 +10773,8 @@
         </p:nvSpPr>
         <p:spPr>
           <a:xfrm>
-            <a:off x="4429080" y="5583960"/>
-            <a:ext cx="3605760" cy="461520"/>
+            <a:off x="4428720" y="5583960"/>
+            <a:ext cx="3603240" cy="459360"/>
           </a:xfrm>
           <a:prstGeom prst="rect">
             <a:avLst/>
@@ -10818,8 +10825,8 @@
         </p:nvSpPr>
         <p:spPr>
           <a:xfrm>
-            <a:off x="8109720" y="4817880"/>
-            <a:ext cx="3605760" cy="693360"/>
+            <a:off x="8109360" y="4817880"/>
+            <a:ext cx="3603240" cy="691200"/>
           </a:xfrm>
           <a:prstGeom prst="rect">
             <a:avLst/>
@@ -10880,8 +10887,8 @@
         </p:nvSpPr>
         <p:spPr>
           <a:xfrm>
-            <a:off x="8109720" y="5583960"/>
-            <a:ext cx="3605760" cy="461520"/>
+            <a:off x="8109360" y="5583960"/>
+            <a:ext cx="3603240" cy="459360"/>
           </a:xfrm>
           <a:prstGeom prst="rect">
             <a:avLst/>
@@ -10970,7 +10977,7 @@
         <p:spPr>
           <a:xfrm>
             <a:off x="609480" y="2066760"/>
-            <a:ext cx="12191760" cy="1217880"/>
+            <a:ext cx="12188520" cy="1215720"/>
           </a:xfrm>
           <a:prstGeom prst="rect">
             <a:avLst/>
@@ -11024,7 +11031,7 @@
         <p:spPr>
           <a:xfrm>
             <a:off x="609480" y="3438360"/>
-            <a:ext cx="11867760" cy="570240"/>
+            <a:ext cx="11864520" cy="568080"/>
           </a:xfrm>
           <a:prstGeom prst="rect">
             <a:avLst/>
@@ -11076,7 +11083,7 @@
         <p:spPr>
           <a:xfrm>
             <a:off x="609480" y="4238640"/>
-            <a:ext cx="1217880" cy="17640"/>
+            <a:ext cx="1215720" cy="15480"/>
           </a:xfrm>
           <a:custGeom>
             <a:avLst/>
@@ -11127,7 +11134,7 @@
         <p:spPr>
           <a:xfrm>
             <a:off x="609480" y="4486320"/>
-            <a:ext cx="11696400" cy="303480"/>
+            <a:ext cx="11693160" cy="301320"/>
           </a:xfrm>
           <a:prstGeom prst="rect">
             <a:avLst/>
@@ -11216,7 +11223,7 @@
         <p:spPr>
           <a:xfrm>
             <a:off x="380880" y="380880"/>
-            <a:ext cx="11505960" cy="227160"/>
+            <a:ext cx="11502720" cy="225000"/>
           </a:xfrm>
           <a:prstGeom prst="rect">
             <a:avLst/>
@@ -11244,7 +11251,7 @@
               <a:buNone/>
             </a:pPr>
             <a:r>
-              <a:rPr b="1" lang="en-US" sz="1200" spc="49" strike="noStrike">
+              <a:rPr b="1" lang="en-US" sz="1200" spc="32" strike="noStrike">
                 <a:solidFill>
                   <a:srgbClr val="0984e3"/>
                 </a:solidFill>
@@ -11268,7 +11275,7 @@
         <p:spPr>
           <a:xfrm>
             <a:off x="380880" y="685800"/>
-            <a:ext cx="11658240" cy="455760"/>
+            <a:ext cx="11655000" cy="453600"/>
           </a:xfrm>
           <a:prstGeom prst="rect">
             <a:avLst/>
@@ -11320,7 +11327,7 @@
         <p:spPr>
           <a:xfrm>
             <a:off x="380880" y="1295280"/>
-            <a:ext cx="5656680" cy="1236960"/>
+            <a:ext cx="5654160" cy="1234800"/>
           </a:xfrm>
           <a:prstGeom prst="rect">
             <a:avLst/>
@@ -11382,7 +11389,7 @@
         <p:spPr>
           <a:xfrm>
             <a:off x="380880" y="2647800"/>
-            <a:ext cx="5637600" cy="741600"/>
+            <a:ext cx="5635080" cy="739440"/>
           </a:xfrm>
           <a:prstGeom prst="rect">
             <a:avLst/>
@@ -11434,7 +11441,7 @@
         <p:spPr>
           <a:xfrm>
             <a:off x="385920" y="3548160"/>
-            <a:ext cx="5551920" cy="2027520"/>
+            <a:ext cx="5549400" cy="2025360"/>
           </a:xfrm>
           <a:custGeom>
             <a:avLst/>
@@ -11488,7 +11495,7 @@
         <p:spPr>
           <a:xfrm>
             <a:off x="495360" y="3705120"/>
-            <a:ext cx="5333040" cy="265320"/>
+            <a:ext cx="5330520" cy="263160"/>
           </a:xfrm>
           <a:prstGeom prst="rect">
             <a:avLst/>
@@ -11539,7 +11546,7 @@
         </p:nvGraphicFramePr>
         <p:xfrm>
           <a:off x="542880" y="4086360"/>
-          <a:ext cx="5238360" cy="1065960"/>
+          <a:ext cx="5238000" cy="1065960"/>
         </p:xfrm>
         <a:graphic>
           <a:graphicData uri="http://schemas.openxmlformats.org/drawingml/2006/table">
@@ -12014,7 +12021,7 @@
         <p:spPr>
           <a:xfrm>
             <a:off x="509760" y="5229360"/>
-            <a:ext cx="5304240" cy="189000"/>
+            <a:ext cx="5301720" cy="186840"/>
           </a:xfrm>
           <a:prstGeom prst="rect">
             <a:avLst/>
@@ -12065,8 +12072,8 @@
         </p:nvSpPr>
         <p:spPr>
           <a:xfrm>
-            <a:off x="6253560" y="1300320"/>
-            <a:ext cx="5551920" cy="1608120"/>
+            <a:off x="6253200" y="1300320"/>
+            <a:ext cx="5549400" cy="1605960"/>
           </a:xfrm>
           <a:custGeom>
             <a:avLst/>
@@ -12119,8 +12126,8 @@
         </p:nvSpPr>
         <p:spPr>
           <a:xfrm>
-            <a:off x="6448680" y="1495440"/>
-            <a:ext cx="5256720" cy="265320"/>
+            <a:off x="6448320" y="1495440"/>
+            <a:ext cx="5254200" cy="263160"/>
           </a:xfrm>
           <a:prstGeom prst="rect">
             <a:avLst/>
@@ -12171,8 +12178,8 @@
         </p:nvSpPr>
         <p:spPr>
           <a:xfrm>
-            <a:off x="6448680" y="1876320"/>
-            <a:ext cx="5237640" cy="227160"/>
+            <a:off x="6448320" y="1876320"/>
+            <a:ext cx="5235120" cy="225000"/>
           </a:xfrm>
           <a:prstGeom prst="rect">
             <a:avLst/>
@@ -12233,8 +12240,8 @@
         </p:nvSpPr>
         <p:spPr>
           <a:xfrm>
-            <a:off x="6448680" y="2181240"/>
-            <a:ext cx="5237640" cy="227160"/>
+            <a:off x="6448320" y="2181240"/>
+            <a:ext cx="5235120" cy="225000"/>
           </a:xfrm>
           <a:prstGeom prst="rect">
             <a:avLst/>
@@ -12295,8 +12302,8 @@
         </p:nvSpPr>
         <p:spPr>
           <a:xfrm>
-            <a:off x="6448680" y="2486160"/>
-            <a:ext cx="5237640" cy="227160"/>
+            <a:off x="6448320" y="2486160"/>
+            <a:ext cx="5235120" cy="225000"/>
           </a:xfrm>
           <a:prstGeom prst="rect">
             <a:avLst/>
@@ -12347,8 +12354,8 @@
         </p:nvSpPr>
         <p:spPr>
           <a:xfrm>
-            <a:off x="6267960" y="3067200"/>
-            <a:ext cx="5542560" cy="2132280"/>
+            <a:off x="6267600" y="3067200"/>
+            <a:ext cx="5540040" cy="2130120"/>
           </a:xfrm>
           <a:custGeom>
             <a:avLst/>
@@ -12398,8 +12405,8 @@
         </p:nvSpPr>
         <p:spPr>
           <a:xfrm>
-            <a:off x="6267960" y="3067200"/>
-            <a:ext cx="36720" cy="2132280"/>
+            <a:off x="6267600" y="3067200"/>
+            <a:ext cx="34560" cy="2130120"/>
           </a:xfrm>
           <a:custGeom>
             <a:avLst/>
@@ -12449,8 +12456,8 @@
         </p:nvSpPr>
         <p:spPr>
           <a:xfrm>
-            <a:off x="6477480" y="3257640"/>
-            <a:ext cx="5237640" cy="265320"/>
+            <a:off x="6477120" y="3257640"/>
+            <a:ext cx="5235120" cy="263160"/>
           </a:xfrm>
           <a:prstGeom prst="rect">
             <a:avLst/>
@@ -12501,8 +12508,8 @@
         </p:nvSpPr>
         <p:spPr>
           <a:xfrm>
-            <a:off x="6496560" y="3672000"/>
-            <a:ext cx="150840" cy="150840"/>
+            <a:off x="6496200" y="3672000"/>
+            <a:ext cx="148680" cy="148680"/>
           </a:xfrm>
           <a:custGeom>
             <a:avLst/>
@@ -12625,8 +12632,8 @@
         </p:nvSpPr>
         <p:spPr>
           <a:xfrm>
-            <a:off x="6725160" y="3638520"/>
-            <a:ext cx="4970880" cy="455760"/>
+            <a:off x="6724800" y="3638520"/>
+            <a:ext cx="4968360" cy="453600"/>
           </a:xfrm>
           <a:prstGeom prst="rect">
             <a:avLst/>
@@ -12687,8 +12694,8 @@
         </p:nvSpPr>
         <p:spPr>
           <a:xfrm>
-            <a:off x="6496560" y="4205160"/>
-            <a:ext cx="150840" cy="150840"/>
+            <a:off x="6496200" y="4205160"/>
+            <a:ext cx="148680" cy="148680"/>
           </a:xfrm>
           <a:custGeom>
             <a:avLst/>
@@ -12810,8 +12817,8 @@
         </p:nvSpPr>
         <p:spPr>
           <a:xfrm>
-            <a:off x="6725160" y="4172040"/>
-            <a:ext cx="4970880" cy="227160"/>
+            <a:off x="6724800" y="4172040"/>
+            <a:ext cx="4968360" cy="225000"/>
           </a:xfrm>
           <a:prstGeom prst="rect">
             <a:avLst/>
@@ -12872,8 +12879,8 @@
         </p:nvSpPr>
         <p:spPr>
           <a:xfrm>
-            <a:off x="6515640" y="4510080"/>
-            <a:ext cx="113040" cy="150840"/>
+            <a:off x="6515280" y="4510080"/>
+            <a:ext cx="110880" cy="148680"/>
           </a:xfrm>
           <a:custGeom>
             <a:avLst/>
@@ -13113,8 +13120,8 @@
         </p:nvSpPr>
         <p:spPr>
           <a:xfrm>
-            <a:off x="6725160" y="4476600"/>
-            <a:ext cx="4970880" cy="227160"/>
+            <a:off x="6724800" y="4476600"/>
+            <a:ext cx="4968360" cy="225000"/>
           </a:xfrm>
           <a:prstGeom prst="rect">
             <a:avLst/>
@@ -13175,8 +13182,8 @@
         </p:nvSpPr>
         <p:spPr>
           <a:xfrm>
-            <a:off x="6486840" y="4815000"/>
-            <a:ext cx="169920" cy="150840"/>
+            <a:off x="6486480" y="4815000"/>
+            <a:ext cx="167760" cy="148680"/>
           </a:xfrm>
           <a:custGeom>
             <a:avLst/>
@@ -13411,8 +13418,8 @@
         </p:nvSpPr>
         <p:spPr>
           <a:xfrm>
-            <a:off x="6725160" y="4781520"/>
-            <a:ext cx="4970880" cy="227160"/>
+            <a:off x="6724800" y="4781520"/>
+            <a:ext cx="4968360" cy="225000"/>
           </a:xfrm>
           <a:prstGeom prst="rect">
             <a:avLst/>
@@ -13511,7 +13518,7 @@
         <p:spPr>
           <a:xfrm>
             <a:off x="358560" y="358560"/>
-            <a:ext cx="11546280" cy="213840"/>
+            <a:ext cx="11543040" cy="211680"/>
           </a:xfrm>
           <a:prstGeom prst="rect">
             <a:avLst/>
@@ -13539,7 +13546,7 @@
               <a:buNone/>
             </a:pPr>
             <a:r>
-              <a:rPr b="1" lang="en-US" sz="1130" spc="46" strike="noStrike">
+              <a:rPr b="1" lang="en-US" sz="1130" spc="29" strike="noStrike">
                 <a:solidFill>
                   <a:srgbClr val="0984e3"/>
                 </a:solidFill>
@@ -13563,7 +13570,7 @@
         <p:spPr>
           <a:xfrm>
             <a:off x="358560" y="645480"/>
-            <a:ext cx="11689560" cy="428760"/>
+            <a:ext cx="11686320" cy="426600"/>
           </a:xfrm>
           <a:prstGeom prst="rect">
             <a:avLst/>
@@ -13615,7 +13622,7 @@
         <p:spPr>
           <a:xfrm>
             <a:off x="358560" y="1290960"/>
-            <a:ext cx="5700600" cy="285480"/>
+            <a:ext cx="5698080" cy="283320"/>
           </a:xfrm>
           <a:prstGeom prst="rect">
             <a:avLst/>
@@ -13667,7 +13674,7 @@
         <p:spPr>
           <a:xfrm>
             <a:off x="358560" y="1725840"/>
-            <a:ext cx="5473440" cy="439920"/>
+            <a:ext cx="5470920" cy="437760"/>
           </a:xfrm>
           <a:prstGeom prst="rect">
             <a:avLst/>
@@ -13719,7 +13726,7 @@
         <p:spPr>
           <a:xfrm>
             <a:off x="358560" y="2317320"/>
-            <a:ext cx="5664600" cy="464760"/>
+            <a:ext cx="5662080" cy="462600"/>
           </a:xfrm>
           <a:prstGeom prst="rect">
             <a:avLst/>
@@ -13771,7 +13778,7 @@
         <p:spPr>
           <a:xfrm>
             <a:off x="363240" y="2931480"/>
-            <a:ext cx="5583960" cy="1872360"/>
+            <a:ext cx="5581440" cy="1870200"/>
           </a:xfrm>
           <a:custGeom>
             <a:avLst/>
@@ -13825,7 +13832,7 @@
         <p:spPr>
           <a:xfrm>
             <a:off x="470520" y="3079440"/>
-            <a:ext cx="5368680" cy="249480"/>
+            <a:ext cx="5366160" cy="247320"/>
           </a:xfrm>
           <a:prstGeom prst="rect">
             <a:avLst/>
@@ -13876,7 +13883,7 @@
         </p:nvGraphicFramePr>
         <p:xfrm>
           <a:off x="510840" y="3402000"/>
-          <a:ext cx="5288760" cy="1003320"/>
+          <a:ext cx="5288400" cy="1003320"/>
         </p:xfrm>
         <a:graphic>
           <a:graphicData uri="http://schemas.openxmlformats.org/drawingml/2006/table">
@@ -14353,7 +14360,7 @@
         <p:spPr>
           <a:xfrm>
             <a:off x="479520" y="4478040"/>
-            <a:ext cx="5350680" cy="177840"/>
+            <a:ext cx="5348160" cy="175680"/>
           </a:xfrm>
           <a:prstGeom prst="rect">
             <a:avLst/>
@@ -14405,7 +14412,7 @@
         <p:spPr>
           <a:xfrm>
             <a:off x="376560" y="4952880"/>
-            <a:ext cx="5574960" cy="751680"/>
+            <a:ext cx="5572440" cy="749520"/>
           </a:xfrm>
           <a:custGeom>
             <a:avLst/>
@@ -14456,7 +14463,7 @@
         <p:spPr>
           <a:xfrm>
             <a:off x="376560" y="4952880"/>
-            <a:ext cx="34560" cy="751680"/>
+            <a:ext cx="32400" cy="749520"/>
           </a:xfrm>
           <a:custGeom>
             <a:avLst/>
@@ -14507,7 +14514,7 @@
         <p:spPr>
           <a:xfrm>
             <a:off x="537840" y="5096520"/>
-            <a:ext cx="5342040" cy="464760"/>
+            <a:ext cx="5339520" cy="462600"/>
           </a:xfrm>
           <a:prstGeom prst="rect">
             <a:avLst/>
@@ -14568,8 +14575,8 @@
         </p:nvSpPr>
         <p:spPr>
           <a:xfrm>
-            <a:off x="6239880" y="1290960"/>
-            <a:ext cx="5700600" cy="285480"/>
+            <a:off x="6239520" y="1290960"/>
+            <a:ext cx="5698080" cy="283320"/>
           </a:xfrm>
           <a:prstGeom prst="rect">
             <a:avLst/>
@@ -14620,8 +14627,8 @@
         </p:nvSpPr>
         <p:spPr>
           <a:xfrm>
-            <a:off x="6239880" y="1685520"/>
-            <a:ext cx="5673600" cy="527400"/>
+            <a:off x="6239520" y="1685520"/>
+            <a:ext cx="5671080" cy="525240"/>
           </a:xfrm>
           <a:prstGeom prst="rect">
             <a:avLst/>
@@ -14682,8 +14689,8 @@
         </p:nvSpPr>
         <p:spPr>
           <a:xfrm>
-            <a:off x="6239880" y="2317320"/>
-            <a:ext cx="5664600" cy="697680"/>
+            <a:off x="6239520" y="2317320"/>
+            <a:ext cx="5662080" cy="695520"/>
           </a:xfrm>
           <a:prstGeom prst="rect">
             <a:avLst/>
@@ -14734,8 +14741,8 @@
         </p:nvSpPr>
         <p:spPr>
           <a:xfrm>
-            <a:off x="6244200" y="3164400"/>
-            <a:ext cx="5583960" cy="1872360"/>
+            <a:off x="6243840" y="3164400"/>
+            <a:ext cx="5581440" cy="1870200"/>
           </a:xfrm>
           <a:custGeom>
             <a:avLst/>
@@ -14788,8 +14795,8 @@
         </p:nvSpPr>
         <p:spPr>
           <a:xfrm>
-            <a:off x="6351840" y="3312360"/>
-            <a:ext cx="5368680" cy="249480"/>
+            <a:off x="6351480" y="3312360"/>
+            <a:ext cx="5366160" cy="247320"/>
           </a:xfrm>
           <a:prstGeom prst="rect">
             <a:avLst/>
@@ -14839,8 +14846,8 @@
           <p:nvPr/>
         </p:nvGraphicFramePr>
         <p:xfrm>
-          <a:off x="6392160" y="3635280"/>
-          <a:ext cx="5288760" cy="1003320"/>
+          <a:off x="6391800" y="3635280"/>
+          <a:ext cx="5288400" cy="1003320"/>
         </p:xfrm>
         <a:graphic>
           <a:graphicData uri="http://schemas.openxmlformats.org/drawingml/2006/table">
@@ -15314,8 +15321,8 @@
         </p:nvSpPr>
         <p:spPr>
           <a:xfrm>
-            <a:off x="6360840" y="4710960"/>
-            <a:ext cx="5350680" cy="177840"/>
+            <a:off x="6360480" y="4710960"/>
+            <a:ext cx="5348160" cy="175680"/>
           </a:xfrm>
           <a:prstGeom prst="rect">
             <a:avLst/>
@@ -15366,8 +15373,8 @@
         </p:nvSpPr>
         <p:spPr>
           <a:xfrm>
-            <a:off x="6239880" y="5186160"/>
-            <a:ext cx="5592960" cy="1307520"/>
+            <a:off x="6239520" y="5186160"/>
+            <a:ext cx="5590440" cy="1305360"/>
           </a:xfrm>
           <a:custGeom>
             <a:avLst/>
@@ -15417,8 +15424,8 @@
         </p:nvSpPr>
         <p:spPr>
           <a:xfrm>
-            <a:off x="6383160" y="5329440"/>
-            <a:ext cx="5386680" cy="249480"/>
+            <a:off x="6382800" y="5329440"/>
+            <a:ext cx="5384160" cy="247320"/>
           </a:xfrm>
           <a:prstGeom prst="rect">
             <a:avLst/>
@@ -15469,8 +15476,8 @@
         </p:nvSpPr>
         <p:spPr>
           <a:xfrm>
-            <a:off x="6383160" y="5652360"/>
-            <a:ext cx="5377680" cy="697680"/>
+            <a:off x="6382800" y="5652360"/>
+            <a:ext cx="5375160" cy="695520"/>
           </a:xfrm>
           <a:prstGeom prst="rect">
             <a:avLst/>
@@ -15559,7 +15566,7 @@
         <p:spPr>
           <a:xfrm>
             <a:off x="609480" y="1781280"/>
-            <a:ext cx="12191760" cy="1217880"/>
+            <a:ext cx="12188520" cy="1215720"/>
           </a:xfrm>
           <a:prstGeom prst="rect">
             <a:avLst/>
@@ -15613,7 +15620,7 @@
         <p:spPr>
           <a:xfrm>
             <a:off x="609480" y="3152880"/>
-            <a:ext cx="11867760" cy="1141560"/>
+            <a:ext cx="11864520" cy="1139400"/>
           </a:xfrm>
           <a:prstGeom prst="rect">
             <a:avLst/>
@@ -15686,7 +15693,7 @@
         <p:spPr>
           <a:xfrm>
             <a:off x="609480" y="4524480"/>
-            <a:ext cx="1217880" cy="17640"/>
+            <a:ext cx="1215720" cy="15480"/>
           </a:xfrm>
           <a:custGeom>
             <a:avLst/>
@@ -15737,7 +15744,7 @@
         <p:spPr>
           <a:xfrm>
             <a:off x="609480" y="4772160"/>
-            <a:ext cx="11696400" cy="303480"/>
+            <a:ext cx="11693160" cy="301320"/>
           </a:xfrm>
           <a:prstGeom prst="rect">
             <a:avLst/>
@@ -15826,7 +15833,7 @@
         <p:spPr>
           <a:xfrm>
             <a:off x="380880" y="380880"/>
-            <a:ext cx="11505960" cy="227160"/>
+            <a:ext cx="11502720" cy="225000"/>
           </a:xfrm>
           <a:prstGeom prst="rect">
             <a:avLst/>
@@ -15854,7 +15861,7 @@
               <a:buNone/>
             </a:pPr>
             <a:r>
-              <a:rPr b="1" lang="en-US" sz="1200" spc="49" strike="noStrike">
+              <a:rPr b="1" lang="en-US" sz="1200" spc="32" strike="noStrike">
                 <a:solidFill>
                   <a:srgbClr val="0984e3"/>
                 </a:solidFill>
@@ -15878,7 +15885,7 @@
         <p:spPr>
           <a:xfrm>
             <a:off x="380880" y="685800"/>
-            <a:ext cx="11658240" cy="455760"/>
+            <a:ext cx="11655000" cy="453600"/>
           </a:xfrm>
           <a:prstGeom prst="rect">
             <a:avLst/>
@@ -15930,7 +15937,7 @@
         <p:spPr>
           <a:xfrm>
             <a:off x="380880" y="1295280"/>
-            <a:ext cx="7647840" cy="932040"/>
+            <a:ext cx="7644960" cy="929880"/>
           </a:xfrm>
           <a:prstGeom prst="rect">
             <a:avLst/>
@@ -15992,7 +15999,7 @@
         <p:spPr>
           <a:xfrm>
             <a:off x="385920" y="2381400"/>
-            <a:ext cx="3694680" cy="1722600"/>
+            <a:ext cx="3692160" cy="1720440"/>
           </a:xfrm>
           <a:custGeom>
             <a:avLst/>
@@ -16046,7 +16053,7 @@
         <p:spPr>
           <a:xfrm>
             <a:off x="542880" y="2538360"/>
-            <a:ext cx="3475440" cy="265320"/>
+            <a:ext cx="3472920" cy="263160"/>
           </a:xfrm>
           <a:prstGeom prst="rect">
             <a:avLst/>
@@ -16098,7 +16105,7 @@
         <p:spPr>
           <a:xfrm>
             <a:off x="542880" y="2881440"/>
-            <a:ext cx="3456360" cy="493920"/>
+            <a:ext cx="3453840" cy="491760"/>
           </a:xfrm>
           <a:prstGeom prst="rect">
             <a:avLst/>
@@ -16160,7 +16167,7 @@
         <p:spPr>
           <a:xfrm>
             <a:off x="542880" y="3452760"/>
-            <a:ext cx="3456360" cy="493920"/>
+            <a:ext cx="3453840" cy="491760"/>
           </a:xfrm>
           <a:prstGeom prst="rect">
             <a:avLst/>
@@ -16221,8 +16228,8 @@
         </p:nvSpPr>
         <p:spPr>
           <a:xfrm>
-            <a:off x="4240440" y="2381400"/>
-            <a:ext cx="3694680" cy="1722600"/>
+            <a:off x="4240080" y="2381400"/>
+            <a:ext cx="3692160" cy="1720440"/>
           </a:xfrm>
           <a:custGeom>
             <a:avLst/>
@@ -16275,8 +16282,8 @@
         </p:nvSpPr>
         <p:spPr>
           <a:xfrm>
-            <a:off x="4397760" y="2538360"/>
-            <a:ext cx="3475440" cy="265320"/>
+            <a:off x="4397400" y="2538360"/>
+            <a:ext cx="3472920" cy="263160"/>
           </a:xfrm>
           <a:prstGeom prst="rect">
             <a:avLst/>
@@ -16327,8 +16334,8 @@
         </p:nvSpPr>
         <p:spPr>
           <a:xfrm>
-            <a:off x="4397760" y="2881440"/>
-            <a:ext cx="3456360" cy="493920"/>
+            <a:off x="4397400" y="2881440"/>
+            <a:ext cx="3453840" cy="491760"/>
           </a:xfrm>
           <a:prstGeom prst="rect">
             <a:avLst/>
@@ -16389,8 +16396,8 @@
         </p:nvSpPr>
         <p:spPr>
           <a:xfrm>
-            <a:off x="4397760" y="3452760"/>
-            <a:ext cx="3456360" cy="493920"/>
+            <a:off x="4397400" y="3452760"/>
+            <a:ext cx="3453840" cy="491760"/>
           </a:xfrm>
           <a:prstGeom prst="rect">
             <a:avLst/>
@@ -16452,7 +16459,7 @@
         <p:spPr>
           <a:xfrm>
             <a:off x="399960" y="4262400"/>
-            <a:ext cx="7533720" cy="1636920"/>
+            <a:ext cx="7530840" cy="1634760"/>
           </a:xfrm>
           <a:custGeom>
             <a:avLst/>
@@ -16503,7 +16510,7 @@
         <p:spPr>
           <a:xfrm>
             <a:off x="399960" y="4262400"/>
-            <a:ext cx="36720" cy="1636920"/>
+            <a:ext cx="34560" cy="1634760"/>
           </a:xfrm>
           <a:custGeom>
             <a:avLst/>
@@ -16554,7 +16561,7 @@
         <p:spPr>
           <a:xfrm>
             <a:off x="571680" y="4414680"/>
-            <a:ext cx="7305120" cy="265320"/>
+            <a:ext cx="7302240" cy="263160"/>
           </a:xfrm>
           <a:prstGeom prst="rect">
             <a:avLst/>
@@ -16606,7 +16613,7 @@
         <p:spPr>
           <a:xfrm>
             <a:off x="619200" y="4791240"/>
-            <a:ext cx="93960" cy="150840"/>
+            <a:ext cx="91800" cy="148680"/>
           </a:xfrm>
           <a:custGeom>
             <a:avLst/>
@@ -16761,7 +16768,7 @@
         <p:spPr>
           <a:xfrm>
             <a:off x="819000" y="4757760"/>
-            <a:ext cx="3361320" cy="455760"/>
+            <a:ext cx="3358800" cy="453600"/>
           </a:xfrm>
           <a:prstGeom prst="rect">
             <a:avLst/>
@@ -16822,8 +16829,8 @@
         </p:nvSpPr>
         <p:spPr>
           <a:xfrm>
-            <a:off x="4283280" y="4791240"/>
-            <a:ext cx="131760" cy="150840"/>
+            <a:off x="4282920" y="4791240"/>
+            <a:ext cx="129600" cy="148680"/>
           </a:xfrm>
           <a:custGeom>
             <a:avLst/>
@@ -16954,8 +16961,8 @@
         </p:nvSpPr>
         <p:spPr>
           <a:xfrm>
-            <a:off x="4502520" y="4757760"/>
-            <a:ext cx="3361320" cy="455760"/>
+            <a:off x="4502160" y="4757760"/>
+            <a:ext cx="3358800" cy="453600"/>
           </a:xfrm>
           <a:prstGeom prst="rect">
             <a:avLst/>
@@ -17017,7 +17024,7 @@
         <p:spPr>
           <a:xfrm>
             <a:off x="590400" y="5324400"/>
-            <a:ext cx="150840" cy="150840"/>
+            <a:ext cx="148680" cy="148680"/>
           </a:xfrm>
           <a:custGeom>
             <a:avLst/>
@@ -17240,7 +17247,7 @@
         <p:spPr>
           <a:xfrm>
             <a:off x="819000" y="5291280"/>
-            <a:ext cx="3361320" cy="455760"/>
+            <a:ext cx="3358800" cy="453600"/>
           </a:xfrm>
           <a:prstGeom prst="rect">
             <a:avLst/>
@@ -17301,8 +17308,8 @@
         </p:nvSpPr>
         <p:spPr>
           <a:xfrm>
-            <a:off x="4264200" y="5324400"/>
-            <a:ext cx="169920" cy="150840"/>
+            <a:off x="4263840" y="5324400"/>
+            <a:ext cx="167760" cy="148680"/>
           </a:xfrm>
           <a:custGeom>
             <a:avLst/>
@@ -17498,8 +17505,8 @@
         </p:nvSpPr>
         <p:spPr>
           <a:xfrm>
-            <a:off x="4502520" y="5291280"/>
-            <a:ext cx="3361320" cy="455760"/>
+            <a:off x="4502160" y="5291280"/>
+            <a:ext cx="3358800" cy="453600"/>
           </a:xfrm>
           <a:prstGeom prst="rect">
             <a:avLst/>
@@ -17560,8 +17567,8 @@
         </p:nvSpPr>
         <p:spPr>
           <a:xfrm>
-            <a:off x="8133120" y="1300320"/>
-            <a:ext cx="3675600" cy="2637000"/>
+            <a:off x="8132760" y="1300320"/>
+            <a:ext cx="3673080" cy="2634840"/>
           </a:xfrm>
           <a:custGeom>
             <a:avLst/>
@@ -17614,8 +17621,8 @@
         </p:nvSpPr>
         <p:spPr>
           <a:xfrm>
-            <a:off x="8242920" y="1457280"/>
-            <a:ext cx="3456360" cy="265320"/>
+            <a:off x="8242200" y="1457280"/>
+            <a:ext cx="3453840" cy="263160"/>
           </a:xfrm>
           <a:prstGeom prst="rect">
             <a:avLst/>
@@ -17666,8 +17673,8 @@
         </p:nvSpPr>
         <p:spPr>
           <a:xfrm>
-            <a:off x="8290440" y="1838160"/>
-            <a:ext cx="3361320" cy="1332000"/>
+            <a:off x="8289720" y="1838160"/>
+            <a:ext cx="3358800" cy="1329840"/>
           </a:xfrm>
           <a:prstGeom prst="roundRect">
             <a:avLst>
@@ -17698,8 +17705,8 @@
         </p:nvSpPr>
         <p:spPr>
           <a:xfrm>
-            <a:off x="8252640" y="3286080"/>
-            <a:ext cx="3437280" cy="493920"/>
+            <a:off x="8251920" y="3286080"/>
+            <a:ext cx="3434760" cy="491760"/>
           </a:xfrm>
           <a:prstGeom prst="rect">
             <a:avLst/>
@@ -17750,8 +17757,8 @@
         </p:nvSpPr>
         <p:spPr>
           <a:xfrm>
-            <a:off x="8128440" y="4095720"/>
-            <a:ext cx="3684960" cy="1636920"/>
+            <a:off x="8128080" y="4095720"/>
+            <a:ext cx="3682440" cy="1634760"/>
           </a:xfrm>
           <a:custGeom>
             <a:avLst/>
@@ -17801,8 +17808,8 @@
         </p:nvSpPr>
         <p:spPr>
           <a:xfrm>
-            <a:off x="8281080" y="4248000"/>
-            <a:ext cx="3466080" cy="265320"/>
+            <a:off x="8280360" y="4248000"/>
+            <a:ext cx="3463560" cy="263160"/>
           </a:xfrm>
           <a:prstGeom prst="rect">
             <a:avLst/>
@@ -17853,8 +17860,8 @@
         </p:nvSpPr>
         <p:spPr>
           <a:xfrm>
-            <a:off x="8281080" y="4591080"/>
-            <a:ext cx="3456360" cy="989280"/>
+            <a:off x="8280360" y="4591080"/>
+            <a:ext cx="3453840" cy="987120"/>
           </a:xfrm>
           <a:prstGeom prst="rect">
             <a:avLst/>
@@ -17943,7 +17950,7 @@
         <p:spPr>
           <a:xfrm>
             <a:off x="370440" y="370440"/>
-            <a:ext cx="11524680" cy="221040"/>
+            <a:ext cx="11521440" cy="218880"/>
           </a:xfrm>
           <a:prstGeom prst="rect">
             <a:avLst/>
@@ -17971,7 +17978,7 @@
               <a:buNone/>
             </a:pPr>
             <a:r>
-              <a:rPr b="1" lang="en-US" sz="1170" spc="46" strike="noStrike">
+              <a:rPr b="1" lang="en-US" sz="1170" spc="29" strike="noStrike">
                 <a:solidFill>
                   <a:srgbClr val="0984e3"/>
                 </a:solidFill>
@@ -17995,7 +18002,7 @@
         <p:spPr>
           <a:xfrm>
             <a:off x="370440" y="667080"/>
-            <a:ext cx="11673000" cy="443160"/>
+            <a:ext cx="11669760" cy="441000"/>
           </a:xfrm>
           <a:prstGeom prst="rect">
             <a:avLst/>
@@ -18047,7 +18054,7 @@
         <p:spPr>
           <a:xfrm>
             <a:off x="370440" y="1334160"/>
-            <a:ext cx="5668920" cy="1202760"/>
+            <a:ext cx="5666400" cy="1200600"/>
           </a:xfrm>
           <a:prstGeom prst="rect">
             <a:avLst/>
@@ -18109,7 +18116,7 @@
         <p:spPr>
           <a:xfrm>
             <a:off x="375120" y="2691360"/>
-            <a:ext cx="5566680" cy="2157120"/>
+            <a:ext cx="5564160" cy="2154960"/>
           </a:xfrm>
           <a:custGeom>
             <a:avLst/>
@@ -18163,7 +18170,7 @@
         <p:spPr>
           <a:xfrm>
             <a:off x="565200" y="2881080"/>
-            <a:ext cx="5279760" cy="258120"/>
+            <a:ext cx="5277240" cy="255960"/>
           </a:xfrm>
           <a:prstGeom prst="rect">
             <a:avLst/>
@@ -18215,7 +18222,7 @@
         <p:spPr>
           <a:xfrm>
             <a:off x="565200" y="3251880"/>
-            <a:ext cx="5261040" cy="480240"/>
+            <a:ext cx="5258520" cy="478080"/>
           </a:xfrm>
           <a:prstGeom prst="rect">
             <a:avLst/>
@@ -18267,7 +18274,7 @@
         <p:spPr>
           <a:xfrm>
             <a:off x="592920" y="3877200"/>
-            <a:ext cx="128160" cy="146880"/>
+            <a:ext cx="126000" cy="144720"/>
           </a:xfrm>
           <a:custGeom>
             <a:avLst/>
@@ -18348,7 +18355,7 @@
         <p:spPr>
           <a:xfrm>
             <a:off x="804600" y="3844800"/>
-            <a:ext cx="5021640" cy="221040"/>
+            <a:ext cx="5019120" cy="218880"/>
           </a:xfrm>
           <a:prstGeom prst="rect">
             <a:avLst/>
@@ -18400,7 +18407,7 @@
         <p:spPr>
           <a:xfrm>
             <a:off x="592920" y="4173480"/>
-            <a:ext cx="128160" cy="146880"/>
+            <a:ext cx="126000" cy="144720"/>
           </a:xfrm>
           <a:custGeom>
             <a:avLst/>
@@ -18481,7 +18488,7 @@
         <p:spPr>
           <a:xfrm>
             <a:off x="804600" y="4141080"/>
-            <a:ext cx="5021640" cy="221040"/>
+            <a:ext cx="5019120" cy="218880"/>
           </a:xfrm>
           <a:prstGeom prst="rect">
             <a:avLst/>
@@ -18533,7 +18540,7 @@
         <p:spPr>
           <a:xfrm>
             <a:off x="592920" y="4470120"/>
-            <a:ext cx="128160" cy="146880"/>
+            <a:ext cx="126000" cy="144720"/>
           </a:xfrm>
           <a:custGeom>
             <a:avLst/>
@@ -18614,7 +18621,7 @@
         <p:spPr>
           <a:xfrm>
             <a:off x="804600" y="4437720"/>
-            <a:ext cx="5021640" cy="221040"/>
+            <a:ext cx="5019120" cy="218880"/>
           </a:xfrm>
           <a:prstGeom prst="rect">
             <a:avLst/>
@@ -18666,7 +18673,7 @@
         <p:spPr>
           <a:xfrm>
             <a:off x="375120" y="5007600"/>
-            <a:ext cx="5566680" cy="1471680"/>
+            <a:ext cx="5564160" cy="1469520"/>
           </a:xfrm>
           <a:custGeom>
             <a:avLst/>
@@ -18720,7 +18727,7 @@
         <p:spPr>
           <a:xfrm>
             <a:off x="565200" y="5197320"/>
-            <a:ext cx="5279760" cy="258120"/>
+            <a:ext cx="5277240" cy="255960"/>
           </a:xfrm>
           <a:prstGeom prst="rect">
             <a:avLst/>
@@ -18772,7 +18779,7 @@
         <p:spPr>
           <a:xfrm>
             <a:off x="565200" y="5567760"/>
-            <a:ext cx="5261040" cy="721080"/>
+            <a:ext cx="5258520" cy="718920"/>
           </a:xfrm>
           <a:prstGeom prst="rect">
             <a:avLst/>
@@ -18823,8 +18830,8 @@
         </p:nvSpPr>
         <p:spPr>
           <a:xfrm>
-            <a:off x="6242400" y="1334160"/>
-            <a:ext cx="5576040" cy="2842920"/>
+            <a:off x="6242040" y="1334160"/>
+            <a:ext cx="5573520" cy="2840760"/>
           </a:xfrm>
           <a:custGeom>
             <a:avLst/>
@@ -18874,8 +18881,8 @@
         </p:nvSpPr>
         <p:spPr>
           <a:xfrm>
-            <a:off x="6427800" y="1519200"/>
-            <a:ext cx="5316840" cy="295200"/>
+            <a:off x="6427440" y="1519200"/>
+            <a:ext cx="5314320" cy="293040"/>
           </a:xfrm>
           <a:prstGeom prst="rect">
             <a:avLst/>
@@ -18926,8 +18933,8 @@
         </p:nvSpPr>
         <p:spPr>
           <a:xfrm>
-            <a:off x="6427800" y="1968840"/>
-            <a:ext cx="5145480" cy="454680"/>
+            <a:off x="6427440" y="1968840"/>
+            <a:ext cx="5142960" cy="452520"/>
           </a:xfrm>
           <a:prstGeom prst="rect">
             <a:avLst/>
@@ -18978,8 +18985,8 @@
         </p:nvSpPr>
         <p:spPr>
           <a:xfrm>
-            <a:off x="6427800" y="2580120"/>
-            <a:ext cx="5279760" cy="480240"/>
+            <a:off x="6427440" y="2580120"/>
+            <a:ext cx="5277240" cy="478080"/>
           </a:xfrm>
           <a:prstGeom prst="rect">
             <a:avLst/>
@@ -19030,8 +19037,8 @@
         </p:nvSpPr>
         <p:spPr>
           <a:xfrm>
-            <a:off x="6437160" y="3205440"/>
-            <a:ext cx="165240" cy="146880"/>
+            <a:off x="6436800" y="3205440"/>
+            <a:ext cx="163080" cy="144720"/>
           </a:xfrm>
           <a:custGeom>
             <a:avLst/>
@@ -19215,8 +19222,8 @@
         </p:nvSpPr>
         <p:spPr>
           <a:xfrm>
-            <a:off x="6667200" y="3173040"/>
-            <a:ext cx="5040360" cy="221040"/>
+            <a:off x="6666840" y="3173040"/>
+            <a:ext cx="5037840" cy="218880"/>
           </a:xfrm>
           <a:prstGeom prst="rect">
             <a:avLst/>
@@ -19277,8 +19284,8 @@
         </p:nvSpPr>
         <p:spPr>
           <a:xfrm>
-            <a:off x="6446160" y="3502080"/>
-            <a:ext cx="146880" cy="146880"/>
+            <a:off x="6445800" y="3502080"/>
+            <a:ext cx="144720" cy="144720"/>
           </a:xfrm>
           <a:custGeom>
             <a:avLst/>
@@ -19444,8 +19451,8 @@
         </p:nvSpPr>
         <p:spPr>
           <a:xfrm>
-            <a:off x="6667200" y="3469680"/>
-            <a:ext cx="5040360" cy="221040"/>
+            <a:off x="6666840" y="3469680"/>
+            <a:ext cx="5037840" cy="218880"/>
           </a:xfrm>
           <a:prstGeom prst="rect">
             <a:avLst/>
@@ -19506,8 +19513,8 @@
         </p:nvSpPr>
         <p:spPr>
           <a:xfrm>
-            <a:off x="6427800" y="3798360"/>
-            <a:ext cx="183960" cy="146880"/>
+            <a:off x="6427440" y="3798360"/>
+            <a:ext cx="181800" cy="144720"/>
           </a:xfrm>
           <a:custGeom>
             <a:avLst/>
@@ -19738,8 +19745,8 @@
         </p:nvSpPr>
         <p:spPr>
           <a:xfrm>
-            <a:off x="6667200" y="3765960"/>
-            <a:ext cx="5040360" cy="221040"/>
+            <a:off x="6666840" y="3765960"/>
+            <a:ext cx="5037840" cy="218880"/>
           </a:xfrm>
           <a:prstGeom prst="rect">
             <a:avLst/>
@@ -19800,8 +19807,8 @@
         </p:nvSpPr>
         <p:spPr>
           <a:xfrm>
-            <a:off x="6261120" y="4321800"/>
-            <a:ext cx="5557680" cy="869400"/>
+            <a:off x="6260760" y="4321800"/>
+            <a:ext cx="5555160" cy="867240"/>
           </a:xfrm>
           <a:custGeom>
             <a:avLst/>
@@ -19851,8 +19858,8 @@
         </p:nvSpPr>
         <p:spPr>
           <a:xfrm>
-            <a:off x="6261120" y="4321800"/>
-            <a:ext cx="35640" cy="869400"/>
+            <a:off x="6260760" y="4321800"/>
+            <a:ext cx="33480" cy="867240"/>
           </a:xfrm>
           <a:custGeom>
             <a:avLst/>
@@ -19902,8 +19909,8 @@
         </p:nvSpPr>
         <p:spPr>
           <a:xfrm>
-            <a:off x="6464880" y="4507200"/>
-            <a:ext cx="5242680" cy="239400"/>
+            <a:off x="6464520" y="4507200"/>
+            <a:ext cx="5240160" cy="237240"/>
           </a:xfrm>
           <a:prstGeom prst="rect">
             <a:avLst/>
@@ -19954,8 +19961,8 @@
         </p:nvSpPr>
         <p:spPr>
           <a:xfrm>
-            <a:off x="6464880" y="4822200"/>
-            <a:ext cx="5233320" cy="183960"/>
+            <a:off x="6464520" y="4822200"/>
+            <a:ext cx="5230800" cy="181800"/>
           </a:xfrm>
           <a:prstGeom prst="rect">
             <a:avLst/>
@@ -20054,7 +20061,7 @@
         <p:spPr>
           <a:xfrm>
             <a:off x="380880" y="380880"/>
-            <a:ext cx="11658240" cy="455760"/>
+            <a:ext cx="11655000" cy="453600"/>
           </a:xfrm>
           <a:prstGeom prst="rect">
             <a:avLst/>
@@ -20106,7 +20113,7 @@
         <p:spPr>
           <a:xfrm>
             <a:off x="380880" y="952560"/>
-            <a:ext cx="760680" cy="17640"/>
+            <a:ext cx="758520" cy="15480"/>
           </a:xfrm>
           <a:custGeom>
             <a:avLst/>
@@ -20157,7 +20164,7 @@
         <p:spPr>
           <a:xfrm>
             <a:off x="380880" y="1428840"/>
-            <a:ext cx="750960" cy="570240"/>
+            <a:ext cx="748800" cy="568080"/>
           </a:xfrm>
           <a:prstGeom prst="rect">
             <a:avLst/>
@@ -20211,7 +20218,7 @@
         <p:spPr>
           <a:xfrm>
             <a:off x="1034280" y="1504800"/>
-            <a:ext cx="4190040" cy="303480"/>
+            <a:ext cx="4187520" cy="301320"/>
           </a:xfrm>
           <a:prstGeom prst="rect">
             <a:avLst/>
@@ -20263,7 +20270,7 @@
         <p:spPr>
           <a:xfrm>
             <a:off x="1034280" y="1886040"/>
-            <a:ext cx="4161240" cy="274680"/>
+            <a:ext cx="4158720" cy="272520"/>
           </a:xfrm>
           <a:prstGeom prst="rect">
             <a:avLst/>
@@ -20314,8 +20321,8 @@
         </p:nvSpPr>
         <p:spPr>
           <a:xfrm>
-            <a:off x="6401160" y="1428840"/>
-            <a:ext cx="855720" cy="570240"/>
+            <a:off x="6400800" y="1428840"/>
+            <a:ext cx="853560" cy="568080"/>
           </a:xfrm>
           <a:prstGeom prst="rect">
             <a:avLst/>
@@ -20368,8 +20375,8 @@
         </p:nvSpPr>
         <p:spPr>
           <a:xfrm>
-            <a:off x="7160400" y="1504800"/>
-            <a:ext cx="4761360" cy="303480"/>
+            <a:off x="7160040" y="1504800"/>
+            <a:ext cx="4758840" cy="301320"/>
           </a:xfrm>
           <a:prstGeom prst="rect">
             <a:avLst/>
@@ -20420,8 +20427,8 @@
         </p:nvSpPr>
         <p:spPr>
           <a:xfrm>
-            <a:off x="7160400" y="1886040"/>
-            <a:ext cx="4732920" cy="560520"/>
+            <a:off x="7160040" y="1886040"/>
+            <a:ext cx="4730400" cy="558360"/>
           </a:xfrm>
           <a:prstGeom prst="rect">
             <a:avLst/>
@@ -20473,7 +20480,7 @@
         <p:spPr>
           <a:xfrm>
             <a:off x="380880" y="2824200"/>
-            <a:ext cx="855720" cy="570240"/>
+            <a:ext cx="853560" cy="568080"/>
           </a:xfrm>
           <a:prstGeom prst="rect">
             <a:avLst/>
@@ -20527,7 +20534,7 @@
         <p:spPr>
           <a:xfrm>
             <a:off x="1143000" y="2900520"/>
-            <a:ext cx="3970800" cy="303480"/>
+            <a:ext cx="3968280" cy="301320"/>
           </a:xfrm>
           <a:prstGeom prst="rect">
             <a:avLst/>
@@ -20579,7 +20586,7 @@
         <p:spPr>
           <a:xfrm>
             <a:off x="1143000" y="3281400"/>
-            <a:ext cx="3942360" cy="274680"/>
+            <a:ext cx="3939840" cy="272520"/>
           </a:xfrm>
           <a:prstGeom prst="rect">
             <a:avLst/>
@@ -20630,8 +20637,8 @@
         </p:nvSpPr>
         <p:spPr>
           <a:xfrm>
-            <a:off x="6401160" y="2824200"/>
-            <a:ext cx="884520" cy="570240"/>
+            <a:off x="6400800" y="2824200"/>
+            <a:ext cx="882360" cy="568080"/>
           </a:xfrm>
           <a:prstGeom prst="rect">
             <a:avLst/>
@@ -20684,8 +20691,8 @@
         </p:nvSpPr>
         <p:spPr>
           <a:xfrm>
-            <a:off x="7188840" y="2900520"/>
-            <a:ext cx="2475360" cy="303480"/>
+            <a:off x="7188480" y="2900520"/>
+            <a:ext cx="2472840" cy="301320"/>
           </a:xfrm>
           <a:prstGeom prst="rect">
             <a:avLst/>
@@ -20736,8 +20743,8 @@
         </p:nvSpPr>
         <p:spPr>
           <a:xfrm>
-            <a:off x="7188840" y="3281400"/>
-            <a:ext cx="2446920" cy="274680"/>
+            <a:off x="7188480" y="3281400"/>
+            <a:ext cx="2444400" cy="272520"/>
           </a:xfrm>
           <a:prstGeom prst="rect">
             <a:avLst/>
@@ -20789,7 +20796,7 @@
         <p:spPr>
           <a:xfrm>
             <a:off x="380880" y="3940920"/>
-            <a:ext cx="846360" cy="570240"/>
+            <a:ext cx="844200" cy="568080"/>
           </a:xfrm>
           <a:prstGeom prst="rect">
             <a:avLst/>
@@ -20843,7 +20850,7 @@
         <p:spPr>
           <a:xfrm>
             <a:off x="1137240" y="4017240"/>
-            <a:ext cx="2865960" cy="303480"/>
+            <a:ext cx="2863440" cy="301320"/>
           </a:xfrm>
           <a:prstGeom prst="rect">
             <a:avLst/>
@@ -20895,7 +20902,7 @@
         <p:spPr>
           <a:xfrm>
             <a:off x="1137240" y="4398120"/>
-            <a:ext cx="2837520" cy="274680"/>
+            <a:ext cx="2835000" cy="272520"/>
           </a:xfrm>
           <a:prstGeom prst="rect">
             <a:avLst/>
@@ -20946,8 +20953,8 @@
         </p:nvSpPr>
         <p:spPr>
           <a:xfrm>
-            <a:off x="6401160" y="3940920"/>
-            <a:ext cx="865440" cy="570240"/>
+            <a:off x="6400800" y="3940920"/>
+            <a:ext cx="863280" cy="568080"/>
           </a:xfrm>
           <a:prstGeom prst="rect">
             <a:avLst/>
@@ -21000,8 +21007,8 @@
         </p:nvSpPr>
         <p:spPr>
           <a:xfrm>
-            <a:off x="7171920" y="4017240"/>
-            <a:ext cx="3075480" cy="303480"/>
+            <a:off x="7171560" y="4017240"/>
+            <a:ext cx="3072960" cy="301320"/>
           </a:xfrm>
           <a:prstGeom prst="rect">
             <a:avLst/>
@@ -21052,8 +21059,8 @@
         </p:nvSpPr>
         <p:spPr>
           <a:xfrm>
-            <a:off x="7171920" y="4398120"/>
-            <a:ext cx="3047040" cy="274680"/>
+            <a:off x="7171560" y="4398120"/>
+            <a:ext cx="3044520" cy="272520"/>
           </a:xfrm>
           <a:prstGeom prst="rect">
             <a:avLst/>
@@ -21142,7 +21149,7 @@
         <p:spPr>
           <a:xfrm>
             <a:off x="335880" y="335880"/>
-            <a:ext cx="11586960" cy="200160"/>
+            <a:ext cx="11583720" cy="198000"/>
           </a:xfrm>
           <a:prstGeom prst="rect">
             <a:avLst/>
@@ -21170,7 +21177,7 @@
               <a:buNone/>
             </a:pPr>
             <a:r>
-              <a:rPr b="1" lang="en-US" sz="1060" spc="43" strike="noStrike">
+              <a:rPr b="1" lang="en-US" sz="1060" spc="26" strike="noStrike">
                 <a:solidFill>
                   <a:srgbClr val="0984e3"/>
                 </a:solidFill>
@@ -21194,7 +21201,7 @@
         <p:spPr>
           <a:xfrm>
             <a:off x="335880" y="604440"/>
-            <a:ext cx="11721600" cy="401760"/>
+            <a:ext cx="11718360" cy="399600"/>
           </a:xfrm>
           <a:prstGeom prst="rect">
             <a:avLst/>
@@ -21246,7 +21253,7 @@
         <p:spPr>
           <a:xfrm>
             <a:off x="335880" y="1251000"/>
-            <a:ext cx="5995080" cy="456120"/>
+            <a:ext cx="5992560" cy="453960"/>
           </a:xfrm>
           <a:prstGeom prst="rect">
             <a:avLst/>
@@ -21298,7 +21305,7 @@
         <p:spPr>
           <a:xfrm>
             <a:off x="335880" y="1889280"/>
-            <a:ext cx="6876000" cy="653400"/>
+            <a:ext cx="6873120" cy="651240"/>
           </a:xfrm>
           <a:prstGeom prst="rect">
             <a:avLst/>
@@ -21350,7 +21357,7 @@
         <p:spPr>
           <a:xfrm>
             <a:off x="340200" y="2682720"/>
-            <a:ext cx="6800760" cy="1955160"/>
+            <a:ext cx="6797880" cy="1953000"/>
           </a:xfrm>
           <a:custGeom>
             <a:avLst/>
@@ -21404,7 +21411,7 @@
         <p:spPr>
           <a:xfrm>
             <a:off x="512280" y="2854800"/>
-            <a:ext cx="6540480" cy="233640"/>
+            <a:ext cx="6537600" cy="231480"/>
           </a:xfrm>
           <a:prstGeom prst="rect">
             <a:avLst/>
@@ -21456,7 +21463,7 @@
         <p:spPr>
           <a:xfrm>
             <a:off x="512280" y="3190680"/>
-            <a:ext cx="6523560" cy="216720"/>
+            <a:ext cx="6520680" cy="214560"/>
           </a:xfrm>
           <a:prstGeom prst="rect">
             <a:avLst/>
@@ -21508,7 +21515,7 @@
         <p:spPr>
           <a:xfrm>
             <a:off x="512280" y="3509640"/>
-            <a:ext cx="6456240" cy="636840"/>
+            <a:ext cx="6453360" cy="634680"/>
           </a:xfrm>
           <a:custGeom>
             <a:avLst/>
@@ -21559,7 +21566,7 @@
         <p:spPr>
           <a:xfrm>
             <a:off x="613080" y="3610440"/>
-            <a:ext cx="6321960" cy="200160"/>
+            <a:ext cx="6319080" cy="198000"/>
           </a:xfrm>
           <a:prstGeom prst="rect">
             <a:avLst/>
@@ -21611,7 +21618,7 @@
         <p:spPr>
           <a:xfrm>
             <a:off x="613080" y="3845520"/>
-            <a:ext cx="6321960" cy="200160"/>
+            <a:ext cx="6319080" cy="198000"/>
           </a:xfrm>
           <a:prstGeom prst="rect">
             <a:avLst/>
@@ -21663,7 +21670,7 @@
         <p:spPr>
           <a:xfrm>
             <a:off x="512280" y="4248720"/>
-            <a:ext cx="6523560" cy="216720"/>
+            <a:ext cx="6520680" cy="214560"/>
           </a:xfrm>
           <a:prstGeom prst="rect">
             <a:avLst/>
@@ -21715,7 +21722,7 @@
         <p:spPr>
           <a:xfrm>
             <a:off x="352800" y="4777560"/>
-            <a:ext cx="6792120" cy="1526760"/>
+            <a:ext cx="6789240" cy="1524600"/>
           </a:xfrm>
           <a:custGeom>
             <a:avLst/>
@@ -21766,7 +21773,7 @@
         <p:spPr>
           <a:xfrm>
             <a:off x="352800" y="4777560"/>
-            <a:ext cx="32040" cy="1526760"/>
+            <a:ext cx="29880" cy="1524600"/>
           </a:xfrm>
           <a:custGeom>
             <a:avLst/>
@@ -21817,7 +21824,7 @@
         <p:spPr>
           <a:xfrm>
             <a:off x="537480" y="4945680"/>
-            <a:ext cx="6523560" cy="233640"/>
+            <a:ext cx="6520680" cy="231480"/>
           </a:xfrm>
           <a:prstGeom prst="rect">
             <a:avLst/>
@@ -21869,7 +21876,7 @@
         <p:spPr>
           <a:xfrm>
             <a:off x="537480" y="5281560"/>
-            <a:ext cx="6506640" cy="216720"/>
+            <a:ext cx="6503760" cy="214560"/>
           </a:xfrm>
           <a:prstGeom prst="rect">
             <a:avLst/>
@@ -21921,7 +21928,7 @@
         <p:spPr>
           <a:xfrm>
             <a:off x="537480" y="5600520"/>
-            <a:ext cx="3214800" cy="200160"/>
+            <a:ext cx="3212280" cy="198000"/>
           </a:xfrm>
           <a:prstGeom prst="rect">
             <a:avLst/>
@@ -21983,7 +21990,7 @@
         <p:spPr>
           <a:xfrm>
             <a:off x="3823200" y="5600520"/>
-            <a:ext cx="3214800" cy="200160"/>
+            <a:ext cx="3212280" cy="198000"/>
           </a:xfrm>
           <a:prstGeom prst="rect">
             <a:avLst/>
@@ -22045,7 +22052,7 @@
         <p:spPr>
           <a:xfrm>
             <a:off x="537480" y="5936400"/>
-            <a:ext cx="3214800" cy="200160"/>
+            <a:ext cx="3212280" cy="198000"/>
           </a:xfrm>
           <a:prstGeom prst="rect">
             <a:avLst/>
@@ -22107,7 +22114,7 @@
         <p:spPr>
           <a:xfrm>
             <a:off x="3823200" y="5936400"/>
-            <a:ext cx="3214800" cy="200160"/>
+            <a:ext cx="3212280" cy="198000"/>
           </a:xfrm>
           <a:prstGeom prst="rect">
             <a:avLst/>
@@ -22168,8 +22175,8 @@
         </p:nvSpPr>
         <p:spPr>
           <a:xfrm>
-            <a:off x="7416000" y="1213200"/>
-            <a:ext cx="4440600" cy="3499920"/>
+            <a:off x="7415640" y="1213200"/>
+            <a:ext cx="4438080" cy="3497760"/>
           </a:xfrm>
           <a:custGeom>
             <a:avLst/>
@@ -22222,8 +22229,8 @@
         </p:nvSpPr>
         <p:spPr>
           <a:xfrm>
-            <a:off x="7588080" y="1385280"/>
-            <a:ext cx="4096440" cy="1677960"/>
+            <a:off x="7587720" y="1385280"/>
+            <a:ext cx="4093920" cy="1675800"/>
           </a:xfrm>
           <a:prstGeom prst="roundRect">
             <a:avLst>
@@ -22254,8 +22261,8 @@
         </p:nvSpPr>
         <p:spPr>
           <a:xfrm>
-            <a:off x="7545960" y="3199320"/>
-            <a:ext cx="4180320" cy="233640"/>
+            <a:off x="7545600" y="3199320"/>
+            <a:ext cx="4177800" cy="231480"/>
           </a:xfrm>
           <a:prstGeom prst="rect">
             <a:avLst/>
@@ -22306,8 +22313,8 @@
         </p:nvSpPr>
         <p:spPr>
           <a:xfrm>
-            <a:off x="7621560" y="3564360"/>
-            <a:ext cx="99360" cy="132840"/>
+            <a:off x="7621200" y="3564360"/>
+            <a:ext cx="97200" cy="130680"/>
           </a:xfrm>
           <a:custGeom>
             <a:avLst/>
@@ -22505,8 +22512,8 @@
         </p:nvSpPr>
         <p:spPr>
           <a:xfrm>
-            <a:off x="7800480" y="3534840"/>
-            <a:ext cx="3951360" cy="200160"/>
+            <a:off x="7800120" y="3534840"/>
+            <a:ext cx="3948840" cy="198000"/>
           </a:xfrm>
           <a:prstGeom prst="rect">
             <a:avLst/>
@@ -22567,8 +22574,8 @@
         </p:nvSpPr>
         <p:spPr>
           <a:xfrm>
-            <a:off x="7605000" y="3832920"/>
-            <a:ext cx="132840" cy="132840"/>
+            <a:off x="7604640" y="3832920"/>
+            <a:ext cx="130680" cy="130680"/>
           </a:xfrm>
           <a:custGeom>
             <a:avLst/>
@@ -22774,8 +22781,8 @@
         </p:nvSpPr>
         <p:spPr>
           <a:xfrm>
-            <a:off x="7800480" y="3803760"/>
-            <a:ext cx="3951360" cy="200160"/>
+            <a:off x="7800120" y="3803760"/>
+            <a:ext cx="3948840" cy="198000"/>
           </a:xfrm>
           <a:prstGeom prst="rect">
             <a:avLst/>
@@ -22836,8 +22843,8 @@
         </p:nvSpPr>
         <p:spPr>
           <a:xfrm>
-            <a:off x="7605000" y="4101840"/>
-            <a:ext cx="132840" cy="132840"/>
+            <a:off x="7604640" y="4101840"/>
+            <a:ext cx="130680" cy="130680"/>
           </a:xfrm>
           <a:custGeom>
             <a:avLst/>
@@ -23027,8 +23034,8 @@
         </p:nvSpPr>
         <p:spPr>
           <a:xfrm>
-            <a:off x="7800480" y="4072320"/>
-            <a:ext cx="3951360" cy="200160"/>
+            <a:off x="7800120" y="4072320"/>
+            <a:ext cx="3948840" cy="198000"/>
           </a:xfrm>
           <a:prstGeom prst="rect">
             <a:avLst/>
@@ -23089,8 +23096,8 @@
         </p:nvSpPr>
         <p:spPr>
           <a:xfrm>
-            <a:off x="7588080" y="4370400"/>
-            <a:ext cx="166320" cy="132840"/>
+            <a:off x="7587720" y="4370400"/>
+            <a:ext cx="164160" cy="130680"/>
           </a:xfrm>
           <a:custGeom>
             <a:avLst/>
@@ -23305,8 +23312,8 @@
         </p:nvSpPr>
         <p:spPr>
           <a:xfrm>
-            <a:off x="7800480" y="4341240"/>
-            <a:ext cx="3951360" cy="200160"/>
+            <a:off x="7800120" y="4341240"/>
+            <a:ext cx="3948840" cy="198000"/>
           </a:xfrm>
           <a:prstGeom prst="rect">
             <a:avLst/>
@@ -23367,8 +23374,8 @@
         </p:nvSpPr>
         <p:spPr>
           <a:xfrm>
-            <a:off x="7411680" y="4853160"/>
-            <a:ext cx="4449240" cy="1291680"/>
+            <a:off x="7411320" y="4853160"/>
+            <a:ext cx="4446720" cy="1289520"/>
           </a:xfrm>
           <a:custGeom>
             <a:avLst/>
@@ -23418,8 +23425,8 @@
         </p:nvSpPr>
         <p:spPr>
           <a:xfrm>
-            <a:off x="7579800" y="5021280"/>
-            <a:ext cx="4188960" cy="233640"/>
+            <a:off x="7579440" y="5021280"/>
+            <a:ext cx="4186440" cy="231480"/>
           </a:xfrm>
           <a:prstGeom prst="rect">
             <a:avLst/>
@@ -23470,8 +23477,8 @@
         </p:nvSpPr>
         <p:spPr>
           <a:xfrm>
-            <a:off x="7579800" y="5323680"/>
-            <a:ext cx="4180320" cy="653400"/>
+            <a:off x="7579440" y="5323680"/>
+            <a:ext cx="4177800" cy="651240"/>
           </a:xfrm>
           <a:prstGeom prst="rect">
             <a:avLst/>
@@ -23559,8 +23566,8 @@
         </p:nvSpPr>
         <p:spPr>
           <a:xfrm>
-            <a:off x="5486760" y="585720"/>
-            <a:ext cx="1217880" cy="17640"/>
+            <a:off x="5486400" y="585720"/>
+            <a:ext cx="1215720" cy="15480"/>
           </a:xfrm>
           <a:custGeom>
             <a:avLst/>
@@ -23611,7 +23618,7 @@
         <p:spPr>
           <a:xfrm>
             <a:off x="3664080" y="909720"/>
-            <a:ext cx="4866120" cy="1427400"/>
+            <a:ext cx="4863600" cy="1425240"/>
           </a:xfrm>
           <a:prstGeom prst="rect">
             <a:avLst/>
@@ -23683,8 +23690,8 @@
         </p:nvSpPr>
         <p:spPr>
           <a:xfrm>
-            <a:off x="5486760" y="2643120"/>
-            <a:ext cx="1217880" cy="17640"/>
+            <a:off x="5486400" y="2643120"/>
+            <a:ext cx="1215720" cy="15480"/>
           </a:xfrm>
           <a:custGeom>
             <a:avLst/>
@@ -23735,7 +23742,7 @@
         <p:spPr>
           <a:xfrm>
             <a:off x="1771560" y="2967120"/>
-            <a:ext cx="8647920" cy="1113120"/>
+            <a:ext cx="8645040" cy="1110960"/>
           </a:xfrm>
           <a:prstGeom prst="rect">
             <a:avLst/>
@@ -23787,7 +23794,7 @@
         <p:spPr>
           <a:xfrm>
             <a:off x="1781280" y="4309920"/>
-            <a:ext cx="8628840" cy="1236960"/>
+            <a:ext cx="8625960" cy="1234800"/>
           </a:xfrm>
           <a:prstGeom prst="rect">
             <a:avLst/>
@@ -23839,7 +23846,7 @@
         <p:spPr>
           <a:xfrm>
             <a:off x="2615400" y="6005520"/>
-            <a:ext cx="6962040" cy="265320"/>
+            <a:ext cx="6959160" cy="263160"/>
           </a:xfrm>
           <a:prstGeom prst="rect">
             <a:avLst/>
@@ -23928,7 +23935,7 @@
         <p:spPr>
           <a:xfrm>
             <a:off x="609480" y="1781280"/>
-            <a:ext cx="12191760" cy="1217880"/>
+            <a:ext cx="12188520" cy="1215720"/>
           </a:xfrm>
           <a:prstGeom prst="rect">
             <a:avLst/>
@@ -23982,7 +23989,7 @@
         <p:spPr>
           <a:xfrm>
             <a:off x="609480" y="3152880"/>
-            <a:ext cx="11867760" cy="1141560"/>
+            <a:ext cx="11864520" cy="1139400"/>
           </a:xfrm>
           <a:prstGeom prst="rect">
             <a:avLst/>
@@ -24055,7 +24062,7 @@
         <p:spPr>
           <a:xfrm>
             <a:off x="609480" y="4524480"/>
-            <a:ext cx="1217880" cy="17640"/>
+            <a:ext cx="1215720" cy="15480"/>
           </a:xfrm>
           <a:custGeom>
             <a:avLst/>
@@ -24106,7 +24113,7 @@
         <p:spPr>
           <a:xfrm>
             <a:off x="609480" y="4772160"/>
-            <a:ext cx="11696400" cy="303480"/>
+            <a:ext cx="11693160" cy="301320"/>
           </a:xfrm>
           <a:prstGeom prst="rect">
             <a:avLst/>
@@ -24195,7 +24202,7 @@
         <p:spPr>
           <a:xfrm>
             <a:off x="380880" y="380880"/>
-            <a:ext cx="11505960" cy="227160"/>
+            <a:ext cx="11502720" cy="225000"/>
           </a:xfrm>
           <a:prstGeom prst="rect">
             <a:avLst/>
@@ -24223,7 +24230,7 @@
               <a:buNone/>
             </a:pPr>
             <a:r>
-              <a:rPr b="1" lang="en-US" sz="1200" spc="49" strike="noStrike">
+              <a:rPr b="1" lang="en-US" sz="1200" spc="32" strike="noStrike">
                 <a:solidFill>
                   <a:srgbClr val="0984e3"/>
                 </a:solidFill>
@@ -24247,7 +24254,7 @@
         <p:spPr>
           <a:xfrm>
             <a:off x="380880" y="685800"/>
-            <a:ext cx="11658240" cy="455760"/>
+            <a:ext cx="11655000" cy="453600"/>
           </a:xfrm>
           <a:prstGeom prst="rect">
             <a:avLst/>
@@ -24299,7 +24306,7 @@
         <p:spPr>
           <a:xfrm>
             <a:off x="380880" y="1371600"/>
-            <a:ext cx="6828840" cy="1236960"/>
+            <a:ext cx="6825960" cy="1234800"/>
           </a:xfrm>
           <a:prstGeom prst="rect">
             <a:avLst/>
@@ -24361,7 +24368,7 @@
         <p:spPr>
           <a:xfrm>
             <a:off x="380880" y="2838600"/>
-            <a:ext cx="6819120" cy="1113120"/>
+            <a:ext cx="6816240" cy="1110960"/>
           </a:xfrm>
           <a:prstGeom prst="rect">
             <a:avLst/>
@@ -24413,7 +24420,7 @@
         <p:spPr>
           <a:xfrm>
             <a:off x="399960" y="4986360"/>
-            <a:ext cx="6714360" cy="1360800"/>
+            <a:ext cx="6711480" cy="1358640"/>
           </a:xfrm>
           <a:custGeom>
             <a:avLst/>
@@ -24464,7 +24471,7 @@
         <p:spPr>
           <a:xfrm>
             <a:off x="399960" y="4986360"/>
-            <a:ext cx="36720" cy="1360800"/>
+            <a:ext cx="34560" cy="1358640"/>
           </a:xfrm>
           <a:custGeom>
             <a:avLst/>
@@ -24515,7 +24522,7 @@
         <p:spPr>
           <a:xfrm>
             <a:off x="647640" y="5214960"/>
-            <a:ext cx="6323760" cy="560520"/>
+            <a:ext cx="6320880" cy="558360"/>
           </a:xfrm>
           <a:prstGeom prst="rect">
             <a:avLst/>
@@ -24567,7 +24574,7 @@
         <p:spPr>
           <a:xfrm>
             <a:off x="647640" y="5886360"/>
-            <a:ext cx="6314400" cy="227160"/>
+            <a:ext cx="6311520" cy="225000"/>
           </a:xfrm>
           <a:prstGeom prst="rect">
             <a:avLst/>
@@ -24628,8 +24635,8 @@
         </p:nvSpPr>
         <p:spPr>
           <a:xfrm>
-            <a:off x="7426800" y="1376280"/>
-            <a:ext cx="4380480" cy="1494000"/>
+            <a:off x="7426440" y="1376280"/>
+            <a:ext cx="4377960" cy="1491840"/>
           </a:xfrm>
           <a:custGeom>
             <a:avLst/>
@@ -24682,8 +24689,8 @@
         </p:nvSpPr>
         <p:spPr>
           <a:xfrm>
-            <a:off x="7660440" y="1609560"/>
-            <a:ext cx="379440" cy="379440"/>
+            <a:off x="7660080" y="1609560"/>
+            <a:ext cx="377280" cy="377280"/>
           </a:xfrm>
           <a:custGeom>
             <a:avLst/>
@@ -24733,8 +24740,8 @@
         </p:nvSpPr>
         <p:spPr>
           <a:xfrm>
-            <a:off x="7746120" y="1714680"/>
-            <a:ext cx="212760" cy="169920"/>
+            <a:off x="7745760" y="1714680"/>
+            <a:ext cx="210600" cy="167760"/>
           </a:xfrm>
           <a:custGeom>
             <a:avLst/>
@@ -24949,8 +24956,8 @@
         </p:nvSpPr>
         <p:spPr>
           <a:xfrm>
-            <a:off x="8156160" y="1666800"/>
-            <a:ext cx="636840" cy="265320"/>
+            <a:off x="8155440" y="1666800"/>
+            <a:ext cx="634680" cy="263160"/>
           </a:xfrm>
           <a:prstGeom prst="rect">
             <a:avLst/>
@@ -25001,8 +25008,8 @@
         </p:nvSpPr>
         <p:spPr>
           <a:xfrm>
-            <a:off x="7660440" y="2143080"/>
-            <a:ext cx="3989880" cy="493920"/>
+            <a:off x="7660080" y="2143080"/>
+            <a:ext cx="3987360" cy="491760"/>
           </a:xfrm>
           <a:prstGeom prst="rect">
             <a:avLst/>
@@ -25053,8 +25060,8 @@
         </p:nvSpPr>
         <p:spPr>
           <a:xfrm>
-            <a:off x="7426800" y="3110040"/>
-            <a:ext cx="4380480" cy="1494000"/>
+            <a:off x="7426440" y="3110040"/>
+            <a:ext cx="4377960" cy="1491840"/>
           </a:xfrm>
           <a:custGeom>
             <a:avLst/>
@@ -25107,8 +25114,8 @@
         </p:nvSpPr>
         <p:spPr>
           <a:xfrm>
-            <a:off x="7660440" y="3343320"/>
-            <a:ext cx="379440" cy="379440"/>
+            <a:off x="7660080" y="3343320"/>
+            <a:ext cx="377280" cy="377280"/>
           </a:xfrm>
           <a:custGeom>
             <a:avLst/>
@@ -25158,8 +25165,8 @@
         </p:nvSpPr>
         <p:spPr>
           <a:xfrm>
-            <a:off x="7767360" y="3448080"/>
-            <a:ext cx="169920" cy="169920"/>
+            <a:off x="7767000" y="3448080"/>
+            <a:ext cx="167760" cy="167760"/>
           </a:xfrm>
           <a:custGeom>
             <a:avLst/>
@@ -25434,8 +25441,8 @@
         </p:nvSpPr>
         <p:spPr>
           <a:xfrm>
-            <a:off x="8156160" y="3400560"/>
-            <a:ext cx="865440" cy="265320"/>
+            <a:off x="8155440" y="3400560"/>
+            <a:ext cx="863280" cy="263160"/>
           </a:xfrm>
           <a:prstGeom prst="rect">
             <a:avLst/>
@@ -25486,8 +25493,8 @@
         </p:nvSpPr>
         <p:spPr>
           <a:xfrm>
-            <a:off x="7660440" y="3876840"/>
-            <a:ext cx="3989880" cy="493920"/>
+            <a:off x="7660080" y="3876840"/>
+            <a:ext cx="3987360" cy="491760"/>
           </a:xfrm>
           <a:prstGeom prst="rect">
             <a:avLst/>
@@ -25538,8 +25545,8 @@
         </p:nvSpPr>
         <p:spPr>
           <a:xfrm>
-            <a:off x="7426800" y="4843440"/>
-            <a:ext cx="4380480" cy="1494000"/>
+            <a:off x="7426440" y="4843440"/>
+            <a:ext cx="4377960" cy="1491840"/>
           </a:xfrm>
           <a:custGeom>
             <a:avLst/>
@@ -25592,8 +25599,8 @@
         </p:nvSpPr>
         <p:spPr>
           <a:xfrm>
-            <a:off x="7660440" y="5076720"/>
-            <a:ext cx="379440" cy="379440"/>
+            <a:off x="7660080" y="5076720"/>
+            <a:ext cx="377280" cy="377280"/>
           </a:xfrm>
           <a:custGeom>
             <a:avLst/>
@@ -25643,8 +25650,8 @@
         </p:nvSpPr>
         <p:spPr>
           <a:xfrm>
-            <a:off x="7767360" y="5181480"/>
-            <a:ext cx="169920" cy="169920"/>
+            <a:off x="7767000" y="5181480"/>
+            <a:ext cx="167760" cy="167760"/>
           </a:xfrm>
           <a:custGeom>
             <a:avLst/>
@@ -25820,8 +25827,8 @@
         </p:nvSpPr>
         <p:spPr>
           <a:xfrm>
-            <a:off x="8156160" y="5133960"/>
-            <a:ext cx="655920" cy="265320"/>
+            <a:off x="8155440" y="5133960"/>
+            <a:ext cx="653760" cy="263160"/>
           </a:xfrm>
           <a:prstGeom prst="rect">
             <a:avLst/>
@@ -25872,8 +25879,8 @@
         </p:nvSpPr>
         <p:spPr>
           <a:xfrm>
-            <a:off x="7660440" y="5610240"/>
-            <a:ext cx="3989880" cy="493920"/>
+            <a:off x="7660080" y="5610240"/>
+            <a:ext cx="3987360" cy="491760"/>
           </a:xfrm>
           <a:prstGeom prst="rect">
             <a:avLst/>
@@ -25962,7 +25969,7 @@
         <p:spPr>
           <a:xfrm>
             <a:off x="609480" y="1781280"/>
-            <a:ext cx="12191760" cy="1217880"/>
+            <a:ext cx="12188520" cy="1215720"/>
           </a:xfrm>
           <a:prstGeom prst="rect">
             <a:avLst/>
@@ -26016,7 +26023,7 @@
         <p:spPr>
           <a:xfrm>
             <a:off x="609480" y="3152880"/>
-            <a:ext cx="11867760" cy="1141560"/>
+            <a:ext cx="11864520" cy="1139400"/>
           </a:xfrm>
           <a:prstGeom prst="rect">
             <a:avLst/>
@@ -26089,7 +26096,7 @@
         <p:spPr>
           <a:xfrm>
             <a:off x="609480" y="4524480"/>
-            <a:ext cx="1217880" cy="17640"/>
+            <a:ext cx="1215720" cy="15480"/>
           </a:xfrm>
           <a:custGeom>
             <a:avLst/>
@@ -26140,7 +26147,7 @@
         <p:spPr>
           <a:xfrm>
             <a:off x="609480" y="4772160"/>
-            <a:ext cx="11696400" cy="303480"/>
+            <a:ext cx="11693160" cy="301320"/>
           </a:xfrm>
           <a:prstGeom prst="rect">
             <a:avLst/>
@@ -26229,7 +26236,7 @@
         <p:spPr>
           <a:xfrm>
             <a:off x="324360" y="324360"/>
-            <a:ext cx="11607840" cy="192960"/>
+            <a:ext cx="11604600" cy="190800"/>
           </a:xfrm>
           <a:prstGeom prst="rect">
             <a:avLst/>
@@ -26257,7 +26264,7 @@
               <a:buNone/>
             </a:pPr>
             <a:r>
-              <a:rPr b="1" lang="en-US" sz="1020" spc="41" strike="noStrike">
+              <a:rPr b="1" lang="en-US" sz="1020" spc="24" strike="noStrike">
                 <a:solidFill>
                   <a:srgbClr val="0984e3"/>
                 </a:solidFill>
@@ -26281,7 +26288,7 @@
         <p:spPr>
           <a:xfrm>
             <a:off x="324360" y="583560"/>
-            <a:ext cx="11737800" cy="387720"/>
+            <a:ext cx="11734560" cy="385560"/>
           </a:xfrm>
           <a:prstGeom prst="rect">
             <a:avLst/>
@@ -26332,8 +26339,8 @@
         </p:nvSpPr>
         <p:spPr>
           <a:xfrm>
-            <a:off x="6096240" y="1167480"/>
-            <a:ext cx="14760" cy="4975920"/>
+            <a:off x="6095880" y="1167480"/>
+            <a:ext cx="12600" cy="4973760"/>
           </a:xfrm>
           <a:custGeom>
             <a:avLst/>
@@ -26384,7 +26391,7 @@
         <p:spPr>
           <a:xfrm>
             <a:off x="1638000" y="1171440"/>
-            <a:ext cx="3865680" cy="720000"/>
+            <a:ext cx="3863160" cy="717840"/>
           </a:xfrm>
           <a:custGeom>
             <a:avLst/>
@@ -26438,7 +26445,7 @@
         <p:spPr>
           <a:xfrm>
             <a:off x="1698840" y="1305000"/>
-            <a:ext cx="3671280" cy="225360"/>
+            <a:ext cx="3668760" cy="223200"/>
           </a:xfrm>
           <a:prstGeom prst="rect">
             <a:avLst/>
@@ -26490,7 +26497,7 @@
         <p:spPr>
           <a:xfrm>
             <a:off x="1706760" y="1564560"/>
-            <a:ext cx="3663000" cy="192960"/>
+            <a:ext cx="3660480" cy="190800"/>
           </a:xfrm>
           <a:prstGeom prst="rect">
             <a:avLst/>
@@ -26541,8 +26548,8 @@
         </p:nvSpPr>
         <p:spPr>
           <a:xfrm>
-            <a:off x="6684120" y="2030760"/>
-            <a:ext cx="3290040" cy="720000"/>
+            <a:off x="6683760" y="2030760"/>
+            <a:ext cx="3287520" cy="717840"/>
           </a:xfrm>
           <a:custGeom>
             <a:avLst/>
@@ -26595,8 +26602,8 @@
         </p:nvSpPr>
         <p:spPr>
           <a:xfrm>
-            <a:off x="6817680" y="2164320"/>
-            <a:ext cx="3095640" cy="225360"/>
+            <a:off x="6817320" y="2164320"/>
+            <a:ext cx="3093120" cy="223200"/>
           </a:xfrm>
           <a:prstGeom prst="rect">
             <a:avLst/>
@@ -26647,8 +26654,8 @@
         </p:nvSpPr>
         <p:spPr>
           <a:xfrm>
-            <a:off x="6817680" y="2423880"/>
-            <a:ext cx="3087360" cy="192960"/>
+            <a:off x="6817320" y="2423880"/>
+            <a:ext cx="3084840" cy="190800"/>
           </a:xfrm>
           <a:prstGeom prst="rect">
             <a:avLst/>
@@ -26700,7 +26707,7 @@
         <p:spPr>
           <a:xfrm>
             <a:off x="633600" y="2885760"/>
-            <a:ext cx="4879080" cy="712080"/>
+            <a:ext cx="4876560" cy="709920"/>
           </a:xfrm>
           <a:custGeom>
             <a:avLst/>
@@ -26751,7 +26758,7 @@
         <p:spPr>
           <a:xfrm>
             <a:off x="633600" y="2885760"/>
-            <a:ext cx="30960" cy="712080"/>
+            <a:ext cx="28800" cy="709920"/>
           </a:xfrm>
           <a:custGeom>
             <a:avLst/>
@@ -26802,7 +26809,7 @@
         <p:spPr>
           <a:xfrm>
             <a:off x="706680" y="3015720"/>
-            <a:ext cx="4676400" cy="225360"/>
+            <a:ext cx="4673880" cy="223200"/>
           </a:xfrm>
           <a:prstGeom prst="rect">
             <a:avLst/>
@@ -26854,7 +26861,7 @@
         <p:spPr>
           <a:xfrm>
             <a:off x="714960" y="3274920"/>
-            <a:ext cx="4668120" cy="192960"/>
+            <a:ext cx="4665600" cy="190800"/>
           </a:xfrm>
           <a:prstGeom prst="rect">
             <a:avLst/>
@@ -26915,8 +26922,8 @@
         </p:nvSpPr>
         <p:spPr>
           <a:xfrm>
-            <a:off x="6696360" y="3728880"/>
-            <a:ext cx="5016600" cy="712080"/>
+            <a:off x="6696000" y="3728880"/>
+            <a:ext cx="5014080" cy="709920"/>
           </a:xfrm>
           <a:custGeom>
             <a:avLst/>
@@ -26966,8 +26973,8 @@
         </p:nvSpPr>
         <p:spPr>
           <a:xfrm>
-            <a:off x="6696360" y="3728880"/>
-            <a:ext cx="30960" cy="712080"/>
+            <a:off x="6696000" y="3728880"/>
+            <a:ext cx="28800" cy="709920"/>
           </a:xfrm>
           <a:custGeom>
             <a:avLst/>
@@ -27017,8 +27024,8 @@
         </p:nvSpPr>
         <p:spPr>
           <a:xfrm>
-            <a:off x="6842160" y="3858480"/>
-            <a:ext cx="4814280" cy="225360"/>
+            <a:off x="6841800" y="3858480"/>
+            <a:ext cx="4811760" cy="223200"/>
           </a:xfrm>
           <a:prstGeom prst="rect">
             <a:avLst/>
@@ -27069,8 +27076,8 @@
         </p:nvSpPr>
         <p:spPr>
           <a:xfrm>
-            <a:off x="6842160" y="4118040"/>
-            <a:ext cx="4806000" cy="192960"/>
+            <a:off x="6841800" y="4118040"/>
+            <a:ext cx="4803480" cy="190800"/>
           </a:xfrm>
           <a:prstGeom prst="rect">
             <a:avLst/>
@@ -27132,7 +27139,7 @@
         <p:spPr>
           <a:xfrm>
             <a:off x="1476360" y="4572000"/>
-            <a:ext cx="4035960" cy="712080"/>
+            <a:ext cx="4033440" cy="709920"/>
           </a:xfrm>
           <a:custGeom>
             <a:avLst/>
@@ -27183,7 +27190,7 @@
         <p:spPr>
           <a:xfrm>
             <a:off x="1532880" y="4701600"/>
-            <a:ext cx="3849480" cy="225360"/>
+            <a:ext cx="3846960" cy="223200"/>
           </a:xfrm>
           <a:prstGeom prst="rect">
             <a:avLst/>
@@ -27235,7 +27242,7 @@
         <p:spPr>
           <a:xfrm>
             <a:off x="1541160" y="4961160"/>
-            <a:ext cx="3841200" cy="192960"/>
+            <a:ext cx="3838680" cy="190800"/>
           </a:xfrm>
           <a:prstGeom prst="rect">
             <a:avLst/>
@@ -27296,8 +27303,8 @@
         </p:nvSpPr>
         <p:spPr>
           <a:xfrm>
-            <a:off x="6684120" y="5419080"/>
-            <a:ext cx="3987360" cy="720000"/>
+            <a:off x="6683760" y="5419080"/>
+            <a:ext cx="3984840" cy="717840"/>
           </a:xfrm>
           <a:custGeom>
             <a:avLst/>
@@ -27350,8 +27357,8 @@
         </p:nvSpPr>
         <p:spPr>
           <a:xfrm>
-            <a:off x="6817680" y="5553000"/>
-            <a:ext cx="3792600" cy="225360"/>
+            <a:off x="6817320" y="5553000"/>
+            <a:ext cx="3790080" cy="223200"/>
           </a:xfrm>
           <a:prstGeom prst="rect">
             <a:avLst/>
@@ -27402,8 +27409,8 @@
         </p:nvSpPr>
         <p:spPr>
           <a:xfrm>
-            <a:off x="6817680" y="5812200"/>
-            <a:ext cx="3784680" cy="192960"/>
+            <a:off x="6817320" y="5812200"/>
+            <a:ext cx="3782160" cy="190800"/>
           </a:xfrm>
           <a:prstGeom prst="rect">
             <a:avLst/>
@@ -27454,8 +27461,8 @@
         </p:nvSpPr>
         <p:spPr>
           <a:xfrm>
-            <a:off x="6031440" y="1467360"/>
-            <a:ext cx="128160" cy="128160"/>
+            <a:off x="6031080" y="1467360"/>
+            <a:ext cx="126000" cy="126000"/>
           </a:xfrm>
           <a:custGeom>
             <a:avLst/>
@@ -27525,8 +27532,8 @@
         </p:nvSpPr>
         <p:spPr>
           <a:xfrm>
-            <a:off x="6031440" y="2326680"/>
-            <a:ext cx="128160" cy="128160"/>
+            <a:off x="6031080" y="2326680"/>
+            <a:ext cx="126000" cy="126000"/>
           </a:xfrm>
           <a:custGeom>
             <a:avLst/>
@@ -27596,8 +27603,8 @@
         </p:nvSpPr>
         <p:spPr>
           <a:xfrm>
-            <a:off x="6031440" y="3177720"/>
-            <a:ext cx="128160" cy="128160"/>
+            <a:off x="6031080" y="3177720"/>
+            <a:ext cx="126000" cy="126000"/>
           </a:xfrm>
           <a:custGeom>
             <a:avLst/>
@@ -27667,8 +27674,8 @@
         </p:nvSpPr>
         <p:spPr>
           <a:xfrm>
-            <a:off x="6031440" y="4020840"/>
-            <a:ext cx="128160" cy="128160"/>
+            <a:off x="6031080" y="4020840"/>
+            <a:ext cx="126000" cy="126000"/>
           </a:xfrm>
           <a:custGeom>
             <a:avLst/>
@@ -27738,8 +27745,8 @@
         </p:nvSpPr>
         <p:spPr>
           <a:xfrm>
-            <a:off x="6031440" y="4863960"/>
-            <a:ext cx="128160" cy="128160"/>
+            <a:off x="6031080" y="4863960"/>
+            <a:ext cx="126000" cy="126000"/>
           </a:xfrm>
           <a:custGeom>
             <a:avLst/>
@@ -27809,8 +27816,8 @@
         </p:nvSpPr>
         <p:spPr>
           <a:xfrm>
-            <a:off x="6031440" y="5715000"/>
-            <a:ext cx="128160" cy="128160"/>
+            <a:off x="6031080" y="5715000"/>
+            <a:ext cx="126000" cy="126000"/>
           </a:xfrm>
           <a:custGeom>
             <a:avLst/>
@@ -27918,7 +27925,7 @@
         <p:spPr>
           <a:xfrm>
             <a:off x="380880" y="380880"/>
-            <a:ext cx="11505960" cy="227160"/>
+            <a:ext cx="11502720" cy="225000"/>
           </a:xfrm>
           <a:prstGeom prst="rect">
             <a:avLst/>
@@ -27946,7 +27953,7 @@
               <a:buNone/>
             </a:pPr>
             <a:r>
-              <a:rPr b="1" lang="en-US" sz="1200" spc="49" strike="noStrike">
+              <a:rPr b="1" lang="en-US" sz="1200" spc="32" strike="noStrike">
                 <a:solidFill>
                   <a:srgbClr val="0984e3"/>
                 </a:solidFill>
@@ -27970,7 +27977,7 @@
         <p:spPr>
           <a:xfrm>
             <a:off x="380880" y="685800"/>
-            <a:ext cx="11658240" cy="455760"/>
+            <a:ext cx="11655000" cy="453600"/>
           </a:xfrm>
           <a:prstGeom prst="rect">
             <a:avLst/>
@@ -28022,7 +28029,7 @@
         <p:spPr>
           <a:xfrm>
             <a:off x="380880" y="1371600"/>
-            <a:ext cx="4389840" cy="3046680"/>
+            <a:ext cx="4387320" cy="3044520"/>
           </a:xfrm>
           <a:prstGeom prst="roundRect">
             <a:avLst>
@@ -28054,7 +28061,7 @@
         <p:spPr>
           <a:xfrm>
             <a:off x="399960" y="4648320"/>
-            <a:ext cx="4370760" cy="1141560"/>
+            <a:ext cx="4368240" cy="1139400"/>
           </a:xfrm>
           <a:custGeom>
             <a:avLst/>
@@ -28105,7 +28112,7 @@
         <p:spPr>
           <a:xfrm>
             <a:off x="399960" y="4648320"/>
-            <a:ext cx="36720" cy="1141560"/>
+            <a:ext cx="34560" cy="1139400"/>
           </a:xfrm>
           <a:custGeom>
             <a:avLst/>
@@ -28156,7 +28163,7 @@
         <p:spPr>
           <a:xfrm>
             <a:off x="609480" y="4838760"/>
-            <a:ext cx="4047120" cy="493920"/>
+            <a:ext cx="4044600" cy="491760"/>
           </a:xfrm>
           <a:prstGeom prst="rect">
             <a:avLst/>
@@ -28208,7 +28215,7 @@
         <p:spPr>
           <a:xfrm>
             <a:off x="609480" y="5410080"/>
-            <a:ext cx="4037400" cy="189000"/>
+            <a:ext cx="4034880" cy="186840"/>
           </a:xfrm>
           <a:prstGeom prst="rect">
             <a:avLst/>
@@ -28269,8 +28276,8 @@
         </p:nvSpPr>
         <p:spPr>
           <a:xfrm>
-            <a:off x="5075280" y="1371600"/>
-            <a:ext cx="6847920" cy="303480"/>
+            <a:off x="5074920" y="1371600"/>
+            <a:ext cx="6845040" cy="301320"/>
           </a:xfrm>
           <a:prstGeom prst="rect">
             <a:avLst/>
@@ -28321,8 +28328,8 @@
         </p:nvSpPr>
         <p:spPr>
           <a:xfrm>
-            <a:off x="5075280" y="1752480"/>
-            <a:ext cx="6809760" cy="989280"/>
+            <a:off x="5074920" y="1752480"/>
+            <a:ext cx="6806880" cy="987120"/>
           </a:xfrm>
           <a:prstGeom prst="rect">
             <a:avLst/>
@@ -28373,8 +28380,8 @@
         </p:nvSpPr>
         <p:spPr>
           <a:xfrm>
-            <a:off x="5075280" y="2895480"/>
-            <a:ext cx="6847920" cy="303480"/>
+            <a:off x="5074920" y="2895480"/>
+            <a:ext cx="6845040" cy="301320"/>
           </a:xfrm>
           <a:prstGeom prst="rect">
             <a:avLst/>
@@ -28425,8 +28432,8 @@
         </p:nvSpPr>
         <p:spPr>
           <a:xfrm>
-            <a:off x="5075280" y="3276720"/>
-            <a:ext cx="6809760" cy="989280"/>
+            <a:off x="5074920" y="3276720"/>
+            <a:ext cx="6806880" cy="987120"/>
           </a:xfrm>
           <a:prstGeom prst="rect">
             <a:avLst/>
@@ -28497,8 +28504,8 @@
         </p:nvSpPr>
         <p:spPr>
           <a:xfrm>
-            <a:off x="5075280" y="4419720"/>
-            <a:ext cx="6847920" cy="303480"/>
+            <a:off x="5074920" y="4419720"/>
+            <a:ext cx="6845040" cy="301320"/>
           </a:xfrm>
           <a:prstGeom prst="rect">
             <a:avLst/>
@@ -28549,8 +28556,8 @@
         </p:nvSpPr>
         <p:spPr>
           <a:xfrm>
-            <a:off x="5075280" y="4800600"/>
-            <a:ext cx="6809760" cy="989280"/>
+            <a:off x="5074920" y="4800600"/>
+            <a:ext cx="6806880" cy="987120"/>
           </a:xfrm>
           <a:prstGeom prst="rect">
             <a:avLst/>
@@ -28659,7 +28666,7 @@
         <p:spPr>
           <a:xfrm>
             <a:off x="609480" y="1781280"/>
-            <a:ext cx="12191760" cy="1217880"/>
+            <a:ext cx="12188520" cy="1215720"/>
           </a:xfrm>
           <a:prstGeom prst="rect">
             <a:avLst/>
@@ -28713,7 +28720,7 @@
         <p:spPr>
           <a:xfrm>
             <a:off x="609480" y="3152880"/>
-            <a:ext cx="11867760" cy="1141560"/>
+            <a:ext cx="11864520" cy="1139400"/>
           </a:xfrm>
           <a:prstGeom prst="rect">
             <a:avLst/>
@@ -28786,7 +28793,7 @@
         <p:spPr>
           <a:xfrm>
             <a:off x="609480" y="4524480"/>
-            <a:ext cx="1217880" cy="17640"/>
+            <a:ext cx="1215720" cy="15480"/>
           </a:xfrm>
           <a:custGeom>
             <a:avLst/>
@@ -28837,7 +28844,7 @@
         <p:spPr>
           <a:xfrm>
             <a:off x="609480" y="4772160"/>
-            <a:ext cx="11696400" cy="303480"/>
+            <a:ext cx="11693160" cy="301320"/>
           </a:xfrm>
           <a:prstGeom prst="rect">
             <a:avLst/>
@@ -28926,7 +28933,7 @@
         <p:spPr>
           <a:xfrm>
             <a:off x="380880" y="380880"/>
-            <a:ext cx="11505960" cy="227160"/>
+            <a:ext cx="11502720" cy="225000"/>
           </a:xfrm>
           <a:prstGeom prst="rect">
             <a:avLst/>
@@ -28954,7 +28961,7 @@
               <a:buNone/>
             </a:pPr>
             <a:r>
-              <a:rPr b="1" lang="en-US" sz="1200" spc="49" strike="noStrike">
+              <a:rPr b="1" lang="en-US" sz="1200" spc="32" strike="noStrike">
                 <a:solidFill>
                   <a:srgbClr val="0984e3"/>
                 </a:solidFill>
@@ -28978,7 +28985,7 @@
         <p:spPr>
           <a:xfrm>
             <a:off x="380880" y="685800"/>
-            <a:ext cx="11658240" cy="455760"/>
+            <a:ext cx="11655000" cy="453600"/>
           </a:xfrm>
           <a:prstGeom prst="rect">
             <a:avLst/>
@@ -29030,7 +29037,7 @@
         <p:spPr>
           <a:xfrm>
             <a:off x="380880" y="1371600"/>
-            <a:ext cx="5656680" cy="1236960"/>
+            <a:ext cx="5654160" cy="1234800"/>
           </a:xfrm>
           <a:prstGeom prst="rect">
             <a:avLst/>
@@ -29092,7 +29099,7 @@
         <p:spPr>
           <a:xfrm>
             <a:off x="380880" y="2762280"/>
-            <a:ext cx="5647320" cy="836640"/>
+            <a:ext cx="5644800" cy="834480"/>
           </a:xfrm>
           <a:prstGeom prst="rect">
             <a:avLst/>
@@ -29144,7 +29151,7 @@
         <p:spPr>
           <a:xfrm>
             <a:off x="399960" y="3750480"/>
-            <a:ext cx="5542560" cy="1598760"/>
+            <a:ext cx="5540040" cy="1596600"/>
           </a:xfrm>
           <a:custGeom>
             <a:avLst/>
@@ -29195,7 +29202,7 @@
         <p:spPr>
           <a:xfrm>
             <a:off x="399960" y="3750480"/>
-            <a:ext cx="36720" cy="1598760"/>
+            <a:ext cx="34560" cy="1596600"/>
           </a:xfrm>
           <a:custGeom>
             <a:avLst/>
@@ -29246,7 +29253,7 @@
         <p:spPr>
           <a:xfrm>
             <a:off x="609480" y="3940920"/>
-            <a:ext cx="5237640" cy="265320"/>
+            <a:ext cx="5235120" cy="263160"/>
           </a:xfrm>
           <a:prstGeom prst="rect">
             <a:avLst/>
@@ -29298,7 +29305,7 @@
         <p:spPr>
           <a:xfrm>
             <a:off x="609480" y="4321800"/>
-            <a:ext cx="5218560" cy="227160"/>
+            <a:ext cx="5216040" cy="225000"/>
           </a:xfrm>
           <a:prstGeom prst="rect">
             <a:avLst/>
@@ -29360,7 +29367,7 @@
         <p:spPr>
           <a:xfrm>
             <a:off x="609480" y="4626720"/>
-            <a:ext cx="5218560" cy="227160"/>
+            <a:ext cx="5216040" cy="225000"/>
           </a:xfrm>
           <a:prstGeom prst="rect">
             <a:avLst/>
@@ -29422,7 +29429,7 @@
         <p:spPr>
           <a:xfrm>
             <a:off x="609480" y="4931640"/>
-            <a:ext cx="5218560" cy="227160"/>
+            <a:ext cx="5216040" cy="225000"/>
           </a:xfrm>
           <a:prstGeom prst="rect">
             <a:avLst/>
@@ -29483,8 +29490,8 @@
         </p:nvSpPr>
         <p:spPr>
           <a:xfrm>
-            <a:off x="6253560" y="1618200"/>
-            <a:ext cx="5551920" cy="3484800"/>
+            <a:off x="6253200" y="1618200"/>
+            <a:ext cx="5549400" cy="3482640"/>
           </a:xfrm>
           <a:custGeom>
             <a:avLst/>
@@ -29537,8 +29544,8 @@
         </p:nvSpPr>
         <p:spPr>
           <a:xfrm>
-            <a:off x="6439320" y="1851480"/>
-            <a:ext cx="5180400" cy="265320"/>
+            <a:off x="6438960" y="1851480"/>
+            <a:ext cx="5177880" cy="263160"/>
           </a:xfrm>
           <a:prstGeom prst="rect">
             <a:avLst/>
@@ -29589,8 +29596,8 @@
         </p:nvSpPr>
         <p:spPr>
           <a:xfrm>
-            <a:off x="6448680" y="2270520"/>
-            <a:ext cx="5161320" cy="227160"/>
+            <a:off x="6448320" y="2270520"/>
+            <a:ext cx="5158800" cy="225000"/>
           </a:xfrm>
           <a:prstGeom prst="rect">
             <a:avLst/>
@@ -29640,8 +29647,8 @@
           <p:nvPr/>
         </p:nvGraphicFramePr>
         <p:xfrm>
-          <a:off x="6486840" y="2651400"/>
-          <a:ext cx="5086080" cy="1409040"/>
+          <a:off x="6486480" y="2651400"/>
+          <a:ext cx="5085720" cy="1409040"/>
         </p:xfrm>
         <a:graphic>
           <a:graphicData uri="http://schemas.openxmlformats.org/drawingml/2006/table">
@@ -30113,8 +30120,8 @@
         </p:nvSpPr>
         <p:spPr>
           <a:xfrm>
-            <a:off x="6486840" y="4218480"/>
-            <a:ext cx="5085360" cy="7920"/>
+            <a:off x="6486480" y="4218480"/>
+            <a:ext cx="5082840" cy="5760"/>
           </a:xfrm>
           <a:custGeom>
             <a:avLst/>
@@ -30164,8 +30171,8 @@
         </p:nvSpPr>
         <p:spPr>
           <a:xfrm>
-            <a:off x="6486840" y="4375440"/>
-            <a:ext cx="5161320" cy="493920"/>
+            <a:off x="6486480" y="4375440"/>
+            <a:ext cx="5158800" cy="491760"/>
           </a:xfrm>
           <a:prstGeom prst="rect">
             <a:avLst/>
